--- a/docs/421_f26/lectures/L0.pptx
+++ b/docs/421_f26/lectures/L0.pptx
@@ -5,7 +5,7 @@
     <p:sldMasterId id="2147483660" r:id="rId1"/>
   </p:sldMasterIdLst>
   <p:notesMasterIdLst>
-    <p:notesMasterId r:id="rId53"/>
+    <p:notesMasterId r:id="rId54"/>
   </p:notesMasterIdLst>
   <p:sldIdLst>
     <p:sldId id="257" r:id="rId2"/>
@@ -29,36 +29,37 @@
     <p:sldId id="1104" r:id="rId20"/>
     <p:sldId id="473" r:id="rId21"/>
     <p:sldId id="1128" r:id="rId22"/>
-    <p:sldId id="1132" r:id="rId23"/>
-    <p:sldId id="1131" r:id="rId24"/>
-    <p:sldId id="1134" r:id="rId25"/>
-    <p:sldId id="1135" r:id="rId26"/>
-    <p:sldId id="1127" r:id="rId27"/>
-    <p:sldId id="1136" r:id="rId28"/>
-    <p:sldId id="1143" r:id="rId29"/>
-    <p:sldId id="1144" r:id="rId30"/>
-    <p:sldId id="1145" r:id="rId31"/>
-    <p:sldId id="574" r:id="rId32"/>
-    <p:sldId id="1146" r:id="rId33"/>
-    <p:sldId id="1154" r:id="rId34"/>
-    <p:sldId id="1155" r:id="rId35"/>
-    <p:sldId id="1156" r:id="rId36"/>
-    <p:sldId id="1157" r:id="rId37"/>
-    <p:sldId id="1158" r:id="rId38"/>
-    <p:sldId id="1159" r:id="rId39"/>
-    <p:sldId id="1160" r:id="rId40"/>
-    <p:sldId id="1147" r:id="rId41"/>
-    <p:sldId id="1148" r:id="rId42"/>
-    <p:sldId id="1149" r:id="rId43"/>
-    <p:sldId id="1150" r:id="rId44"/>
-    <p:sldId id="1163" r:id="rId45"/>
-    <p:sldId id="1164" r:id="rId46"/>
-    <p:sldId id="1165" r:id="rId47"/>
-    <p:sldId id="1167" r:id="rId48"/>
-    <p:sldId id="1151" r:id="rId49"/>
-    <p:sldId id="1152" r:id="rId50"/>
-    <p:sldId id="1161" r:id="rId51"/>
-    <p:sldId id="1162" r:id="rId52"/>
+    <p:sldId id="1168" r:id="rId23"/>
+    <p:sldId id="1132" r:id="rId24"/>
+    <p:sldId id="1131" r:id="rId25"/>
+    <p:sldId id="1134" r:id="rId26"/>
+    <p:sldId id="1135" r:id="rId27"/>
+    <p:sldId id="1127" r:id="rId28"/>
+    <p:sldId id="1136" r:id="rId29"/>
+    <p:sldId id="1143" r:id="rId30"/>
+    <p:sldId id="1144" r:id="rId31"/>
+    <p:sldId id="1145" r:id="rId32"/>
+    <p:sldId id="574" r:id="rId33"/>
+    <p:sldId id="1146" r:id="rId34"/>
+    <p:sldId id="1154" r:id="rId35"/>
+    <p:sldId id="1155" r:id="rId36"/>
+    <p:sldId id="1156" r:id="rId37"/>
+    <p:sldId id="1157" r:id="rId38"/>
+    <p:sldId id="1158" r:id="rId39"/>
+    <p:sldId id="1159" r:id="rId40"/>
+    <p:sldId id="1160" r:id="rId41"/>
+    <p:sldId id="1147" r:id="rId42"/>
+    <p:sldId id="1148" r:id="rId43"/>
+    <p:sldId id="1149" r:id="rId44"/>
+    <p:sldId id="1150" r:id="rId45"/>
+    <p:sldId id="1163" r:id="rId46"/>
+    <p:sldId id="1164" r:id="rId47"/>
+    <p:sldId id="1165" r:id="rId48"/>
+    <p:sldId id="1167" r:id="rId49"/>
+    <p:sldId id="1151" r:id="rId50"/>
+    <p:sldId id="1152" r:id="rId51"/>
+    <p:sldId id="1161" r:id="rId52"/>
+    <p:sldId id="1162" r:id="rId53"/>
   </p:sldIdLst>
   <p:sldSz cx="12192000" cy="6858000"/>
   <p:notesSz cx="6858000" cy="9144000"/>
@@ -247,7 +248,7 @@
           <a:p>
             <a:fld id="{B9967E9D-8649-5844-BD0B-5294D0422CA6}" type="datetimeFigureOut">
               <a:rPr lang="en-US" smtClean="0"/>
-              <a:t>9/16/25</a:t>
+              <a:t>8/12/26</a:t>
             </a:fld>
             <a:endParaRPr lang="en-US"/>
           </a:p>
@@ -512,4122 +513,6 @@
     </a:lvl9pPr>
   </p:notesStyle>
 </p:notesMaster>
-</file>
-
-<file path=ppt/notesSlides/notesSlide1.xml><?xml version="1.0" encoding="utf-8"?>
-<p:notes xmlns:a="http://schemas.openxmlformats.org/drawingml/2006/main" xmlns:r="http://schemas.openxmlformats.org/officeDocument/2006/relationships" xmlns:p="http://schemas.openxmlformats.org/presentationml/2006/main">
-  <p:cSld>
-    <p:spTree>
-      <p:nvGrpSpPr>
-        <p:cNvPr id="1" name=""/>
-        <p:cNvGrpSpPr/>
-        <p:nvPr/>
-      </p:nvGrpSpPr>
-      <p:grpSpPr>
-        <a:xfrm>
-          <a:off x="0" y="0"/>
-          <a:ext cx="0" cy="0"/>
-          <a:chOff x="0" y="0"/>
-          <a:chExt cx="0" cy="0"/>
-        </a:xfrm>
-      </p:grpSpPr>
-      <p:sp>
-        <p:nvSpPr>
-          <p:cNvPr id="2" name="Slide Image Placeholder 1"/>
-          <p:cNvSpPr>
-            <a:spLocks noGrp="1" noRot="1" noChangeAspect="1"/>
-          </p:cNvSpPr>
-          <p:nvPr>
-            <p:ph type="sldImg"/>
-          </p:nvPr>
-        </p:nvSpPr>
-        <p:spPr/>
-      </p:sp>
-      <p:sp>
-        <p:nvSpPr>
-          <p:cNvPr id="3" name="Notes Placeholder 2"/>
-          <p:cNvSpPr>
-            <a:spLocks noGrp="1"/>
-          </p:cNvSpPr>
-          <p:nvPr>
-            <p:ph type="body" idx="1"/>
-          </p:nvPr>
-        </p:nvSpPr>
-        <p:spPr/>
-        <p:txBody>
-          <a:bodyPr/>
-          <a:lstStyle/>
-          <a:p>
-            <a:endParaRPr lang="en-US"/>
-          </a:p>
-        </p:txBody>
-      </p:sp>
-      <p:sp>
-        <p:nvSpPr>
-          <p:cNvPr id="4" name="Slide Number Placeholder 3"/>
-          <p:cNvSpPr>
-            <a:spLocks noGrp="1"/>
-          </p:cNvSpPr>
-          <p:nvPr>
-            <p:ph type="sldNum" sz="quarter" idx="5"/>
-          </p:nvPr>
-        </p:nvSpPr>
-        <p:spPr/>
-        <p:txBody>
-          <a:bodyPr/>
-          <a:lstStyle/>
-          <a:p>
-            <a:endParaRPr lang="en-US"/>
-          </a:p>
-        </p:txBody>
-      </p:sp>
-    </p:spTree>
-    <p:extLst>
-      <p:ext uri="{BB962C8B-B14F-4D97-AF65-F5344CB8AC3E}">
-        <p14:creationId xmlns:p14="http://schemas.microsoft.com/office/powerpoint/2010/main" val="1696820215"/>
-      </p:ext>
-    </p:extLst>
-  </p:cSld>
-  <p:clrMapOvr>
-    <a:masterClrMapping/>
-  </p:clrMapOvr>
-</p:notes>
-</file>
-
-<file path=ppt/notesSlides/notesSlide10.xml><?xml version="1.0" encoding="utf-8"?>
-<p:notes xmlns:a="http://schemas.openxmlformats.org/drawingml/2006/main" xmlns:r="http://schemas.openxmlformats.org/officeDocument/2006/relationships" xmlns:p="http://schemas.openxmlformats.org/presentationml/2006/main">
-  <p:cSld>
-    <p:spTree>
-      <p:nvGrpSpPr>
-        <p:cNvPr id="1" name=""/>
-        <p:cNvGrpSpPr/>
-        <p:nvPr/>
-      </p:nvGrpSpPr>
-      <p:grpSpPr>
-        <a:xfrm>
-          <a:off x="0" y="0"/>
-          <a:ext cx="0" cy="0"/>
-          <a:chOff x="0" y="0"/>
-          <a:chExt cx="0" cy="0"/>
-        </a:xfrm>
-      </p:grpSpPr>
-      <p:sp>
-        <p:nvSpPr>
-          <p:cNvPr id="2" name="Slide Image Placeholder 1"/>
-          <p:cNvSpPr>
-            <a:spLocks noGrp="1" noRot="1" noChangeAspect="1"/>
-          </p:cNvSpPr>
-          <p:nvPr>
-            <p:ph type="sldImg"/>
-          </p:nvPr>
-        </p:nvSpPr>
-        <p:spPr/>
-      </p:sp>
-      <p:sp>
-        <p:nvSpPr>
-          <p:cNvPr id="3" name="Notes Placeholder 2"/>
-          <p:cNvSpPr>
-            <a:spLocks noGrp="1"/>
-          </p:cNvSpPr>
-          <p:nvPr>
-            <p:ph type="body" idx="1"/>
-          </p:nvPr>
-        </p:nvSpPr>
-        <p:spPr/>
-        <p:txBody>
-          <a:bodyPr/>
-          <a:lstStyle/>
-          <a:p>
-            <a:endParaRPr lang="en-US"/>
-          </a:p>
-        </p:txBody>
-      </p:sp>
-      <p:sp>
-        <p:nvSpPr>
-          <p:cNvPr id="4" name="Slide Number Placeholder 3"/>
-          <p:cNvSpPr>
-            <a:spLocks noGrp="1"/>
-          </p:cNvSpPr>
-          <p:nvPr>
-            <p:ph type="sldNum" sz="quarter" idx="5"/>
-          </p:nvPr>
-        </p:nvSpPr>
-        <p:spPr/>
-        <p:txBody>
-          <a:bodyPr/>
-          <a:lstStyle/>
-          <a:p>
-            <a:endParaRPr lang="en-US"/>
-          </a:p>
-        </p:txBody>
-      </p:sp>
-    </p:spTree>
-    <p:extLst>
-      <p:ext uri="{BB962C8B-B14F-4D97-AF65-F5344CB8AC3E}">
-        <p14:creationId xmlns:p14="http://schemas.microsoft.com/office/powerpoint/2010/main" val="1753338603"/>
-      </p:ext>
-    </p:extLst>
-  </p:cSld>
-  <p:clrMapOvr>
-    <a:masterClrMapping/>
-  </p:clrMapOvr>
-</p:notes>
-</file>
-
-<file path=ppt/notesSlides/notesSlide11.xml><?xml version="1.0" encoding="utf-8"?>
-<p:notes xmlns:a="http://schemas.openxmlformats.org/drawingml/2006/main" xmlns:r="http://schemas.openxmlformats.org/officeDocument/2006/relationships" xmlns:p="http://schemas.openxmlformats.org/presentationml/2006/main">
-  <p:cSld>
-    <p:spTree>
-      <p:nvGrpSpPr>
-        <p:cNvPr id="1" name=""/>
-        <p:cNvGrpSpPr/>
-        <p:nvPr/>
-      </p:nvGrpSpPr>
-      <p:grpSpPr>
-        <a:xfrm>
-          <a:off x="0" y="0"/>
-          <a:ext cx="0" cy="0"/>
-          <a:chOff x="0" y="0"/>
-          <a:chExt cx="0" cy="0"/>
-        </a:xfrm>
-      </p:grpSpPr>
-      <p:sp>
-        <p:nvSpPr>
-          <p:cNvPr id="2" name="Slide Image Placeholder 1"/>
-          <p:cNvSpPr>
-            <a:spLocks noGrp="1" noRot="1" noChangeAspect="1"/>
-          </p:cNvSpPr>
-          <p:nvPr>
-            <p:ph type="sldImg"/>
-          </p:nvPr>
-        </p:nvSpPr>
-        <p:spPr/>
-      </p:sp>
-      <p:sp>
-        <p:nvSpPr>
-          <p:cNvPr id="3" name="Notes Placeholder 2"/>
-          <p:cNvSpPr>
-            <a:spLocks noGrp="1"/>
-          </p:cNvSpPr>
-          <p:nvPr>
-            <p:ph type="body" idx="1"/>
-          </p:nvPr>
-        </p:nvSpPr>
-        <p:spPr/>
-        <p:txBody>
-          <a:bodyPr/>
-          <a:lstStyle/>
-          <a:p>
-            <a:endParaRPr lang="en-US"/>
-          </a:p>
-        </p:txBody>
-      </p:sp>
-      <p:sp>
-        <p:nvSpPr>
-          <p:cNvPr id="4" name="Slide Number Placeholder 3"/>
-          <p:cNvSpPr>
-            <a:spLocks noGrp="1"/>
-          </p:cNvSpPr>
-          <p:nvPr>
-            <p:ph type="sldNum" sz="quarter" idx="5"/>
-          </p:nvPr>
-        </p:nvSpPr>
-        <p:spPr/>
-        <p:txBody>
-          <a:bodyPr/>
-          <a:lstStyle/>
-          <a:p>
-            <a:endParaRPr lang="en-US"/>
-          </a:p>
-        </p:txBody>
-      </p:sp>
-    </p:spTree>
-    <p:extLst>
-      <p:ext uri="{BB962C8B-B14F-4D97-AF65-F5344CB8AC3E}">
-        <p14:creationId xmlns:p14="http://schemas.microsoft.com/office/powerpoint/2010/main" val="179504116"/>
-      </p:ext>
-    </p:extLst>
-  </p:cSld>
-  <p:clrMapOvr>
-    <a:masterClrMapping/>
-  </p:clrMapOvr>
-</p:notes>
-</file>
-
-<file path=ppt/notesSlides/notesSlide12.xml><?xml version="1.0" encoding="utf-8"?>
-<p:notes xmlns:a="http://schemas.openxmlformats.org/drawingml/2006/main" xmlns:r="http://schemas.openxmlformats.org/officeDocument/2006/relationships" xmlns:p="http://schemas.openxmlformats.org/presentationml/2006/main">
-  <p:cSld>
-    <p:spTree>
-      <p:nvGrpSpPr>
-        <p:cNvPr id="1" name=""/>
-        <p:cNvGrpSpPr/>
-        <p:nvPr/>
-      </p:nvGrpSpPr>
-      <p:grpSpPr>
-        <a:xfrm>
-          <a:off x="0" y="0"/>
-          <a:ext cx="0" cy="0"/>
-          <a:chOff x="0" y="0"/>
-          <a:chExt cx="0" cy="0"/>
-        </a:xfrm>
-      </p:grpSpPr>
-      <p:sp>
-        <p:nvSpPr>
-          <p:cNvPr id="2" name="Slide Image Placeholder 1"/>
-          <p:cNvSpPr>
-            <a:spLocks noGrp="1" noRot="1" noChangeAspect="1"/>
-          </p:cNvSpPr>
-          <p:nvPr>
-            <p:ph type="sldImg"/>
-          </p:nvPr>
-        </p:nvSpPr>
-        <p:spPr/>
-      </p:sp>
-      <p:sp>
-        <p:nvSpPr>
-          <p:cNvPr id="3" name="Notes Placeholder 2"/>
-          <p:cNvSpPr>
-            <a:spLocks noGrp="1"/>
-          </p:cNvSpPr>
-          <p:nvPr>
-            <p:ph type="body" idx="1"/>
-          </p:nvPr>
-        </p:nvSpPr>
-        <p:spPr/>
-        <p:txBody>
-          <a:bodyPr/>
-          <a:lstStyle/>
-          <a:p>
-            <a:endParaRPr lang="en-US"/>
-          </a:p>
-        </p:txBody>
-      </p:sp>
-      <p:sp>
-        <p:nvSpPr>
-          <p:cNvPr id="4" name="Slide Number Placeholder 3"/>
-          <p:cNvSpPr>
-            <a:spLocks noGrp="1"/>
-          </p:cNvSpPr>
-          <p:nvPr>
-            <p:ph type="sldNum" sz="quarter" idx="5"/>
-          </p:nvPr>
-        </p:nvSpPr>
-        <p:spPr/>
-        <p:txBody>
-          <a:bodyPr/>
-          <a:lstStyle/>
-          <a:p>
-            <a:endParaRPr lang="en-US"/>
-          </a:p>
-        </p:txBody>
-      </p:sp>
-    </p:spTree>
-    <p:extLst>
-      <p:ext uri="{BB962C8B-B14F-4D97-AF65-F5344CB8AC3E}">
-        <p14:creationId xmlns:p14="http://schemas.microsoft.com/office/powerpoint/2010/main" val="1998312442"/>
-      </p:ext>
-    </p:extLst>
-  </p:cSld>
-  <p:clrMapOvr>
-    <a:masterClrMapping/>
-  </p:clrMapOvr>
-</p:notes>
-</file>
-
-<file path=ppt/notesSlides/notesSlide13.xml><?xml version="1.0" encoding="utf-8"?>
-<p:notes xmlns:a="http://schemas.openxmlformats.org/drawingml/2006/main" xmlns:r="http://schemas.openxmlformats.org/officeDocument/2006/relationships" xmlns:p="http://schemas.openxmlformats.org/presentationml/2006/main">
-  <p:cSld>
-    <p:spTree>
-      <p:nvGrpSpPr>
-        <p:cNvPr id="1" name=""/>
-        <p:cNvGrpSpPr/>
-        <p:nvPr/>
-      </p:nvGrpSpPr>
-      <p:grpSpPr>
-        <a:xfrm>
-          <a:off x="0" y="0"/>
-          <a:ext cx="0" cy="0"/>
-          <a:chOff x="0" y="0"/>
-          <a:chExt cx="0" cy="0"/>
-        </a:xfrm>
-      </p:grpSpPr>
-      <p:sp>
-        <p:nvSpPr>
-          <p:cNvPr id="2" name="Slide Image Placeholder 1"/>
-          <p:cNvSpPr>
-            <a:spLocks noGrp="1" noRot="1" noChangeAspect="1"/>
-          </p:cNvSpPr>
-          <p:nvPr>
-            <p:ph type="sldImg"/>
-          </p:nvPr>
-        </p:nvSpPr>
-        <p:spPr/>
-      </p:sp>
-      <p:sp>
-        <p:nvSpPr>
-          <p:cNvPr id="3" name="Notes Placeholder 2"/>
-          <p:cNvSpPr>
-            <a:spLocks noGrp="1"/>
-          </p:cNvSpPr>
-          <p:nvPr>
-            <p:ph type="body" idx="1"/>
-          </p:nvPr>
-        </p:nvSpPr>
-        <p:spPr/>
-        <p:txBody>
-          <a:bodyPr/>
-          <a:lstStyle/>
-          <a:p>
-            <a:endParaRPr lang="en-US"/>
-          </a:p>
-        </p:txBody>
-      </p:sp>
-      <p:sp>
-        <p:nvSpPr>
-          <p:cNvPr id="4" name="Slide Number Placeholder 3"/>
-          <p:cNvSpPr>
-            <a:spLocks noGrp="1"/>
-          </p:cNvSpPr>
-          <p:nvPr>
-            <p:ph type="sldNum" sz="quarter" idx="5"/>
-          </p:nvPr>
-        </p:nvSpPr>
-        <p:spPr/>
-        <p:txBody>
-          <a:bodyPr/>
-          <a:lstStyle/>
-          <a:p>
-            <a:endParaRPr lang="en-US"/>
-          </a:p>
-        </p:txBody>
-      </p:sp>
-    </p:spTree>
-    <p:extLst>
-      <p:ext uri="{BB962C8B-B14F-4D97-AF65-F5344CB8AC3E}">
-        <p14:creationId xmlns:p14="http://schemas.microsoft.com/office/powerpoint/2010/main" val="2111622714"/>
-      </p:ext>
-    </p:extLst>
-  </p:cSld>
-  <p:clrMapOvr>
-    <a:masterClrMapping/>
-  </p:clrMapOvr>
-</p:notes>
-</file>
-
-<file path=ppt/notesSlides/notesSlide14.xml><?xml version="1.0" encoding="utf-8"?>
-<p:notes xmlns:a="http://schemas.openxmlformats.org/drawingml/2006/main" xmlns:r="http://schemas.openxmlformats.org/officeDocument/2006/relationships" xmlns:p="http://schemas.openxmlformats.org/presentationml/2006/main">
-  <p:cSld>
-    <p:spTree>
-      <p:nvGrpSpPr>
-        <p:cNvPr id="1" name=""/>
-        <p:cNvGrpSpPr/>
-        <p:nvPr/>
-      </p:nvGrpSpPr>
-      <p:grpSpPr>
-        <a:xfrm>
-          <a:off x="0" y="0"/>
-          <a:ext cx="0" cy="0"/>
-          <a:chOff x="0" y="0"/>
-          <a:chExt cx="0" cy="0"/>
-        </a:xfrm>
-      </p:grpSpPr>
-      <p:sp>
-        <p:nvSpPr>
-          <p:cNvPr id="2" name="Slide Image Placeholder 1"/>
-          <p:cNvSpPr>
-            <a:spLocks noGrp="1" noRot="1" noChangeAspect="1"/>
-          </p:cNvSpPr>
-          <p:nvPr>
-            <p:ph type="sldImg"/>
-          </p:nvPr>
-        </p:nvSpPr>
-        <p:spPr/>
-      </p:sp>
-      <p:sp>
-        <p:nvSpPr>
-          <p:cNvPr id="3" name="Notes Placeholder 2"/>
-          <p:cNvSpPr>
-            <a:spLocks noGrp="1"/>
-          </p:cNvSpPr>
-          <p:nvPr>
-            <p:ph type="body" idx="1"/>
-          </p:nvPr>
-        </p:nvSpPr>
-        <p:spPr/>
-        <p:txBody>
-          <a:bodyPr/>
-          <a:lstStyle/>
-          <a:p>
-            <a:endParaRPr lang="en-US"/>
-          </a:p>
-        </p:txBody>
-      </p:sp>
-      <p:sp>
-        <p:nvSpPr>
-          <p:cNvPr id="4" name="Slide Number Placeholder 3"/>
-          <p:cNvSpPr>
-            <a:spLocks noGrp="1"/>
-          </p:cNvSpPr>
-          <p:nvPr>
-            <p:ph type="sldNum" sz="quarter" idx="5"/>
-          </p:nvPr>
-        </p:nvSpPr>
-        <p:spPr/>
-        <p:txBody>
-          <a:bodyPr/>
-          <a:lstStyle/>
-          <a:p>
-            <a:endParaRPr lang="en-US"/>
-          </a:p>
-        </p:txBody>
-      </p:sp>
-    </p:spTree>
-    <p:extLst>
-      <p:ext uri="{BB962C8B-B14F-4D97-AF65-F5344CB8AC3E}">
-        <p14:creationId xmlns:p14="http://schemas.microsoft.com/office/powerpoint/2010/main" val="2384686897"/>
-      </p:ext>
-    </p:extLst>
-  </p:cSld>
-  <p:clrMapOvr>
-    <a:masterClrMapping/>
-  </p:clrMapOvr>
-</p:notes>
-</file>
-
-<file path=ppt/notesSlides/notesSlide15.xml><?xml version="1.0" encoding="utf-8"?>
-<p:notes xmlns:a="http://schemas.openxmlformats.org/drawingml/2006/main" xmlns:r="http://schemas.openxmlformats.org/officeDocument/2006/relationships" xmlns:p="http://schemas.openxmlformats.org/presentationml/2006/main">
-  <p:cSld>
-    <p:spTree>
-      <p:nvGrpSpPr>
-        <p:cNvPr id="1" name=""/>
-        <p:cNvGrpSpPr/>
-        <p:nvPr/>
-      </p:nvGrpSpPr>
-      <p:grpSpPr>
-        <a:xfrm>
-          <a:off x="0" y="0"/>
-          <a:ext cx="0" cy="0"/>
-          <a:chOff x="0" y="0"/>
-          <a:chExt cx="0" cy="0"/>
-        </a:xfrm>
-      </p:grpSpPr>
-      <p:sp>
-        <p:nvSpPr>
-          <p:cNvPr id="2" name="Slide Image Placeholder 1"/>
-          <p:cNvSpPr>
-            <a:spLocks noGrp="1" noRot="1" noChangeAspect="1"/>
-          </p:cNvSpPr>
-          <p:nvPr>
-            <p:ph type="sldImg"/>
-          </p:nvPr>
-        </p:nvSpPr>
-        <p:spPr/>
-      </p:sp>
-      <p:sp>
-        <p:nvSpPr>
-          <p:cNvPr id="3" name="Notes Placeholder 2"/>
-          <p:cNvSpPr>
-            <a:spLocks noGrp="1"/>
-          </p:cNvSpPr>
-          <p:nvPr>
-            <p:ph type="body" idx="1"/>
-          </p:nvPr>
-        </p:nvSpPr>
-        <p:spPr/>
-        <p:txBody>
-          <a:bodyPr/>
-          <a:lstStyle/>
-          <a:p>
-            <a:endParaRPr lang="en-US" dirty="0"/>
-          </a:p>
-        </p:txBody>
-      </p:sp>
-      <p:sp>
-        <p:nvSpPr>
-          <p:cNvPr id="4" name="Slide Number Placeholder 3"/>
-          <p:cNvSpPr>
-            <a:spLocks noGrp="1"/>
-          </p:cNvSpPr>
-          <p:nvPr>
-            <p:ph type="sldNum" sz="quarter" idx="5"/>
-          </p:nvPr>
-        </p:nvSpPr>
-        <p:spPr/>
-        <p:txBody>
-          <a:bodyPr/>
-          <a:lstStyle/>
-          <a:p>
-            <a:endParaRPr lang="en-US"/>
-          </a:p>
-        </p:txBody>
-      </p:sp>
-    </p:spTree>
-    <p:extLst>
-      <p:ext uri="{BB962C8B-B14F-4D97-AF65-F5344CB8AC3E}">
-        <p14:creationId xmlns:p14="http://schemas.microsoft.com/office/powerpoint/2010/main" val="87837289"/>
-      </p:ext>
-    </p:extLst>
-  </p:cSld>
-  <p:clrMapOvr>
-    <a:masterClrMapping/>
-  </p:clrMapOvr>
-</p:notes>
-</file>
-
-<file path=ppt/notesSlides/notesSlide16.xml><?xml version="1.0" encoding="utf-8"?>
-<p:notes xmlns:a="http://schemas.openxmlformats.org/drawingml/2006/main" xmlns:r="http://schemas.openxmlformats.org/officeDocument/2006/relationships" xmlns:p="http://schemas.openxmlformats.org/presentationml/2006/main">
-  <p:cSld>
-    <p:spTree>
-      <p:nvGrpSpPr>
-        <p:cNvPr id="1" name=""/>
-        <p:cNvGrpSpPr/>
-        <p:nvPr/>
-      </p:nvGrpSpPr>
-      <p:grpSpPr>
-        <a:xfrm>
-          <a:off x="0" y="0"/>
-          <a:ext cx="0" cy="0"/>
-          <a:chOff x="0" y="0"/>
-          <a:chExt cx="0" cy="0"/>
-        </a:xfrm>
-      </p:grpSpPr>
-      <p:sp>
-        <p:nvSpPr>
-          <p:cNvPr id="2" name="Slide Image Placeholder 1"/>
-          <p:cNvSpPr>
-            <a:spLocks noGrp="1" noRot="1" noChangeAspect="1"/>
-          </p:cNvSpPr>
-          <p:nvPr>
-            <p:ph type="sldImg"/>
-          </p:nvPr>
-        </p:nvSpPr>
-        <p:spPr/>
-      </p:sp>
-      <p:sp>
-        <p:nvSpPr>
-          <p:cNvPr id="3" name="Notes Placeholder 2"/>
-          <p:cNvSpPr>
-            <a:spLocks noGrp="1"/>
-          </p:cNvSpPr>
-          <p:nvPr>
-            <p:ph type="body" idx="1"/>
-          </p:nvPr>
-        </p:nvSpPr>
-        <p:spPr/>
-        <p:txBody>
-          <a:bodyPr/>
-          <a:lstStyle/>
-          <a:p>
-            <a:endParaRPr lang="en-US"/>
-          </a:p>
-        </p:txBody>
-      </p:sp>
-      <p:sp>
-        <p:nvSpPr>
-          <p:cNvPr id="4" name="Slide Number Placeholder 3"/>
-          <p:cNvSpPr>
-            <a:spLocks noGrp="1"/>
-          </p:cNvSpPr>
-          <p:nvPr>
-            <p:ph type="sldNum" sz="quarter" idx="5"/>
-          </p:nvPr>
-        </p:nvSpPr>
-        <p:spPr/>
-        <p:txBody>
-          <a:bodyPr/>
-          <a:lstStyle/>
-          <a:p>
-            <a:endParaRPr lang="en-US"/>
-          </a:p>
-        </p:txBody>
-      </p:sp>
-    </p:spTree>
-    <p:extLst>
-      <p:ext uri="{BB962C8B-B14F-4D97-AF65-F5344CB8AC3E}">
-        <p14:creationId xmlns:p14="http://schemas.microsoft.com/office/powerpoint/2010/main" val="1219509579"/>
-      </p:ext>
-    </p:extLst>
-  </p:cSld>
-  <p:clrMapOvr>
-    <a:masterClrMapping/>
-  </p:clrMapOvr>
-</p:notes>
-</file>
-
-<file path=ppt/notesSlides/notesSlide17.xml><?xml version="1.0" encoding="utf-8"?>
-<p:notes xmlns:a="http://schemas.openxmlformats.org/drawingml/2006/main" xmlns:r="http://schemas.openxmlformats.org/officeDocument/2006/relationships" xmlns:p="http://schemas.openxmlformats.org/presentationml/2006/main">
-  <p:cSld>
-    <p:spTree>
-      <p:nvGrpSpPr>
-        <p:cNvPr id="1" name=""/>
-        <p:cNvGrpSpPr/>
-        <p:nvPr/>
-      </p:nvGrpSpPr>
-      <p:grpSpPr>
-        <a:xfrm>
-          <a:off x="0" y="0"/>
-          <a:ext cx="0" cy="0"/>
-          <a:chOff x="0" y="0"/>
-          <a:chExt cx="0" cy="0"/>
-        </a:xfrm>
-      </p:grpSpPr>
-      <p:sp>
-        <p:nvSpPr>
-          <p:cNvPr id="2" name="Slide Image Placeholder 1"/>
-          <p:cNvSpPr>
-            <a:spLocks noGrp="1" noRot="1" noChangeAspect="1"/>
-          </p:cNvSpPr>
-          <p:nvPr>
-            <p:ph type="sldImg"/>
-          </p:nvPr>
-        </p:nvSpPr>
-        <p:spPr/>
-      </p:sp>
-      <p:sp>
-        <p:nvSpPr>
-          <p:cNvPr id="3" name="Notes Placeholder 2"/>
-          <p:cNvSpPr>
-            <a:spLocks noGrp="1"/>
-          </p:cNvSpPr>
-          <p:nvPr>
-            <p:ph type="body" idx="1"/>
-          </p:nvPr>
-        </p:nvSpPr>
-        <p:spPr/>
-        <p:txBody>
-          <a:bodyPr/>
-          <a:lstStyle/>
-          <a:p>
-            <a:endParaRPr lang="en-US"/>
-          </a:p>
-        </p:txBody>
-      </p:sp>
-      <p:sp>
-        <p:nvSpPr>
-          <p:cNvPr id="4" name="Slide Number Placeholder 3"/>
-          <p:cNvSpPr>
-            <a:spLocks noGrp="1"/>
-          </p:cNvSpPr>
-          <p:nvPr>
-            <p:ph type="sldNum" sz="quarter" idx="5"/>
-          </p:nvPr>
-        </p:nvSpPr>
-        <p:spPr/>
-        <p:txBody>
-          <a:bodyPr/>
-          <a:lstStyle/>
-          <a:p>
-            <a:endParaRPr lang="en-US"/>
-          </a:p>
-        </p:txBody>
-      </p:sp>
-    </p:spTree>
-    <p:extLst>
-      <p:ext uri="{BB962C8B-B14F-4D97-AF65-F5344CB8AC3E}">
-        <p14:creationId xmlns:p14="http://schemas.microsoft.com/office/powerpoint/2010/main" val="1099310564"/>
-      </p:ext>
-    </p:extLst>
-  </p:cSld>
-  <p:clrMapOvr>
-    <a:masterClrMapping/>
-  </p:clrMapOvr>
-</p:notes>
-</file>
-
-<file path=ppt/notesSlides/notesSlide18.xml><?xml version="1.0" encoding="utf-8"?>
-<p:notes xmlns:a="http://schemas.openxmlformats.org/drawingml/2006/main" xmlns:r="http://schemas.openxmlformats.org/officeDocument/2006/relationships" xmlns:p="http://schemas.openxmlformats.org/presentationml/2006/main">
-  <p:cSld>
-    <p:spTree>
-      <p:nvGrpSpPr>
-        <p:cNvPr id="1" name=""/>
-        <p:cNvGrpSpPr/>
-        <p:nvPr/>
-      </p:nvGrpSpPr>
-      <p:grpSpPr>
-        <a:xfrm>
-          <a:off x="0" y="0"/>
-          <a:ext cx="0" cy="0"/>
-          <a:chOff x="0" y="0"/>
-          <a:chExt cx="0" cy="0"/>
-        </a:xfrm>
-      </p:grpSpPr>
-      <p:sp>
-        <p:nvSpPr>
-          <p:cNvPr id="2" name="Slide Image Placeholder 1"/>
-          <p:cNvSpPr>
-            <a:spLocks noGrp="1" noRot="1" noChangeAspect="1"/>
-          </p:cNvSpPr>
-          <p:nvPr>
-            <p:ph type="sldImg"/>
-          </p:nvPr>
-        </p:nvSpPr>
-        <p:spPr/>
-      </p:sp>
-      <p:sp>
-        <p:nvSpPr>
-          <p:cNvPr id="3" name="Notes Placeholder 2"/>
-          <p:cNvSpPr>
-            <a:spLocks noGrp="1"/>
-          </p:cNvSpPr>
-          <p:nvPr>
-            <p:ph type="body" idx="1"/>
-          </p:nvPr>
-        </p:nvSpPr>
-        <p:spPr/>
-        <p:txBody>
-          <a:bodyPr/>
-          <a:lstStyle/>
-          <a:p>
-            <a:endParaRPr lang="en-US"/>
-          </a:p>
-        </p:txBody>
-      </p:sp>
-      <p:sp>
-        <p:nvSpPr>
-          <p:cNvPr id="4" name="Slide Number Placeholder 3"/>
-          <p:cNvSpPr>
-            <a:spLocks noGrp="1"/>
-          </p:cNvSpPr>
-          <p:nvPr>
-            <p:ph type="sldNum" sz="quarter" idx="5"/>
-          </p:nvPr>
-        </p:nvSpPr>
-        <p:spPr/>
-        <p:txBody>
-          <a:bodyPr/>
-          <a:lstStyle/>
-          <a:p>
-            <a:endParaRPr lang="en-US"/>
-          </a:p>
-        </p:txBody>
-      </p:sp>
-    </p:spTree>
-    <p:extLst>
-      <p:ext uri="{BB962C8B-B14F-4D97-AF65-F5344CB8AC3E}">
-        <p14:creationId xmlns:p14="http://schemas.microsoft.com/office/powerpoint/2010/main" val="41839157"/>
-      </p:ext>
-    </p:extLst>
-  </p:cSld>
-  <p:clrMapOvr>
-    <a:masterClrMapping/>
-  </p:clrMapOvr>
-</p:notes>
-</file>
-
-<file path=ppt/notesSlides/notesSlide19.xml><?xml version="1.0" encoding="utf-8"?>
-<p:notes xmlns:a="http://schemas.openxmlformats.org/drawingml/2006/main" xmlns:r="http://schemas.openxmlformats.org/officeDocument/2006/relationships" xmlns:p="http://schemas.openxmlformats.org/presentationml/2006/main">
-  <p:cSld>
-    <p:spTree>
-      <p:nvGrpSpPr>
-        <p:cNvPr id="1" name=""/>
-        <p:cNvGrpSpPr/>
-        <p:nvPr/>
-      </p:nvGrpSpPr>
-      <p:grpSpPr>
-        <a:xfrm>
-          <a:off x="0" y="0"/>
-          <a:ext cx="0" cy="0"/>
-          <a:chOff x="0" y="0"/>
-          <a:chExt cx="0" cy="0"/>
-        </a:xfrm>
-      </p:grpSpPr>
-      <p:sp>
-        <p:nvSpPr>
-          <p:cNvPr id="2" name="Slide Image Placeholder 1"/>
-          <p:cNvSpPr>
-            <a:spLocks noGrp="1" noRot="1" noChangeAspect="1"/>
-          </p:cNvSpPr>
-          <p:nvPr>
-            <p:ph type="sldImg"/>
-          </p:nvPr>
-        </p:nvSpPr>
-        <p:spPr/>
-      </p:sp>
-      <p:sp>
-        <p:nvSpPr>
-          <p:cNvPr id="3" name="Notes Placeholder 2"/>
-          <p:cNvSpPr>
-            <a:spLocks noGrp="1"/>
-          </p:cNvSpPr>
-          <p:nvPr>
-            <p:ph type="body" idx="1"/>
-          </p:nvPr>
-        </p:nvSpPr>
-        <p:spPr/>
-        <p:txBody>
-          <a:bodyPr/>
-          <a:lstStyle/>
-          <a:p>
-            <a:endParaRPr lang="en-US" dirty="0"/>
-          </a:p>
-        </p:txBody>
-      </p:sp>
-      <p:sp>
-        <p:nvSpPr>
-          <p:cNvPr id="4" name="Slide Number Placeholder 3"/>
-          <p:cNvSpPr>
-            <a:spLocks noGrp="1"/>
-          </p:cNvSpPr>
-          <p:nvPr>
-            <p:ph type="sldNum" sz="quarter" idx="5"/>
-          </p:nvPr>
-        </p:nvSpPr>
-        <p:spPr/>
-        <p:txBody>
-          <a:bodyPr/>
-          <a:lstStyle/>
-          <a:p>
-            <a:endParaRPr lang="en-US" dirty="0"/>
-          </a:p>
-        </p:txBody>
-      </p:sp>
-    </p:spTree>
-    <p:extLst>
-      <p:ext uri="{BB962C8B-B14F-4D97-AF65-F5344CB8AC3E}">
-        <p14:creationId xmlns:p14="http://schemas.microsoft.com/office/powerpoint/2010/main" val="3731795292"/>
-      </p:ext>
-    </p:extLst>
-  </p:cSld>
-  <p:clrMapOvr>
-    <a:masterClrMapping/>
-  </p:clrMapOvr>
-</p:notes>
-</file>
-
-<file path=ppt/notesSlides/notesSlide2.xml><?xml version="1.0" encoding="utf-8"?>
-<p:notes xmlns:a="http://schemas.openxmlformats.org/drawingml/2006/main" xmlns:r="http://schemas.openxmlformats.org/officeDocument/2006/relationships" xmlns:p="http://schemas.openxmlformats.org/presentationml/2006/main">
-  <p:cSld>
-    <p:spTree>
-      <p:nvGrpSpPr>
-        <p:cNvPr id="1" name=""/>
-        <p:cNvGrpSpPr/>
-        <p:nvPr/>
-      </p:nvGrpSpPr>
-      <p:grpSpPr>
-        <a:xfrm>
-          <a:off x="0" y="0"/>
-          <a:ext cx="0" cy="0"/>
-          <a:chOff x="0" y="0"/>
-          <a:chExt cx="0" cy="0"/>
-        </a:xfrm>
-      </p:grpSpPr>
-      <p:sp>
-        <p:nvSpPr>
-          <p:cNvPr id="2" name="Slide Image Placeholder 1"/>
-          <p:cNvSpPr>
-            <a:spLocks noGrp="1" noRot="1" noChangeAspect="1"/>
-          </p:cNvSpPr>
-          <p:nvPr>
-            <p:ph type="sldImg"/>
-          </p:nvPr>
-        </p:nvSpPr>
-        <p:spPr/>
-      </p:sp>
-      <p:sp>
-        <p:nvSpPr>
-          <p:cNvPr id="3" name="Notes Placeholder 2"/>
-          <p:cNvSpPr>
-            <a:spLocks noGrp="1"/>
-          </p:cNvSpPr>
-          <p:nvPr>
-            <p:ph type="body" idx="1"/>
-          </p:nvPr>
-        </p:nvSpPr>
-        <p:spPr/>
-        <p:txBody>
-          <a:bodyPr/>
-          <a:lstStyle/>
-          <a:p>
-            <a:endParaRPr lang="en-US" dirty="0"/>
-          </a:p>
-        </p:txBody>
-      </p:sp>
-      <p:sp>
-        <p:nvSpPr>
-          <p:cNvPr id="4" name="Slide Number Placeholder 3"/>
-          <p:cNvSpPr>
-            <a:spLocks noGrp="1"/>
-          </p:cNvSpPr>
-          <p:nvPr>
-            <p:ph type="sldNum" sz="quarter" idx="5"/>
-          </p:nvPr>
-        </p:nvSpPr>
-        <p:spPr/>
-        <p:txBody>
-          <a:bodyPr/>
-          <a:lstStyle/>
-          <a:p>
-            <a:endParaRPr lang="en-US" dirty="0"/>
-          </a:p>
-        </p:txBody>
-      </p:sp>
-    </p:spTree>
-    <p:extLst>
-      <p:ext uri="{BB962C8B-B14F-4D97-AF65-F5344CB8AC3E}">
-        <p14:creationId xmlns:p14="http://schemas.microsoft.com/office/powerpoint/2010/main" val="3125886555"/>
-      </p:ext>
-    </p:extLst>
-  </p:cSld>
-  <p:clrMapOvr>
-    <a:masterClrMapping/>
-  </p:clrMapOvr>
-</p:notes>
-</file>
-
-<file path=ppt/notesSlides/notesSlide20.xml><?xml version="1.0" encoding="utf-8"?>
-<p:notes xmlns:a="http://schemas.openxmlformats.org/drawingml/2006/main" xmlns:r="http://schemas.openxmlformats.org/officeDocument/2006/relationships" xmlns:p="http://schemas.openxmlformats.org/presentationml/2006/main">
-  <p:cSld>
-    <p:spTree>
-      <p:nvGrpSpPr>
-        <p:cNvPr id="1" name=""/>
-        <p:cNvGrpSpPr/>
-        <p:nvPr/>
-      </p:nvGrpSpPr>
-      <p:grpSpPr>
-        <a:xfrm>
-          <a:off x="0" y="0"/>
-          <a:ext cx="0" cy="0"/>
-          <a:chOff x="0" y="0"/>
-          <a:chExt cx="0" cy="0"/>
-        </a:xfrm>
-      </p:grpSpPr>
-      <p:sp>
-        <p:nvSpPr>
-          <p:cNvPr id="2" name="Slide Image Placeholder 1"/>
-          <p:cNvSpPr>
-            <a:spLocks noGrp="1" noRot="1" noChangeAspect="1"/>
-          </p:cNvSpPr>
-          <p:nvPr>
-            <p:ph type="sldImg"/>
-          </p:nvPr>
-        </p:nvSpPr>
-        <p:spPr/>
-      </p:sp>
-      <p:sp>
-        <p:nvSpPr>
-          <p:cNvPr id="3" name="Notes Placeholder 2"/>
-          <p:cNvSpPr>
-            <a:spLocks noGrp="1"/>
-          </p:cNvSpPr>
-          <p:nvPr>
-            <p:ph type="body" idx="1"/>
-          </p:nvPr>
-        </p:nvSpPr>
-        <p:spPr/>
-        <p:txBody>
-          <a:bodyPr/>
-          <a:lstStyle/>
-          <a:p>
-            <a:endParaRPr lang="en-US" dirty="0"/>
-          </a:p>
-        </p:txBody>
-      </p:sp>
-      <p:sp>
-        <p:nvSpPr>
-          <p:cNvPr id="4" name="Slide Number Placeholder 3"/>
-          <p:cNvSpPr>
-            <a:spLocks noGrp="1"/>
-          </p:cNvSpPr>
-          <p:nvPr>
-            <p:ph type="sldNum" sz="quarter" idx="5"/>
-          </p:nvPr>
-        </p:nvSpPr>
-        <p:spPr/>
-        <p:txBody>
-          <a:bodyPr/>
-          <a:lstStyle/>
-          <a:p>
-            <a:fld id="{EEBB2FDE-2E55-4B3D-B7EA-09D0CC108070}" type="slidenum">
-              <a:rPr lang="en-US" smtClean="0"/>
-              <a:t>20</a:t>
-            </a:fld>
-            <a:endParaRPr lang="en-US" dirty="0"/>
-          </a:p>
-        </p:txBody>
-      </p:sp>
-    </p:spTree>
-    <p:extLst>
-      <p:ext uri="{BB962C8B-B14F-4D97-AF65-F5344CB8AC3E}">
-        <p14:creationId xmlns:p14="http://schemas.microsoft.com/office/powerpoint/2010/main" val="2957338251"/>
-      </p:ext>
-    </p:extLst>
-  </p:cSld>
-  <p:clrMapOvr>
-    <a:masterClrMapping/>
-  </p:clrMapOvr>
-</p:notes>
-</file>
-
-<file path=ppt/notesSlides/notesSlide21.xml><?xml version="1.0" encoding="utf-8"?>
-<p:notes xmlns:a="http://schemas.openxmlformats.org/drawingml/2006/main" xmlns:r="http://schemas.openxmlformats.org/officeDocument/2006/relationships" xmlns:p="http://schemas.openxmlformats.org/presentationml/2006/main">
-  <p:cSld>
-    <p:spTree>
-      <p:nvGrpSpPr>
-        <p:cNvPr id="1" name=""/>
-        <p:cNvGrpSpPr/>
-        <p:nvPr/>
-      </p:nvGrpSpPr>
-      <p:grpSpPr>
-        <a:xfrm>
-          <a:off x="0" y="0"/>
-          <a:ext cx="0" cy="0"/>
-          <a:chOff x="0" y="0"/>
-          <a:chExt cx="0" cy="0"/>
-        </a:xfrm>
-      </p:grpSpPr>
-      <p:sp>
-        <p:nvSpPr>
-          <p:cNvPr id="2" name="Slide Image Placeholder 1"/>
-          <p:cNvSpPr>
-            <a:spLocks noGrp="1" noRot="1" noChangeAspect="1"/>
-          </p:cNvSpPr>
-          <p:nvPr>
-            <p:ph type="sldImg"/>
-          </p:nvPr>
-        </p:nvSpPr>
-        <p:spPr/>
-      </p:sp>
-      <p:sp>
-        <p:nvSpPr>
-          <p:cNvPr id="3" name="Notes Placeholder 2"/>
-          <p:cNvSpPr>
-            <a:spLocks noGrp="1"/>
-          </p:cNvSpPr>
-          <p:nvPr>
-            <p:ph type="body" idx="1"/>
-          </p:nvPr>
-        </p:nvSpPr>
-        <p:spPr/>
-        <p:txBody>
-          <a:bodyPr/>
-          <a:lstStyle/>
-          <a:p>
-            <a:endParaRPr lang="en-US" dirty="0"/>
-          </a:p>
-        </p:txBody>
-      </p:sp>
-      <p:sp>
-        <p:nvSpPr>
-          <p:cNvPr id="4" name="Slide Number Placeholder 3"/>
-          <p:cNvSpPr>
-            <a:spLocks noGrp="1"/>
-          </p:cNvSpPr>
-          <p:nvPr>
-            <p:ph type="sldNum" sz="quarter" idx="5"/>
-          </p:nvPr>
-        </p:nvSpPr>
-        <p:spPr/>
-        <p:txBody>
-          <a:bodyPr/>
-          <a:lstStyle/>
-          <a:p>
-            <a:fld id="{EEBB2FDE-2E55-4B3D-B7EA-09D0CC108070}" type="slidenum">
-              <a:rPr lang="en-US" smtClean="0"/>
-              <a:t>21</a:t>
-            </a:fld>
-            <a:endParaRPr lang="en-US" dirty="0"/>
-          </a:p>
-        </p:txBody>
-      </p:sp>
-    </p:spTree>
-    <p:extLst>
-      <p:ext uri="{BB962C8B-B14F-4D97-AF65-F5344CB8AC3E}">
-        <p14:creationId xmlns:p14="http://schemas.microsoft.com/office/powerpoint/2010/main" val="1479852563"/>
-      </p:ext>
-    </p:extLst>
-  </p:cSld>
-  <p:clrMapOvr>
-    <a:masterClrMapping/>
-  </p:clrMapOvr>
-</p:notes>
-</file>
-
-<file path=ppt/notesSlides/notesSlide22.xml><?xml version="1.0" encoding="utf-8"?>
-<p:notes xmlns:a="http://schemas.openxmlformats.org/drawingml/2006/main" xmlns:r="http://schemas.openxmlformats.org/officeDocument/2006/relationships" xmlns:p="http://schemas.openxmlformats.org/presentationml/2006/main">
-  <p:cSld>
-    <p:spTree>
-      <p:nvGrpSpPr>
-        <p:cNvPr id="1" name=""/>
-        <p:cNvGrpSpPr/>
-        <p:nvPr/>
-      </p:nvGrpSpPr>
-      <p:grpSpPr>
-        <a:xfrm>
-          <a:off x="0" y="0"/>
-          <a:ext cx="0" cy="0"/>
-          <a:chOff x="0" y="0"/>
-          <a:chExt cx="0" cy="0"/>
-        </a:xfrm>
-      </p:grpSpPr>
-      <p:sp>
-        <p:nvSpPr>
-          <p:cNvPr id="2" name="Slide Image Placeholder 1"/>
-          <p:cNvSpPr>
-            <a:spLocks noGrp="1" noRot="1" noChangeAspect="1"/>
-          </p:cNvSpPr>
-          <p:nvPr>
-            <p:ph type="sldImg"/>
-          </p:nvPr>
-        </p:nvSpPr>
-        <p:spPr/>
-      </p:sp>
-      <p:sp>
-        <p:nvSpPr>
-          <p:cNvPr id="3" name="Notes Placeholder 2"/>
-          <p:cNvSpPr>
-            <a:spLocks noGrp="1"/>
-          </p:cNvSpPr>
-          <p:nvPr>
-            <p:ph type="body" idx="1"/>
-          </p:nvPr>
-        </p:nvSpPr>
-        <p:spPr/>
-        <p:txBody>
-          <a:bodyPr/>
-          <a:lstStyle/>
-          <a:p>
-            <a:endParaRPr lang="en-US" dirty="0"/>
-          </a:p>
-        </p:txBody>
-      </p:sp>
-      <p:sp>
-        <p:nvSpPr>
-          <p:cNvPr id="4" name="Slide Number Placeholder 3"/>
-          <p:cNvSpPr>
-            <a:spLocks noGrp="1"/>
-          </p:cNvSpPr>
-          <p:nvPr>
-            <p:ph type="sldNum" sz="quarter" idx="5"/>
-          </p:nvPr>
-        </p:nvSpPr>
-        <p:spPr/>
-        <p:txBody>
-          <a:bodyPr/>
-          <a:lstStyle/>
-          <a:p>
-            <a:endParaRPr lang="en-US" dirty="0"/>
-          </a:p>
-        </p:txBody>
-      </p:sp>
-    </p:spTree>
-    <p:extLst>
-      <p:ext uri="{BB962C8B-B14F-4D97-AF65-F5344CB8AC3E}">
-        <p14:creationId xmlns:p14="http://schemas.microsoft.com/office/powerpoint/2010/main" val="1850074559"/>
-      </p:ext>
-    </p:extLst>
-  </p:cSld>
-  <p:clrMapOvr>
-    <a:masterClrMapping/>
-  </p:clrMapOvr>
-</p:notes>
-</file>
-
-<file path=ppt/notesSlides/notesSlide23.xml><?xml version="1.0" encoding="utf-8"?>
-<p:notes xmlns:a="http://schemas.openxmlformats.org/drawingml/2006/main" xmlns:r="http://schemas.openxmlformats.org/officeDocument/2006/relationships" xmlns:p="http://schemas.openxmlformats.org/presentationml/2006/main">
-  <p:cSld>
-    <p:spTree>
-      <p:nvGrpSpPr>
-        <p:cNvPr id="1" name=""/>
-        <p:cNvGrpSpPr/>
-        <p:nvPr/>
-      </p:nvGrpSpPr>
-      <p:grpSpPr>
-        <a:xfrm>
-          <a:off x="0" y="0"/>
-          <a:ext cx="0" cy="0"/>
-          <a:chOff x="0" y="0"/>
-          <a:chExt cx="0" cy="0"/>
-        </a:xfrm>
-      </p:grpSpPr>
-      <p:sp>
-        <p:nvSpPr>
-          <p:cNvPr id="2" name="Slide Image Placeholder 1"/>
-          <p:cNvSpPr>
-            <a:spLocks noGrp="1" noRot="1" noChangeAspect="1"/>
-          </p:cNvSpPr>
-          <p:nvPr>
-            <p:ph type="sldImg"/>
-          </p:nvPr>
-        </p:nvSpPr>
-        <p:spPr/>
-      </p:sp>
-      <p:sp>
-        <p:nvSpPr>
-          <p:cNvPr id="3" name="Notes Placeholder 2"/>
-          <p:cNvSpPr>
-            <a:spLocks noGrp="1"/>
-          </p:cNvSpPr>
-          <p:nvPr>
-            <p:ph type="body" idx="1"/>
-          </p:nvPr>
-        </p:nvSpPr>
-        <p:spPr/>
-        <p:txBody>
-          <a:bodyPr/>
-          <a:lstStyle/>
-          <a:p>
-            <a:endParaRPr lang="en-US" dirty="0"/>
-          </a:p>
-        </p:txBody>
-      </p:sp>
-      <p:sp>
-        <p:nvSpPr>
-          <p:cNvPr id="4" name="Slide Number Placeholder 3"/>
-          <p:cNvSpPr>
-            <a:spLocks noGrp="1"/>
-          </p:cNvSpPr>
-          <p:nvPr>
-            <p:ph type="sldNum" sz="quarter" idx="5"/>
-          </p:nvPr>
-        </p:nvSpPr>
-        <p:spPr/>
-        <p:txBody>
-          <a:bodyPr/>
-          <a:lstStyle/>
-          <a:p>
-            <a:endParaRPr lang="en-US" dirty="0"/>
-          </a:p>
-        </p:txBody>
-      </p:sp>
-    </p:spTree>
-    <p:extLst>
-      <p:ext uri="{BB962C8B-B14F-4D97-AF65-F5344CB8AC3E}">
-        <p14:creationId xmlns:p14="http://schemas.microsoft.com/office/powerpoint/2010/main" val="1505046937"/>
-      </p:ext>
-    </p:extLst>
-  </p:cSld>
-  <p:clrMapOvr>
-    <a:masterClrMapping/>
-  </p:clrMapOvr>
-</p:notes>
-</file>
-
-<file path=ppt/notesSlides/notesSlide24.xml><?xml version="1.0" encoding="utf-8"?>
-<p:notes xmlns:a="http://schemas.openxmlformats.org/drawingml/2006/main" xmlns:r="http://schemas.openxmlformats.org/officeDocument/2006/relationships" xmlns:p="http://schemas.openxmlformats.org/presentationml/2006/main">
-  <p:cSld>
-    <p:spTree>
-      <p:nvGrpSpPr>
-        <p:cNvPr id="1" name=""/>
-        <p:cNvGrpSpPr/>
-        <p:nvPr/>
-      </p:nvGrpSpPr>
-      <p:grpSpPr>
-        <a:xfrm>
-          <a:off x="0" y="0"/>
-          <a:ext cx="0" cy="0"/>
-          <a:chOff x="0" y="0"/>
-          <a:chExt cx="0" cy="0"/>
-        </a:xfrm>
-      </p:grpSpPr>
-      <p:sp>
-        <p:nvSpPr>
-          <p:cNvPr id="2" name="Slide Image Placeholder 1"/>
-          <p:cNvSpPr>
-            <a:spLocks noGrp="1" noRot="1" noChangeAspect="1"/>
-          </p:cNvSpPr>
-          <p:nvPr>
-            <p:ph type="sldImg"/>
-          </p:nvPr>
-        </p:nvSpPr>
-        <p:spPr/>
-      </p:sp>
-      <p:sp>
-        <p:nvSpPr>
-          <p:cNvPr id="3" name="Notes Placeholder 2"/>
-          <p:cNvSpPr>
-            <a:spLocks noGrp="1"/>
-          </p:cNvSpPr>
-          <p:nvPr>
-            <p:ph type="body" idx="1"/>
-          </p:nvPr>
-        </p:nvSpPr>
-        <p:spPr/>
-        <p:txBody>
-          <a:bodyPr/>
-          <a:lstStyle/>
-          <a:p>
-            <a:endParaRPr lang="en-US"/>
-          </a:p>
-        </p:txBody>
-      </p:sp>
-      <p:sp>
-        <p:nvSpPr>
-          <p:cNvPr id="4" name="Slide Number Placeholder 3"/>
-          <p:cNvSpPr>
-            <a:spLocks noGrp="1"/>
-          </p:cNvSpPr>
-          <p:nvPr>
-            <p:ph type="sldNum" sz="quarter" idx="5"/>
-          </p:nvPr>
-        </p:nvSpPr>
-        <p:spPr/>
-        <p:txBody>
-          <a:bodyPr/>
-          <a:lstStyle/>
-          <a:p>
-            <a:endParaRPr lang="en-US"/>
-          </a:p>
-        </p:txBody>
-      </p:sp>
-    </p:spTree>
-    <p:extLst>
-      <p:ext uri="{BB962C8B-B14F-4D97-AF65-F5344CB8AC3E}">
-        <p14:creationId xmlns:p14="http://schemas.microsoft.com/office/powerpoint/2010/main" val="3000894950"/>
-      </p:ext>
-    </p:extLst>
-  </p:cSld>
-  <p:clrMapOvr>
-    <a:masterClrMapping/>
-  </p:clrMapOvr>
-</p:notes>
-</file>
-
-<file path=ppt/notesSlides/notesSlide25.xml><?xml version="1.0" encoding="utf-8"?>
-<p:notes xmlns:a="http://schemas.openxmlformats.org/drawingml/2006/main" xmlns:r="http://schemas.openxmlformats.org/officeDocument/2006/relationships" xmlns:p="http://schemas.openxmlformats.org/presentationml/2006/main">
-  <p:cSld>
-    <p:spTree>
-      <p:nvGrpSpPr>
-        <p:cNvPr id="1" name=""/>
-        <p:cNvGrpSpPr/>
-        <p:nvPr/>
-      </p:nvGrpSpPr>
-      <p:grpSpPr>
-        <a:xfrm>
-          <a:off x="0" y="0"/>
-          <a:ext cx="0" cy="0"/>
-          <a:chOff x="0" y="0"/>
-          <a:chExt cx="0" cy="0"/>
-        </a:xfrm>
-      </p:grpSpPr>
-      <p:sp>
-        <p:nvSpPr>
-          <p:cNvPr id="2" name="Slide Image Placeholder 1"/>
-          <p:cNvSpPr>
-            <a:spLocks noGrp="1" noRot="1" noChangeAspect="1"/>
-          </p:cNvSpPr>
-          <p:nvPr>
-            <p:ph type="sldImg"/>
-          </p:nvPr>
-        </p:nvSpPr>
-        <p:spPr/>
-      </p:sp>
-      <p:sp>
-        <p:nvSpPr>
-          <p:cNvPr id="3" name="Notes Placeholder 2"/>
-          <p:cNvSpPr>
-            <a:spLocks noGrp="1"/>
-          </p:cNvSpPr>
-          <p:nvPr>
-            <p:ph type="body" idx="1"/>
-          </p:nvPr>
-        </p:nvSpPr>
-        <p:spPr/>
-        <p:txBody>
-          <a:bodyPr/>
-          <a:lstStyle/>
-          <a:p>
-            <a:endParaRPr lang="en-US" dirty="0"/>
-          </a:p>
-        </p:txBody>
-      </p:sp>
-      <p:sp>
-        <p:nvSpPr>
-          <p:cNvPr id="4" name="Slide Number Placeholder 3"/>
-          <p:cNvSpPr>
-            <a:spLocks noGrp="1"/>
-          </p:cNvSpPr>
-          <p:nvPr>
-            <p:ph type="sldNum" sz="quarter" idx="5"/>
-          </p:nvPr>
-        </p:nvSpPr>
-        <p:spPr/>
-        <p:txBody>
-          <a:bodyPr/>
-          <a:lstStyle/>
-          <a:p>
-            <a:endParaRPr lang="en-US" dirty="0"/>
-          </a:p>
-        </p:txBody>
-      </p:sp>
-    </p:spTree>
-    <p:extLst>
-      <p:ext uri="{BB962C8B-B14F-4D97-AF65-F5344CB8AC3E}">
-        <p14:creationId xmlns:p14="http://schemas.microsoft.com/office/powerpoint/2010/main" val="2767105446"/>
-      </p:ext>
-    </p:extLst>
-  </p:cSld>
-  <p:clrMapOvr>
-    <a:masterClrMapping/>
-  </p:clrMapOvr>
-</p:notes>
-</file>
-
-<file path=ppt/notesSlides/notesSlide26.xml><?xml version="1.0" encoding="utf-8"?>
-<p:notes xmlns:a="http://schemas.openxmlformats.org/drawingml/2006/main" xmlns:r="http://schemas.openxmlformats.org/officeDocument/2006/relationships" xmlns:p="http://schemas.openxmlformats.org/presentationml/2006/main">
-  <p:cSld>
-    <p:spTree>
-      <p:nvGrpSpPr>
-        <p:cNvPr id="1" name=""/>
-        <p:cNvGrpSpPr/>
-        <p:nvPr/>
-      </p:nvGrpSpPr>
-      <p:grpSpPr>
-        <a:xfrm>
-          <a:off x="0" y="0"/>
-          <a:ext cx="0" cy="0"/>
-          <a:chOff x="0" y="0"/>
-          <a:chExt cx="0" cy="0"/>
-        </a:xfrm>
-      </p:grpSpPr>
-      <p:sp>
-        <p:nvSpPr>
-          <p:cNvPr id="2" name="Slide Image Placeholder 1"/>
-          <p:cNvSpPr>
-            <a:spLocks noGrp="1" noRot="1" noChangeAspect="1"/>
-          </p:cNvSpPr>
-          <p:nvPr>
-            <p:ph type="sldImg"/>
-          </p:nvPr>
-        </p:nvSpPr>
-        <p:spPr/>
-      </p:sp>
-      <p:sp>
-        <p:nvSpPr>
-          <p:cNvPr id="3" name="Notes Placeholder 2"/>
-          <p:cNvSpPr>
-            <a:spLocks noGrp="1"/>
-          </p:cNvSpPr>
-          <p:nvPr>
-            <p:ph type="body" idx="1"/>
-          </p:nvPr>
-        </p:nvSpPr>
-        <p:spPr/>
-        <p:txBody>
-          <a:bodyPr/>
-          <a:lstStyle/>
-          <a:p>
-            <a:endParaRPr lang="en-US" dirty="0"/>
-          </a:p>
-        </p:txBody>
-      </p:sp>
-      <p:sp>
-        <p:nvSpPr>
-          <p:cNvPr id="4" name="Slide Number Placeholder 3"/>
-          <p:cNvSpPr>
-            <a:spLocks noGrp="1"/>
-          </p:cNvSpPr>
-          <p:nvPr>
-            <p:ph type="sldNum" sz="quarter" idx="5"/>
-          </p:nvPr>
-        </p:nvSpPr>
-        <p:spPr/>
-        <p:txBody>
-          <a:bodyPr/>
-          <a:lstStyle/>
-          <a:p>
-            <a:endParaRPr lang="en-US" dirty="0"/>
-          </a:p>
-        </p:txBody>
-      </p:sp>
-    </p:spTree>
-    <p:extLst>
-      <p:ext uri="{BB962C8B-B14F-4D97-AF65-F5344CB8AC3E}">
-        <p14:creationId xmlns:p14="http://schemas.microsoft.com/office/powerpoint/2010/main" val="1681185838"/>
-      </p:ext>
-    </p:extLst>
-  </p:cSld>
-  <p:clrMapOvr>
-    <a:masterClrMapping/>
-  </p:clrMapOvr>
-</p:notes>
-</file>
-
-<file path=ppt/notesSlides/notesSlide27.xml><?xml version="1.0" encoding="utf-8"?>
-<p:notes xmlns:a="http://schemas.openxmlformats.org/drawingml/2006/main" xmlns:r="http://schemas.openxmlformats.org/officeDocument/2006/relationships" xmlns:p="http://schemas.openxmlformats.org/presentationml/2006/main">
-  <p:cSld>
-    <p:spTree>
-      <p:nvGrpSpPr>
-        <p:cNvPr id="1" name=""/>
-        <p:cNvGrpSpPr/>
-        <p:nvPr/>
-      </p:nvGrpSpPr>
-      <p:grpSpPr>
-        <a:xfrm>
-          <a:off x="0" y="0"/>
-          <a:ext cx="0" cy="0"/>
-          <a:chOff x="0" y="0"/>
-          <a:chExt cx="0" cy="0"/>
-        </a:xfrm>
-      </p:grpSpPr>
-      <p:sp>
-        <p:nvSpPr>
-          <p:cNvPr id="2" name="Slide Image Placeholder 1"/>
-          <p:cNvSpPr>
-            <a:spLocks noGrp="1" noRot="1" noChangeAspect="1"/>
-          </p:cNvSpPr>
-          <p:nvPr>
-            <p:ph type="sldImg"/>
-          </p:nvPr>
-        </p:nvSpPr>
-        <p:spPr/>
-      </p:sp>
-      <p:sp>
-        <p:nvSpPr>
-          <p:cNvPr id="3" name="Notes Placeholder 2"/>
-          <p:cNvSpPr>
-            <a:spLocks noGrp="1"/>
-          </p:cNvSpPr>
-          <p:nvPr>
-            <p:ph type="body" idx="1"/>
-          </p:nvPr>
-        </p:nvSpPr>
-        <p:spPr/>
-        <p:txBody>
-          <a:bodyPr/>
-          <a:lstStyle/>
-          <a:p>
-            <a:endParaRPr lang="en-US" dirty="0"/>
-          </a:p>
-        </p:txBody>
-      </p:sp>
-      <p:sp>
-        <p:nvSpPr>
-          <p:cNvPr id="4" name="Slide Number Placeholder 3"/>
-          <p:cNvSpPr>
-            <a:spLocks noGrp="1"/>
-          </p:cNvSpPr>
-          <p:nvPr>
-            <p:ph type="sldNum" sz="quarter" idx="5"/>
-          </p:nvPr>
-        </p:nvSpPr>
-        <p:spPr/>
-        <p:txBody>
-          <a:bodyPr/>
-          <a:lstStyle/>
-          <a:p>
-            <a:endParaRPr lang="en-US" dirty="0"/>
-          </a:p>
-        </p:txBody>
-      </p:sp>
-    </p:spTree>
-    <p:extLst>
-      <p:ext uri="{BB962C8B-B14F-4D97-AF65-F5344CB8AC3E}">
-        <p14:creationId xmlns:p14="http://schemas.microsoft.com/office/powerpoint/2010/main" val="1365910940"/>
-      </p:ext>
-    </p:extLst>
-  </p:cSld>
-  <p:clrMapOvr>
-    <a:masterClrMapping/>
-  </p:clrMapOvr>
-</p:notes>
-</file>
-
-<file path=ppt/notesSlides/notesSlide28.xml><?xml version="1.0" encoding="utf-8"?>
-<p:notes xmlns:a="http://schemas.openxmlformats.org/drawingml/2006/main" xmlns:r="http://schemas.openxmlformats.org/officeDocument/2006/relationships" xmlns:p="http://schemas.openxmlformats.org/presentationml/2006/main">
-  <p:cSld>
-    <p:spTree>
-      <p:nvGrpSpPr>
-        <p:cNvPr id="1" name=""/>
-        <p:cNvGrpSpPr/>
-        <p:nvPr/>
-      </p:nvGrpSpPr>
-      <p:grpSpPr>
-        <a:xfrm>
-          <a:off x="0" y="0"/>
-          <a:ext cx="0" cy="0"/>
-          <a:chOff x="0" y="0"/>
-          <a:chExt cx="0" cy="0"/>
-        </a:xfrm>
-      </p:grpSpPr>
-      <p:sp>
-        <p:nvSpPr>
-          <p:cNvPr id="2" name="Slide Image Placeholder 1"/>
-          <p:cNvSpPr>
-            <a:spLocks noGrp="1" noRot="1" noChangeAspect="1"/>
-          </p:cNvSpPr>
-          <p:nvPr>
-            <p:ph type="sldImg"/>
-          </p:nvPr>
-        </p:nvSpPr>
-        <p:spPr/>
-      </p:sp>
-      <p:sp>
-        <p:nvSpPr>
-          <p:cNvPr id="3" name="Notes Placeholder 2"/>
-          <p:cNvSpPr>
-            <a:spLocks noGrp="1"/>
-          </p:cNvSpPr>
-          <p:nvPr>
-            <p:ph type="body" idx="1"/>
-          </p:nvPr>
-        </p:nvSpPr>
-        <p:spPr/>
-        <p:txBody>
-          <a:bodyPr/>
-          <a:lstStyle/>
-          <a:p>
-            <a:endParaRPr lang="en-US"/>
-          </a:p>
-        </p:txBody>
-      </p:sp>
-      <p:sp>
-        <p:nvSpPr>
-          <p:cNvPr id="4" name="Slide Number Placeholder 3"/>
-          <p:cNvSpPr>
-            <a:spLocks noGrp="1"/>
-          </p:cNvSpPr>
-          <p:nvPr>
-            <p:ph type="sldNum" sz="quarter" idx="5"/>
-          </p:nvPr>
-        </p:nvSpPr>
-        <p:spPr/>
-        <p:txBody>
-          <a:bodyPr/>
-          <a:lstStyle/>
-          <a:p>
-            <a:endParaRPr lang="en-US"/>
-          </a:p>
-        </p:txBody>
-      </p:sp>
-    </p:spTree>
-    <p:extLst>
-      <p:ext uri="{BB962C8B-B14F-4D97-AF65-F5344CB8AC3E}">
-        <p14:creationId xmlns:p14="http://schemas.microsoft.com/office/powerpoint/2010/main" val="1882446152"/>
-      </p:ext>
-    </p:extLst>
-  </p:cSld>
-  <p:clrMapOvr>
-    <a:masterClrMapping/>
-  </p:clrMapOvr>
-</p:notes>
-</file>
-
-<file path=ppt/notesSlides/notesSlide29.xml><?xml version="1.0" encoding="utf-8"?>
-<p:notes xmlns:a="http://schemas.openxmlformats.org/drawingml/2006/main" xmlns:r="http://schemas.openxmlformats.org/officeDocument/2006/relationships" xmlns:p="http://schemas.openxmlformats.org/presentationml/2006/main">
-  <p:cSld>
-    <p:spTree>
-      <p:nvGrpSpPr>
-        <p:cNvPr id="1" name=""/>
-        <p:cNvGrpSpPr/>
-        <p:nvPr/>
-      </p:nvGrpSpPr>
-      <p:grpSpPr>
-        <a:xfrm>
-          <a:off x="0" y="0"/>
-          <a:ext cx="0" cy="0"/>
-          <a:chOff x="0" y="0"/>
-          <a:chExt cx="0" cy="0"/>
-        </a:xfrm>
-      </p:grpSpPr>
-      <p:sp>
-        <p:nvSpPr>
-          <p:cNvPr id="2" name="Slide Image Placeholder 1"/>
-          <p:cNvSpPr>
-            <a:spLocks noGrp="1" noRot="1" noChangeAspect="1"/>
-          </p:cNvSpPr>
-          <p:nvPr>
-            <p:ph type="sldImg"/>
-          </p:nvPr>
-        </p:nvSpPr>
-        <p:spPr/>
-      </p:sp>
-      <p:sp>
-        <p:nvSpPr>
-          <p:cNvPr id="3" name="Notes Placeholder 2"/>
-          <p:cNvSpPr>
-            <a:spLocks noGrp="1"/>
-          </p:cNvSpPr>
-          <p:nvPr>
-            <p:ph type="body" idx="1"/>
-          </p:nvPr>
-        </p:nvSpPr>
-        <p:spPr/>
-        <p:txBody>
-          <a:bodyPr/>
-          <a:lstStyle/>
-          <a:p>
-            <a:endParaRPr lang="en-US"/>
-          </a:p>
-        </p:txBody>
-      </p:sp>
-      <p:sp>
-        <p:nvSpPr>
-          <p:cNvPr id="4" name="Slide Number Placeholder 3"/>
-          <p:cNvSpPr>
-            <a:spLocks noGrp="1"/>
-          </p:cNvSpPr>
-          <p:nvPr>
-            <p:ph type="sldNum" sz="quarter" idx="5"/>
-          </p:nvPr>
-        </p:nvSpPr>
-        <p:spPr/>
-        <p:txBody>
-          <a:bodyPr/>
-          <a:lstStyle/>
-          <a:p>
-            <a:endParaRPr lang="en-US"/>
-          </a:p>
-        </p:txBody>
-      </p:sp>
-    </p:spTree>
-    <p:extLst>
-      <p:ext uri="{BB962C8B-B14F-4D97-AF65-F5344CB8AC3E}">
-        <p14:creationId xmlns:p14="http://schemas.microsoft.com/office/powerpoint/2010/main" val="4142435012"/>
-      </p:ext>
-    </p:extLst>
-  </p:cSld>
-  <p:clrMapOvr>
-    <a:masterClrMapping/>
-  </p:clrMapOvr>
-</p:notes>
-</file>
-
-<file path=ppt/notesSlides/notesSlide3.xml><?xml version="1.0" encoding="utf-8"?>
-<p:notes xmlns:a="http://schemas.openxmlformats.org/drawingml/2006/main" xmlns:r="http://schemas.openxmlformats.org/officeDocument/2006/relationships" xmlns:p="http://schemas.openxmlformats.org/presentationml/2006/main">
-  <p:cSld>
-    <p:spTree>
-      <p:nvGrpSpPr>
-        <p:cNvPr id="1" name=""/>
-        <p:cNvGrpSpPr/>
-        <p:nvPr/>
-      </p:nvGrpSpPr>
-      <p:grpSpPr>
-        <a:xfrm>
-          <a:off x="0" y="0"/>
-          <a:ext cx="0" cy="0"/>
-          <a:chOff x="0" y="0"/>
-          <a:chExt cx="0" cy="0"/>
-        </a:xfrm>
-      </p:grpSpPr>
-      <p:sp>
-        <p:nvSpPr>
-          <p:cNvPr id="2" name="Slide Image Placeholder 1"/>
-          <p:cNvSpPr>
-            <a:spLocks noGrp="1" noRot="1" noChangeAspect="1"/>
-          </p:cNvSpPr>
-          <p:nvPr>
-            <p:ph type="sldImg"/>
-          </p:nvPr>
-        </p:nvSpPr>
-        <p:spPr/>
-      </p:sp>
-      <p:sp>
-        <p:nvSpPr>
-          <p:cNvPr id="3" name="Notes Placeholder 2"/>
-          <p:cNvSpPr>
-            <a:spLocks noGrp="1"/>
-          </p:cNvSpPr>
-          <p:nvPr>
-            <p:ph type="body" idx="1"/>
-          </p:nvPr>
-        </p:nvSpPr>
-        <p:spPr/>
-        <p:txBody>
-          <a:bodyPr/>
-          <a:lstStyle/>
-          <a:p>
-            <a:endParaRPr lang="en-US" dirty="0"/>
-          </a:p>
-        </p:txBody>
-      </p:sp>
-      <p:sp>
-        <p:nvSpPr>
-          <p:cNvPr id="4" name="Slide Number Placeholder 3"/>
-          <p:cNvSpPr>
-            <a:spLocks noGrp="1"/>
-          </p:cNvSpPr>
-          <p:nvPr>
-            <p:ph type="sldNum" sz="quarter" idx="5"/>
-          </p:nvPr>
-        </p:nvSpPr>
-        <p:spPr/>
-        <p:txBody>
-          <a:bodyPr/>
-          <a:lstStyle/>
-          <a:p>
-            <a:endParaRPr lang="en-US" dirty="0"/>
-          </a:p>
-        </p:txBody>
-      </p:sp>
-    </p:spTree>
-    <p:extLst>
-      <p:ext uri="{BB962C8B-B14F-4D97-AF65-F5344CB8AC3E}">
-        <p14:creationId xmlns:p14="http://schemas.microsoft.com/office/powerpoint/2010/main" val="1709614520"/>
-      </p:ext>
-    </p:extLst>
-  </p:cSld>
-  <p:clrMapOvr>
-    <a:masterClrMapping/>
-  </p:clrMapOvr>
-</p:notes>
-</file>
-
-<file path=ppt/notesSlides/notesSlide30.xml><?xml version="1.0" encoding="utf-8"?>
-<p:notes xmlns:a="http://schemas.openxmlformats.org/drawingml/2006/main" xmlns:r="http://schemas.openxmlformats.org/officeDocument/2006/relationships" xmlns:p="http://schemas.openxmlformats.org/presentationml/2006/main">
-  <p:cSld>
-    <p:spTree>
-      <p:nvGrpSpPr>
-        <p:cNvPr id="1" name=""/>
-        <p:cNvGrpSpPr/>
-        <p:nvPr/>
-      </p:nvGrpSpPr>
-      <p:grpSpPr>
-        <a:xfrm>
-          <a:off x="0" y="0"/>
-          <a:ext cx="0" cy="0"/>
-          <a:chOff x="0" y="0"/>
-          <a:chExt cx="0" cy="0"/>
-        </a:xfrm>
-      </p:grpSpPr>
-      <p:sp>
-        <p:nvSpPr>
-          <p:cNvPr id="2" name="Slide Image Placeholder 1"/>
-          <p:cNvSpPr>
-            <a:spLocks noGrp="1" noRot="1" noChangeAspect="1"/>
-          </p:cNvSpPr>
-          <p:nvPr>
-            <p:ph type="sldImg"/>
-          </p:nvPr>
-        </p:nvSpPr>
-        <p:spPr/>
-      </p:sp>
-      <p:sp>
-        <p:nvSpPr>
-          <p:cNvPr id="3" name="Notes Placeholder 2"/>
-          <p:cNvSpPr>
-            <a:spLocks noGrp="1"/>
-          </p:cNvSpPr>
-          <p:nvPr>
-            <p:ph type="body" idx="1"/>
-          </p:nvPr>
-        </p:nvSpPr>
-        <p:spPr/>
-        <p:txBody>
-          <a:bodyPr/>
-          <a:lstStyle/>
-          <a:p>
-            <a:endParaRPr lang="en-US"/>
-          </a:p>
-        </p:txBody>
-      </p:sp>
-      <p:sp>
-        <p:nvSpPr>
-          <p:cNvPr id="4" name="Slide Number Placeholder 3"/>
-          <p:cNvSpPr>
-            <a:spLocks noGrp="1"/>
-          </p:cNvSpPr>
-          <p:nvPr>
-            <p:ph type="sldNum" sz="quarter" idx="5"/>
-          </p:nvPr>
-        </p:nvSpPr>
-        <p:spPr/>
-        <p:txBody>
-          <a:bodyPr/>
-          <a:lstStyle/>
-          <a:p>
-            <a:endParaRPr lang="en-US"/>
-          </a:p>
-        </p:txBody>
-      </p:sp>
-    </p:spTree>
-    <p:extLst>
-      <p:ext uri="{BB962C8B-B14F-4D97-AF65-F5344CB8AC3E}">
-        <p14:creationId xmlns:p14="http://schemas.microsoft.com/office/powerpoint/2010/main" val="3606389848"/>
-      </p:ext>
-    </p:extLst>
-  </p:cSld>
-  <p:clrMapOvr>
-    <a:masterClrMapping/>
-  </p:clrMapOvr>
-</p:notes>
-</file>
-
-<file path=ppt/notesSlides/notesSlide31.xml><?xml version="1.0" encoding="utf-8"?>
-<p:notes xmlns:a="http://schemas.openxmlformats.org/drawingml/2006/main" xmlns:r="http://schemas.openxmlformats.org/officeDocument/2006/relationships" xmlns:p="http://schemas.openxmlformats.org/presentationml/2006/main">
-  <p:cSld>
-    <p:spTree>
-      <p:nvGrpSpPr>
-        <p:cNvPr id="1" name=""/>
-        <p:cNvGrpSpPr/>
-        <p:nvPr/>
-      </p:nvGrpSpPr>
-      <p:grpSpPr>
-        <a:xfrm>
-          <a:off x="0" y="0"/>
-          <a:ext cx="0" cy="0"/>
-          <a:chOff x="0" y="0"/>
-          <a:chExt cx="0" cy="0"/>
-        </a:xfrm>
-      </p:grpSpPr>
-      <p:sp>
-        <p:nvSpPr>
-          <p:cNvPr id="2" name="Slide Image Placeholder 1"/>
-          <p:cNvSpPr>
-            <a:spLocks noGrp="1" noRot="1" noChangeAspect="1"/>
-          </p:cNvSpPr>
-          <p:nvPr>
-            <p:ph type="sldImg"/>
-          </p:nvPr>
-        </p:nvSpPr>
-        <p:spPr/>
-      </p:sp>
-      <p:sp>
-        <p:nvSpPr>
-          <p:cNvPr id="3" name="Notes Placeholder 2"/>
-          <p:cNvSpPr>
-            <a:spLocks noGrp="1"/>
-          </p:cNvSpPr>
-          <p:nvPr>
-            <p:ph type="body" idx="1"/>
-          </p:nvPr>
-        </p:nvSpPr>
-        <p:spPr/>
-        <p:txBody>
-          <a:bodyPr/>
-          <a:lstStyle/>
-          <a:p>
-            <a:endParaRPr lang="en-US" dirty="0"/>
-          </a:p>
-        </p:txBody>
-      </p:sp>
-      <p:sp>
-        <p:nvSpPr>
-          <p:cNvPr id="4" name="Slide Number Placeholder 3"/>
-          <p:cNvSpPr>
-            <a:spLocks noGrp="1"/>
-          </p:cNvSpPr>
-          <p:nvPr>
-            <p:ph type="sldNum" sz="quarter" idx="10"/>
-          </p:nvPr>
-        </p:nvSpPr>
-        <p:spPr/>
-        <p:txBody>
-          <a:bodyPr/>
-          <a:lstStyle/>
-          <a:p>
-            <a:fld id="{EEBB2FDE-2E55-4B3D-B7EA-09D0CC108070}" type="slidenum">
-              <a:rPr lang="en-US" smtClean="0"/>
-              <a:t>31</a:t>
-            </a:fld>
-            <a:endParaRPr lang="en-US" dirty="0"/>
-          </a:p>
-        </p:txBody>
-      </p:sp>
-    </p:spTree>
-    <p:extLst>
-      <p:ext uri="{BB962C8B-B14F-4D97-AF65-F5344CB8AC3E}">
-        <p14:creationId xmlns:p14="http://schemas.microsoft.com/office/powerpoint/2010/main" val="1543309411"/>
-      </p:ext>
-    </p:extLst>
-  </p:cSld>
-  <p:clrMapOvr>
-    <a:masterClrMapping/>
-  </p:clrMapOvr>
-</p:notes>
-</file>
-
-<file path=ppt/notesSlides/notesSlide32.xml><?xml version="1.0" encoding="utf-8"?>
-<p:notes xmlns:a="http://schemas.openxmlformats.org/drawingml/2006/main" xmlns:r="http://schemas.openxmlformats.org/officeDocument/2006/relationships" xmlns:p="http://schemas.openxmlformats.org/presentationml/2006/main">
-  <p:cSld>
-    <p:spTree>
-      <p:nvGrpSpPr>
-        <p:cNvPr id="1" name=""/>
-        <p:cNvGrpSpPr/>
-        <p:nvPr/>
-      </p:nvGrpSpPr>
-      <p:grpSpPr>
-        <a:xfrm>
-          <a:off x="0" y="0"/>
-          <a:ext cx="0" cy="0"/>
-          <a:chOff x="0" y="0"/>
-          <a:chExt cx="0" cy="0"/>
-        </a:xfrm>
-      </p:grpSpPr>
-      <p:sp>
-        <p:nvSpPr>
-          <p:cNvPr id="2" name="Slide Image Placeholder 1"/>
-          <p:cNvSpPr>
-            <a:spLocks noGrp="1" noRot="1" noChangeAspect="1"/>
-          </p:cNvSpPr>
-          <p:nvPr>
-            <p:ph type="sldImg"/>
-          </p:nvPr>
-        </p:nvSpPr>
-        <p:spPr/>
-      </p:sp>
-      <p:sp>
-        <p:nvSpPr>
-          <p:cNvPr id="3" name="Notes Placeholder 2"/>
-          <p:cNvSpPr>
-            <a:spLocks noGrp="1"/>
-          </p:cNvSpPr>
-          <p:nvPr>
-            <p:ph type="body" idx="1"/>
-          </p:nvPr>
-        </p:nvSpPr>
-        <p:spPr/>
-        <p:txBody>
-          <a:bodyPr/>
-          <a:lstStyle/>
-          <a:p>
-            <a:endParaRPr lang="en-US" dirty="0"/>
-          </a:p>
-        </p:txBody>
-      </p:sp>
-      <p:sp>
-        <p:nvSpPr>
-          <p:cNvPr id="4" name="Slide Number Placeholder 3"/>
-          <p:cNvSpPr>
-            <a:spLocks noGrp="1"/>
-          </p:cNvSpPr>
-          <p:nvPr>
-            <p:ph type="sldNum" sz="quarter" idx="10"/>
-          </p:nvPr>
-        </p:nvSpPr>
-        <p:spPr/>
-        <p:txBody>
-          <a:bodyPr/>
-          <a:lstStyle/>
-          <a:p>
-            <a:fld id="{EEBB2FDE-2E55-4B3D-B7EA-09D0CC108070}" type="slidenum">
-              <a:rPr lang="en-US" smtClean="0"/>
-              <a:t>32</a:t>
-            </a:fld>
-            <a:endParaRPr lang="en-US" dirty="0"/>
-          </a:p>
-        </p:txBody>
-      </p:sp>
-    </p:spTree>
-    <p:extLst>
-      <p:ext uri="{BB962C8B-B14F-4D97-AF65-F5344CB8AC3E}">
-        <p14:creationId xmlns:p14="http://schemas.microsoft.com/office/powerpoint/2010/main" val="224503001"/>
-      </p:ext>
-    </p:extLst>
-  </p:cSld>
-  <p:clrMapOvr>
-    <a:masterClrMapping/>
-  </p:clrMapOvr>
-</p:notes>
-</file>
-
-<file path=ppt/notesSlides/notesSlide33.xml><?xml version="1.0" encoding="utf-8"?>
-<p:notes xmlns:a="http://schemas.openxmlformats.org/drawingml/2006/main" xmlns:r="http://schemas.openxmlformats.org/officeDocument/2006/relationships" xmlns:p="http://schemas.openxmlformats.org/presentationml/2006/main">
-  <p:cSld>
-    <p:spTree>
-      <p:nvGrpSpPr>
-        <p:cNvPr id="1" name=""/>
-        <p:cNvGrpSpPr/>
-        <p:nvPr/>
-      </p:nvGrpSpPr>
-      <p:grpSpPr>
-        <a:xfrm>
-          <a:off x="0" y="0"/>
-          <a:ext cx="0" cy="0"/>
-          <a:chOff x="0" y="0"/>
-          <a:chExt cx="0" cy="0"/>
-        </a:xfrm>
-      </p:grpSpPr>
-      <p:sp>
-        <p:nvSpPr>
-          <p:cNvPr id="2" name="Slide Image Placeholder 1"/>
-          <p:cNvSpPr>
-            <a:spLocks noGrp="1" noRot="1" noChangeAspect="1"/>
-          </p:cNvSpPr>
-          <p:nvPr>
-            <p:ph type="sldImg"/>
-          </p:nvPr>
-        </p:nvSpPr>
-        <p:spPr/>
-      </p:sp>
-      <p:sp>
-        <p:nvSpPr>
-          <p:cNvPr id="3" name="Notes Placeholder 2"/>
-          <p:cNvSpPr>
-            <a:spLocks noGrp="1"/>
-          </p:cNvSpPr>
-          <p:nvPr>
-            <p:ph type="body" idx="1"/>
-          </p:nvPr>
-        </p:nvSpPr>
-        <p:spPr/>
-        <p:txBody>
-          <a:bodyPr/>
-          <a:lstStyle/>
-          <a:p>
-            <a:endParaRPr lang="en-US"/>
-          </a:p>
-        </p:txBody>
-      </p:sp>
-      <p:sp>
-        <p:nvSpPr>
-          <p:cNvPr id="4" name="Slide Number Placeholder 3"/>
-          <p:cNvSpPr>
-            <a:spLocks noGrp="1"/>
-          </p:cNvSpPr>
-          <p:nvPr>
-            <p:ph type="sldNum" sz="quarter" idx="5"/>
-          </p:nvPr>
-        </p:nvSpPr>
-        <p:spPr/>
-        <p:txBody>
-          <a:bodyPr/>
-          <a:lstStyle/>
-          <a:p>
-            <a:endParaRPr lang="en-US"/>
-          </a:p>
-        </p:txBody>
-      </p:sp>
-    </p:spTree>
-    <p:extLst>
-      <p:ext uri="{BB962C8B-B14F-4D97-AF65-F5344CB8AC3E}">
-        <p14:creationId xmlns:p14="http://schemas.microsoft.com/office/powerpoint/2010/main" val="2864011389"/>
-      </p:ext>
-    </p:extLst>
-  </p:cSld>
-  <p:clrMapOvr>
-    <a:masterClrMapping/>
-  </p:clrMapOvr>
-</p:notes>
-</file>
-
-<file path=ppt/notesSlides/notesSlide34.xml><?xml version="1.0" encoding="utf-8"?>
-<p:notes xmlns:a="http://schemas.openxmlformats.org/drawingml/2006/main" xmlns:r="http://schemas.openxmlformats.org/officeDocument/2006/relationships" xmlns:p="http://schemas.openxmlformats.org/presentationml/2006/main">
-  <p:cSld>
-    <p:spTree>
-      <p:nvGrpSpPr>
-        <p:cNvPr id="1" name=""/>
-        <p:cNvGrpSpPr/>
-        <p:nvPr/>
-      </p:nvGrpSpPr>
-      <p:grpSpPr>
-        <a:xfrm>
-          <a:off x="0" y="0"/>
-          <a:ext cx="0" cy="0"/>
-          <a:chOff x="0" y="0"/>
-          <a:chExt cx="0" cy="0"/>
-        </a:xfrm>
-      </p:grpSpPr>
-      <p:sp>
-        <p:nvSpPr>
-          <p:cNvPr id="2" name="Slide Image Placeholder 1"/>
-          <p:cNvSpPr>
-            <a:spLocks noGrp="1" noRot="1" noChangeAspect="1"/>
-          </p:cNvSpPr>
-          <p:nvPr>
-            <p:ph type="sldImg"/>
-          </p:nvPr>
-        </p:nvSpPr>
-        <p:spPr/>
-      </p:sp>
-      <p:sp>
-        <p:nvSpPr>
-          <p:cNvPr id="3" name="Notes Placeholder 2"/>
-          <p:cNvSpPr>
-            <a:spLocks noGrp="1"/>
-          </p:cNvSpPr>
-          <p:nvPr>
-            <p:ph type="body" idx="1"/>
-          </p:nvPr>
-        </p:nvSpPr>
-        <p:spPr/>
-        <p:txBody>
-          <a:bodyPr/>
-          <a:lstStyle/>
-          <a:p>
-            <a:endParaRPr lang="en-US" dirty="0"/>
-          </a:p>
-        </p:txBody>
-      </p:sp>
-      <p:sp>
-        <p:nvSpPr>
-          <p:cNvPr id="4" name="Slide Number Placeholder 3"/>
-          <p:cNvSpPr>
-            <a:spLocks noGrp="1"/>
-          </p:cNvSpPr>
-          <p:nvPr>
-            <p:ph type="sldNum" sz="quarter" idx="10"/>
-          </p:nvPr>
-        </p:nvSpPr>
-        <p:spPr/>
-        <p:txBody>
-          <a:bodyPr/>
-          <a:lstStyle/>
-          <a:p>
-            <a:fld id="{EEBB2FDE-2E55-4B3D-B7EA-09D0CC108070}" type="slidenum">
-              <a:rPr lang="en-US" smtClean="0"/>
-              <a:t>34</a:t>
-            </a:fld>
-            <a:endParaRPr lang="en-US" dirty="0"/>
-          </a:p>
-        </p:txBody>
-      </p:sp>
-    </p:spTree>
-    <p:extLst>
-      <p:ext uri="{BB962C8B-B14F-4D97-AF65-F5344CB8AC3E}">
-        <p14:creationId xmlns:p14="http://schemas.microsoft.com/office/powerpoint/2010/main" val="3862682959"/>
-      </p:ext>
-    </p:extLst>
-  </p:cSld>
-  <p:clrMapOvr>
-    <a:masterClrMapping/>
-  </p:clrMapOvr>
-</p:notes>
-</file>
-
-<file path=ppt/notesSlides/notesSlide35.xml><?xml version="1.0" encoding="utf-8"?>
-<p:notes xmlns:a="http://schemas.openxmlformats.org/drawingml/2006/main" xmlns:r="http://schemas.openxmlformats.org/officeDocument/2006/relationships" xmlns:p="http://schemas.openxmlformats.org/presentationml/2006/main">
-  <p:cSld>
-    <p:spTree>
-      <p:nvGrpSpPr>
-        <p:cNvPr id="1" name=""/>
-        <p:cNvGrpSpPr/>
-        <p:nvPr/>
-      </p:nvGrpSpPr>
-      <p:grpSpPr>
-        <a:xfrm>
-          <a:off x="0" y="0"/>
-          <a:ext cx="0" cy="0"/>
-          <a:chOff x="0" y="0"/>
-          <a:chExt cx="0" cy="0"/>
-        </a:xfrm>
-      </p:grpSpPr>
-      <p:sp>
-        <p:nvSpPr>
-          <p:cNvPr id="2" name="Slide Image Placeholder 1"/>
-          <p:cNvSpPr>
-            <a:spLocks noGrp="1" noRot="1" noChangeAspect="1"/>
-          </p:cNvSpPr>
-          <p:nvPr>
-            <p:ph type="sldImg"/>
-          </p:nvPr>
-        </p:nvSpPr>
-        <p:spPr/>
-      </p:sp>
-      <p:sp>
-        <p:nvSpPr>
-          <p:cNvPr id="3" name="Notes Placeholder 2"/>
-          <p:cNvSpPr>
-            <a:spLocks noGrp="1"/>
-          </p:cNvSpPr>
-          <p:nvPr>
-            <p:ph type="body" idx="1"/>
-          </p:nvPr>
-        </p:nvSpPr>
-        <p:spPr/>
-        <p:txBody>
-          <a:bodyPr/>
-          <a:lstStyle/>
-          <a:p>
-            <a:endParaRPr lang="en-US"/>
-          </a:p>
-        </p:txBody>
-      </p:sp>
-      <p:sp>
-        <p:nvSpPr>
-          <p:cNvPr id="4" name="Slide Number Placeholder 3"/>
-          <p:cNvSpPr>
-            <a:spLocks noGrp="1"/>
-          </p:cNvSpPr>
-          <p:nvPr>
-            <p:ph type="sldNum" sz="quarter" idx="5"/>
-          </p:nvPr>
-        </p:nvSpPr>
-        <p:spPr/>
-        <p:txBody>
-          <a:bodyPr/>
-          <a:lstStyle/>
-          <a:p>
-            <a:endParaRPr lang="en-US"/>
-          </a:p>
-        </p:txBody>
-      </p:sp>
-    </p:spTree>
-    <p:extLst>
-      <p:ext uri="{BB962C8B-B14F-4D97-AF65-F5344CB8AC3E}">
-        <p14:creationId xmlns:p14="http://schemas.microsoft.com/office/powerpoint/2010/main" val="475015397"/>
-      </p:ext>
-    </p:extLst>
-  </p:cSld>
-  <p:clrMapOvr>
-    <a:masterClrMapping/>
-  </p:clrMapOvr>
-</p:notes>
-</file>
-
-<file path=ppt/notesSlides/notesSlide36.xml><?xml version="1.0" encoding="utf-8"?>
-<p:notes xmlns:a="http://schemas.openxmlformats.org/drawingml/2006/main" xmlns:r="http://schemas.openxmlformats.org/officeDocument/2006/relationships" xmlns:p="http://schemas.openxmlformats.org/presentationml/2006/main">
-  <p:cSld>
-    <p:spTree>
-      <p:nvGrpSpPr>
-        <p:cNvPr id="1" name=""/>
-        <p:cNvGrpSpPr/>
-        <p:nvPr/>
-      </p:nvGrpSpPr>
-      <p:grpSpPr>
-        <a:xfrm>
-          <a:off x="0" y="0"/>
-          <a:ext cx="0" cy="0"/>
-          <a:chOff x="0" y="0"/>
-          <a:chExt cx="0" cy="0"/>
-        </a:xfrm>
-      </p:grpSpPr>
-      <p:sp>
-        <p:nvSpPr>
-          <p:cNvPr id="2" name="Slide Image Placeholder 1"/>
-          <p:cNvSpPr>
-            <a:spLocks noGrp="1" noRot="1" noChangeAspect="1"/>
-          </p:cNvSpPr>
-          <p:nvPr>
-            <p:ph type="sldImg"/>
-          </p:nvPr>
-        </p:nvSpPr>
-        <p:spPr/>
-      </p:sp>
-      <p:sp>
-        <p:nvSpPr>
-          <p:cNvPr id="3" name="Notes Placeholder 2"/>
-          <p:cNvSpPr>
-            <a:spLocks noGrp="1"/>
-          </p:cNvSpPr>
-          <p:nvPr>
-            <p:ph type="body" idx="1"/>
-          </p:nvPr>
-        </p:nvSpPr>
-        <p:spPr/>
-        <p:txBody>
-          <a:bodyPr/>
-          <a:lstStyle/>
-          <a:p>
-            <a:endParaRPr lang="en-US" dirty="0"/>
-          </a:p>
-        </p:txBody>
-      </p:sp>
-      <p:sp>
-        <p:nvSpPr>
-          <p:cNvPr id="4" name="Slide Number Placeholder 3"/>
-          <p:cNvSpPr>
-            <a:spLocks noGrp="1"/>
-          </p:cNvSpPr>
-          <p:nvPr>
-            <p:ph type="sldNum" sz="quarter" idx="10"/>
-          </p:nvPr>
-        </p:nvSpPr>
-        <p:spPr/>
-        <p:txBody>
-          <a:bodyPr/>
-          <a:lstStyle/>
-          <a:p>
-            <a:fld id="{EEBB2FDE-2E55-4B3D-B7EA-09D0CC108070}" type="slidenum">
-              <a:rPr lang="en-US" smtClean="0"/>
-              <a:t>36</a:t>
-            </a:fld>
-            <a:endParaRPr lang="en-US" dirty="0"/>
-          </a:p>
-        </p:txBody>
-      </p:sp>
-    </p:spTree>
-    <p:extLst>
-      <p:ext uri="{BB962C8B-B14F-4D97-AF65-F5344CB8AC3E}">
-        <p14:creationId xmlns:p14="http://schemas.microsoft.com/office/powerpoint/2010/main" val="3568688516"/>
-      </p:ext>
-    </p:extLst>
-  </p:cSld>
-  <p:clrMapOvr>
-    <a:masterClrMapping/>
-  </p:clrMapOvr>
-</p:notes>
-</file>
-
-<file path=ppt/notesSlides/notesSlide37.xml><?xml version="1.0" encoding="utf-8"?>
-<p:notes xmlns:a="http://schemas.openxmlformats.org/drawingml/2006/main" xmlns:r="http://schemas.openxmlformats.org/officeDocument/2006/relationships" xmlns:p="http://schemas.openxmlformats.org/presentationml/2006/main">
-  <p:cSld>
-    <p:spTree>
-      <p:nvGrpSpPr>
-        <p:cNvPr id="1" name=""/>
-        <p:cNvGrpSpPr/>
-        <p:nvPr/>
-      </p:nvGrpSpPr>
-      <p:grpSpPr>
-        <a:xfrm>
-          <a:off x="0" y="0"/>
-          <a:ext cx="0" cy="0"/>
-          <a:chOff x="0" y="0"/>
-          <a:chExt cx="0" cy="0"/>
-        </a:xfrm>
-      </p:grpSpPr>
-      <p:sp>
-        <p:nvSpPr>
-          <p:cNvPr id="2" name="Slide Image Placeholder 1"/>
-          <p:cNvSpPr>
-            <a:spLocks noGrp="1" noRot="1" noChangeAspect="1"/>
-          </p:cNvSpPr>
-          <p:nvPr>
-            <p:ph type="sldImg"/>
-          </p:nvPr>
-        </p:nvSpPr>
-        <p:spPr/>
-      </p:sp>
-      <p:sp>
-        <p:nvSpPr>
-          <p:cNvPr id="3" name="Notes Placeholder 2"/>
-          <p:cNvSpPr>
-            <a:spLocks noGrp="1"/>
-          </p:cNvSpPr>
-          <p:nvPr>
-            <p:ph type="body" idx="1"/>
-          </p:nvPr>
-        </p:nvSpPr>
-        <p:spPr/>
-        <p:txBody>
-          <a:bodyPr/>
-          <a:lstStyle/>
-          <a:p>
-            <a:endParaRPr lang="en-US" dirty="0"/>
-          </a:p>
-        </p:txBody>
-      </p:sp>
-      <p:sp>
-        <p:nvSpPr>
-          <p:cNvPr id="4" name="Slide Number Placeholder 3"/>
-          <p:cNvSpPr>
-            <a:spLocks noGrp="1"/>
-          </p:cNvSpPr>
-          <p:nvPr>
-            <p:ph type="sldNum" sz="quarter" idx="10"/>
-          </p:nvPr>
-        </p:nvSpPr>
-        <p:spPr/>
-        <p:txBody>
-          <a:bodyPr/>
-          <a:lstStyle/>
-          <a:p>
-            <a:fld id="{EEBB2FDE-2E55-4B3D-B7EA-09D0CC108070}" type="slidenum">
-              <a:rPr lang="en-US" smtClean="0"/>
-              <a:t>37</a:t>
-            </a:fld>
-            <a:endParaRPr lang="en-US" dirty="0"/>
-          </a:p>
-        </p:txBody>
-      </p:sp>
-    </p:spTree>
-    <p:extLst>
-      <p:ext uri="{BB962C8B-B14F-4D97-AF65-F5344CB8AC3E}">
-        <p14:creationId xmlns:p14="http://schemas.microsoft.com/office/powerpoint/2010/main" val="658999283"/>
-      </p:ext>
-    </p:extLst>
-  </p:cSld>
-  <p:clrMapOvr>
-    <a:masterClrMapping/>
-  </p:clrMapOvr>
-</p:notes>
-</file>
-
-<file path=ppt/notesSlides/notesSlide38.xml><?xml version="1.0" encoding="utf-8"?>
-<p:notes xmlns:a="http://schemas.openxmlformats.org/drawingml/2006/main" xmlns:r="http://schemas.openxmlformats.org/officeDocument/2006/relationships" xmlns:p="http://schemas.openxmlformats.org/presentationml/2006/main">
-  <p:cSld>
-    <p:spTree>
-      <p:nvGrpSpPr>
-        <p:cNvPr id="1" name=""/>
-        <p:cNvGrpSpPr/>
-        <p:nvPr/>
-      </p:nvGrpSpPr>
-      <p:grpSpPr>
-        <a:xfrm>
-          <a:off x="0" y="0"/>
-          <a:ext cx="0" cy="0"/>
-          <a:chOff x="0" y="0"/>
-          <a:chExt cx="0" cy="0"/>
-        </a:xfrm>
-      </p:grpSpPr>
-      <p:sp>
-        <p:nvSpPr>
-          <p:cNvPr id="2" name="Slide Image Placeholder 1"/>
-          <p:cNvSpPr>
-            <a:spLocks noGrp="1" noRot="1" noChangeAspect="1"/>
-          </p:cNvSpPr>
-          <p:nvPr>
-            <p:ph type="sldImg"/>
-          </p:nvPr>
-        </p:nvSpPr>
-        <p:spPr/>
-      </p:sp>
-      <p:sp>
-        <p:nvSpPr>
-          <p:cNvPr id="3" name="Notes Placeholder 2"/>
-          <p:cNvSpPr>
-            <a:spLocks noGrp="1"/>
-          </p:cNvSpPr>
-          <p:nvPr>
-            <p:ph type="body" idx="1"/>
-          </p:nvPr>
-        </p:nvSpPr>
-        <p:spPr/>
-        <p:txBody>
-          <a:bodyPr/>
-          <a:lstStyle/>
-          <a:p>
-            <a:endParaRPr lang="en-US"/>
-          </a:p>
-        </p:txBody>
-      </p:sp>
-      <p:sp>
-        <p:nvSpPr>
-          <p:cNvPr id="4" name="Slide Number Placeholder 3"/>
-          <p:cNvSpPr>
-            <a:spLocks noGrp="1"/>
-          </p:cNvSpPr>
-          <p:nvPr>
-            <p:ph type="sldNum" sz="quarter" idx="5"/>
-          </p:nvPr>
-        </p:nvSpPr>
-        <p:spPr/>
-        <p:txBody>
-          <a:bodyPr/>
-          <a:lstStyle/>
-          <a:p>
-            <a:endParaRPr lang="en-US"/>
-          </a:p>
-        </p:txBody>
-      </p:sp>
-    </p:spTree>
-    <p:extLst>
-      <p:ext uri="{BB962C8B-B14F-4D97-AF65-F5344CB8AC3E}">
-        <p14:creationId xmlns:p14="http://schemas.microsoft.com/office/powerpoint/2010/main" val="2992770927"/>
-      </p:ext>
-    </p:extLst>
-  </p:cSld>
-  <p:clrMapOvr>
-    <a:masterClrMapping/>
-  </p:clrMapOvr>
-</p:notes>
-</file>
-
-<file path=ppt/notesSlides/notesSlide39.xml><?xml version="1.0" encoding="utf-8"?>
-<p:notes xmlns:a="http://schemas.openxmlformats.org/drawingml/2006/main" xmlns:r="http://schemas.openxmlformats.org/officeDocument/2006/relationships" xmlns:p="http://schemas.openxmlformats.org/presentationml/2006/main">
-  <p:cSld>
-    <p:spTree>
-      <p:nvGrpSpPr>
-        <p:cNvPr id="1" name=""/>
-        <p:cNvGrpSpPr/>
-        <p:nvPr/>
-      </p:nvGrpSpPr>
-      <p:grpSpPr>
-        <a:xfrm>
-          <a:off x="0" y="0"/>
-          <a:ext cx="0" cy="0"/>
-          <a:chOff x="0" y="0"/>
-          <a:chExt cx="0" cy="0"/>
-        </a:xfrm>
-      </p:grpSpPr>
-      <p:sp>
-        <p:nvSpPr>
-          <p:cNvPr id="2" name="Slide Image Placeholder 1"/>
-          <p:cNvSpPr>
-            <a:spLocks noGrp="1" noRot="1" noChangeAspect="1"/>
-          </p:cNvSpPr>
-          <p:nvPr>
-            <p:ph type="sldImg"/>
-          </p:nvPr>
-        </p:nvSpPr>
-        <p:spPr/>
-      </p:sp>
-      <p:sp>
-        <p:nvSpPr>
-          <p:cNvPr id="3" name="Notes Placeholder 2"/>
-          <p:cNvSpPr>
-            <a:spLocks noGrp="1"/>
-          </p:cNvSpPr>
-          <p:nvPr>
-            <p:ph type="body" idx="1"/>
-          </p:nvPr>
-        </p:nvSpPr>
-        <p:spPr/>
-        <p:txBody>
-          <a:bodyPr/>
-          <a:lstStyle/>
-          <a:p>
-            <a:endParaRPr lang="en-US" dirty="0"/>
-          </a:p>
-        </p:txBody>
-      </p:sp>
-      <p:sp>
-        <p:nvSpPr>
-          <p:cNvPr id="4" name="Slide Number Placeholder 3"/>
-          <p:cNvSpPr>
-            <a:spLocks noGrp="1"/>
-          </p:cNvSpPr>
-          <p:nvPr>
-            <p:ph type="sldNum" sz="quarter" idx="10"/>
-          </p:nvPr>
-        </p:nvSpPr>
-        <p:spPr/>
-        <p:txBody>
-          <a:bodyPr/>
-          <a:lstStyle/>
-          <a:p>
-            <a:fld id="{EEBB2FDE-2E55-4B3D-B7EA-09D0CC108070}" type="slidenum">
-              <a:rPr lang="en-US" smtClean="0"/>
-              <a:t>39</a:t>
-            </a:fld>
-            <a:endParaRPr lang="en-US" dirty="0"/>
-          </a:p>
-        </p:txBody>
-      </p:sp>
-    </p:spTree>
-    <p:extLst>
-      <p:ext uri="{BB962C8B-B14F-4D97-AF65-F5344CB8AC3E}">
-        <p14:creationId xmlns:p14="http://schemas.microsoft.com/office/powerpoint/2010/main" val="3224729461"/>
-      </p:ext>
-    </p:extLst>
-  </p:cSld>
-  <p:clrMapOvr>
-    <a:masterClrMapping/>
-  </p:clrMapOvr>
-</p:notes>
-</file>
-
-<file path=ppt/notesSlides/notesSlide4.xml><?xml version="1.0" encoding="utf-8"?>
-<p:notes xmlns:a="http://schemas.openxmlformats.org/drawingml/2006/main" xmlns:r="http://schemas.openxmlformats.org/officeDocument/2006/relationships" xmlns:p="http://schemas.openxmlformats.org/presentationml/2006/main">
-  <p:cSld>
-    <p:spTree>
-      <p:nvGrpSpPr>
-        <p:cNvPr id="1" name=""/>
-        <p:cNvGrpSpPr/>
-        <p:nvPr/>
-      </p:nvGrpSpPr>
-      <p:grpSpPr>
-        <a:xfrm>
-          <a:off x="0" y="0"/>
-          <a:ext cx="0" cy="0"/>
-          <a:chOff x="0" y="0"/>
-          <a:chExt cx="0" cy="0"/>
-        </a:xfrm>
-      </p:grpSpPr>
-      <p:sp>
-        <p:nvSpPr>
-          <p:cNvPr id="2" name="Slide Image Placeholder 1"/>
-          <p:cNvSpPr>
-            <a:spLocks noGrp="1" noRot="1" noChangeAspect="1"/>
-          </p:cNvSpPr>
-          <p:nvPr>
-            <p:ph type="sldImg"/>
-          </p:nvPr>
-        </p:nvSpPr>
-        <p:spPr/>
-      </p:sp>
-      <p:sp>
-        <p:nvSpPr>
-          <p:cNvPr id="3" name="Notes Placeholder 2"/>
-          <p:cNvSpPr>
-            <a:spLocks noGrp="1"/>
-          </p:cNvSpPr>
-          <p:nvPr>
-            <p:ph type="body" idx="1"/>
-          </p:nvPr>
-        </p:nvSpPr>
-        <p:spPr/>
-        <p:txBody>
-          <a:bodyPr/>
-          <a:lstStyle/>
-          <a:p>
-            <a:endParaRPr lang="en-US" dirty="0"/>
-          </a:p>
-        </p:txBody>
-      </p:sp>
-      <p:sp>
-        <p:nvSpPr>
-          <p:cNvPr id="4" name="Slide Number Placeholder 3"/>
-          <p:cNvSpPr>
-            <a:spLocks noGrp="1"/>
-          </p:cNvSpPr>
-          <p:nvPr>
-            <p:ph type="sldNum" sz="quarter" idx="5"/>
-          </p:nvPr>
-        </p:nvSpPr>
-        <p:spPr/>
-        <p:txBody>
-          <a:bodyPr/>
-          <a:lstStyle/>
-          <a:p>
-            <a:endParaRPr lang="en-US" dirty="0"/>
-          </a:p>
-        </p:txBody>
-      </p:sp>
-    </p:spTree>
-    <p:extLst>
-      <p:ext uri="{BB962C8B-B14F-4D97-AF65-F5344CB8AC3E}">
-        <p14:creationId xmlns:p14="http://schemas.microsoft.com/office/powerpoint/2010/main" val="2278422132"/>
-      </p:ext>
-    </p:extLst>
-  </p:cSld>
-  <p:clrMapOvr>
-    <a:masterClrMapping/>
-  </p:clrMapOvr>
-</p:notes>
-</file>
-
-<file path=ppt/notesSlides/notesSlide40.xml><?xml version="1.0" encoding="utf-8"?>
-<p:notes xmlns:a="http://schemas.openxmlformats.org/drawingml/2006/main" xmlns:r="http://schemas.openxmlformats.org/officeDocument/2006/relationships" xmlns:p="http://schemas.openxmlformats.org/presentationml/2006/main">
-  <p:cSld>
-    <p:spTree>
-      <p:nvGrpSpPr>
-        <p:cNvPr id="1" name=""/>
-        <p:cNvGrpSpPr/>
-        <p:nvPr/>
-      </p:nvGrpSpPr>
-      <p:grpSpPr>
-        <a:xfrm>
-          <a:off x="0" y="0"/>
-          <a:ext cx="0" cy="0"/>
-          <a:chOff x="0" y="0"/>
-          <a:chExt cx="0" cy="0"/>
-        </a:xfrm>
-      </p:grpSpPr>
-      <p:sp>
-        <p:nvSpPr>
-          <p:cNvPr id="2" name="Slide Image Placeholder 1"/>
-          <p:cNvSpPr>
-            <a:spLocks noGrp="1" noRot="1" noChangeAspect="1"/>
-          </p:cNvSpPr>
-          <p:nvPr>
-            <p:ph type="sldImg"/>
-          </p:nvPr>
-        </p:nvSpPr>
-        <p:spPr/>
-      </p:sp>
-      <p:sp>
-        <p:nvSpPr>
-          <p:cNvPr id="3" name="Notes Placeholder 2"/>
-          <p:cNvSpPr>
-            <a:spLocks noGrp="1"/>
-          </p:cNvSpPr>
-          <p:nvPr>
-            <p:ph type="body" idx="1"/>
-          </p:nvPr>
-        </p:nvSpPr>
-        <p:spPr/>
-        <p:txBody>
-          <a:bodyPr/>
-          <a:lstStyle/>
-          <a:p>
-            <a:endParaRPr lang="en-US"/>
-          </a:p>
-        </p:txBody>
-      </p:sp>
-      <p:sp>
-        <p:nvSpPr>
-          <p:cNvPr id="4" name="Slide Number Placeholder 3"/>
-          <p:cNvSpPr>
-            <a:spLocks noGrp="1"/>
-          </p:cNvSpPr>
-          <p:nvPr>
-            <p:ph type="sldNum" sz="quarter" idx="5"/>
-          </p:nvPr>
-        </p:nvSpPr>
-        <p:spPr/>
-        <p:txBody>
-          <a:bodyPr/>
-          <a:lstStyle/>
-          <a:p>
-            <a:endParaRPr lang="en-US"/>
-          </a:p>
-        </p:txBody>
-      </p:sp>
-    </p:spTree>
-    <p:extLst>
-      <p:ext uri="{BB962C8B-B14F-4D97-AF65-F5344CB8AC3E}">
-        <p14:creationId xmlns:p14="http://schemas.microsoft.com/office/powerpoint/2010/main" val="3536885969"/>
-      </p:ext>
-    </p:extLst>
-  </p:cSld>
-  <p:clrMapOvr>
-    <a:masterClrMapping/>
-  </p:clrMapOvr>
-</p:notes>
-</file>
-
-<file path=ppt/notesSlides/notesSlide41.xml><?xml version="1.0" encoding="utf-8"?>
-<p:notes xmlns:a="http://schemas.openxmlformats.org/drawingml/2006/main" xmlns:r="http://schemas.openxmlformats.org/officeDocument/2006/relationships" xmlns:p="http://schemas.openxmlformats.org/presentationml/2006/main">
-  <p:cSld>
-    <p:spTree>
-      <p:nvGrpSpPr>
-        <p:cNvPr id="1" name=""/>
-        <p:cNvGrpSpPr/>
-        <p:nvPr/>
-      </p:nvGrpSpPr>
-      <p:grpSpPr>
-        <a:xfrm>
-          <a:off x="0" y="0"/>
-          <a:ext cx="0" cy="0"/>
-          <a:chOff x="0" y="0"/>
-          <a:chExt cx="0" cy="0"/>
-        </a:xfrm>
-      </p:grpSpPr>
-      <p:sp>
-        <p:nvSpPr>
-          <p:cNvPr id="2" name="Slide Image Placeholder 1"/>
-          <p:cNvSpPr>
-            <a:spLocks noGrp="1" noRot="1" noChangeAspect="1"/>
-          </p:cNvSpPr>
-          <p:nvPr>
-            <p:ph type="sldImg"/>
-          </p:nvPr>
-        </p:nvSpPr>
-        <p:spPr/>
-      </p:sp>
-      <p:sp>
-        <p:nvSpPr>
-          <p:cNvPr id="3" name="Notes Placeholder 2"/>
-          <p:cNvSpPr>
-            <a:spLocks noGrp="1"/>
-          </p:cNvSpPr>
-          <p:nvPr>
-            <p:ph type="body" idx="1"/>
-          </p:nvPr>
-        </p:nvSpPr>
-        <p:spPr/>
-        <p:txBody>
-          <a:bodyPr/>
-          <a:lstStyle/>
-          <a:p>
-            <a:endParaRPr lang="en-US"/>
-          </a:p>
-        </p:txBody>
-      </p:sp>
-      <p:sp>
-        <p:nvSpPr>
-          <p:cNvPr id="4" name="Slide Number Placeholder 3"/>
-          <p:cNvSpPr>
-            <a:spLocks noGrp="1"/>
-          </p:cNvSpPr>
-          <p:nvPr>
-            <p:ph type="sldNum" sz="quarter" idx="5"/>
-          </p:nvPr>
-        </p:nvSpPr>
-        <p:spPr/>
-        <p:txBody>
-          <a:bodyPr/>
-          <a:lstStyle/>
-          <a:p>
-            <a:endParaRPr lang="en-US"/>
-          </a:p>
-        </p:txBody>
-      </p:sp>
-    </p:spTree>
-    <p:extLst>
-      <p:ext uri="{BB962C8B-B14F-4D97-AF65-F5344CB8AC3E}">
-        <p14:creationId xmlns:p14="http://schemas.microsoft.com/office/powerpoint/2010/main" val="633359610"/>
-      </p:ext>
-    </p:extLst>
-  </p:cSld>
-  <p:clrMapOvr>
-    <a:masterClrMapping/>
-  </p:clrMapOvr>
-</p:notes>
-</file>
-
-<file path=ppt/notesSlides/notesSlide42.xml><?xml version="1.0" encoding="utf-8"?>
-<p:notes xmlns:a="http://schemas.openxmlformats.org/drawingml/2006/main" xmlns:r="http://schemas.openxmlformats.org/officeDocument/2006/relationships" xmlns:p="http://schemas.openxmlformats.org/presentationml/2006/main">
-  <p:cSld>
-    <p:spTree>
-      <p:nvGrpSpPr>
-        <p:cNvPr id="1" name=""/>
-        <p:cNvGrpSpPr/>
-        <p:nvPr/>
-      </p:nvGrpSpPr>
-      <p:grpSpPr>
-        <a:xfrm>
-          <a:off x="0" y="0"/>
-          <a:ext cx="0" cy="0"/>
-          <a:chOff x="0" y="0"/>
-          <a:chExt cx="0" cy="0"/>
-        </a:xfrm>
-      </p:grpSpPr>
-      <p:sp>
-        <p:nvSpPr>
-          <p:cNvPr id="2" name="Slide Image Placeholder 1"/>
-          <p:cNvSpPr>
-            <a:spLocks noGrp="1" noRot="1" noChangeAspect="1"/>
-          </p:cNvSpPr>
-          <p:nvPr>
-            <p:ph type="sldImg"/>
-          </p:nvPr>
-        </p:nvSpPr>
-        <p:spPr/>
-      </p:sp>
-      <p:sp>
-        <p:nvSpPr>
-          <p:cNvPr id="3" name="Notes Placeholder 2"/>
-          <p:cNvSpPr>
-            <a:spLocks noGrp="1"/>
-          </p:cNvSpPr>
-          <p:nvPr>
-            <p:ph type="body" idx="1"/>
-          </p:nvPr>
-        </p:nvSpPr>
-        <p:spPr/>
-        <p:txBody>
-          <a:bodyPr/>
-          <a:lstStyle/>
-          <a:p>
-            <a:endParaRPr lang="en-US"/>
-          </a:p>
-        </p:txBody>
-      </p:sp>
-      <p:sp>
-        <p:nvSpPr>
-          <p:cNvPr id="4" name="Slide Number Placeholder 3"/>
-          <p:cNvSpPr>
-            <a:spLocks noGrp="1"/>
-          </p:cNvSpPr>
-          <p:nvPr>
-            <p:ph type="sldNum" sz="quarter" idx="5"/>
-          </p:nvPr>
-        </p:nvSpPr>
-        <p:spPr/>
-        <p:txBody>
-          <a:bodyPr/>
-          <a:lstStyle/>
-          <a:p>
-            <a:endParaRPr lang="en-US"/>
-          </a:p>
-        </p:txBody>
-      </p:sp>
-    </p:spTree>
-    <p:extLst>
-      <p:ext uri="{BB962C8B-B14F-4D97-AF65-F5344CB8AC3E}">
-        <p14:creationId xmlns:p14="http://schemas.microsoft.com/office/powerpoint/2010/main" val="3024552403"/>
-      </p:ext>
-    </p:extLst>
-  </p:cSld>
-  <p:clrMapOvr>
-    <a:masterClrMapping/>
-  </p:clrMapOvr>
-</p:notes>
-</file>
-
-<file path=ppt/notesSlides/notesSlide43.xml><?xml version="1.0" encoding="utf-8"?>
-<p:notes xmlns:a="http://schemas.openxmlformats.org/drawingml/2006/main" xmlns:r="http://schemas.openxmlformats.org/officeDocument/2006/relationships" xmlns:p="http://schemas.openxmlformats.org/presentationml/2006/main">
-  <p:cSld>
-    <p:spTree>
-      <p:nvGrpSpPr>
-        <p:cNvPr id="1" name=""/>
-        <p:cNvGrpSpPr/>
-        <p:nvPr/>
-      </p:nvGrpSpPr>
-      <p:grpSpPr>
-        <a:xfrm>
-          <a:off x="0" y="0"/>
-          <a:ext cx="0" cy="0"/>
-          <a:chOff x="0" y="0"/>
-          <a:chExt cx="0" cy="0"/>
-        </a:xfrm>
-      </p:grpSpPr>
-      <p:sp>
-        <p:nvSpPr>
-          <p:cNvPr id="2" name="Slide Image Placeholder 1"/>
-          <p:cNvSpPr>
-            <a:spLocks noGrp="1" noRot="1" noChangeAspect="1"/>
-          </p:cNvSpPr>
-          <p:nvPr>
-            <p:ph type="sldImg"/>
-          </p:nvPr>
-        </p:nvSpPr>
-        <p:spPr/>
-      </p:sp>
-      <p:sp>
-        <p:nvSpPr>
-          <p:cNvPr id="3" name="Notes Placeholder 2"/>
-          <p:cNvSpPr>
-            <a:spLocks noGrp="1"/>
-          </p:cNvSpPr>
-          <p:nvPr>
-            <p:ph type="body" idx="1"/>
-          </p:nvPr>
-        </p:nvSpPr>
-        <p:spPr/>
-        <p:txBody>
-          <a:bodyPr/>
-          <a:lstStyle/>
-          <a:p>
-            <a:endParaRPr lang="en-US"/>
-          </a:p>
-        </p:txBody>
-      </p:sp>
-      <p:sp>
-        <p:nvSpPr>
-          <p:cNvPr id="4" name="Slide Number Placeholder 3"/>
-          <p:cNvSpPr>
-            <a:spLocks noGrp="1"/>
-          </p:cNvSpPr>
-          <p:nvPr>
-            <p:ph type="sldNum" sz="quarter" idx="5"/>
-          </p:nvPr>
-        </p:nvSpPr>
-        <p:spPr/>
-        <p:txBody>
-          <a:bodyPr/>
-          <a:lstStyle/>
-          <a:p>
-            <a:endParaRPr lang="en-US"/>
-          </a:p>
-        </p:txBody>
-      </p:sp>
-    </p:spTree>
-    <p:extLst>
-      <p:ext uri="{BB962C8B-B14F-4D97-AF65-F5344CB8AC3E}">
-        <p14:creationId xmlns:p14="http://schemas.microsoft.com/office/powerpoint/2010/main" val="1657706771"/>
-      </p:ext>
-    </p:extLst>
-  </p:cSld>
-  <p:clrMapOvr>
-    <a:masterClrMapping/>
-  </p:clrMapOvr>
-</p:notes>
-</file>
-
-<file path=ppt/notesSlides/notesSlide44.xml><?xml version="1.0" encoding="utf-8"?>
-<p:notes xmlns:a="http://schemas.openxmlformats.org/drawingml/2006/main" xmlns:r="http://schemas.openxmlformats.org/officeDocument/2006/relationships" xmlns:p="http://schemas.openxmlformats.org/presentationml/2006/main">
-  <p:cSld>
-    <p:spTree>
-      <p:nvGrpSpPr>
-        <p:cNvPr id="1" name=""/>
-        <p:cNvGrpSpPr/>
-        <p:nvPr/>
-      </p:nvGrpSpPr>
-      <p:grpSpPr>
-        <a:xfrm>
-          <a:off x="0" y="0"/>
-          <a:ext cx="0" cy="0"/>
-          <a:chOff x="0" y="0"/>
-          <a:chExt cx="0" cy="0"/>
-        </a:xfrm>
-      </p:grpSpPr>
-      <p:sp>
-        <p:nvSpPr>
-          <p:cNvPr id="2" name="Slide Image Placeholder 1"/>
-          <p:cNvSpPr>
-            <a:spLocks noGrp="1" noRot="1" noChangeAspect="1"/>
-          </p:cNvSpPr>
-          <p:nvPr>
-            <p:ph type="sldImg"/>
-          </p:nvPr>
-        </p:nvSpPr>
-        <p:spPr/>
-      </p:sp>
-      <p:sp>
-        <p:nvSpPr>
-          <p:cNvPr id="3" name="Notes Placeholder 2"/>
-          <p:cNvSpPr>
-            <a:spLocks noGrp="1"/>
-          </p:cNvSpPr>
-          <p:nvPr>
-            <p:ph type="body" idx="1"/>
-          </p:nvPr>
-        </p:nvSpPr>
-        <p:spPr/>
-        <p:txBody>
-          <a:bodyPr/>
-          <a:lstStyle/>
-          <a:p>
-            <a:endParaRPr lang="en-US"/>
-          </a:p>
-        </p:txBody>
-      </p:sp>
-      <p:sp>
-        <p:nvSpPr>
-          <p:cNvPr id="4" name="Slide Number Placeholder 3"/>
-          <p:cNvSpPr>
-            <a:spLocks noGrp="1"/>
-          </p:cNvSpPr>
-          <p:nvPr>
-            <p:ph type="sldNum" sz="quarter" idx="5"/>
-          </p:nvPr>
-        </p:nvSpPr>
-        <p:spPr/>
-        <p:txBody>
-          <a:bodyPr/>
-          <a:lstStyle/>
-          <a:p>
-            <a:endParaRPr lang="en-US"/>
-          </a:p>
-        </p:txBody>
-      </p:sp>
-    </p:spTree>
-    <p:extLst>
-      <p:ext uri="{BB962C8B-B14F-4D97-AF65-F5344CB8AC3E}">
-        <p14:creationId xmlns:p14="http://schemas.microsoft.com/office/powerpoint/2010/main" val="3424570052"/>
-      </p:ext>
-    </p:extLst>
-  </p:cSld>
-  <p:clrMapOvr>
-    <a:masterClrMapping/>
-  </p:clrMapOvr>
-</p:notes>
-</file>
-
-<file path=ppt/notesSlides/notesSlide45.xml><?xml version="1.0" encoding="utf-8"?>
-<p:notes xmlns:a="http://schemas.openxmlformats.org/drawingml/2006/main" xmlns:r="http://schemas.openxmlformats.org/officeDocument/2006/relationships" xmlns:p="http://schemas.openxmlformats.org/presentationml/2006/main">
-  <p:cSld>
-    <p:spTree>
-      <p:nvGrpSpPr>
-        <p:cNvPr id="1" name=""/>
-        <p:cNvGrpSpPr/>
-        <p:nvPr/>
-      </p:nvGrpSpPr>
-      <p:grpSpPr>
-        <a:xfrm>
-          <a:off x="0" y="0"/>
-          <a:ext cx="0" cy="0"/>
-          <a:chOff x="0" y="0"/>
-          <a:chExt cx="0" cy="0"/>
-        </a:xfrm>
-      </p:grpSpPr>
-      <p:sp>
-        <p:nvSpPr>
-          <p:cNvPr id="2" name="Slide Image Placeholder 1"/>
-          <p:cNvSpPr>
-            <a:spLocks noGrp="1" noRot="1" noChangeAspect="1"/>
-          </p:cNvSpPr>
-          <p:nvPr>
-            <p:ph type="sldImg"/>
-          </p:nvPr>
-        </p:nvSpPr>
-        <p:spPr/>
-      </p:sp>
-      <p:sp>
-        <p:nvSpPr>
-          <p:cNvPr id="3" name="Notes Placeholder 2"/>
-          <p:cNvSpPr>
-            <a:spLocks noGrp="1"/>
-          </p:cNvSpPr>
-          <p:nvPr>
-            <p:ph type="body" idx="1"/>
-          </p:nvPr>
-        </p:nvSpPr>
-        <p:spPr/>
-        <p:txBody>
-          <a:bodyPr/>
-          <a:lstStyle/>
-          <a:p>
-            <a:endParaRPr lang="en-US"/>
-          </a:p>
-        </p:txBody>
-      </p:sp>
-      <p:sp>
-        <p:nvSpPr>
-          <p:cNvPr id="4" name="Slide Number Placeholder 3"/>
-          <p:cNvSpPr>
-            <a:spLocks noGrp="1"/>
-          </p:cNvSpPr>
-          <p:nvPr>
-            <p:ph type="sldNum" sz="quarter" idx="5"/>
-          </p:nvPr>
-        </p:nvSpPr>
-        <p:spPr/>
-        <p:txBody>
-          <a:bodyPr/>
-          <a:lstStyle/>
-          <a:p>
-            <a:endParaRPr lang="en-US"/>
-          </a:p>
-        </p:txBody>
-      </p:sp>
-    </p:spTree>
-    <p:extLst>
-      <p:ext uri="{BB962C8B-B14F-4D97-AF65-F5344CB8AC3E}">
-        <p14:creationId xmlns:p14="http://schemas.microsoft.com/office/powerpoint/2010/main" val="3022226086"/>
-      </p:ext>
-    </p:extLst>
-  </p:cSld>
-  <p:clrMapOvr>
-    <a:masterClrMapping/>
-  </p:clrMapOvr>
-</p:notes>
-</file>
-
-<file path=ppt/notesSlides/notesSlide46.xml><?xml version="1.0" encoding="utf-8"?>
-<p:notes xmlns:a="http://schemas.openxmlformats.org/drawingml/2006/main" xmlns:r="http://schemas.openxmlformats.org/officeDocument/2006/relationships" xmlns:p="http://schemas.openxmlformats.org/presentationml/2006/main">
-  <p:cSld>
-    <p:spTree>
-      <p:nvGrpSpPr>
-        <p:cNvPr id="1" name=""/>
-        <p:cNvGrpSpPr/>
-        <p:nvPr/>
-      </p:nvGrpSpPr>
-      <p:grpSpPr>
-        <a:xfrm>
-          <a:off x="0" y="0"/>
-          <a:ext cx="0" cy="0"/>
-          <a:chOff x="0" y="0"/>
-          <a:chExt cx="0" cy="0"/>
-        </a:xfrm>
-      </p:grpSpPr>
-      <p:sp>
-        <p:nvSpPr>
-          <p:cNvPr id="2" name="Slide Image Placeholder 1"/>
-          <p:cNvSpPr>
-            <a:spLocks noGrp="1" noRot="1" noChangeAspect="1"/>
-          </p:cNvSpPr>
-          <p:nvPr>
-            <p:ph type="sldImg"/>
-          </p:nvPr>
-        </p:nvSpPr>
-        <p:spPr/>
-      </p:sp>
-      <p:sp>
-        <p:nvSpPr>
-          <p:cNvPr id="3" name="Notes Placeholder 2"/>
-          <p:cNvSpPr>
-            <a:spLocks noGrp="1"/>
-          </p:cNvSpPr>
-          <p:nvPr>
-            <p:ph type="body" idx="1"/>
-          </p:nvPr>
-        </p:nvSpPr>
-        <p:spPr/>
-        <p:txBody>
-          <a:bodyPr/>
-          <a:lstStyle/>
-          <a:p>
-            <a:endParaRPr lang="en-US"/>
-          </a:p>
-        </p:txBody>
-      </p:sp>
-      <p:sp>
-        <p:nvSpPr>
-          <p:cNvPr id="4" name="Slide Number Placeholder 3"/>
-          <p:cNvSpPr>
-            <a:spLocks noGrp="1"/>
-          </p:cNvSpPr>
-          <p:nvPr>
-            <p:ph type="sldNum" sz="quarter" idx="5"/>
-          </p:nvPr>
-        </p:nvSpPr>
-        <p:spPr/>
-        <p:txBody>
-          <a:bodyPr/>
-          <a:lstStyle/>
-          <a:p>
-            <a:endParaRPr lang="en-US"/>
-          </a:p>
-        </p:txBody>
-      </p:sp>
-    </p:spTree>
-    <p:extLst>
-      <p:ext uri="{BB962C8B-B14F-4D97-AF65-F5344CB8AC3E}">
-        <p14:creationId xmlns:p14="http://schemas.microsoft.com/office/powerpoint/2010/main" val="4064148708"/>
-      </p:ext>
-    </p:extLst>
-  </p:cSld>
-  <p:clrMapOvr>
-    <a:masterClrMapping/>
-  </p:clrMapOvr>
-</p:notes>
-</file>
-
-<file path=ppt/notesSlides/notesSlide47.xml><?xml version="1.0" encoding="utf-8"?>
-<p:notes xmlns:a="http://schemas.openxmlformats.org/drawingml/2006/main" xmlns:r="http://schemas.openxmlformats.org/officeDocument/2006/relationships" xmlns:p="http://schemas.openxmlformats.org/presentationml/2006/main">
-  <p:cSld>
-    <p:spTree>
-      <p:nvGrpSpPr>
-        <p:cNvPr id="1" name=""/>
-        <p:cNvGrpSpPr/>
-        <p:nvPr/>
-      </p:nvGrpSpPr>
-      <p:grpSpPr>
-        <a:xfrm>
-          <a:off x="0" y="0"/>
-          <a:ext cx="0" cy="0"/>
-          <a:chOff x="0" y="0"/>
-          <a:chExt cx="0" cy="0"/>
-        </a:xfrm>
-      </p:grpSpPr>
-      <p:sp>
-        <p:nvSpPr>
-          <p:cNvPr id="2" name="Slide Image Placeholder 1"/>
-          <p:cNvSpPr>
-            <a:spLocks noGrp="1" noRot="1" noChangeAspect="1"/>
-          </p:cNvSpPr>
-          <p:nvPr>
-            <p:ph type="sldImg"/>
-          </p:nvPr>
-        </p:nvSpPr>
-        <p:spPr/>
-      </p:sp>
-      <p:sp>
-        <p:nvSpPr>
-          <p:cNvPr id="3" name="Notes Placeholder 2"/>
-          <p:cNvSpPr>
-            <a:spLocks noGrp="1"/>
-          </p:cNvSpPr>
-          <p:nvPr>
-            <p:ph type="body" idx="1"/>
-          </p:nvPr>
-        </p:nvSpPr>
-        <p:spPr/>
-        <p:txBody>
-          <a:bodyPr/>
-          <a:lstStyle/>
-          <a:p>
-            <a:endParaRPr lang="en-US"/>
-          </a:p>
-        </p:txBody>
-      </p:sp>
-      <p:sp>
-        <p:nvSpPr>
-          <p:cNvPr id="4" name="Slide Number Placeholder 3"/>
-          <p:cNvSpPr>
-            <a:spLocks noGrp="1"/>
-          </p:cNvSpPr>
-          <p:nvPr>
-            <p:ph type="sldNum" sz="quarter" idx="5"/>
-          </p:nvPr>
-        </p:nvSpPr>
-        <p:spPr/>
-        <p:txBody>
-          <a:bodyPr/>
-          <a:lstStyle/>
-          <a:p>
-            <a:endParaRPr lang="en-US"/>
-          </a:p>
-        </p:txBody>
-      </p:sp>
-    </p:spTree>
-    <p:extLst>
-      <p:ext uri="{BB962C8B-B14F-4D97-AF65-F5344CB8AC3E}">
-        <p14:creationId xmlns:p14="http://schemas.microsoft.com/office/powerpoint/2010/main" val="3890102093"/>
-      </p:ext>
-    </p:extLst>
-  </p:cSld>
-  <p:clrMapOvr>
-    <a:masterClrMapping/>
-  </p:clrMapOvr>
-</p:notes>
-</file>
-
-<file path=ppt/notesSlides/notesSlide48.xml><?xml version="1.0" encoding="utf-8"?>
-<p:notes xmlns:a="http://schemas.openxmlformats.org/drawingml/2006/main" xmlns:r="http://schemas.openxmlformats.org/officeDocument/2006/relationships" xmlns:p="http://schemas.openxmlformats.org/presentationml/2006/main">
-  <p:cSld>
-    <p:spTree>
-      <p:nvGrpSpPr>
-        <p:cNvPr id="1" name=""/>
-        <p:cNvGrpSpPr/>
-        <p:nvPr/>
-      </p:nvGrpSpPr>
-      <p:grpSpPr>
-        <a:xfrm>
-          <a:off x="0" y="0"/>
-          <a:ext cx="0" cy="0"/>
-          <a:chOff x="0" y="0"/>
-          <a:chExt cx="0" cy="0"/>
-        </a:xfrm>
-      </p:grpSpPr>
-      <p:sp>
-        <p:nvSpPr>
-          <p:cNvPr id="2" name="Slide Image Placeholder 1"/>
-          <p:cNvSpPr>
-            <a:spLocks noGrp="1" noRot="1" noChangeAspect="1"/>
-          </p:cNvSpPr>
-          <p:nvPr>
-            <p:ph type="sldImg"/>
-          </p:nvPr>
-        </p:nvSpPr>
-        <p:spPr/>
-      </p:sp>
-      <p:sp>
-        <p:nvSpPr>
-          <p:cNvPr id="3" name="Notes Placeholder 2"/>
-          <p:cNvSpPr>
-            <a:spLocks noGrp="1"/>
-          </p:cNvSpPr>
-          <p:nvPr>
-            <p:ph type="body" idx="1"/>
-          </p:nvPr>
-        </p:nvSpPr>
-        <p:spPr/>
-        <p:txBody>
-          <a:bodyPr/>
-          <a:lstStyle/>
-          <a:p>
-            <a:endParaRPr lang="en-US"/>
-          </a:p>
-        </p:txBody>
-      </p:sp>
-      <p:sp>
-        <p:nvSpPr>
-          <p:cNvPr id="4" name="Slide Number Placeholder 3"/>
-          <p:cNvSpPr>
-            <a:spLocks noGrp="1"/>
-          </p:cNvSpPr>
-          <p:nvPr>
-            <p:ph type="sldNum" sz="quarter" idx="5"/>
-          </p:nvPr>
-        </p:nvSpPr>
-        <p:spPr/>
-        <p:txBody>
-          <a:bodyPr/>
-          <a:lstStyle/>
-          <a:p>
-            <a:endParaRPr lang="en-US"/>
-          </a:p>
-        </p:txBody>
-      </p:sp>
-    </p:spTree>
-    <p:extLst>
-      <p:ext uri="{BB962C8B-B14F-4D97-AF65-F5344CB8AC3E}">
-        <p14:creationId xmlns:p14="http://schemas.microsoft.com/office/powerpoint/2010/main" val="1664347917"/>
-      </p:ext>
-    </p:extLst>
-  </p:cSld>
-  <p:clrMapOvr>
-    <a:masterClrMapping/>
-  </p:clrMapOvr>
-</p:notes>
-</file>
-
-<file path=ppt/notesSlides/notesSlide49.xml><?xml version="1.0" encoding="utf-8"?>
-<p:notes xmlns:a="http://schemas.openxmlformats.org/drawingml/2006/main" xmlns:r="http://schemas.openxmlformats.org/officeDocument/2006/relationships" xmlns:p="http://schemas.openxmlformats.org/presentationml/2006/main">
-  <p:cSld>
-    <p:spTree>
-      <p:nvGrpSpPr>
-        <p:cNvPr id="1" name=""/>
-        <p:cNvGrpSpPr/>
-        <p:nvPr/>
-      </p:nvGrpSpPr>
-      <p:grpSpPr>
-        <a:xfrm>
-          <a:off x="0" y="0"/>
-          <a:ext cx="0" cy="0"/>
-          <a:chOff x="0" y="0"/>
-          <a:chExt cx="0" cy="0"/>
-        </a:xfrm>
-      </p:grpSpPr>
-      <p:sp>
-        <p:nvSpPr>
-          <p:cNvPr id="2" name="Slide Image Placeholder 1"/>
-          <p:cNvSpPr>
-            <a:spLocks noGrp="1" noRot="1" noChangeAspect="1"/>
-          </p:cNvSpPr>
-          <p:nvPr>
-            <p:ph type="sldImg"/>
-          </p:nvPr>
-        </p:nvSpPr>
-        <p:spPr/>
-      </p:sp>
-      <p:sp>
-        <p:nvSpPr>
-          <p:cNvPr id="3" name="Notes Placeholder 2"/>
-          <p:cNvSpPr>
-            <a:spLocks noGrp="1"/>
-          </p:cNvSpPr>
-          <p:nvPr>
-            <p:ph type="body" idx="1"/>
-          </p:nvPr>
-        </p:nvSpPr>
-        <p:spPr/>
-        <p:txBody>
-          <a:bodyPr/>
-          <a:lstStyle/>
-          <a:p>
-            <a:endParaRPr lang="en-US"/>
-          </a:p>
-        </p:txBody>
-      </p:sp>
-      <p:sp>
-        <p:nvSpPr>
-          <p:cNvPr id="4" name="Slide Number Placeholder 3"/>
-          <p:cNvSpPr>
-            <a:spLocks noGrp="1"/>
-          </p:cNvSpPr>
-          <p:nvPr>
-            <p:ph type="sldNum" sz="quarter" idx="5"/>
-          </p:nvPr>
-        </p:nvSpPr>
-        <p:spPr/>
-        <p:txBody>
-          <a:bodyPr/>
-          <a:lstStyle/>
-          <a:p>
-            <a:endParaRPr lang="en-US"/>
-          </a:p>
-        </p:txBody>
-      </p:sp>
-    </p:spTree>
-    <p:extLst>
-      <p:ext uri="{BB962C8B-B14F-4D97-AF65-F5344CB8AC3E}">
-        <p14:creationId xmlns:p14="http://schemas.microsoft.com/office/powerpoint/2010/main" val="1694704242"/>
-      </p:ext>
-    </p:extLst>
-  </p:cSld>
-  <p:clrMapOvr>
-    <a:masterClrMapping/>
-  </p:clrMapOvr>
-</p:notes>
-</file>
-
-<file path=ppt/notesSlides/notesSlide5.xml><?xml version="1.0" encoding="utf-8"?>
-<p:notes xmlns:a="http://schemas.openxmlformats.org/drawingml/2006/main" xmlns:r="http://schemas.openxmlformats.org/officeDocument/2006/relationships" xmlns:p="http://schemas.openxmlformats.org/presentationml/2006/main">
-  <p:cSld>
-    <p:spTree>
-      <p:nvGrpSpPr>
-        <p:cNvPr id="1" name=""/>
-        <p:cNvGrpSpPr/>
-        <p:nvPr/>
-      </p:nvGrpSpPr>
-      <p:grpSpPr>
-        <a:xfrm>
-          <a:off x="0" y="0"/>
-          <a:ext cx="0" cy="0"/>
-          <a:chOff x="0" y="0"/>
-          <a:chExt cx="0" cy="0"/>
-        </a:xfrm>
-      </p:grpSpPr>
-      <p:sp>
-        <p:nvSpPr>
-          <p:cNvPr id="2" name="Slide Image Placeholder 1"/>
-          <p:cNvSpPr>
-            <a:spLocks noGrp="1" noRot="1" noChangeAspect="1"/>
-          </p:cNvSpPr>
-          <p:nvPr>
-            <p:ph type="sldImg"/>
-          </p:nvPr>
-        </p:nvSpPr>
-        <p:spPr/>
-      </p:sp>
-      <p:sp>
-        <p:nvSpPr>
-          <p:cNvPr id="3" name="Notes Placeholder 2"/>
-          <p:cNvSpPr>
-            <a:spLocks noGrp="1"/>
-          </p:cNvSpPr>
-          <p:nvPr>
-            <p:ph type="body" idx="1"/>
-          </p:nvPr>
-        </p:nvSpPr>
-        <p:spPr/>
-        <p:txBody>
-          <a:bodyPr/>
-          <a:lstStyle/>
-          <a:p>
-            <a:endParaRPr lang="en-US" dirty="0"/>
-          </a:p>
-        </p:txBody>
-      </p:sp>
-      <p:sp>
-        <p:nvSpPr>
-          <p:cNvPr id="4" name="Slide Number Placeholder 3"/>
-          <p:cNvSpPr>
-            <a:spLocks noGrp="1"/>
-          </p:cNvSpPr>
-          <p:nvPr>
-            <p:ph type="sldNum" sz="quarter" idx="5"/>
-          </p:nvPr>
-        </p:nvSpPr>
-        <p:spPr/>
-        <p:txBody>
-          <a:bodyPr/>
-          <a:lstStyle/>
-          <a:p>
-            <a:endParaRPr lang="en-US" dirty="0"/>
-          </a:p>
-        </p:txBody>
-      </p:sp>
-    </p:spTree>
-    <p:extLst>
-      <p:ext uri="{BB962C8B-B14F-4D97-AF65-F5344CB8AC3E}">
-        <p14:creationId xmlns:p14="http://schemas.microsoft.com/office/powerpoint/2010/main" val="2824334396"/>
-      </p:ext>
-    </p:extLst>
-  </p:cSld>
-  <p:clrMapOvr>
-    <a:masterClrMapping/>
-  </p:clrMapOvr>
-</p:notes>
-</file>
-
-<file path=ppt/notesSlides/notesSlide50.xml><?xml version="1.0" encoding="utf-8"?>
-<p:notes xmlns:a="http://schemas.openxmlformats.org/drawingml/2006/main" xmlns:r="http://schemas.openxmlformats.org/officeDocument/2006/relationships" xmlns:p="http://schemas.openxmlformats.org/presentationml/2006/main">
-  <p:cSld>
-    <p:spTree>
-      <p:nvGrpSpPr>
-        <p:cNvPr id="1" name=""/>
-        <p:cNvGrpSpPr/>
-        <p:nvPr/>
-      </p:nvGrpSpPr>
-      <p:grpSpPr>
-        <a:xfrm>
-          <a:off x="0" y="0"/>
-          <a:ext cx="0" cy="0"/>
-          <a:chOff x="0" y="0"/>
-          <a:chExt cx="0" cy="0"/>
-        </a:xfrm>
-      </p:grpSpPr>
-      <p:sp>
-        <p:nvSpPr>
-          <p:cNvPr id="2" name="Slide Image Placeholder 1"/>
-          <p:cNvSpPr>
-            <a:spLocks noGrp="1" noRot="1" noChangeAspect="1"/>
-          </p:cNvSpPr>
-          <p:nvPr>
-            <p:ph type="sldImg"/>
-          </p:nvPr>
-        </p:nvSpPr>
-        <p:spPr/>
-      </p:sp>
-      <p:sp>
-        <p:nvSpPr>
-          <p:cNvPr id="3" name="Notes Placeholder 2"/>
-          <p:cNvSpPr>
-            <a:spLocks noGrp="1"/>
-          </p:cNvSpPr>
-          <p:nvPr>
-            <p:ph type="body" idx="1"/>
-          </p:nvPr>
-        </p:nvSpPr>
-        <p:spPr/>
-        <p:txBody>
-          <a:bodyPr/>
-          <a:lstStyle/>
-          <a:p>
-            <a:endParaRPr lang="en-US"/>
-          </a:p>
-        </p:txBody>
-      </p:sp>
-      <p:sp>
-        <p:nvSpPr>
-          <p:cNvPr id="4" name="Slide Number Placeholder 3"/>
-          <p:cNvSpPr>
-            <a:spLocks noGrp="1"/>
-          </p:cNvSpPr>
-          <p:nvPr>
-            <p:ph type="sldNum" sz="quarter" idx="5"/>
-          </p:nvPr>
-        </p:nvSpPr>
-        <p:spPr/>
-        <p:txBody>
-          <a:bodyPr/>
-          <a:lstStyle/>
-          <a:p>
-            <a:endParaRPr lang="en-US"/>
-          </a:p>
-        </p:txBody>
-      </p:sp>
-    </p:spTree>
-    <p:extLst>
-      <p:ext uri="{BB962C8B-B14F-4D97-AF65-F5344CB8AC3E}">
-        <p14:creationId xmlns:p14="http://schemas.microsoft.com/office/powerpoint/2010/main" val="1738025338"/>
-      </p:ext>
-    </p:extLst>
-  </p:cSld>
-  <p:clrMapOvr>
-    <a:masterClrMapping/>
-  </p:clrMapOvr>
-</p:notes>
-</file>
-
-<file path=ppt/notesSlides/notesSlide51.xml><?xml version="1.0" encoding="utf-8"?>
-<p:notes xmlns:a="http://schemas.openxmlformats.org/drawingml/2006/main" xmlns:r="http://schemas.openxmlformats.org/officeDocument/2006/relationships" xmlns:p="http://schemas.openxmlformats.org/presentationml/2006/main">
-  <p:cSld>
-    <p:spTree>
-      <p:nvGrpSpPr>
-        <p:cNvPr id="1" name=""/>
-        <p:cNvGrpSpPr/>
-        <p:nvPr/>
-      </p:nvGrpSpPr>
-      <p:grpSpPr>
-        <a:xfrm>
-          <a:off x="0" y="0"/>
-          <a:ext cx="0" cy="0"/>
-          <a:chOff x="0" y="0"/>
-          <a:chExt cx="0" cy="0"/>
-        </a:xfrm>
-      </p:grpSpPr>
-      <p:sp>
-        <p:nvSpPr>
-          <p:cNvPr id="2" name="Slide Image Placeholder 1"/>
-          <p:cNvSpPr>
-            <a:spLocks noGrp="1" noRot="1" noChangeAspect="1"/>
-          </p:cNvSpPr>
-          <p:nvPr>
-            <p:ph type="sldImg"/>
-          </p:nvPr>
-        </p:nvSpPr>
-        <p:spPr/>
-      </p:sp>
-      <p:sp>
-        <p:nvSpPr>
-          <p:cNvPr id="3" name="Notes Placeholder 2"/>
-          <p:cNvSpPr>
-            <a:spLocks noGrp="1"/>
-          </p:cNvSpPr>
-          <p:nvPr>
-            <p:ph type="body" idx="1"/>
-          </p:nvPr>
-        </p:nvSpPr>
-        <p:spPr/>
-        <p:txBody>
-          <a:bodyPr/>
-          <a:lstStyle/>
-          <a:p>
-            <a:endParaRPr lang="en-US"/>
-          </a:p>
-        </p:txBody>
-      </p:sp>
-      <p:sp>
-        <p:nvSpPr>
-          <p:cNvPr id="4" name="Slide Number Placeholder 3"/>
-          <p:cNvSpPr>
-            <a:spLocks noGrp="1"/>
-          </p:cNvSpPr>
-          <p:nvPr>
-            <p:ph type="sldNum" sz="quarter" idx="5"/>
-          </p:nvPr>
-        </p:nvSpPr>
-        <p:spPr/>
-        <p:txBody>
-          <a:bodyPr/>
-          <a:lstStyle/>
-          <a:p>
-            <a:endParaRPr lang="en-US"/>
-          </a:p>
-        </p:txBody>
-      </p:sp>
-    </p:spTree>
-    <p:extLst>
-      <p:ext uri="{BB962C8B-B14F-4D97-AF65-F5344CB8AC3E}">
-        <p14:creationId xmlns:p14="http://schemas.microsoft.com/office/powerpoint/2010/main" val="3111755284"/>
-      </p:ext>
-    </p:extLst>
-  </p:cSld>
-  <p:clrMapOvr>
-    <a:masterClrMapping/>
-  </p:clrMapOvr>
-</p:notes>
-</file>
-
-<file path=ppt/notesSlides/notesSlide6.xml><?xml version="1.0" encoding="utf-8"?>
-<p:notes xmlns:a="http://schemas.openxmlformats.org/drawingml/2006/main" xmlns:r="http://schemas.openxmlformats.org/officeDocument/2006/relationships" xmlns:p="http://schemas.openxmlformats.org/presentationml/2006/main">
-  <p:cSld>
-    <p:spTree>
-      <p:nvGrpSpPr>
-        <p:cNvPr id="1" name=""/>
-        <p:cNvGrpSpPr/>
-        <p:nvPr/>
-      </p:nvGrpSpPr>
-      <p:grpSpPr>
-        <a:xfrm>
-          <a:off x="0" y="0"/>
-          <a:ext cx="0" cy="0"/>
-          <a:chOff x="0" y="0"/>
-          <a:chExt cx="0" cy="0"/>
-        </a:xfrm>
-      </p:grpSpPr>
-      <p:sp>
-        <p:nvSpPr>
-          <p:cNvPr id="2" name="Slide Image Placeholder 1"/>
-          <p:cNvSpPr>
-            <a:spLocks noGrp="1" noRot="1" noChangeAspect="1"/>
-          </p:cNvSpPr>
-          <p:nvPr>
-            <p:ph type="sldImg"/>
-          </p:nvPr>
-        </p:nvSpPr>
-        <p:spPr/>
-      </p:sp>
-      <p:sp>
-        <p:nvSpPr>
-          <p:cNvPr id="3" name="Notes Placeholder 2"/>
-          <p:cNvSpPr>
-            <a:spLocks noGrp="1"/>
-          </p:cNvSpPr>
-          <p:nvPr>
-            <p:ph type="body" idx="1"/>
-          </p:nvPr>
-        </p:nvSpPr>
-        <p:spPr/>
-        <p:txBody>
-          <a:bodyPr/>
-          <a:lstStyle/>
-          <a:p>
-            <a:endParaRPr lang="en-US" dirty="0"/>
-          </a:p>
-        </p:txBody>
-      </p:sp>
-      <p:sp>
-        <p:nvSpPr>
-          <p:cNvPr id="4" name="Slide Number Placeholder 3"/>
-          <p:cNvSpPr>
-            <a:spLocks noGrp="1"/>
-          </p:cNvSpPr>
-          <p:nvPr>
-            <p:ph type="sldNum" sz="quarter" idx="5"/>
-          </p:nvPr>
-        </p:nvSpPr>
-        <p:spPr/>
-        <p:txBody>
-          <a:bodyPr/>
-          <a:lstStyle/>
-          <a:p>
-            <a:endParaRPr lang="en-US" dirty="0"/>
-          </a:p>
-        </p:txBody>
-      </p:sp>
-    </p:spTree>
-    <p:extLst>
-      <p:ext uri="{BB962C8B-B14F-4D97-AF65-F5344CB8AC3E}">
-        <p14:creationId xmlns:p14="http://schemas.microsoft.com/office/powerpoint/2010/main" val="258168079"/>
-      </p:ext>
-    </p:extLst>
-  </p:cSld>
-  <p:clrMapOvr>
-    <a:masterClrMapping/>
-  </p:clrMapOvr>
-</p:notes>
-</file>
-
-<file path=ppt/notesSlides/notesSlide7.xml><?xml version="1.0" encoding="utf-8"?>
-<p:notes xmlns:a="http://schemas.openxmlformats.org/drawingml/2006/main" xmlns:r="http://schemas.openxmlformats.org/officeDocument/2006/relationships" xmlns:p="http://schemas.openxmlformats.org/presentationml/2006/main">
-  <p:cSld>
-    <p:spTree>
-      <p:nvGrpSpPr>
-        <p:cNvPr id="1" name=""/>
-        <p:cNvGrpSpPr/>
-        <p:nvPr/>
-      </p:nvGrpSpPr>
-      <p:grpSpPr>
-        <a:xfrm>
-          <a:off x="0" y="0"/>
-          <a:ext cx="0" cy="0"/>
-          <a:chOff x="0" y="0"/>
-          <a:chExt cx="0" cy="0"/>
-        </a:xfrm>
-      </p:grpSpPr>
-      <p:sp>
-        <p:nvSpPr>
-          <p:cNvPr id="2" name="Slide Image Placeholder 1"/>
-          <p:cNvSpPr>
-            <a:spLocks noGrp="1" noRot="1" noChangeAspect="1"/>
-          </p:cNvSpPr>
-          <p:nvPr>
-            <p:ph type="sldImg"/>
-          </p:nvPr>
-        </p:nvSpPr>
-        <p:spPr/>
-      </p:sp>
-      <p:sp>
-        <p:nvSpPr>
-          <p:cNvPr id="3" name="Notes Placeholder 2"/>
-          <p:cNvSpPr>
-            <a:spLocks noGrp="1"/>
-          </p:cNvSpPr>
-          <p:nvPr>
-            <p:ph type="body" idx="1"/>
-          </p:nvPr>
-        </p:nvSpPr>
-        <p:spPr/>
-        <p:txBody>
-          <a:bodyPr/>
-          <a:lstStyle/>
-          <a:p>
-            <a:endParaRPr lang="en-US"/>
-          </a:p>
-        </p:txBody>
-      </p:sp>
-      <p:sp>
-        <p:nvSpPr>
-          <p:cNvPr id="4" name="Slide Number Placeholder 3"/>
-          <p:cNvSpPr>
-            <a:spLocks noGrp="1"/>
-          </p:cNvSpPr>
-          <p:nvPr>
-            <p:ph type="sldNum" sz="quarter" idx="5"/>
-          </p:nvPr>
-        </p:nvSpPr>
-        <p:spPr/>
-        <p:txBody>
-          <a:bodyPr/>
-          <a:lstStyle/>
-          <a:p>
-            <a:endParaRPr lang="en-US"/>
-          </a:p>
-        </p:txBody>
-      </p:sp>
-    </p:spTree>
-    <p:extLst>
-      <p:ext uri="{BB962C8B-B14F-4D97-AF65-F5344CB8AC3E}">
-        <p14:creationId xmlns:p14="http://schemas.microsoft.com/office/powerpoint/2010/main" val="3832955907"/>
-      </p:ext>
-    </p:extLst>
-  </p:cSld>
-  <p:clrMapOvr>
-    <a:masterClrMapping/>
-  </p:clrMapOvr>
-</p:notes>
-</file>
-
-<file path=ppt/notesSlides/notesSlide8.xml><?xml version="1.0" encoding="utf-8"?>
-<p:notes xmlns:a="http://schemas.openxmlformats.org/drawingml/2006/main" xmlns:r="http://schemas.openxmlformats.org/officeDocument/2006/relationships" xmlns:p="http://schemas.openxmlformats.org/presentationml/2006/main">
-  <p:cSld>
-    <p:spTree>
-      <p:nvGrpSpPr>
-        <p:cNvPr id="1" name=""/>
-        <p:cNvGrpSpPr/>
-        <p:nvPr/>
-      </p:nvGrpSpPr>
-      <p:grpSpPr>
-        <a:xfrm>
-          <a:off x="0" y="0"/>
-          <a:ext cx="0" cy="0"/>
-          <a:chOff x="0" y="0"/>
-          <a:chExt cx="0" cy="0"/>
-        </a:xfrm>
-      </p:grpSpPr>
-      <p:sp>
-        <p:nvSpPr>
-          <p:cNvPr id="2" name="Slide Image Placeholder 1"/>
-          <p:cNvSpPr>
-            <a:spLocks noGrp="1" noRot="1" noChangeAspect="1"/>
-          </p:cNvSpPr>
-          <p:nvPr>
-            <p:ph type="sldImg"/>
-          </p:nvPr>
-        </p:nvSpPr>
-        <p:spPr/>
-      </p:sp>
-      <p:sp>
-        <p:nvSpPr>
-          <p:cNvPr id="3" name="Notes Placeholder 2"/>
-          <p:cNvSpPr>
-            <a:spLocks noGrp="1"/>
-          </p:cNvSpPr>
-          <p:nvPr>
-            <p:ph type="body" idx="1"/>
-          </p:nvPr>
-        </p:nvSpPr>
-        <p:spPr/>
-        <p:txBody>
-          <a:bodyPr/>
-          <a:lstStyle/>
-          <a:p>
-            <a:endParaRPr lang="en-US"/>
-          </a:p>
-        </p:txBody>
-      </p:sp>
-      <p:sp>
-        <p:nvSpPr>
-          <p:cNvPr id="4" name="Slide Number Placeholder 3"/>
-          <p:cNvSpPr>
-            <a:spLocks noGrp="1"/>
-          </p:cNvSpPr>
-          <p:nvPr>
-            <p:ph type="sldNum" sz="quarter" idx="5"/>
-          </p:nvPr>
-        </p:nvSpPr>
-        <p:spPr/>
-        <p:txBody>
-          <a:bodyPr/>
-          <a:lstStyle/>
-          <a:p>
-            <a:endParaRPr lang="en-US"/>
-          </a:p>
-        </p:txBody>
-      </p:sp>
-    </p:spTree>
-    <p:extLst>
-      <p:ext uri="{BB962C8B-B14F-4D97-AF65-F5344CB8AC3E}">
-        <p14:creationId xmlns:p14="http://schemas.microsoft.com/office/powerpoint/2010/main" val="364625942"/>
-      </p:ext>
-    </p:extLst>
-  </p:cSld>
-  <p:clrMapOvr>
-    <a:masterClrMapping/>
-  </p:clrMapOvr>
-</p:notes>
-</file>
-
-<file path=ppt/notesSlides/notesSlide9.xml><?xml version="1.0" encoding="utf-8"?>
-<p:notes xmlns:a="http://schemas.openxmlformats.org/drawingml/2006/main" xmlns:r="http://schemas.openxmlformats.org/officeDocument/2006/relationships" xmlns:p="http://schemas.openxmlformats.org/presentationml/2006/main">
-  <p:cSld>
-    <p:spTree>
-      <p:nvGrpSpPr>
-        <p:cNvPr id="1" name=""/>
-        <p:cNvGrpSpPr/>
-        <p:nvPr/>
-      </p:nvGrpSpPr>
-      <p:grpSpPr>
-        <a:xfrm>
-          <a:off x="0" y="0"/>
-          <a:ext cx="0" cy="0"/>
-          <a:chOff x="0" y="0"/>
-          <a:chExt cx="0" cy="0"/>
-        </a:xfrm>
-      </p:grpSpPr>
-      <p:sp>
-        <p:nvSpPr>
-          <p:cNvPr id="2" name="Slide Image Placeholder 1"/>
-          <p:cNvSpPr>
-            <a:spLocks noGrp="1" noRot="1" noChangeAspect="1"/>
-          </p:cNvSpPr>
-          <p:nvPr>
-            <p:ph type="sldImg"/>
-          </p:nvPr>
-        </p:nvSpPr>
-        <p:spPr/>
-      </p:sp>
-      <p:sp>
-        <p:nvSpPr>
-          <p:cNvPr id="3" name="Notes Placeholder 2"/>
-          <p:cNvSpPr>
-            <a:spLocks noGrp="1"/>
-          </p:cNvSpPr>
-          <p:nvPr>
-            <p:ph type="body" idx="1"/>
-          </p:nvPr>
-        </p:nvSpPr>
-        <p:spPr/>
-        <p:txBody>
-          <a:bodyPr/>
-          <a:lstStyle/>
-          <a:p>
-            <a:endParaRPr lang="en-US" dirty="0"/>
-          </a:p>
-        </p:txBody>
-      </p:sp>
-      <p:sp>
-        <p:nvSpPr>
-          <p:cNvPr id="4" name="Slide Number Placeholder 3"/>
-          <p:cNvSpPr>
-            <a:spLocks noGrp="1"/>
-          </p:cNvSpPr>
-          <p:nvPr>
-            <p:ph type="sldNum" sz="quarter" idx="5"/>
-          </p:nvPr>
-        </p:nvSpPr>
-        <p:spPr/>
-        <p:txBody>
-          <a:bodyPr/>
-          <a:lstStyle/>
-          <a:p>
-            <a:fld id="{EEBB2FDE-2E55-4B3D-B7EA-09D0CC108070}" type="slidenum">
-              <a:rPr lang="en-US" smtClean="0"/>
-              <a:t>9</a:t>
-            </a:fld>
-            <a:endParaRPr lang="en-US" dirty="0"/>
-          </a:p>
-        </p:txBody>
-      </p:sp>
-    </p:spTree>
-    <p:extLst>
-      <p:ext uri="{BB962C8B-B14F-4D97-AF65-F5344CB8AC3E}">
-        <p14:creationId xmlns:p14="http://schemas.microsoft.com/office/powerpoint/2010/main" val="2717941944"/>
-      </p:ext>
-    </p:extLst>
-  </p:cSld>
-  <p:clrMapOvr>
-    <a:masterClrMapping/>
-  </p:clrMapOvr>
-</p:notes>
 </file>
 
 <file path=ppt/slideLayouts/slideLayout1.xml><?xml version="1.0" encoding="utf-8"?>
@@ -4821,7 +706,7 @@
           <a:p>
             <a:fld id="{5C61DBD6-C07E-0146-B853-FF227983C6A9}" type="datetimeFigureOut">
               <a:rPr lang="en-US" smtClean="0"/>
-              <a:t>9/16/25</a:t>
+              <a:t>8/12/26</a:t>
             </a:fld>
             <a:endParaRPr lang="en-US"/>
           </a:p>
@@ -5007,7 +892,7 @@
           <a:p>
             <a:fld id="{5C61DBD6-C07E-0146-B853-FF227983C6A9}" type="datetimeFigureOut">
               <a:rPr lang="en-US" smtClean="0"/>
-              <a:t>9/16/25</a:t>
+              <a:t>8/12/26</a:t>
             </a:fld>
             <a:endParaRPr lang="en-US"/>
           </a:p>
@@ -5757,7 +1642,7 @@
           <a:p>
             <a:fld id="{5C61DBD6-C07E-0146-B853-FF227983C6A9}" type="datetimeFigureOut">
               <a:rPr lang="en-US" smtClean="0"/>
-              <a:t>9/16/25</a:t>
+              <a:t>8/12/26</a:t>
             </a:fld>
             <a:endParaRPr lang="en-US"/>
           </a:p>
@@ -6509,7 +2394,7 @@
             </a:r>
             <a:r>
               <a:rPr lang="en-US" dirty="0" err="1"/>
-              <a:t>Don’t’s</a:t>
+              <a:t>Dont's</a:t>
             </a:r>
             <a:endParaRPr lang="en-US" dirty="0"/>
           </a:p>
@@ -6686,7 +2571,7 @@
             <p:nvPr/>
           </p:nvPicPr>
           <p:blipFill>
-            <a:blip r:embed="rId3"/>
+            <a:blip r:embed="rId2"/>
             <a:stretch>
               <a:fillRect/>
             </a:stretch>
@@ -7362,7 +3247,7 @@
           <a:p>
             <a:r>
               <a:rPr lang="en-US" dirty="0"/>
-              <a:t>Goal: A realistic, enforceable policy that acknowledges the reality of how humans program computers in 2025</a:t>
+              <a:t>Goal: A realistic, enforceable policy that acknowledges the reality of how humans program computers in 2026</a:t>
             </a:r>
           </a:p>
           <a:p>
@@ -7384,55 +3269,8 @@
           <a:p>
             <a:r>
               <a:rPr lang="en-US" dirty="0"/>
-              <a:t>Things that might be ok when working on project:</a:t>
-            </a:r>
-          </a:p>
-          <a:p>
-            <a:pPr lvl="1"/>
-            <a:r>
-              <a:rPr lang="en-US" dirty="0"/>
-              <a:t>High level questions: “how does </a:t>
-            </a:r>
-            <a:r>
-              <a:rPr lang="en-US" dirty="0" err="1"/>
-              <a:t>postgres</a:t>
-            </a:r>
-            <a:r>
-              <a:rPr lang="en-US" dirty="0"/>
-              <a:t> store large objects?”</a:t>
-            </a:r>
-          </a:p>
-          <a:p>
-            <a:pPr lvl="1"/>
-            <a:r>
-              <a:rPr lang="en-US" dirty="0"/>
-              <a:t>Limited coding assistance “include the library for </a:t>
-            </a:r>
-            <a:r>
-              <a:rPr lang="en-US" dirty="0">
-                <a:solidFill>
-                  <a:srgbClr val="C00000"/>
-                </a:solidFill>
-                <a:latin typeface="Consolas" panose="020B0609020204030204" pitchFamily="49" charset="0"/>
-                <a:cs typeface="Consolas" panose="020B0609020204030204" pitchFamily="49" charset="0"/>
-              </a:rPr>
-              <a:t>std::sort</a:t>
-            </a:r>
-            <a:r>
-              <a:rPr lang="en-US" dirty="0">
-                <a:cs typeface="Calibri" panose="020F0502020204030204" pitchFamily="34" charset="0"/>
-              </a:rPr>
-              <a:t>”</a:t>
-            </a:r>
-            <a:endParaRPr lang="en-US" dirty="0">
-              <a:solidFill>
-                <a:srgbClr val="C00000"/>
-              </a:solidFill>
-              <a:cs typeface="Calibri" panose="020F0502020204030204" pitchFamily="34" charset="0"/>
-            </a:endParaRPr>
-          </a:p>
-          <a:p>
-            <a:endParaRPr lang="en-US" dirty="0"/>
+              <a:t>Not ok: verbatim reproduction of code from pre-existing sources/solutions</a:t>
+            </a:r>
           </a:p>
           <a:p>
             <a:endParaRPr lang="en-US" dirty="0"/>
@@ -7697,104 +3535,6 @@
                       </p:childTnLst>
                     </p:cTn>
                   </p:par>
-                  <p:par>
-                    <p:cTn id="19" fill="hold">
-                      <p:stCondLst>
-                        <p:cond delay="indefinite"/>
-                      </p:stCondLst>
-                      <p:childTnLst>
-                        <p:par>
-                          <p:cTn id="20" fill="hold">
-                            <p:stCondLst>
-                              <p:cond delay="0"/>
-                            </p:stCondLst>
-                            <p:childTnLst>
-                              <p:par>
-                                <p:cTn id="21" presetID="1" presetClass="entr" presetSubtype="0" fill="hold" nodeType="clickEffect">
-                                  <p:stCondLst>
-                                    <p:cond delay="0"/>
-                                  </p:stCondLst>
-                                  <p:childTnLst>
-                                    <p:set>
-                                      <p:cBhvr>
-                                        <p:cTn id="22" dur="1" fill="hold">
-                                          <p:stCondLst>
-                                            <p:cond delay="0"/>
-                                          </p:stCondLst>
-                                        </p:cTn>
-                                        <p:tgtEl>
-                                          <p:spTgt spid="5">
-                                            <p:txEl>
-                                              <p:pRg st="4" end="4"/>
-                                            </p:txEl>
-                                          </p:spTgt>
-                                        </p:tgtEl>
-                                        <p:attrNameLst>
-                                          <p:attrName>style.visibility</p:attrName>
-                                        </p:attrNameLst>
-                                      </p:cBhvr>
-                                      <p:to>
-                                        <p:strVal val="visible"/>
-                                      </p:to>
-                                    </p:set>
-                                  </p:childTnLst>
-                                </p:cTn>
-                              </p:par>
-                            </p:childTnLst>
-                          </p:cTn>
-                        </p:par>
-                      </p:childTnLst>
-                    </p:cTn>
-                  </p:par>
-                  <p:par>
-                    <p:cTn id="23" fill="hold">
-                      <p:stCondLst>
-                        <p:cond delay="indefinite"/>
-                      </p:stCondLst>
-                      <p:childTnLst>
-                        <p:par>
-                          <p:cTn id="24" fill="hold">
-                            <p:stCondLst>
-                              <p:cond delay="0"/>
-                            </p:stCondLst>
-                            <p:childTnLst>
-                              <p:par>
-                                <p:cTn id="25" presetID="1" presetClass="entr" presetSubtype="0" fill="hold" nodeType="clickEffect">
-                                  <p:stCondLst>
-                                    <p:cond delay="0"/>
-                                  </p:stCondLst>
-                                  <p:childTnLst>
-                                    <p:set>
-                                      <p:cBhvr>
-                                        <p:cTn id="26" dur="1" fill="hold">
-                                          <p:stCondLst>
-                                            <p:cond delay="0"/>
-                                          </p:stCondLst>
-                                        </p:cTn>
-                                        <p:tgtEl>
-                                          <p:spTgt spid="5">
-                                            <p:txEl>
-                                              <p:pRg st="5" end="5"/>
-                                            </p:txEl>
-                                          </p:spTgt>
-                                        </p:tgtEl>
-                                        <p:attrNameLst>
-                                          <p:attrName>style.visibility</p:attrName>
-                                        </p:attrNameLst>
-                                      </p:cBhvr>
-                                      <p:to>
-                                        <p:strVal val="visible"/>
-                                      </p:to>
-                                    </p:set>
-                                  </p:childTnLst>
-                                </p:cTn>
-                              </p:par>
-                            </p:childTnLst>
-                          </p:cTn>
-                        </p:par>
-                      </p:childTnLst>
-                    </p:cTn>
-                  </p:par>
                 </p:childTnLst>
               </p:cTn>
               <p:prevCondLst>
@@ -8202,10 +3942,10 @@
             <p:nvPr/>
           </p:nvPicPr>
           <p:blipFill>
-            <a:blip r:embed="rId3">
+            <a:blip>
               <a:extLst>
                 <a:ext uri="{96DAC541-7B7A-43D3-8B79-37D633B846F1}">
-                  <asvg:svgBlip xmlns:asvg="http://schemas.microsoft.com/office/drawing/2016/SVG/main" r:embed="rId4"/>
+                  <asvg:svgBlip xmlns:asvg="http://schemas.microsoft.com/office/drawing/2016/SVG/main" r:embed="rId3"/>
                 </a:ext>
               </a:extLst>
             </a:blip>
@@ -8237,10 +3977,10 @@
             <p:nvPr/>
           </p:nvPicPr>
           <p:blipFill>
-            <a:blip r:embed="rId3">
+            <a:blip>
               <a:extLst>
                 <a:ext uri="{96DAC541-7B7A-43D3-8B79-37D633B846F1}">
-                  <asvg:svgBlip xmlns:asvg="http://schemas.microsoft.com/office/drawing/2016/SVG/main" r:embed="rId4"/>
+                  <asvg:svgBlip xmlns:asvg="http://schemas.microsoft.com/office/drawing/2016/SVG/main" r:embed="rId3"/>
                 </a:ext>
               </a:extLst>
             </a:blip>
@@ -8946,7 +4686,7 @@
           <p:nvPr/>
         </p:nvPicPr>
         <p:blipFill>
-          <a:blip r:embed="rId3">
+          <a:blip r:embed="rId2">
             <a:extLst>
               <a:ext uri="{28A0092B-C50C-407E-A947-70E740481C1C}">
                 <a14:useLocalDpi xmlns:a14="http://schemas.microsoft.com/office/drawing/2010/main" val="0"/>
@@ -10092,7 +5832,7 @@
 </file>
 
 <file path=ppt/slides/slide2.xml><?xml version="1.0" encoding="utf-8"?>
-<p:sld xmlns:a="http://schemas.openxmlformats.org/drawingml/2006/main" xmlns:r="http://schemas.openxmlformats.org/officeDocument/2006/relationships" xmlns:p="http://schemas.openxmlformats.org/presentationml/2006/main">
+<p:sld xmlns:a="http://schemas.openxmlformats.org/drawingml/2006/main" xmlns:r="http://schemas.openxmlformats.org/officeDocument/2006/relationships" xmlns:p="http://schemas.openxmlformats.org/presentationml/2006/main" show="0">
   <p:cSld>
     <p:spTree>
       <p:nvGrpSpPr>
@@ -10130,10 +5870,9 @@
           <a:lstStyle/>
           <a:p>
             <a:r>
-              <a:rPr lang="en-US" dirty="0" err="1"/>
-              <a:t>WaitList</a:t>
-            </a:r>
-            <a:endParaRPr lang="en-US" dirty="0"/>
+              <a:rPr lang="en-US" dirty="0"/>
+              <a:t>Wait List</a:t>
+            </a:r>
           </a:p>
         </p:txBody>
       </p:sp>
@@ -11235,6 +6974,295 @@
       </p:grpSpPr>
       <p:sp>
         <p:nvSpPr>
+          <p:cNvPr id="2" name="Title 1">
+            <a:extLst>
+              <a:ext uri="{FF2B5EF4-FFF2-40B4-BE49-F238E27FC236}">
+                <a16:creationId xmlns:a16="http://schemas.microsoft.com/office/drawing/2014/main" id="{4BD528E0-8295-FA54-9214-1A0ED6BFACA6}"/>
+              </a:ext>
+            </a:extLst>
+          </p:cNvPr>
+          <p:cNvSpPr>
+            <a:spLocks noGrp="1"/>
+          </p:cNvSpPr>
+          <p:nvPr>
+            <p:ph type="title"/>
+          </p:nvPr>
+        </p:nvSpPr>
+        <p:spPr/>
+        <p:txBody>
+          <a:bodyPr>
+            <a:normAutofit fontScale="90000"/>
+          </a:bodyPr>
+          <a:lstStyle/>
+          <a:p>
+            <a:r>
+              <a:rPr lang="en-US" dirty="0"/>
+              <a:t>For Fun</a:t>
+            </a:r>
+          </a:p>
+        </p:txBody>
+      </p:sp>
+      <p:sp>
+        <p:nvSpPr>
+          <p:cNvPr id="3" name="Content Placeholder 2">
+            <a:extLst>
+              <a:ext uri="{FF2B5EF4-FFF2-40B4-BE49-F238E27FC236}">
+                <a16:creationId xmlns:a16="http://schemas.microsoft.com/office/drawing/2014/main" id="{FF07C672-761B-3F06-0A41-2995E633D6C6}"/>
+              </a:ext>
+            </a:extLst>
+          </p:cNvPr>
+          <p:cNvSpPr>
+            <a:spLocks noGrp="1"/>
+          </p:cNvSpPr>
+          <p:nvPr>
+            <p:ph idx="1"/>
+          </p:nvPr>
+        </p:nvSpPr>
+        <p:spPr/>
+        <p:txBody>
+          <a:bodyPr/>
+          <a:lstStyle/>
+          <a:p>
+            <a:r>
+              <a:rPr lang="en-US" dirty="0">
+                <a:hlinkClick r:id="rId4"/>
+              </a:rPr>
+              <a:t>The C++ Documentary on YouTube</a:t>
+            </a:r>
+            <a:endParaRPr lang="en-US" dirty="0"/>
+          </a:p>
+        </p:txBody>
+      </p:sp>
+      <p:pic>
+        <p:nvPicPr>
+          <p:cNvPr id="4" name="Picture 3">
+            <a:extLst>
+              <a:ext uri="{FF2B5EF4-FFF2-40B4-BE49-F238E27FC236}">
+                <a16:creationId xmlns:a16="http://schemas.microsoft.com/office/drawing/2014/main" id="{9F5A7D62-C8EA-5663-7E81-FC8D98A0F722}"/>
+              </a:ext>
+            </a:extLst>
+          </p:cNvPr>
+          <p:cNvPicPr>
+            <a:picLocks noChangeAspect="1"/>
+          </p:cNvPicPr>
+          <p:nvPr/>
+        </p:nvPicPr>
+        <p:blipFill>
+          <a:blip r:embed="rId5"/>
+          <a:stretch>
+            <a:fillRect/>
+          </a:stretch>
+        </p:blipFill>
+        <p:spPr>
+          <a:xfrm>
+            <a:off x="1328651" y="1759527"/>
+            <a:ext cx="4170218" cy="4170218"/>
+          </a:xfrm>
+          <a:prstGeom prst="rect">
+            <a:avLst/>
+          </a:prstGeom>
+        </p:spPr>
+      </p:pic>
+      <p:pic>
+        <p:nvPicPr>
+          <p:cNvPr id="11" name="Online Media 10" descr="The Story of C++ : The World's Most Consequential Programming Language | The Official Story">
+            <a:hlinkClick r:id="" action="ppaction://media"/>
+            <a:extLst>
+              <a:ext uri="{FF2B5EF4-FFF2-40B4-BE49-F238E27FC236}">
+                <a16:creationId xmlns:a16="http://schemas.microsoft.com/office/drawing/2014/main" id="{47ADF07D-059A-8D44-1D26-7AE8A5FD476E}"/>
+              </a:ext>
+            </a:extLst>
+          </p:cNvPr>
+          <p:cNvPicPr>
+            <a:picLocks noRot="1" noChangeAspect="1"/>
+          </p:cNvPicPr>
+          <p:nvPr>
+            <a:videoFile r:link="rId1"/>
+          </p:nvPr>
+        </p:nvPicPr>
+        <p:blipFill>
+          <a:blip r:embed="rId6"/>
+          <a:stretch>
+            <a:fillRect/>
+          </a:stretch>
+        </p:blipFill>
+        <p:spPr>
+          <a:xfrm>
+            <a:off x="6096000" y="2252979"/>
+            <a:ext cx="5634182" cy="3183313"/>
+          </a:xfrm>
+          <a:prstGeom prst="rect">
+            <a:avLst/>
+          </a:prstGeom>
+        </p:spPr>
+      </p:pic>
+    </p:spTree>
+    <p:extLst>
+      <p:ext uri="{BB962C8B-B14F-4D97-AF65-F5344CB8AC3E}">
+        <p14:creationId xmlns:p14="http://schemas.microsoft.com/office/powerpoint/2010/main" val="1962913987"/>
+      </p:ext>
+    </p:extLst>
+  </p:cSld>
+  <p:clrMapOvr>
+    <a:masterClrMapping/>
+  </p:clrMapOvr>
+  <p:timing>
+    <p:tnLst>
+      <p:par>
+        <p:cTn id="1" dur="indefinite" restart="never" nodeType="tmRoot">
+          <p:childTnLst>
+            <p:seq concurrent="1" nextAc="seek">
+              <p:cTn id="2" dur="indefinite" nodeType="mainSeq">
+                <p:childTnLst>
+                  <p:par>
+                    <p:cTn id="3" fill="hold">
+                      <p:stCondLst>
+                        <p:cond delay="indefinite"/>
+                      </p:stCondLst>
+                      <p:childTnLst>
+                        <p:par>
+                          <p:cTn id="4" fill="hold">
+                            <p:stCondLst>
+                              <p:cond delay="0"/>
+                            </p:stCondLst>
+                            <p:childTnLst>
+                              <p:par>
+                                <p:cTn id="5" presetID="1" presetClass="mediacall" presetSubtype="0" fill="hold" nodeType="clickEffect">
+                                  <p:stCondLst>
+                                    <p:cond delay="0"/>
+                                  </p:stCondLst>
+                                  <p:childTnLst>
+                                    <p:cmd type="call" cmd="playFrom(0.0)">
+                                      <p:cBhvr>
+                                        <p:cTn id="6" dur="1" fill="hold"/>
+                                        <p:tgtEl>
+                                          <p:spTgt spid="11"/>
+                                        </p:tgtEl>
+                                      </p:cBhvr>
+                                    </p:cmd>
+                                  </p:childTnLst>
+                                </p:cTn>
+                              </p:par>
+                            </p:childTnLst>
+                          </p:cTn>
+                        </p:par>
+                      </p:childTnLst>
+                    </p:cTn>
+                  </p:par>
+                </p:childTnLst>
+              </p:cTn>
+              <p:prevCondLst>
+                <p:cond evt="onPrev" delay="0">
+                  <p:tgtEl>
+                    <p:sldTgt/>
+                  </p:tgtEl>
+                </p:cond>
+              </p:prevCondLst>
+              <p:nextCondLst>
+                <p:cond evt="onNext" delay="0">
+                  <p:tgtEl>
+                    <p:sldTgt/>
+                  </p:tgtEl>
+                </p:cond>
+              </p:nextCondLst>
+            </p:seq>
+            <p:video>
+              <p:cMediaNode vol="80000">
+                <p:cTn id="7" fill="hold" display="0">
+                  <p:stCondLst>
+                    <p:cond delay="indefinite"/>
+                  </p:stCondLst>
+                </p:cTn>
+                <p:tgtEl>
+                  <p:spTgt spid="11"/>
+                </p:tgtEl>
+              </p:cMediaNode>
+            </p:video>
+            <p:seq concurrent="1" nextAc="seek">
+              <p:cTn id="8" restart="whenNotActive" fill="hold" evtFilter="cancelBubble" nodeType="interactiveSeq">
+                <p:stCondLst>
+                  <p:cond evt="onClick" delay="0">
+                    <p:tgtEl>
+                      <p:spTgt spid="11"/>
+                    </p:tgtEl>
+                  </p:cond>
+                </p:stCondLst>
+                <p:endSync evt="end" delay="0">
+                  <p:rtn val="all"/>
+                </p:endSync>
+                <p:childTnLst>
+                  <p:par>
+                    <p:cTn id="9" fill="hold">
+                      <p:stCondLst>
+                        <p:cond delay="0"/>
+                      </p:stCondLst>
+                      <p:childTnLst>
+                        <p:par>
+                          <p:cTn id="10" fill="hold">
+                            <p:stCondLst>
+                              <p:cond delay="0"/>
+                            </p:stCondLst>
+                            <p:childTnLst>
+                              <p:par>
+                                <p:cTn id="11" presetID="2" presetClass="mediacall" presetSubtype="0" fill="hold" nodeType="clickEffect">
+                                  <p:stCondLst>
+                                    <p:cond delay="0"/>
+                                  </p:stCondLst>
+                                  <p:childTnLst>
+                                    <p:cmd type="call" cmd="togglePause">
+                                      <p:cBhvr>
+                                        <p:cTn id="12" dur="1" fill="hold"/>
+                                        <p:tgtEl>
+                                          <p:spTgt spid="11"/>
+                                        </p:tgtEl>
+                                      </p:cBhvr>
+                                    </p:cmd>
+                                  </p:childTnLst>
+                                </p:cTn>
+                              </p:par>
+                            </p:childTnLst>
+                          </p:cTn>
+                        </p:par>
+                      </p:childTnLst>
+                    </p:cTn>
+                  </p:par>
+                </p:childTnLst>
+              </p:cTn>
+              <p:nextCondLst>
+                <p:cond evt="onClick" delay="0">
+                  <p:tgtEl>
+                    <p:spTgt spid="11"/>
+                  </p:tgtEl>
+                </p:cond>
+              </p:nextCondLst>
+            </p:seq>
+          </p:childTnLst>
+        </p:cTn>
+      </p:par>
+    </p:tnLst>
+  </p:timing>
+</p:sld>
+</file>
+
+<file path=ppt/slides/slide23.xml><?xml version="1.0" encoding="utf-8"?>
+<p:sld xmlns:a="http://schemas.openxmlformats.org/drawingml/2006/main" xmlns:r="http://schemas.openxmlformats.org/officeDocument/2006/relationships" xmlns:p="http://schemas.openxmlformats.org/presentationml/2006/main">
+  <p:cSld>
+    <p:spTree>
+      <p:nvGrpSpPr>
+        <p:cNvPr id="1" name=""/>
+        <p:cNvGrpSpPr/>
+        <p:nvPr/>
+      </p:nvGrpSpPr>
+      <p:grpSpPr>
+        <a:xfrm>
+          <a:off x="0" y="0"/>
+          <a:ext cx="0" cy="0"/>
+          <a:chOff x="0" y="0"/>
+          <a:chExt cx="0" cy="0"/>
+        </a:xfrm>
+      </p:grpSpPr>
+      <p:sp>
+        <p:nvSpPr>
           <p:cNvPr id="3" name="Title 2">
             <a:extLst>
               <a:ext uri="{FF2B5EF4-FFF2-40B4-BE49-F238E27FC236}">
@@ -11474,7 +7502,7 @@
             <a:fld id="{97DD1AB5-42BA-4E8A-BFEE-435884E16AAB}" type="slidenum">
               <a:rPr lang="en-US" sz="1600"/>
               <a:pPr/>
-              <a:t>22</a:t>
+              <a:t>23</a:t>
             </a:fld>
             <a:endParaRPr lang="en-US" sz="1600" dirty="0"/>
           </a:p>
@@ -11709,7 +7737,7 @@
 </p:sld>
 </file>
 
-<file path=ppt/slides/slide23.xml><?xml version="1.0" encoding="utf-8"?>
+<file path=ppt/slides/slide24.xml><?xml version="1.0" encoding="utf-8"?>
 <p:sld xmlns:a="http://schemas.openxmlformats.org/drawingml/2006/main" xmlns:r="http://schemas.openxmlformats.org/officeDocument/2006/relationships" xmlns:p="http://schemas.openxmlformats.org/presentationml/2006/main">
   <p:cSld>
     <p:spTree>
@@ -11923,7 +7951,7 @@
             <a:fld id="{97DD1AB5-42BA-4E8A-BFEE-435884E16AAB}" type="slidenum">
               <a:rPr lang="en-US" sz="1600"/>
               <a:pPr/>
-              <a:t>23</a:t>
+              <a:t>24</a:t>
             </a:fld>
             <a:endParaRPr lang="en-US" sz="1600" dirty="0"/>
           </a:p>
@@ -12000,10 +8028,7 @@
           </a:p>
           <a:p>
             <a:pPr algn="ctr"/>
-            <a:r>
-              <a:rPr lang="en-US" sz="2800" dirty="0"/>
-              <a:t>SN014</a:t>
-            </a:r>
+            <a:endParaRPr lang="en-US" sz="2800" dirty="0"/>
           </a:p>
         </p:txBody>
       </p:sp>
@@ -12043,10 +8068,7 @@
           </a:p>
           <a:p>
             <a:pPr algn="ctr"/>
-            <a:r>
-              <a:rPr lang="en-US" sz="2800" dirty="0"/>
-              <a:t>SN014</a:t>
-            </a:r>
+            <a:endParaRPr lang="en-US" sz="2800" dirty="0"/>
           </a:p>
         </p:txBody>
       </p:sp>
@@ -12193,36 +8215,6 @@
           </a:p>
         </p:txBody>
       </p:sp>
-      <p:pic>
-        <p:nvPicPr>
-          <p:cNvPr id="13" name="Picture 12">
-            <a:extLst>
-              <a:ext uri="{FF2B5EF4-FFF2-40B4-BE49-F238E27FC236}">
-                <a16:creationId xmlns:a16="http://schemas.microsoft.com/office/drawing/2014/main" id="{F0D2CB33-098B-76EE-E58A-E5874E7A6BAE}"/>
-              </a:ext>
-            </a:extLst>
-          </p:cNvPr>
-          <p:cNvPicPr>
-            <a:picLocks noChangeAspect="1"/>
-          </p:cNvPicPr>
-          <p:nvPr/>
-        </p:nvPicPr>
-        <p:blipFill>
-          <a:blip r:embed="rId3"/>
-          <a:stretch>
-            <a:fillRect/>
-          </a:stretch>
-        </p:blipFill>
-        <p:spPr>
-          <a:xfrm>
-            <a:off x="4718145" y="3864017"/>
-            <a:ext cx="2755710" cy="2755710"/>
-          </a:xfrm>
-          <a:prstGeom prst="rect">
-            <a:avLst/>
-          </a:prstGeom>
-        </p:spPr>
-      </p:pic>
       <p:sp>
         <p:nvSpPr>
           <p:cNvPr id="14" name="TextBox 13">
@@ -12276,8 +8268,8 @@
         </p:nvSpPr>
         <p:spPr>
           <a:xfrm>
-            <a:off x="9886146" y="2082238"/>
-            <a:ext cx="2209524" cy="1077218"/>
+            <a:off x="9572304" y="2163678"/>
+            <a:ext cx="2209524" cy="584775"/>
           </a:xfrm>
           <a:prstGeom prst="rect">
             <a:avLst/>
@@ -12296,11 +8288,41 @@
                   <a:srgbClr val="C00000"/>
                 </a:solidFill>
               </a:rPr>
-              <a:t>Room might change!</a:t>
+              <a:t>Room TBD!</a:t>
             </a:r>
           </a:p>
         </p:txBody>
       </p:sp>
+      <p:pic>
+        <p:nvPicPr>
+          <p:cNvPr id="15" name="Picture 14">
+            <a:extLst>
+              <a:ext uri="{FF2B5EF4-FFF2-40B4-BE49-F238E27FC236}">
+                <a16:creationId xmlns:a16="http://schemas.microsoft.com/office/drawing/2014/main" id="{83C45B54-1D49-727E-262D-ED6E926023B5}"/>
+              </a:ext>
+            </a:extLst>
+          </p:cNvPr>
+          <p:cNvPicPr>
+            <a:picLocks noChangeAspect="1"/>
+          </p:cNvPicPr>
+          <p:nvPr/>
+        </p:nvPicPr>
+        <p:blipFill>
+          <a:blip r:embed="rId3"/>
+          <a:stretch>
+            <a:fillRect/>
+          </a:stretch>
+        </p:blipFill>
+        <p:spPr>
+          <a:xfrm>
+            <a:off x="4617027" y="3687288"/>
+            <a:ext cx="2957944" cy="2957944"/>
+          </a:xfrm>
+          <a:prstGeom prst="rect">
+            <a:avLst/>
+          </a:prstGeom>
+        </p:spPr>
+      </p:pic>
     </p:spTree>
     <p:extLst>
       <p:ext uri="{BB962C8B-B14F-4D97-AF65-F5344CB8AC3E}">
@@ -12637,60 +8659,15 @@
                                   </p:childTnLst>
                                 </p:cTn>
                               </p:par>
-                            </p:childTnLst>
-                          </p:cTn>
-                        </p:par>
-                      </p:childTnLst>
-                    </p:cTn>
-                  </p:par>
-                  <p:par>
-                    <p:cTn id="31" fill="hold">
-                      <p:stCondLst>
-                        <p:cond delay="indefinite"/>
-                      </p:stCondLst>
-                      <p:childTnLst>
-                        <p:par>
-                          <p:cTn id="32" fill="hold">
-                            <p:stCondLst>
-                              <p:cond delay="0"/>
-                            </p:stCondLst>
-                            <p:childTnLst>
                               <p:par>
-                                <p:cTn id="33" presetID="1" presetClass="entr" presetSubtype="0" fill="hold" nodeType="clickEffect">
+                                <p:cTn id="31" presetID="1" presetClass="entr" presetSubtype="0" fill="hold" grpId="0" nodeType="withEffect">
                                   <p:stCondLst>
                                     <p:cond delay="0"/>
                                   </p:stCondLst>
                                   <p:childTnLst>
                                     <p:set>
                                       <p:cBhvr>
-                                        <p:cTn id="34" dur="1" fill="hold">
-                                          <p:stCondLst>
-                                            <p:cond delay="0"/>
-                                          </p:stCondLst>
-                                        </p:cTn>
-                                        <p:tgtEl>
-                                          <p:spTgt spid="13"/>
-                                        </p:tgtEl>
-                                        <p:attrNameLst>
-                                          <p:attrName>style.visibility</p:attrName>
-                                        </p:attrNameLst>
-                                      </p:cBhvr>
-                                      <p:to>
-                                        <p:strVal val="visible"/>
-                                      </p:to>
-                                    </p:set>
-                                  </p:childTnLst>
-                                </p:cTn>
-                              </p:par>
-                              <p:par>
-                                <p:cTn id="35" presetID="1" presetClass="entr" presetSubtype="0" fill="hold" grpId="0" nodeType="withEffect">
-                                  <p:stCondLst>
-                                    <p:cond delay="0"/>
-                                  </p:stCondLst>
-                                  <p:childTnLst>
-                                    <p:set>
-                                      <p:cBhvr>
-                                        <p:cTn id="36" dur="1" fill="hold">
+                                        <p:cTn id="32" dur="1" fill="hold">
                                           <p:stCondLst>
                                             <p:cond delay="0"/>
                                           </p:stCondLst>
@@ -12751,7 +8728,7 @@
 </p:sld>
 </file>
 
-<file path=ppt/slides/slide24.xml><?xml version="1.0" encoding="utf-8"?>
+<file path=ppt/slides/slide25.xml><?xml version="1.0" encoding="utf-8"?>
 <p:sld xmlns:a="http://schemas.openxmlformats.org/drawingml/2006/main" xmlns:r="http://schemas.openxmlformats.org/officeDocument/2006/relationships" xmlns:p="http://schemas.openxmlformats.org/presentationml/2006/main">
   <p:cSld>
     <p:spTree>
@@ -12849,7 +8826,7 @@
 </p:sld>
 </file>
 
-<file path=ppt/slides/slide25.xml><?xml version="1.0" encoding="utf-8"?>
+<file path=ppt/slides/slide26.xml><?xml version="1.0" encoding="utf-8"?>
 <p:sld xmlns:a="http://schemas.openxmlformats.org/drawingml/2006/main" xmlns:r="http://schemas.openxmlformats.org/officeDocument/2006/relationships" xmlns:p="http://schemas.openxmlformats.org/presentationml/2006/main">
   <p:cSld>
     <p:spTree>
@@ -13107,7 +9084,7 @@
             <a:fld id="{97DD1AB5-42BA-4E8A-BFEE-435884E16AAB}" type="slidenum">
               <a:rPr lang="en-US" sz="1600"/>
               <a:pPr/>
-              <a:t>25</a:t>
+              <a:t>26</a:t>
             </a:fld>
             <a:endParaRPr lang="en-US" sz="1600" dirty="0"/>
           </a:p>
@@ -13342,7 +9319,7 @@
 </p:sld>
 </file>
 
-<file path=ppt/slides/slide26.xml><?xml version="1.0" encoding="utf-8"?>
+<file path=ppt/slides/slide27.xml><?xml version="1.0" encoding="utf-8"?>
 <p:sld xmlns:a="http://schemas.openxmlformats.org/drawingml/2006/main" xmlns:r="http://schemas.openxmlformats.org/officeDocument/2006/relationships" xmlns:p="http://schemas.openxmlformats.org/presentationml/2006/main">
   <p:cSld>
     <p:spTree>
@@ -13671,7 +9648,7 @@
             <a:fld id="{97DD1AB5-42BA-4E8A-BFEE-435884E16AAB}" type="slidenum">
               <a:rPr lang="en-US" sz="1600"/>
               <a:pPr/>
-              <a:t>26</a:t>
+              <a:t>27</a:t>
             </a:fld>
             <a:endParaRPr lang="en-US" sz="1600" dirty="0"/>
           </a:p>
@@ -14243,7 +10220,7 @@
 </p:sld>
 </file>
 
-<file path=ppt/slides/slide27.xml><?xml version="1.0" encoding="utf-8"?>
+<file path=ppt/slides/slide28.xml><?xml version="1.0" encoding="utf-8"?>
 <p:sld xmlns:a="http://schemas.openxmlformats.org/drawingml/2006/main" xmlns:r="http://schemas.openxmlformats.org/officeDocument/2006/relationships" xmlns:p="http://schemas.openxmlformats.org/presentationml/2006/main">
   <p:cSld>
     <p:spTree>
@@ -14642,7 +10619,7 @@
             <a:fld id="{97DD1AB5-42BA-4E8A-BFEE-435884E16AAB}" type="slidenum">
               <a:rPr lang="en-US" sz="1600"/>
               <a:pPr/>
-              <a:t>27</a:t>
+              <a:t>28</a:t>
             </a:fld>
             <a:endParaRPr lang="en-US" sz="1600" dirty="0"/>
           </a:p>
@@ -14936,7 +10913,7 @@
 </p:sld>
 </file>
 
-<file path=ppt/slides/slide28.xml><?xml version="1.0" encoding="utf-8"?>
+<file path=ppt/slides/slide29.xml><?xml version="1.0" encoding="utf-8"?>
 <p:sld xmlns:a="http://schemas.openxmlformats.org/drawingml/2006/main" xmlns:r="http://schemas.openxmlformats.org/officeDocument/2006/relationships" xmlns:p="http://schemas.openxmlformats.org/presentationml/2006/main">
   <p:cSld>
     <p:spTree>
@@ -14990,111 +10967,6 @@
     <p:extLst>
       <p:ext uri="{BB962C8B-B14F-4D97-AF65-F5344CB8AC3E}">
         <p14:creationId xmlns:p14="http://schemas.microsoft.com/office/powerpoint/2010/main" val="537779102"/>
-      </p:ext>
-    </p:extLst>
-  </p:cSld>
-  <p:clrMapOvr>
-    <a:masterClrMapping/>
-  </p:clrMapOvr>
-</p:sld>
-</file>
-
-<file path=ppt/slides/slide29.xml><?xml version="1.0" encoding="utf-8"?>
-<p:sld xmlns:a="http://schemas.openxmlformats.org/drawingml/2006/main" xmlns:r="http://schemas.openxmlformats.org/officeDocument/2006/relationships" xmlns:p="http://schemas.openxmlformats.org/presentationml/2006/main">
-  <p:cSld>
-    <p:spTree>
-      <p:nvGrpSpPr>
-        <p:cNvPr id="1" name=""/>
-        <p:cNvGrpSpPr/>
-        <p:nvPr/>
-      </p:nvGrpSpPr>
-      <p:grpSpPr>
-        <a:xfrm>
-          <a:off x="0" y="0"/>
-          <a:ext cx="0" cy="0"/>
-          <a:chOff x="0" y="0"/>
-          <a:chExt cx="0" cy="0"/>
-        </a:xfrm>
-      </p:grpSpPr>
-      <p:sp>
-        <p:nvSpPr>
-          <p:cNvPr id="2" name="Title 1">
-            <a:extLst>
-              <a:ext uri="{FF2B5EF4-FFF2-40B4-BE49-F238E27FC236}">
-                <a16:creationId xmlns:a16="http://schemas.microsoft.com/office/drawing/2014/main" id="{8F9F4EBE-18C1-9B7F-D1FE-0017698BA018}"/>
-              </a:ext>
-            </a:extLst>
-          </p:cNvPr>
-          <p:cNvSpPr>
-            <a:spLocks noGrp="1"/>
-          </p:cNvSpPr>
-          <p:nvPr>
-            <p:ph type="title"/>
-          </p:nvPr>
-        </p:nvSpPr>
-        <p:spPr/>
-        <p:txBody>
-          <a:bodyPr/>
-          <a:lstStyle/>
-          <a:p>
-            <a:r>
-              <a:rPr lang="en-US" dirty="0"/>
-              <a:t>High-level Problem</a:t>
-            </a:r>
-          </a:p>
-        </p:txBody>
-      </p:sp>
-      <p:pic>
-        <p:nvPicPr>
-          <p:cNvPr id="8194" name="Picture 2">
-            <a:extLst>
-              <a:ext uri="{FF2B5EF4-FFF2-40B4-BE49-F238E27FC236}">
-                <a16:creationId xmlns:a16="http://schemas.microsoft.com/office/drawing/2014/main" id="{9C92A016-44F9-0D53-F3E4-DA4DB716BECB}"/>
-              </a:ext>
-            </a:extLst>
-          </p:cNvPr>
-          <p:cNvPicPr>
-            <a:picLocks noChangeAspect="1" noChangeArrowheads="1"/>
-          </p:cNvPicPr>
-          <p:nvPr/>
-        </p:nvPicPr>
-        <p:blipFill>
-          <a:blip r:embed="rId3">
-            <a:extLst>
-              <a:ext uri="{28A0092B-C50C-407E-A947-70E740481C1C}">
-                <a14:useLocalDpi xmlns:a14="http://schemas.microsoft.com/office/drawing/2010/main" val="0"/>
-              </a:ext>
-            </a:extLst>
-          </a:blip>
-          <a:srcRect/>
-          <a:stretch>
-            <a:fillRect/>
-          </a:stretch>
-        </p:blipFill>
-        <p:spPr bwMode="auto">
-          <a:xfrm>
-            <a:off x="1510673" y="945518"/>
-            <a:ext cx="9170654" cy="5670134"/>
-          </a:xfrm>
-          <a:prstGeom prst="rect">
-            <a:avLst/>
-          </a:prstGeom>
-          <a:noFill/>
-          <a:extLst>
-            <a:ext uri="{909E8E84-426E-40DD-AFC4-6F175D3DCCD1}">
-              <a14:hiddenFill xmlns:a14="http://schemas.microsoft.com/office/drawing/2010/main">
-                <a:solidFill>
-                  <a:srgbClr val="FFFFFF"/>
-                </a:solidFill>
-              </a14:hiddenFill>
-            </a:ext>
-          </a:extLst>
-        </p:spPr>
-      </p:pic>
-    </p:spTree>
-    <p:extLst>
-      <p:ext uri="{BB962C8B-B14F-4D97-AF65-F5344CB8AC3E}">
-        <p14:creationId xmlns:p14="http://schemas.microsoft.com/office/powerpoint/2010/main" val="761739978"/>
       </p:ext>
     </p:extLst>
   </p:cSld>
@@ -15698,6 +11570,111 @@
           <p:cNvPr id="2" name="Title 1">
             <a:extLst>
               <a:ext uri="{FF2B5EF4-FFF2-40B4-BE49-F238E27FC236}">
+                <a16:creationId xmlns:a16="http://schemas.microsoft.com/office/drawing/2014/main" id="{8F9F4EBE-18C1-9B7F-D1FE-0017698BA018}"/>
+              </a:ext>
+            </a:extLst>
+          </p:cNvPr>
+          <p:cNvSpPr>
+            <a:spLocks noGrp="1"/>
+          </p:cNvSpPr>
+          <p:nvPr>
+            <p:ph type="title"/>
+          </p:nvPr>
+        </p:nvSpPr>
+        <p:spPr/>
+        <p:txBody>
+          <a:bodyPr/>
+          <a:lstStyle/>
+          <a:p>
+            <a:r>
+              <a:rPr lang="en-US" dirty="0"/>
+              <a:t>High-level Problem</a:t>
+            </a:r>
+          </a:p>
+        </p:txBody>
+      </p:sp>
+      <p:pic>
+        <p:nvPicPr>
+          <p:cNvPr id="8194" name="Picture 2">
+            <a:extLst>
+              <a:ext uri="{FF2B5EF4-FFF2-40B4-BE49-F238E27FC236}">
+                <a16:creationId xmlns:a16="http://schemas.microsoft.com/office/drawing/2014/main" id="{9C92A016-44F9-0D53-F3E4-DA4DB716BECB}"/>
+              </a:ext>
+            </a:extLst>
+          </p:cNvPr>
+          <p:cNvPicPr>
+            <a:picLocks noChangeAspect="1" noChangeArrowheads="1"/>
+          </p:cNvPicPr>
+          <p:nvPr/>
+        </p:nvPicPr>
+        <p:blipFill>
+          <a:blip r:embed="rId2">
+            <a:extLst>
+              <a:ext uri="{28A0092B-C50C-407E-A947-70E740481C1C}">
+                <a14:useLocalDpi xmlns:a14="http://schemas.microsoft.com/office/drawing/2010/main" val="0"/>
+              </a:ext>
+            </a:extLst>
+          </a:blip>
+          <a:srcRect/>
+          <a:stretch>
+            <a:fillRect/>
+          </a:stretch>
+        </p:blipFill>
+        <p:spPr bwMode="auto">
+          <a:xfrm>
+            <a:off x="1510673" y="945518"/>
+            <a:ext cx="9170654" cy="5670134"/>
+          </a:xfrm>
+          <a:prstGeom prst="rect">
+            <a:avLst/>
+          </a:prstGeom>
+          <a:noFill/>
+          <a:extLst>
+            <a:ext uri="{909E8E84-426E-40DD-AFC4-6F175D3DCCD1}">
+              <a14:hiddenFill xmlns:a14="http://schemas.microsoft.com/office/drawing/2010/main">
+                <a:solidFill>
+                  <a:srgbClr val="FFFFFF"/>
+                </a:solidFill>
+              </a14:hiddenFill>
+            </a:ext>
+          </a:extLst>
+        </p:spPr>
+      </p:pic>
+    </p:spTree>
+    <p:extLst>
+      <p:ext uri="{BB962C8B-B14F-4D97-AF65-F5344CB8AC3E}">
+        <p14:creationId xmlns:p14="http://schemas.microsoft.com/office/powerpoint/2010/main" val="761739978"/>
+      </p:ext>
+    </p:extLst>
+  </p:cSld>
+  <p:clrMapOvr>
+    <a:masterClrMapping/>
+  </p:clrMapOvr>
+</p:sld>
+</file>
+
+<file path=ppt/slides/slide31.xml><?xml version="1.0" encoding="utf-8"?>
+<p:sld xmlns:a="http://schemas.openxmlformats.org/drawingml/2006/main" xmlns:r="http://schemas.openxmlformats.org/officeDocument/2006/relationships" xmlns:p="http://schemas.openxmlformats.org/presentationml/2006/main">
+  <p:cSld>
+    <p:spTree>
+      <p:nvGrpSpPr>
+        <p:cNvPr id="1" name=""/>
+        <p:cNvGrpSpPr/>
+        <p:nvPr/>
+      </p:nvGrpSpPr>
+      <p:grpSpPr>
+        <a:xfrm>
+          <a:off x="0" y="0"/>
+          <a:ext cx="0" cy="0"/>
+          <a:chOff x="0" y="0"/>
+          <a:chExt cx="0" cy="0"/>
+        </a:xfrm>
+      </p:grpSpPr>
+      <p:sp>
+        <p:nvSpPr>
+          <p:cNvPr id="2" name="Title 1">
+            <a:extLst>
+              <a:ext uri="{FF2B5EF4-FFF2-40B4-BE49-F238E27FC236}">
                 <a16:creationId xmlns:a16="http://schemas.microsoft.com/office/drawing/2014/main" id="{6D10F057-95D8-F8EB-BABD-0BB3DEDCFD75}"/>
               </a:ext>
             </a:extLst>
@@ -15736,7 +11713,7 @@
           <p:nvPr/>
         </p:nvPicPr>
         <p:blipFill>
-          <a:blip r:embed="rId3">
+          <a:blip r:embed="rId2">
             <a:extLst>
               <a:ext uri="{28A0092B-C50C-407E-A947-70E740481C1C}">
                 <a14:useLocalDpi xmlns:a14="http://schemas.microsoft.com/office/drawing/2010/main" val="0"/>
@@ -15803,10 +11780,10 @@
             <p:nvPr/>
           </p:nvPicPr>
           <p:blipFill>
-            <a:blip r:embed="rId4">
+            <a:blip>
               <a:extLst>
                 <a:ext uri="{96DAC541-7B7A-43D3-8B79-37D633B846F1}">
-                  <asvg:svgBlip xmlns:asvg="http://schemas.microsoft.com/office/drawing/2016/SVG/main" r:embed="rId5"/>
+                  <asvg:svgBlip xmlns:asvg="http://schemas.microsoft.com/office/drawing/2016/SVG/main" r:embed="rId3"/>
                 </a:ext>
               </a:extLst>
             </a:blip>
@@ -16187,7 +12164,7 @@
 </p:sld>
 </file>
 
-<file path=ppt/slides/slide31.xml><?xml version="1.0" encoding="utf-8"?>
+<file path=ppt/slides/slide32.xml><?xml version="1.0" encoding="utf-8"?>
 <p:sld xmlns:a="http://schemas.openxmlformats.org/drawingml/2006/main" xmlns:r="http://schemas.openxmlformats.org/officeDocument/2006/relationships" xmlns:p="http://schemas.openxmlformats.org/presentationml/2006/main">
   <p:cSld>
     <p:spTree>
@@ -18826,7 +14803,7 @@
               <a:pPr defTabSz="1219170">
                 <a:defRPr/>
               </a:pPr>
-              <a:t>31</a:t>
+              <a:t>32</a:t>
             </a:fld>
             <a:endParaRPr lang="en-US" sz="1600" dirty="0">
               <a:solidFill>
@@ -19357,7 +15334,7 @@
 </p:sld>
 </file>
 
-<file path=ppt/slides/slide32.xml><?xml version="1.0" encoding="utf-8"?>
+<file path=ppt/slides/slide33.xml><?xml version="1.0" encoding="utf-8"?>
 <p:sld xmlns:a="http://schemas.openxmlformats.org/drawingml/2006/main" xmlns:r="http://schemas.openxmlformats.org/officeDocument/2006/relationships" xmlns:p="http://schemas.openxmlformats.org/presentationml/2006/main">
   <p:cSld>
     <p:spTree>
@@ -20474,7 +16451,7 @@
               <a:pPr defTabSz="1219170">
                 <a:defRPr/>
               </a:pPr>
-              <a:t>32</a:t>
+              <a:t>33</a:t>
             </a:fld>
             <a:endParaRPr lang="en-US" sz="1600" dirty="0">
               <a:solidFill>
@@ -20924,7 +16901,7 @@
 </p:sld>
 </file>
 
-<file path=ppt/slides/slide33.xml><?xml version="1.0" encoding="utf-8"?>
+<file path=ppt/slides/slide34.xml><?xml version="1.0" encoding="utf-8"?>
 <p:sld xmlns:a="http://schemas.openxmlformats.org/drawingml/2006/main" xmlns:r="http://schemas.openxmlformats.org/officeDocument/2006/relationships" xmlns:p="http://schemas.openxmlformats.org/presentationml/2006/main">
   <p:cSld>
     <p:spTree>
@@ -21243,7 +17220,7 @@
 </p:sld>
 </file>
 
-<file path=ppt/slides/slide34.xml><?xml version="1.0" encoding="utf-8"?>
+<file path=ppt/slides/slide35.xml><?xml version="1.0" encoding="utf-8"?>
 <p:sld xmlns:a="http://schemas.openxmlformats.org/drawingml/2006/main" xmlns:r="http://schemas.openxmlformats.org/officeDocument/2006/relationships" xmlns:p="http://schemas.openxmlformats.org/presentationml/2006/main">
   <p:cSld>
     <p:spTree>
@@ -22354,7 +18331,7 @@
               <a:pPr defTabSz="1219170">
                 <a:defRPr/>
               </a:pPr>
-              <a:t>34</a:t>
+              <a:t>35</a:t>
             </a:fld>
             <a:endParaRPr lang="en-US" sz="1600" dirty="0">
               <a:solidFill>
@@ -24678,7 +20655,7 @@
 </p:sld>
 </file>
 
-<file path=ppt/slides/slide35.xml><?xml version="1.0" encoding="utf-8"?>
+<file path=ppt/slides/slide36.xml><?xml version="1.0" encoding="utf-8"?>
 <p:sld xmlns:a="http://schemas.openxmlformats.org/drawingml/2006/main" xmlns:r="http://schemas.openxmlformats.org/officeDocument/2006/relationships" xmlns:p="http://schemas.openxmlformats.org/presentationml/2006/main">
   <p:cSld>
     <p:spTree>
@@ -25039,7 +21016,7 @@
 </p:sld>
 </file>
 
-<file path=ppt/slides/slide36.xml><?xml version="1.0" encoding="utf-8"?>
+<file path=ppt/slides/slide37.xml><?xml version="1.0" encoding="utf-8"?>
 <p:sld xmlns:a="http://schemas.openxmlformats.org/drawingml/2006/main" xmlns:r="http://schemas.openxmlformats.org/officeDocument/2006/relationships" xmlns:p="http://schemas.openxmlformats.org/presentationml/2006/main">
   <p:cSld>
     <p:spTree>
@@ -26150,7 +22127,7 @@
               <a:pPr defTabSz="1219170">
                 <a:defRPr/>
               </a:pPr>
-              <a:t>36</a:t>
+              <a:t>37</a:t>
             </a:fld>
             <a:endParaRPr lang="en-US" sz="1600" dirty="0">
               <a:solidFill>
@@ -28081,7 +24058,7 @@
 </p:sld>
 </file>
 
-<file path=ppt/slides/slide37.xml><?xml version="1.0" encoding="utf-8"?>
+<file path=ppt/slides/slide38.xml><?xml version="1.0" encoding="utf-8"?>
 <p:sld xmlns:a="http://schemas.openxmlformats.org/drawingml/2006/main" xmlns:r="http://schemas.openxmlformats.org/officeDocument/2006/relationships" xmlns:p="http://schemas.openxmlformats.org/presentationml/2006/main">
   <p:cSld>
     <p:spTree>
@@ -29192,7 +25169,7 @@
               <a:pPr defTabSz="1219170">
                 <a:defRPr/>
               </a:pPr>
-              <a:t>37</a:t>
+              <a:t>38</a:t>
             </a:fld>
             <a:endParaRPr lang="en-US" sz="1600" dirty="0">
               <a:solidFill>
@@ -31048,7 +27025,7 @@
 </p:sld>
 </file>
 
-<file path=ppt/slides/slide38.xml><?xml version="1.0" encoding="utf-8"?>
+<file path=ppt/slides/slide39.xml><?xml version="1.0" encoding="utf-8"?>
 <p:sld xmlns:a="http://schemas.openxmlformats.org/drawingml/2006/main" xmlns:r="http://schemas.openxmlformats.org/officeDocument/2006/relationships" xmlns:p="http://schemas.openxmlformats.org/presentationml/2006/main">
   <p:cSld>
     <p:spTree>
@@ -31503,1334 +27480,6 @@
 </p:sld>
 </file>
 
-<file path=ppt/slides/slide39.xml><?xml version="1.0" encoding="utf-8"?>
-<p:sld xmlns:a="http://schemas.openxmlformats.org/drawingml/2006/main" xmlns:r="http://schemas.openxmlformats.org/officeDocument/2006/relationships" xmlns:p="http://schemas.openxmlformats.org/presentationml/2006/main">
-  <p:cSld>
-    <p:spTree>
-      <p:nvGrpSpPr>
-        <p:cNvPr id="1" name=""/>
-        <p:cNvGrpSpPr/>
-        <p:nvPr/>
-      </p:nvGrpSpPr>
-      <p:grpSpPr>
-        <a:xfrm>
-          <a:off x="0" y="0"/>
-          <a:ext cx="0" cy="0"/>
-          <a:chOff x="0" y="0"/>
-          <a:chExt cx="0" cy="0"/>
-        </a:xfrm>
-      </p:grpSpPr>
-      <p:sp>
-        <p:nvSpPr>
-          <p:cNvPr id="2" name="Title 1">
-            <a:extLst>
-              <a:ext uri="{FF2B5EF4-FFF2-40B4-BE49-F238E27FC236}">
-                <a16:creationId xmlns:a16="http://schemas.microsoft.com/office/drawing/2014/main" id="{83AE860B-85F5-412A-9967-3F6C35D6D751}"/>
-              </a:ext>
-            </a:extLst>
-          </p:cNvPr>
-          <p:cNvSpPr>
-            <a:spLocks noGrp="1"/>
-          </p:cNvSpPr>
-          <p:nvPr>
-            <p:ph type="title"/>
-          </p:nvPr>
-        </p:nvSpPr>
-        <p:spPr>
-          <a:xfrm>
-            <a:off x="0" y="-17916"/>
-            <a:ext cx="12192000" cy="881350"/>
-          </a:xfrm>
-        </p:spPr>
-        <p:txBody>
-          <a:bodyPr/>
-          <a:lstStyle/>
-          <a:p>
-            <a:r>
-              <a:rPr lang="en-US" dirty="0">
-                <a:latin typeface="Crimson Text" panose="02000503000000000000" pitchFamily="2" charset="0"/>
-              </a:rPr>
-              <a:t>Latency Numbers Every Programmer Should Know</a:t>
-            </a:r>
-            <a:endParaRPr lang="en-US" dirty="0"/>
-          </a:p>
-        </p:txBody>
-      </p:sp>
-      <p:graphicFrame>
-        <p:nvGraphicFramePr>
-          <p:cNvPr id="4" name="Table 3">
-            <a:extLst>
-              <a:ext uri="{FF2B5EF4-FFF2-40B4-BE49-F238E27FC236}">
-                <a16:creationId xmlns:a16="http://schemas.microsoft.com/office/drawing/2014/main" id="{E389AEE5-7AA7-4E19-B36A-5446E549222B}"/>
-              </a:ext>
-            </a:extLst>
-          </p:cNvPr>
-          <p:cNvGraphicFramePr>
-            <a:graphicFrameLocks noGrp="1"/>
-          </p:cNvGraphicFramePr>
-          <p:nvPr/>
-        </p:nvGraphicFramePr>
-        <p:xfrm>
-          <a:off x="1559923" y="2006602"/>
-          <a:ext cx="5852160" cy="4145281"/>
-        </p:xfrm>
-        <a:graphic>
-          <a:graphicData uri="http://schemas.openxmlformats.org/drawingml/2006/table">
-            <a:tbl>
-              <a:tblPr firstRow="1" bandRow="1">
-                <a:tableStyleId>{2D5ABB26-0587-4C30-8999-92F81FD0307C}</a:tableStyleId>
-              </a:tblPr>
-              <a:tblGrid>
-                <a:gridCol w="3050027">
-                  <a:extLst>
-                    <a:ext uri="{9D8B030D-6E8A-4147-A177-3AD203B41FA5}">
-                      <a16:colId xmlns:a16="http://schemas.microsoft.com/office/drawing/2014/main" val="3577304506"/>
-                    </a:ext>
-                  </a:extLst>
-                </a:gridCol>
-                <a:gridCol w="2802133">
-                  <a:extLst>
-                    <a:ext uri="{9D8B030D-6E8A-4147-A177-3AD203B41FA5}">
-                      <a16:colId xmlns:a16="http://schemas.microsoft.com/office/drawing/2014/main" val="3606947816"/>
-                    </a:ext>
-                  </a:extLst>
-                </a:gridCol>
-              </a:tblGrid>
-              <a:tr h="592183">
-                <a:tc>
-                  <a:txBody>
-                    <a:bodyPr/>
-                    <a:lstStyle/>
-                    <a:p>
-                      <a:pPr lvl="0" algn="r"/>
-                      <a:r>
-                        <a:rPr lang="en-US" sz="2700" b="1" dirty="0">
-                          <a:solidFill>
-                            <a:srgbClr val="C30037"/>
-                          </a:solidFill>
-                          <a:latin typeface="+mn-lt"/>
-                        </a:rPr>
-                        <a:t>1 ns</a:t>
-                      </a:r>
-                    </a:p>
-                  </a:txBody>
-                  <a:tcPr marL="0" marR="121920" marT="0" marB="0" anchor="ctr">
-                    <a:lnL w="12700" cap="flat" cmpd="sng" algn="ctr">
-                      <a:noFill/>
-                      <a:prstDash val="solid"/>
-                      <a:round/>
-                      <a:headEnd type="none" w="med" len="med"/>
-                      <a:tailEnd type="none" w="med" len="med"/>
-                    </a:lnL>
-                    <a:lnR>
-                      <a:noFill/>
-                    </a:lnR>
-                    <a:lnT w="12700" cap="flat" cmpd="sng" algn="ctr">
-                      <a:noFill/>
-                      <a:prstDash val="solid"/>
-                      <a:round/>
-                      <a:headEnd type="none" w="med" len="med"/>
-                      <a:tailEnd type="none" w="med" len="med"/>
-                    </a:lnT>
-                    <a:lnB>
-                      <a:noFill/>
-                    </a:lnB>
-                    <a:lnTlToBr w="12700" cmpd="sng">
-                      <a:noFill/>
-                      <a:prstDash val="solid"/>
-                    </a:lnTlToBr>
-                    <a:lnBlToTr w="12700" cmpd="sng">
-                      <a:noFill/>
-                      <a:prstDash val="solid"/>
-                    </a:lnBlToTr>
-                    <a:solidFill>
-                      <a:schemeClr val="tx1">
-                        <a:alpha val="7000"/>
-                      </a:schemeClr>
-                    </a:solidFill>
-                  </a:tcPr>
-                </a:tc>
-                <a:tc>
-                  <a:txBody>
-                    <a:bodyPr/>
-                    <a:lstStyle/>
-                    <a:p>
-                      <a:pPr algn="l"/>
-                      <a:r>
-                        <a:rPr lang="en-US" sz="2700" dirty="0">
-                          <a:solidFill>
-                            <a:schemeClr val="tx1">
-                              <a:lumMod val="65000"/>
-                              <a:lumOff val="35000"/>
-                            </a:schemeClr>
-                          </a:solidFill>
-                          <a:latin typeface="+mn-lt"/>
-                        </a:rPr>
-                        <a:t>L1 Cache Ref</a:t>
-                      </a:r>
-                    </a:p>
-                  </a:txBody>
-                  <a:tcPr marL="0" marR="0" marT="0" marB="0" anchor="ctr">
-                    <a:lnL>
-                      <a:noFill/>
-                    </a:lnL>
-                    <a:lnR w="12700" cap="flat" cmpd="sng" algn="ctr">
-                      <a:noFill/>
-                      <a:prstDash val="solid"/>
-                      <a:round/>
-                      <a:headEnd type="none" w="med" len="med"/>
-                      <a:tailEnd type="none" w="med" len="med"/>
-                    </a:lnR>
-                    <a:lnT w="12700" cap="flat" cmpd="sng" algn="ctr">
-                      <a:noFill/>
-                      <a:prstDash val="solid"/>
-                      <a:round/>
-                      <a:headEnd type="none" w="med" len="med"/>
-                      <a:tailEnd type="none" w="med" len="med"/>
-                    </a:lnT>
-                    <a:lnB>
-                      <a:noFill/>
-                    </a:lnB>
-                    <a:lnTlToBr w="12700" cmpd="sng">
-                      <a:noFill/>
-                      <a:prstDash val="solid"/>
-                    </a:lnTlToBr>
-                    <a:lnBlToTr w="12700" cmpd="sng">
-                      <a:noFill/>
-                      <a:prstDash val="solid"/>
-                    </a:lnBlToTr>
-                    <a:solidFill>
-                      <a:schemeClr val="tx1">
-                        <a:alpha val="7000"/>
-                      </a:schemeClr>
-                    </a:solidFill>
-                  </a:tcPr>
-                </a:tc>
-                <a:extLst>
-                  <a:ext uri="{0D108BD9-81ED-4DB2-BD59-A6C34878D82A}">
-                    <a16:rowId xmlns:a16="http://schemas.microsoft.com/office/drawing/2014/main" val="10001"/>
-                  </a:ext>
-                </a:extLst>
-              </a:tr>
-              <a:tr h="592183">
-                <a:tc>
-                  <a:txBody>
-                    <a:bodyPr/>
-                    <a:lstStyle/>
-                    <a:p>
-                      <a:pPr lvl="0" algn="r"/>
-                      <a:r>
-                        <a:rPr lang="en-US" sz="2700" b="1" dirty="0">
-                          <a:solidFill>
-                            <a:srgbClr val="C30037"/>
-                          </a:solidFill>
-                          <a:latin typeface="+mn-lt"/>
-                        </a:rPr>
-                        <a:t>4 ns</a:t>
-                      </a:r>
-                    </a:p>
-                  </a:txBody>
-                  <a:tcPr marL="0" marR="121920" marT="0" marB="0" anchor="ctr">
-                    <a:lnL w="12700" cap="flat" cmpd="sng" algn="ctr">
-                      <a:noFill/>
-                      <a:prstDash val="solid"/>
-                      <a:round/>
-                      <a:headEnd type="none" w="med" len="med"/>
-                      <a:tailEnd type="none" w="med" len="med"/>
-                    </a:lnL>
-                    <a:lnR>
-                      <a:noFill/>
-                    </a:lnR>
-                    <a:lnT>
-                      <a:noFill/>
-                    </a:lnT>
-                    <a:lnB>
-                      <a:noFill/>
-                    </a:lnB>
-                    <a:lnTlToBr w="12700" cmpd="sng">
-                      <a:noFill/>
-                      <a:prstDash val="solid"/>
-                    </a:lnTlToBr>
-                    <a:lnBlToTr w="12700" cmpd="sng">
-                      <a:noFill/>
-                      <a:prstDash val="solid"/>
-                    </a:lnBlToTr>
-                    <a:solidFill>
-                      <a:schemeClr val="tx1">
-                        <a:alpha val="7000"/>
-                      </a:schemeClr>
-                    </a:solidFill>
-                  </a:tcPr>
-                </a:tc>
-                <a:tc>
-                  <a:txBody>
-                    <a:bodyPr/>
-                    <a:lstStyle/>
-                    <a:p>
-                      <a:pPr algn="l"/>
-                      <a:r>
-                        <a:rPr lang="en-US" sz="2700" dirty="0">
-                          <a:solidFill>
-                            <a:schemeClr val="tx1">
-                              <a:lumMod val="65000"/>
-                              <a:lumOff val="35000"/>
-                            </a:schemeClr>
-                          </a:solidFill>
-                          <a:latin typeface="+mn-lt"/>
-                        </a:rPr>
-                        <a:t>L2 Cache Ref</a:t>
-                      </a:r>
-                    </a:p>
-                  </a:txBody>
-                  <a:tcPr marL="0" marR="0" marT="0" marB="0" anchor="ctr">
-                    <a:lnL>
-                      <a:noFill/>
-                    </a:lnL>
-                    <a:lnR w="12700" cap="flat" cmpd="sng" algn="ctr">
-                      <a:noFill/>
-                      <a:prstDash val="solid"/>
-                      <a:round/>
-                      <a:headEnd type="none" w="med" len="med"/>
-                      <a:tailEnd type="none" w="med" len="med"/>
-                    </a:lnR>
-                    <a:lnT>
-                      <a:noFill/>
-                    </a:lnT>
-                    <a:lnB>
-                      <a:noFill/>
-                    </a:lnB>
-                    <a:lnTlToBr w="12700" cmpd="sng">
-                      <a:noFill/>
-                      <a:prstDash val="solid"/>
-                    </a:lnTlToBr>
-                    <a:lnBlToTr w="12700" cmpd="sng">
-                      <a:noFill/>
-                      <a:prstDash val="solid"/>
-                    </a:lnBlToTr>
-                    <a:solidFill>
-                      <a:schemeClr val="tx1">
-                        <a:alpha val="7000"/>
-                      </a:schemeClr>
-                    </a:solidFill>
-                  </a:tcPr>
-                </a:tc>
-                <a:extLst>
-                  <a:ext uri="{0D108BD9-81ED-4DB2-BD59-A6C34878D82A}">
-                    <a16:rowId xmlns:a16="http://schemas.microsoft.com/office/drawing/2014/main" val="10002"/>
-                  </a:ext>
-                </a:extLst>
-              </a:tr>
-              <a:tr h="592183">
-                <a:tc>
-                  <a:txBody>
-                    <a:bodyPr/>
-                    <a:lstStyle/>
-                    <a:p>
-                      <a:pPr lvl="0" algn="r"/>
-                      <a:r>
-                        <a:rPr lang="en-US" sz="2700" b="1" dirty="0">
-                          <a:solidFill>
-                            <a:srgbClr val="C30037"/>
-                          </a:solidFill>
-                          <a:latin typeface="+mn-lt"/>
-                        </a:rPr>
-                        <a:t>100 ns</a:t>
-                      </a:r>
-                    </a:p>
-                  </a:txBody>
-                  <a:tcPr marL="0" marR="121920" marT="0" marB="0" anchor="ctr">
-                    <a:lnL w="12700" cap="flat" cmpd="sng" algn="ctr">
-                      <a:noFill/>
-                      <a:prstDash val="solid"/>
-                      <a:round/>
-                      <a:headEnd type="none" w="med" len="med"/>
-                      <a:tailEnd type="none" w="med" len="med"/>
-                    </a:lnL>
-                    <a:lnR>
-                      <a:noFill/>
-                    </a:lnR>
-                    <a:lnT>
-                      <a:noFill/>
-                    </a:lnT>
-                    <a:lnB>
-                      <a:noFill/>
-                    </a:lnB>
-                    <a:lnTlToBr w="12700" cmpd="sng">
-                      <a:noFill/>
-                      <a:prstDash val="solid"/>
-                    </a:lnTlToBr>
-                    <a:lnBlToTr w="12700" cmpd="sng">
-                      <a:noFill/>
-                      <a:prstDash val="solid"/>
-                    </a:lnBlToTr>
-                    <a:solidFill>
-                      <a:schemeClr val="tx1">
-                        <a:alpha val="7000"/>
-                      </a:schemeClr>
-                    </a:solidFill>
-                  </a:tcPr>
-                </a:tc>
-                <a:tc>
-                  <a:txBody>
-                    <a:bodyPr/>
-                    <a:lstStyle/>
-                    <a:p>
-                      <a:pPr algn="l"/>
-                      <a:r>
-                        <a:rPr lang="en-US" sz="2700" dirty="0">
-                          <a:solidFill>
-                            <a:schemeClr val="tx1">
-                              <a:lumMod val="65000"/>
-                              <a:lumOff val="35000"/>
-                            </a:schemeClr>
-                          </a:solidFill>
-                          <a:latin typeface="+mn-lt"/>
-                        </a:rPr>
-                        <a:t>DRAM</a:t>
-                      </a:r>
-                    </a:p>
-                  </a:txBody>
-                  <a:tcPr marL="0" marR="0" marT="0" marB="0" anchor="ctr">
-                    <a:lnL>
-                      <a:noFill/>
-                    </a:lnL>
-                    <a:lnR w="12700" cap="flat" cmpd="sng" algn="ctr">
-                      <a:noFill/>
-                      <a:prstDash val="solid"/>
-                      <a:round/>
-                      <a:headEnd type="none" w="med" len="med"/>
-                      <a:tailEnd type="none" w="med" len="med"/>
-                    </a:lnR>
-                    <a:lnT>
-                      <a:noFill/>
-                    </a:lnT>
-                    <a:lnB>
-                      <a:noFill/>
-                    </a:lnB>
-                    <a:lnTlToBr w="12700" cmpd="sng">
-                      <a:noFill/>
-                      <a:prstDash val="solid"/>
-                    </a:lnTlToBr>
-                    <a:lnBlToTr w="12700" cmpd="sng">
-                      <a:noFill/>
-                      <a:prstDash val="solid"/>
-                    </a:lnBlToTr>
-                    <a:solidFill>
-                      <a:schemeClr val="tx1">
-                        <a:alpha val="7000"/>
-                      </a:schemeClr>
-                    </a:solidFill>
-                  </a:tcPr>
-                </a:tc>
-                <a:extLst>
-                  <a:ext uri="{0D108BD9-81ED-4DB2-BD59-A6C34878D82A}">
-                    <a16:rowId xmlns:a16="http://schemas.microsoft.com/office/drawing/2014/main" val="2054045550"/>
-                  </a:ext>
-                </a:extLst>
-              </a:tr>
-              <a:tr h="592183">
-                <a:tc>
-                  <a:txBody>
-                    <a:bodyPr/>
-                    <a:lstStyle/>
-                    <a:p>
-                      <a:pPr lvl="0" algn="r"/>
-                      <a:r>
-                        <a:rPr lang="en-US" sz="2700" b="1" dirty="0">
-                          <a:solidFill>
-                            <a:srgbClr val="C30037"/>
-                          </a:solidFill>
-                          <a:latin typeface="+mn-lt"/>
-                        </a:rPr>
-                        <a:t>16,000</a:t>
-                      </a:r>
-                      <a:r>
-                        <a:rPr lang="en-US" sz="2700" b="1" baseline="30000" dirty="0">
-                          <a:solidFill>
-                            <a:srgbClr val="C30037"/>
-                          </a:solidFill>
-                          <a:latin typeface="+mn-lt"/>
-                        </a:rPr>
-                        <a:t> </a:t>
-                      </a:r>
-                      <a:r>
-                        <a:rPr lang="en-US" sz="2700" b="1" baseline="0" dirty="0">
-                          <a:solidFill>
-                            <a:srgbClr val="C30037"/>
-                          </a:solidFill>
-                          <a:latin typeface="+mn-lt"/>
-                        </a:rPr>
-                        <a:t>ns</a:t>
-                      </a:r>
-                      <a:endParaRPr lang="en-US" sz="2700" b="1" baseline="30000" dirty="0">
-                        <a:solidFill>
-                          <a:srgbClr val="C30037"/>
-                        </a:solidFill>
-                        <a:latin typeface="+mn-lt"/>
-                      </a:endParaRPr>
-                    </a:p>
-                  </a:txBody>
-                  <a:tcPr marL="0" marR="121920" marT="0" marB="0" anchor="ctr">
-                    <a:lnL w="12700" cap="flat" cmpd="sng" algn="ctr">
-                      <a:noFill/>
-                      <a:prstDash val="solid"/>
-                      <a:round/>
-                      <a:headEnd type="none" w="med" len="med"/>
-                      <a:tailEnd type="none" w="med" len="med"/>
-                    </a:lnL>
-                    <a:lnR>
-                      <a:noFill/>
-                    </a:lnR>
-                    <a:lnT>
-                      <a:noFill/>
-                    </a:lnT>
-                    <a:lnB>
-                      <a:noFill/>
-                    </a:lnB>
-                    <a:lnTlToBr w="12700" cmpd="sng">
-                      <a:noFill/>
-                      <a:prstDash val="solid"/>
-                    </a:lnTlToBr>
-                    <a:lnBlToTr w="12700" cmpd="sng">
-                      <a:noFill/>
-                      <a:prstDash val="solid"/>
-                    </a:lnBlToTr>
-                    <a:solidFill>
-                      <a:schemeClr val="tx1">
-                        <a:alpha val="7000"/>
-                      </a:schemeClr>
-                    </a:solidFill>
-                  </a:tcPr>
-                </a:tc>
-                <a:tc>
-                  <a:txBody>
-                    <a:bodyPr/>
-                    <a:lstStyle/>
-                    <a:p>
-                      <a:pPr algn="l"/>
-                      <a:r>
-                        <a:rPr lang="en-US" sz="2700" dirty="0">
-                          <a:solidFill>
-                            <a:schemeClr val="tx1">
-                              <a:lumMod val="65000"/>
-                              <a:lumOff val="35000"/>
-                            </a:schemeClr>
-                          </a:solidFill>
-                          <a:latin typeface="+mn-lt"/>
-                        </a:rPr>
-                        <a:t>SSD</a:t>
-                      </a:r>
-                    </a:p>
-                  </a:txBody>
-                  <a:tcPr marL="0" marR="0" marT="0" marB="0" anchor="ctr">
-                    <a:lnL>
-                      <a:noFill/>
-                    </a:lnL>
-                    <a:lnR w="12700" cap="flat" cmpd="sng" algn="ctr">
-                      <a:noFill/>
-                      <a:prstDash val="solid"/>
-                      <a:round/>
-                      <a:headEnd type="none" w="med" len="med"/>
-                      <a:tailEnd type="none" w="med" len="med"/>
-                    </a:lnR>
-                    <a:lnT>
-                      <a:noFill/>
-                    </a:lnT>
-                    <a:lnB>
-                      <a:noFill/>
-                    </a:lnB>
-                    <a:lnTlToBr w="12700" cmpd="sng">
-                      <a:noFill/>
-                      <a:prstDash val="solid"/>
-                    </a:lnTlToBr>
-                    <a:lnBlToTr w="12700" cmpd="sng">
-                      <a:noFill/>
-                      <a:prstDash val="solid"/>
-                    </a:lnBlToTr>
-                    <a:solidFill>
-                      <a:schemeClr val="tx1">
-                        <a:alpha val="7000"/>
-                      </a:schemeClr>
-                    </a:solidFill>
-                  </a:tcPr>
-                </a:tc>
-                <a:extLst>
-                  <a:ext uri="{0D108BD9-81ED-4DB2-BD59-A6C34878D82A}">
-                    <a16:rowId xmlns:a16="http://schemas.microsoft.com/office/drawing/2014/main" val="10003"/>
-                  </a:ext>
-                </a:extLst>
-              </a:tr>
-              <a:tr h="592183">
-                <a:tc>
-                  <a:txBody>
-                    <a:bodyPr/>
-                    <a:lstStyle/>
-                    <a:p>
-                      <a:pPr lvl="0" algn="r"/>
-                      <a:r>
-                        <a:rPr lang="en-US" sz="2700" b="1" dirty="0">
-                          <a:solidFill>
-                            <a:srgbClr val="C30037"/>
-                          </a:solidFill>
-                          <a:latin typeface="+mn-lt"/>
-                        </a:rPr>
-                        <a:t>2</a:t>
-                      </a:r>
-                      <a:r>
-                        <a:rPr lang="en-US" sz="2700" b="1" baseline="0" dirty="0">
-                          <a:solidFill>
-                            <a:srgbClr val="C30037"/>
-                          </a:solidFill>
-                          <a:latin typeface="+mn-lt"/>
-                        </a:rPr>
-                        <a:t>,000,000 ns</a:t>
-                      </a:r>
-                    </a:p>
-                  </a:txBody>
-                  <a:tcPr marL="0" marR="121920" marT="0" marB="0" anchor="ctr">
-                    <a:lnL w="12700" cap="flat" cmpd="sng" algn="ctr">
-                      <a:noFill/>
-                      <a:prstDash val="solid"/>
-                      <a:round/>
-                      <a:headEnd type="none" w="med" len="med"/>
-                      <a:tailEnd type="none" w="med" len="med"/>
-                    </a:lnL>
-                    <a:lnR>
-                      <a:noFill/>
-                    </a:lnR>
-                    <a:lnT>
-                      <a:noFill/>
-                    </a:lnT>
-                    <a:lnB>
-                      <a:noFill/>
-                    </a:lnB>
-                    <a:lnTlToBr w="12700" cmpd="sng">
-                      <a:noFill/>
-                      <a:prstDash val="solid"/>
-                    </a:lnTlToBr>
-                    <a:lnBlToTr w="12700" cmpd="sng">
-                      <a:noFill/>
-                      <a:prstDash val="solid"/>
-                    </a:lnBlToTr>
-                    <a:solidFill>
-                      <a:schemeClr val="tx1">
-                        <a:alpha val="7000"/>
-                      </a:schemeClr>
-                    </a:solidFill>
-                  </a:tcPr>
-                </a:tc>
-                <a:tc>
-                  <a:txBody>
-                    <a:bodyPr/>
-                    <a:lstStyle/>
-                    <a:p>
-                      <a:pPr algn="l"/>
-                      <a:r>
-                        <a:rPr lang="en-US" sz="2700" dirty="0">
-                          <a:solidFill>
-                            <a:schemeClr val="tx1">
-                              <a:lumMod val="65000"/>
-                              <a:lumOff val="35000"/>
-                            </a:schemeClr>
-                          </a:solidFill>
-                          <a:latin typeface="+mn-lt"/>
-                        </a:rPr>
-                        <a:t>HDD</a:t>
-                      </a:r>
-                    </a:p>
-                  </a:txBody>
-                  <a:tcPr marL="0" marR="0" marT="0" marB="0" anchor="ctr">
-                    <a:lnL>
-                      <a:noFill/>
-                    </a:lnL>
-                    <a:lnR w="12700" cap="flat" cmpd="sng" algn="ctr">
-                      <a:noFill/>
-                      <a:prstDash val="solid"/>
-                      <a:round/>
-                      <a:headEnd type="none" w="med" len="med"/>
-                      <a:tailEnd type="none" w="med" len="med"/>
-                    </a:lnR>
-                    <a:lnT>
-                      <a:noFill/>
-                    </a:lnT>
-                    <a:lnB>
-                      <a:noFill/>
-                    </a:lnB>
-                    <a:lnTlToBr w="12700" cmpd="sng">
-                      <a:noFill/>
-                      <a:prstDash val="solid"/>
-                    </a:lnTlToBr>
-                    <a:lnBlToTr w="12700" cmpd="sng">
-                      <a:noFill/>
-                      <a:prstDash val="solid"/>
-                    </a:lnBlToTr>
-                    <a:solidFill>
-                      <a:schemeClr val="tx1">
-                        <a:alpha val="7000"/>
-                      </a:schemeClr>
-                    </a:solidFill>
-                  </a:tcPr>
-                </a:tc>
-                <a:extLst>
-                  <a:ext uri="{0D108BD9-81ED-4DB2-BD59-A6C34878D82A}">
-                    <a16:rowId xmlns:a16="http://schemas.microsoft.com/office/drawing/2014/main" val="3445743322"/>
-                  </a:ext>
-                </a:extLst>
-              </a:tr>
-              <a:tr h="592183">
-                <a:tc>
-                  <a:txBody>
-                    <a:bodyPr/>
-                    <a:lstStyle/>
-                    <a:p>
-                      <a:pPr lvl="0" algn="r"/>
-                      <a:r>
-                        <a:rPr lang="en-US" sz="2700" b="1" dirty="0">
-                          <a:solidFill>
-                            <a:srgbClr val="C30037"/>
-                          </a:solidFill>
-                          <a:latin typeface="+mn-lt"/>
-                        </a:rPr>
-                        <a:t>~50,000,000 ns</a:t>
-                      </a:r>
-                    </a:p>
-                  </a:txBody>
-                  <a:tcPr marL="0" marR="121920" marT="0" marB="0" anchor="ctr">
-                    <a:lnL w="12700" cap="flat" cmpd="sng" algn="ctr">
-                      <a:noFill/>
-                      <a:prstDash val="solid"/>
-                      <a:round/>
-                      <a:headEnd type="none" w="med" len="med"/>
-                      <a:tailEnd type="none" w="med" len="med"/>
-                    </a:lnL>
-                    <a:lnR>
-                      <a:noFill/>
-                    </a:lnR>
-                    <a:lnT>
-                      <a:noFill/>
-                    </a:lnT>
-                    <a:lnB>
-                      <a:noFill/>
-                    </a:lnB>
-                    <a:lnTlToBr w="12700" cmpd="sng">
-                      <a:noFill/>
-                      <a:prstDash val="solid"/>
-                    </a:lnTlToBr>
-                    <a:lnBlToTr w="12700" cmpd="sng">
-                      <a:noFill/>
-                      <a:prstDash val="solid"/>
-                    </a:lnBlToTr>
-                    <a:solidFill>
-                      <a:schemeClr val="tx1">
-                        <a:alpha val="7000"/>
-                      </a:schemeClr>
-                    </a:solidFill>
-                  </a:tcPr>
-                </a:tc>
-                <a:tc>
-                  <a:txBody>
-                    <a:bodyPr/>
-                    <a:lstStyle/>
-                    <a:p>
-                      <a:pPr algn="l"/>
-                      <a:r>
-                        <a:rPr lang="en-US" sz="2700" dirty="0">
-                          <a:solidFill>
-                            <a:schemeClr val="tx1">
-                              <a:lumMod val="65000"/>
-                              <a:lumOff val="35000"/>
-                            </a:schemeClr>
-                          </a:solidFill>
-                          <a:latin typeface="+mn-lt"/>
-                        </a:rPr>
-                        <a:t>Network Storage</a:t>
-                      </a:r>
-                    </a:p>
-                  </a:txBody>
-                  <a:tcPr marL="0" marR="0" marT="0" marB="0" anchor="ctr">
-                    <a:lnL>
-                      <a:noFill/>
-                    </a:lnL>
-                    <a:lnR w="12700" cap="flat" cmpd="sng" algn="ctr">
-                      <a:noFill/>
-                      <a:prstDash val="solid"/>
-                      <a:round/>
-                      <a:headEnd type="none" w="med" len="med"/>
-                      <a:tailEnd type="none" w="med" len="med"/>
-                    </a:lnR>
-                    <a:lnT>
-                      <a:noFill/>
-                    </a:lnT>
-                    <a:lnB>
-                      <a:noFill/>
-                    </a:lnB>
-                    <a:lnTlToBr w="12700" cmpd="sng">
-                      <a:noFill/>
-                      <a:prstDash val="solid"/>
-                    </a:lnTlToBr>
-                    <a:lnBlToTr w="12700" cmpd="sng">
-                      <a:noFill/>
-                      <a:prstDash val="solid"/>
-                    </a:lnBlToTr>
-                    <a:solidFill>
-                      <a:schemeClr val="tx1">
-                        <a:alpha val="7000"/>
-                      </a:schemeClr>
-                    </a:solidFill>
-                  </a:tcPr>
-                </a:tc>
-                <a:extLst>
-                  <a:ext uri="{0D108BD9-81ED-4DB2-BD59-A6C34878D82A}">
-                    <a16:rowId xmlns:a16="http://schemas.microsoft.com/office/drawing/2014/main" val="49878179"/>
-                  </a:ext>
-                </a:extLst>
-              </a:tr>
-              <a:tr h="592183">
-                <a:tc>
-                  <a:txBody>
-                    <a:bodyPr/>
-                    <a:lstStyle/>
-                    <a:p>
-                      <a:pPr lvl="0" algn="r"/>
-                      <a:r>
-                        <a:rPr lang="en-US" sz="2700" b="1" baseline="0" dirty="0">
-                          <a:solidFill>
-                            <a:srgbClr val="C30037"/>
-                          </a:solidFill>
-                          <a:latin typeface="+mn-lt"/>
-                        </a:rPr>
-                        <a:t>1,000,000,000 ns</a:t>
-                      </a:r>
-                    </a:p>
-                  </a:txBody>
-                  <a:tcPr marL="0" marR="121920" marT="0" marB="0" anchor="ctr">
-                    <a:lnL w="12700" cap="flat" cmpd="sng" algn="ctr">
-                      <a:noFill/>
-                      <a:prstDash val="solid"/>
-                      <a:round/>
-                      <a:headEnd type="none" w="med" len="med"/>
-                      <a:tailEnd type="none" w="med" len="med"/>
-                    </a:lnL>
-                    <a:lnR>
-                      <a:noFill/>
-                    </a:lnR>
-                    <a:lnT>
-                      <a:noFill/>
-                    </a:lnT>
-                    <a:lnB w="12700" cap="flat" cmpd="sng" algn="ctr">
-                      <a:noFill/>
-                      <a:prstDash val="solid"/>
-                      <a:round/>
-                      <a:headEnd type="none" w="med" len="med"/>
-                      <a:tailEnd type="none" w="med" len="med"/>
-                    </a:lnB>
-                    <a:lnTlToBr w="12700" cmpd="sng">
-                      <a:noFill/>
-                      <a:prstDash val="solid"/>
-                    </a:lnTlToBr>
-                    <a:lnBlToTr w="12700" cmpd="sng">
-                      <a:noFill/>
-                      <a:prstDash val="solid"/>
-                    </a:lnBlToTr>
-                    <a:solidFill>
-                      <a:schemeClr val="tx1">
-                        <a:alpha val="7000"/>
-                      </a:schemeClr>
-                    </a:solidFill>
-                  </a:tcPr>
-                </a:tc>
-                <a:tc>
-                  <a:txBody>
-                    <a:bodyPr/>
-                    <a:lstStyle/>
-                    <a:p>
-                      <a:pPr algn="l"/>
-                      <a:r>
-                        <a:rPr lang="en-US" sz="2700" dirty="0">
-                          <a:solidFill>
-                            <a:schemeClr val="tx1">
-                              <a:lumMod val="65000"/>
-                              <a:lumOff val="35000"/>
-                            </a:schemeClr>
-                          </a:solidFill>
-                          <a:latin typeface="+mn-lt"/>
-                        </a:rPr>
-                        <a:t>Tape Archives</a:t>
-                      </a:r>
-                    </a:p>
-                  </a:txBody>
-                  <a:tcPr marL="0" marR="0" marT="0" marB="0" anchor="ctr">
-                    <a:lnL>
-                      <a:noFill/>
-                    </a:lnL>
-                    <a:lnR w="12700" cap="flat" cmpd="sng" algn="ctr">
-                      <a:noFill/>
-                      <a:prstDash val="solid"/>
-                      <a:round/>
-                      <a:headEnd type="none" w="med" len="med"/>
-                      <a:tailEnd type="none" w="med" len="med"/>
-                    </a:lnR>
-                    <a:lnT>
-                      <a:noFill/>
-                    </a:lnT>
-                    <a:lnB w="12700" cap="flat" cmpd="sng" algn="ctr">
-                      <a:noFill/>
-                      <a:prstDash val="solid"/>
-                      <a:round/>
-                      <a:headEnd type="none" w="med" len="med"/>
-                      <a:tailEnd type="none" w="med" len="med"/>
-                    </a:lnB>
-                    <a:lnTlToBr w="12700" cmpd="sng">
-                      <a:noFill/>
-                      <a:prstDash val="solid"/>
-                    </a:lnTlToBr>
-                    <a:lnBlToTr w="12700" cmpd="sng">
-                      <a:noFill/>
-                      <a:prstDash val="solid"/>
-                    </a:lnBlToTr>
-                    <a:solidFill>
-                      <a:schemeClr val="tx1">
-                        <a:alpha val="7000"/>
-                      </a:schemeClr>
-                    </a:solidFill>
-                  </a:tcPr>
-                </a:tc>
-                <a:extLst>
-                  <a:ext uri="{0D108BD9-81ED-4DB2-BD59-A6C34878D82A}">
-                    <a16:rowId xmlns:a16="http://schemas.microsoft.com/office/drawing/2014/main" val="1136046997"/>
-                  </a:ext>
-                </a:extLst>
-              </a:tr>
-            </a:tbl>
-          </a:graphicData>
-        </a:graphic>
-      </p:graphicFrame>
-      <p:sp>
-        <p:nvSpPr>
-          <p:cNvPr id="20" name="TextBox 19">
-            <a:extLst>
-              <a:ext uri="{FF2B5EF4-FFF2-40B4-BE49-F238E27FC236}">
-                <a16:creationId xmlns:a16="http://schemas.microsoft.com/office/drawing/2014/main" id="{2ECD80B6-7844-27DF-5202-8E65AF59A4D3}"/>
-              </a:ext>
-            </a:extLst>
-          </p:cNvPr>
-          <p:cNvSpPr txBox="1"/>
-          <p:nvPr/>
-        </p:nvSpPr>
-        <p:spPr>
-          <a:xfrm>
-            <a:off x="10665236" y="6406595"/>
-            <a:ext cx="1526764" cy="451342"/>
-          </a:xfrm>
-          <a:prstGeom prst="rect">
-            <a:avLst/>
-          </a:prstGeom>
-          <a:noFill/>
-        </p:spPr>
-        <p:txBody>
-          <a:bodyPr wrap="none" lIns="0" tIns="0" rIns="97536" bIns="243840" rtlCol="0">
-            <a:spAutoFit/>
-          </a:bodyPr>
-          <a:lstStyle>
-            <a:defPPr>
-              <a:defRPr lang="en-US"/>
-            </a:defPPr>
-            <a:lvl1pPr lvl="0">
-              <a:defRPr kumimoji="0" sz="1000" b="0" i="0" u="none" strike="noStrike" cap="none" spc="0" normalizeH="0" baseline="0">
-                <a:ln>
-                  <a:noFill/>
-                </a:ln>
-                <a:solidFill>
-                  <a:prstClr val="black">
-                    <a:lumMod val="75000"/>
-                    <a:lumOff val="25000"/>
-                  </a:prstClr>
-                </a:solidFill>
-                <a:effectLst/>
-                <a:uLnTx/>
-                <a:uFillTx/>
-                <a:latin typeface="Museo Sans 300" panose="02000000000000000000" pitchFamily="50" charset="0"/>
-              </a:defRPr>
-            </a:lvl1pPr>
-          </a:lstStyle>
-          <a:p>
-            <a:pPr algn="r"/>
-            <a:r>
-              <a:rPr lang="en-US" sz="1333" dirty="0">
-                <a:latin typeface="Lato" panose="020F0502020204030203" pitchFamily="34" charset="0"/>
-              </a:rPr>
-              <a:t>Source: </a:t>
-            </a:r>
-            <a:r>
-              <a:rPr lang="en-US" sz="1333" dirty="0">
-                <a:latin typeface="Lato" panose="020F0502020204030203" pitchFamily="34" charset="0"/>
-                <a:hlinkClick r:id="rId3"/>
-              </a:rPr>
-              <a:t>Colin Scott</a:t>
-            </a:r>
-            <a:endParaRPr lang="en-US" sz="1333" dirty="0">
-              <a:latin typeface="Lato" panose="020F0502020204030203" pitchFamily="34" charset="0"/>
-            </a:endParaRPr>
-          </a:p>
-        </p:txBody>
-      </p:sp>
-      <p:sp>
-        <p:nvSpPr>
-          <p:cNvPr id="21" name="Slide Number Placeholder 3" descr=" 5">
-            <a:extLst>
-              <a:ext uri="{FF2B5EF4-FFF2-40B4-BE49-F238E27FC236}">
-                <a16:creationId xmlns:a16="http://schemas.microsoft.com/office/drawing/2014/main" id="{801EB65A-0424-61DE-09A6-77ECD9FEF324}"/>
-              </a:ext>
-            </a:extLst>
-          </p:cNvPr>
-          <p:cNvSpPr txBox="1">
-            <a:spLocks/>
-          </p:cNvSpPr>
-          <p:nvPr/>
-        </p:nvSpPr>
-        <p:spPr>
-          <a:xfrm>
-            <a:off x="11704320" y="0"/>
-            <a:ext cx="487680" cy="365125"/>
-          </a:xfrm>
-          <a:prstGeom prst="rect">
-            <a:avLst/>
-          </a:prstGeom>
-          <a:solidFill>
-            <a:schemeClr val="bg1">
-              <a:lumMod val="50000"/>
-            </a:schemeClr>
-          </a:solidFill>
-        </p:spPr>
-        <p:txBody>
-          <a:bodyPr vert="horz" wrap="square" lIns="0" tIns="60960" rIns="60960" bIns="60960" rtlCol="0" anchor="ctr"/>
-          <a:lstStyle>
-            <a:defPPr>
-              <a:defRPr lang="en-US"/>
-            </a:defPPr>
-            <a:lvl1pPr algn="r">
-              <a:defRPr sz="1200">
-                <a:solidFill>
-                  <a:schemeClr val="bg1">
-                    <a:lumMod val="95000"/>
-                  </a:schemeClr>
-                </a:solidFill>
-                <a:latin typeface="Consolas" panose="020B0609020204030204" pitchFamily="49" charset="0"/>
-              </a:defRPr>
-            </a:lvl1pPr>
-            <a:lvl2pPr marL="457200" algn="l" defTabSz="914400" rtl="0" eaLnBrk="1" latinLnBrk="0" hangingPunct="1">
-              <a:defRPr sz="1800" kern="1200">
-                <a:solidFill>
-                  <a:schemeClr val="tx1"/>
-                </a:solidFill>
-                <a:latin typeface="+mn-lt"/>
-                <a:ea typeface="+mn-ea"/>
-                <a:cs typeface="+mn-cs"/>
-              </a:defRPr>
-            </a:lvl2pPr>
-            <a:lvl3pPr marL="914400" algn="l" defTabSz="914400" rtl="0" eaLnBrk="1" latinLnBrk="0" hangingPunct="1">
-              <a:defRPr sz="1800" kern="1200">
-                <a:solidFill>
-                  <a:schemeClr val="tx1"/>
-                </a:solidFill>
-                <a:latin typeface="+mn-lt"/>
-                <a:ea typeface="+mn-ea"/>
-                <a:cs typeface="+mn-cs"/>
-              </a:defRPr>
-            </a:lvl3pPr>
-            <a:lvl4pPr marL="1371600" algn="l" defTabSz="914400" rtl="0" eaLnBrk="1" latinLnBrk="0" hangingPunct="1">
-              <a:defRPr sz="1800" kern="1200">
-                <a:solidFill>
-                  <a:schemeClr val="tx1"/>
-                </a:solidFill>
-                <a:latin typeface="+mn-lt"/>
-                <a:ea typeface="+mn-ea"/>
-                <a:cs typeface="+mn-cs"/>
-              </a:defRPr>
-            </a:lvl4pPr>
-            <a:lvl5pPr marL="1828800" algn="l" defTabSz="914400" rtl="0" eaLnBrk="1" latinLnBrk="0" hangingPunct="1">
-              <a:defRPr sz="1800" kern="1200">
-                <a:solidFill>
-                  <a:schemeClr val="tx1"/>
-                </a:solidFill>
-                <a:latin typeface="+mn-lt"/>
-                <a:ea typeface="+mn-ea"/>
-                <a:cs typeface="+mn-cs"/>
-              </a:defRPr>
-            </a:lvl5pPr>
-            <a:lvl6pPr marL="2286000" algn="l" defTabSz="914400" rtl="0" eaLnBrk="1" latinLnBrk="0" hangingPunct="1">
-              <a:defRPr sz="1800" kern="1200">
-                <a:solidFill>
-                  <a:schemeClr val="tx1"/>
-                </a:solidFill>
-                <a:latin typeface="+mn-lt"/>
-                <a:ea typeface="+mn-ea"/>
-                <a:cs typeface="+mn-cs"/>
-              </a:defRPr>
-            </a:lvl6pPr>
-            <a:lvl7pPr marL="2743200" algn="l" defTabSz="914400" rtl="0" eaLnBrk="1" latinLnBrk="0" hangingPunct="1">
-              <a:defRPr sz="1800" kern="1200">
-                <a:solidFill>
-                  <a:schemeClr val="tx1"/>
-                </a:solidFill>
-                <a:latin typeface="+mn-lt"/>
-                <a:ea typeface="+mn-ea"/>
-                <a:cs typeface="+mn-cs"/>
-              </a:defRPr>
-            </a:lvl7pPr>
-            <a:lvl8pPr marL="3200400" algn="l" defTabSz="914400" rtl="0" eaLnBrk="1" latinLnBrk="0" hangingPunct="1">
-              <a:defRPr sz="1800" kern="1200">
-                <a:solidFill>
-                  <a:schemeClr val="tx1"/>
-                </a:solidFill>
-                <a:latin typeface="+mn-lt"/>
-                <a:ea typeface="+mn-ea"/>
-                <a:cs typeface="+mn-cs"/>
-              </a:defRPr>
-            </a:lvl8pPr>
-            <a:lvl9pPr marL="3657600" algn="l" defTabSz="914400" rtl="0" eaLnBrk="1" latinLnBrk="0" hangingPunct="1">
-              <a:defRPr sz="1800" kern="1200">
-                <a:solidFill>
-                  <a:schemeClr val="tx1"/>
-                </a:solidFill>
-                <a:latin typeface="+mn-lt"/>
-                <a:ea typeface="+mn-ea"/>
-                <a:cs typeface="+mn-cs"/>
-              </a:defRPr>
-            </a:lvl9pPr>
-          </a:lstStyle>
-          <a:p>
-            <a:pPr defTabSz="1219170">
-              <a:defRPr/>
-            </a:pPr>
-            <a:fld id="{97DD1AB5-42BA-4E8A-BFEE-435884E16AAB}" type="slidenum">
-              <a:rPr lang="en-US" sz="1600">
-                <a:solidFill>
-                  <a:prstClr val="white">
-                    <a:lumMod val="95000"/>
-                  </a:prstClr>
-                </a:solidFill>
-              </a:rPr>
-              <a:pPr defTabSz="1219170">
-                <a:defRPr/>
-              </a:pPr>
-              <a:t>39</a:t>
-            </a:fld>
-            <a:endParaRPr lang="en-US" sz="1600" dirty="0">
-              <a:solidFill>
-                <a:prstClr val="white">
-                  <a:lumMod val="95000"/>
-                </a:prstClr>
-              </a:solidFill>
-            </a:endParaRPr>
-          </a:p>
-        </p:txBody>
-      </p:sp>
-      <p:sp>
-        <p:nvSpPr>
-          <p:cNvPr id="25" name="Rectangle 24">
-            <a:extLst>
-              <a:ext uri="{FF2B5EF4-FFF2-40B4-BE49-F238E27FC236}">
-                <a16:creationId xmlns:a16="http://schemas.microsoft.com/office/drawing/2014/main" id="{E64DD466-60B5-525A-B0D2-E4A83052CC3B}"/>
-              </a:ext>
-            </a:extLst>
-          </p:cNvPr>
-          <p:cNvSpPr/>
-          <p:nvPr/>
-        </p:nvSpPr>
-        <p:spPr>
-          <a:xfrm>
-            <a:off x="2424112" y="4395194"/>
-            <a:ext cx="3448050" cy="529368"/>
-          </a:xfrm>
-          <a:prstGeom prst="rect">
-            <a:avLst/>
-          </a:prstGeom>
-          <a:noFill/>
-          <a:ln w="82550">
-            <a:solidFill>
-              <a:schemeClr val="tx1"/>
-            </a:solidFill>
-          </a:ln>
-          <a:effectLst/>
-        </p:spPr>
-        <p:style>
-          <a:lnRef idx="1">
-            <a:schemeClr val="accent1"/>
-          </a:lnRef>
-          <a:fillRef idx="3">
-            <a:schemeClr val="accent1"/>
-          </a:fillRef>
-          <a:effectRef idx="2">
-            <a:schemeClr val="accent1"/>
-          </a:effectRef>
-          <a:fontRef idx="minor">
-            <a:schemeClr val="lt1"/>
-          </a:fontRef>
-        </p:style>
-        <p:txBody>
-          <a:bodyPr rtlCol="0" anchor="ctr"/>
-          <a:lstStyle/>
-          <a:p>
-            <a:pPr algn="ctr"/>
-            <a:endParaRPr lang="en-US"/>
-          </a:p>
-        </p:txBody>
-      </p:sp>
-      <p:sp>
-        <p:nvSpPr>
-          <p:cNvPr id="28" name="TextBox 27">
-            <a:extLst>
-              <a:ext uri="{FF2B5EF4-FFF2-40B4-BE49-F238E27FC236}">
-                <a16:creationId xmlns:a16="http://schemas.microsoft.com/office/drawing/2014/main" id="{C514509C-838C-6A25-47B7-26AD9D54028B}"/>
-              </a:ext>
-            </a:extLst>
-          </p:cNvPr>
-          <p:cNvSpPr txBox="1"/>
-          <p:nvPr/>
-        </p:nvSpPr>
-        <p:spPr>
-          <a:xfrm>
-            <a:off x="7412083" y="4182824"/>
-            <a:ext cx="4246879" cy="954107"/>
-          </a:xfrm>
-          <a:prstGeom prst="rect">
-            <a:avLst/>
-          </a:prstGeom>
-          <a:noFill/>
-        </p:spPr>
-        <p:txBody>
-          <a:bodyPr wrap="square" rtlCol="0">
-            <a:spAutoFit/>
-          </a:bodyPr>
-          <a:lstStyle/>
-          <a:p>
-            <a:r>
-              <a:rPr lang="en-US" sz="2800" dirty="0"/>
-              <a:t>Example: disk performance under different workloads</a:t>
-            </a:r>
-          </a:p>
-        </p:txBody>
-      </p:sp>
-    </p:spTree>
-    <p:extLst>
-      <p:ext uri="{BB962C8B-B14F-4D97-AF65-F5344CB8AC3E}">
-        <p14:creationId xmlns:p14="http://schemas.microsoft.com/office/powerpoint/2010/main" val="3947783722"/>
-      </p:ext>
-    </p:extLst>
-  </p:cSld>
-  <p:clrMapOvr>
-    <a:masterClrMapping/>
-  </p:clrMapOvr>
-  <p:timing>
-    <p:tnLst>
-      <p:par>
-        <p:cTn id="1" dur="indefinite" restart="never" nodeType="tmRoot">
-          <p:childTnLst>
-            <p:seq concurrent="1" nextAc="seek">
-              <p:cTn id="2" dur="indefinite" nodeType="mainSeq">
-                <p:childTnLst>
-                  <p:par>
-                    <p:cTn id="3" fill="hold">
-                      <p:stCondLst>
-                        <p:cond delay="indefinite"/>
-                      </p:stCondLst>
-                      <p:childTnLst>
-                        <p:par>
-                          <p:cTn id="4" fill="hold">
-                            <p:stCondLst>
-                              <p:cond delay="0"/>
-                            </p:stCondLst>
-                            <p:childTnLst>
-                              <p:par>
-                                <p:cTn id="5" presetID="1" presetClass="entr" presetSubtype="0" fill="hold" grpId="0" nodeType="clickEffect">
-                                  <p:stCondLst>
-                                    <p:cond delay="0"/>
-                                  </p:stCondLst>
-                                  <p:childTnLst>
-                                    <p:set>
-                                      <p:cBhvr>
-                                        <p:cTn id="6" dur="1" fill="hold">
-                                          <p:stCondLst>
-                                            <p:cond delay="0"/>
-                                          </p:stCondLst>
-                                        </p:cTn>
-                                        <p:tgtEl>
-                                          <p:spTgt spid="25"/>
-                                        </p:tgtEl>
-                                        <p:attrNameLst>
-                                          <p:attrName>style.visibility</p:attrName>
-                                        </p:attrNameLst>
-                                      </p:cBhvr>
-                                      <p:to>
-                                        <p:strVal val="visible"/>
-                                      </p:to>
-                                    </p:set>
-                                  </p:childTnLst>
-                                </p:cTn>
-                              </p:par>
-                              <p:par>
-                                <p:cTn id="7" presetID="1" presetClass="entr" presetSubtype="0" fill="hold" grpId="0" nodeType="withEffect">
-                                  <p:stCondLst>
-                                    <p:cond delay="0"/>
-                                  </p:stCondLst>
-                                  <p:childTnLst>
-                                    <p:set>
-                                      <p:cBhvr>
-                                        <p:cTn id="8" dur="1" fill="hold">
-                                          <p:stCondLst>
-                                            <p:cond delay="0"/>
-                                          </p:stCondLst>
-                                        </p:cTn>
-                                        <p:tgtEl>
-                                          <p:spTgt spid="28"/>
-                                        </p:tgtEl>
-                                        <p:attrNameLst>
-                                          <p:attrName>style.visibility</p:attrName>
-                                        </p:attrNameLst>
-                                      </p:cBhvr>
-                                      <p:to>
-                                        <p:strVal val="visible"/>
-                                      </p:to>
-                                    </p:set>
-                                  </p:childTnLst>
-                                </p:cTn>
-                              </p:par>
-                            </p:childTnLst>
-                          </p:cTn>
-                        </p:par>
-                      </p:childTnLst>
-                    </p:cTn>
-                  </p:par>
-                </p:childTnLst>
-              </p:cTn>
-              <p:prevCondLst>
-                <p:cond evt="onPrev" delay="0">
-                  <p:tgtEl>
-                    <p:sldTgt/>
-                  </p:tgtEl>
-                </p:cond>
-              </p:prevCondLst>
-              <p:nextCondLst>
-                <p:cond evt="onNext" delay="0">
-                  <p:tgtEl>
-                    <p:sldTgt/>
-                  </p:tgtEl>
-                </p:cond>
-              </p:nextCondLst>
-            </p:seq>
-          </p:childTnLst>
-        </p:cTn>
-      </p:par>
-    </p:tnLst>
-    <p:bldLst>
-      <p:bldP spid="25" grpId="0" animBg="1"/>
-      <p:bldP spid="28" grpId="0"/>
-    </p:bldLst>
-  </p:timing>
-</p:sld>
-</file>
-
 <file path=ppt/slides/slide4.xml><?xml version="1.0" encoding="utf-8"?>
 <p:sld xmlns:a="http://schemas.openxmlformats.org/drawingml/2006/main" xmlns:r="http://schemas.openxmlformats.org/officeDocument/2006/relationships" xmlns:p="http://schemas.openxmlformats.org/presentationml/2006/main">
   <p:cSld>
@@ -33057,10 +27706,10 @@
       </p:sp>
       <p:pic>
         <p:nvPicPr>
-          <p:cNvPr id="2" name="Picture 1">
+          <p:cNvPr id="6" name="Picture 5">
             <a:extLst>
               <a:ext uri="{FF2B5EF4-FFF2-40B4-BE49-F238E27FC236}">
-                <a16:creationId xmlns:a16="http://schemas.microsoft.com/office/drawing/2014/main" id="{D41AC2D4-C1FF-15DE-F924-8A3B51DD9A94}"/>
+                <a16:creationId xmlns:a16="http://schemas.microsoft.com/office/drawing/2014/main" id="{0BA97ACF-1F8C-7791-DDE9-8355EE5F4753}"/>
               </a:ext>
             </a:extLst>
           </p:cNvPr>
@@ -33077,8 +27726,8 @@
         </p:blipFill>
         <p:spPr>
           <a:xfrm>
-            <a:off x="3995737" y="1693360"/>
-            <a:ext cx="4200525" cy="4200525"/>
+            <a:off x="4223202" y="2148289"/>
+            <a:ext cx="3745596" cy="3745596"/>
           </a:xfrm>
           <a:prstGeom prst="rect">
             <a:avLst/>
@@ -33099,6 +27748,1334 @@
 </file>
 
 <file path=ppt/slides/slide40.xml><?xml version="1.0" encoding="utf-8"?>
+<p:sld xmlns:a="http://schemas.openxmlformats.org/drawingml/2006/main" xmlns:r="http://schemas.openxmlformats.org/officeDocument/2006/relationships" xmlns:p="http://schemas.openxmlformats.org/presentationml/2006/main">
+  <p:cSld>
+    <p:spTree>
+      <p:nvGrpSpPr>
+        <p:cNvPr id="1" name=""/>
+        <p:cNvGrpSpPr/>
+        <p:nvPr/>
+      </p:nvGrpSpPr>
+      <p:grpSpPr>
+        <a:xfrm>
+          <a:off x="0" y="0"/>
+          <a:ext cx="0" cy="0"/>
+          <a:chOff x="0" y="0"/>
+          <a:chExt cx="0" cy="0"/>
+        </a:xfrm>
+      </p:grpSpPr>
+      <p:sp>
+        <p:nvSpPr>
+          <p:cNvPr id="2" name="Title 1">
+            <a:extLst>
+              <a:ext uri="{FF2B5EF4-FFF2-40B4-BE49-F238E27FC236}">
+                <a16:creationId xmlns:a16="http://schemas.microsoft.com/office/drawing/2014/main" id="{83AE860B-85F5-412A-9967-3F6C35D6D751}"/>
+              </a:ext>
+            </a:extLst>
+          </p:cNvPr>
+          <p:cNvSpPr>
+            <a:spLocks noGrp="1"/>
+          </p:cNvSpPr>
+          <p:nvPr>
+            <p:ph type="title"/>
+          </p:nvPr>
+        </p:nvSpPr>
+        <p:spPr>
+          <a:xfrm>
+            <a:off x="0" y="-17916"/>
+            <a:ext cx="12192000" cy="881350"/>
+          </a:xfrm>
+        </p:spPr>
+        <p:txBody>
+          <a:bodyPr/>
+          <a:lstStyle/>
+          <a:p>
+            <a:r>
+              <a:rPr lang="en-US" dirty="0">
+                <a:latin typeface="Crimson Text" panose="02000503000000000000" pitchFamily="2" charset="0"/>
+              </a:rPr>
+              <a:t>Latency Numbers Every Programmer Should Know</a:t>
+            </a:r>
+            <a:endParaRPr lang="en-US" dirty="0"/>
+          </a:p>
+        </p:txBody>
+      </p:sp>
+      <p:graphicFrame>
+        <p:nvGraphicFramePr>
+          <p:cNvPr id="4" name="Table 3">
+            <a:extLst>
+              <a:ext uri="{FF2B5EF4-FFF2-40B4-BE49-F238E27FC236}">
+                <a16:creationId xmlns:a16="http://schemas.microsoft.com/office/drawing/2014/main" id="{E389AEE5-7AA7-4E19-B36A-5446E549222B}"/>
+              </a:ext>
+            </a:extLst>
+          </p:cNvPr>
+          <p:cNvGraphicFramePr>
+            <a:graphicFrameLocks noGrp="1"/>
+          </p:cNvGraphicFramePr>
+          <p:nvPr/>
+        </p:nvGraphicFramePr>
+        <p:xfrm>
+          <a:off x="1559923" y="2006602"/>
+          <a:ext cx="5852160" cy="4145281"/>
+        </p:xfrm>
+        <a:graphic>
+          <a:graphicData uri="http://schemas.openxmlformats.org/drawingml/2006/table">
+            <a:tbl>
+              <a:tblPr firstRow="1" bandRow="1">
+                <a:tableStyleId>{2D5ABB26-0587-4C30-8999-92F81FD0307C}</a:tableStyleId>
+              </a:tblPr>
+              <a:tblGrid>
+                <a:gridCol w="3050027">
+                  <a:extLst>
+                    <a:ext uri="{9D8B030D-6E8A-4147-A177-3AD203B41FA5}">
+                      <a16:colId xmlns:a16="http://schemas.microsoft.com/office/drawing/2014/main" val="3577304506"/>
+                    </a:ext>
+                  </a:extLst>
+                </a:gridCol>
+                <a:gridCol w="2802133">
+                  <a:extLst>
+                    <a:ext uri="{9D8B030D-6E8A-4147-A177-3AD203B41FA5}">
+                      <a16:colId xmlns:a16="http://schemas.microsoft.com/office/drawing/2014/main" val="3606947816"/>
+                    </a:ext>
+                  </a:extLst>
+                </a:gridCol>
+              </a:tblGrid>
+              <a:tr h="592183">
+                <a:tc>
+                  <a:txBody>
+                    <a:bodyPr/>
+                    <a:lstStyle/>
+                    <a:p>
+                      <a:pPr lvl="0" algn="r"/>
+                      <a:r>
+                        <a:rPr lang="en-US" sz="2700" b="1" dirty="0">
+                          <a:solidFill>
+                            <a:srgbClr val="C30037"/>
+                          </a:solidFill>
+                          <a:latin typeface="+mn-lt"/>
+                        </a:rPr>
+                        <a:t>1 ns</a:t>
+                      </a:r>
+                    </a:p>
+                  </a:txBody>
+                  <a:tcPr marL="0" marR="121920" marT="0" marB="0" anchor="ctr">
+                    <a:lnL w="12700" cap="flat" cmpd="sng" algn="ctr">
+                      <a:noFill/>
+                      <a:prstDash val="solid"/>
+                      <a:round/>
+                      <a:headEnd type="none" w="med" len="med"/>
+                      <a:tailEnd type="none" w="med" len="med"/>
+                    </a:lnL>
+                    <a:lnR>
+                      <a:noFill/>
+                    </a:lnR>
+                    <a:lnT w="12700" cap="flat" cmpd="sng" algn="ctr">
+                      <a:noFill/>
+                      <a:prstDash val="solid"/>
+                      <a:round/>
+                      <a:headEnd type="none" w="med" len="med"/>
+                      <a:tailEnd type="none" w="med" len="med"/>
+                    </a:lnT>
+                    <a:lnB>
+                      <a:noFill/>
+                    </a:lnB>
+                    <a:lnTlToBr w="12700" cmpd="sng">
+                      <a:noFill/>
+                      <a:prstDash val="solid"/>
+                    </a:lnTlToBr>
+                    <a:lnBlToTr w="12700" cmpd="sng">
+                      <a:noFill/>
+                      <a:prstDash val="solid"/>
+                    </a:lnBlToTr>
+                    <a:solidFill>
+                      <a:schemeClr val="tx1">
+                        <a:alpha val="7000"/>
+                      </a:schemeClr>
+                    </a:solidFill>
+                  </a:tcPr>
+                </a:tc>
+                <a:tc>
+                  <a:txBody>
+                    <a:bodyPr/>
+                    <a:lstStyle/>
+                    <a:p>
+                      <a:pPr algn="l"/>
+                      <a:r>
+                        <a:rPr lang="en-US" sz="2700" dirty="0">
+                          <a:solidFill>
+                            <a:schemeClr val="tx1">
+                              <a:lumMod val="65000"/>
+                              <a:lumOff val="35000"/>
+                            </a:schemeClr>
+                          </a:solidFill>
+                          <a:latin typeface="+mn-lt"/>
+                        </a:rPr>
+                        <a:t>L1 Cache Ref</a:t>
+                      </a:r>
+                    </a:p>
+                  </a:txBody>
+                  <a:tcPr marL="0" marR="0" marT="0" marB="0" anchor="ctr">
+                    <a:lnL>
+                      <a:noFill/>
+                    </a:lnL>
+                    <a:lnR w="12700" cap="flat" cmpd="sng" algn="ctr">
+                      <a:noFill/>
+                      <a:prstDash val="solid"/>
+                      <a:round/>
+                      <a:headEnd type="none" w="med" len="med"/>
+                      <a:tailEnd type="none" w="med" len="med"/>
+                    </a:lnR>
+                    <a:lnT w="12700" cap="flat" cmpd="sng" algn="ctr">
+                      <a:noFill/>
+                      <a:prstDash val="solid"/>
+                      <a:round/>
+                      <a:headEnd type="none" w="med" len="med"/>
+                      <a:tailEnd type="none" w="med" len="med"/>
+                    </a:lnT>
+                    <a:lnB>
+                      <a:noFill/>
+                    </a:lnB>
+                    <a:lnTlToBr w="12700" cmpd="sng">
+                      <a:noFill/>
+                      <a:prstDash val="solid"/>
+                    </a:lnTlToBr>
+                    <a:lnBlToTr w="12700" cmpd="sng">
+                      <a:noFill/>
+                      <a:prstDash val="solid"/>
+                    </a:lnBlToTr>
+                    <a:solidFill>
+                      <a:schemeClr val="tx1">
+                        <a:alpha val="7000"/>
+                      </a:schemeClr>
+                    </a:solidFill>
+                  </a:tcPr>
+                </a:tc>
+                <a:extLst>
+                  <a:ext uri="{0D108BD9-81ED-4DB2-BD59-A6C34878D82A}">
+                    <a16:rowId xmlns:a16="http://schemas.microsoft.com/office/drawing/2014/main" val="10001"/>
+                  </a:ext>
+                </a:extLst>
+              </a:tr>
+              <a:tr h="592183">
+                <a:tc>
+                  <a:txBody>
+                    <a:bodyPr/>
+                    <a:lstStyle/>
+                    <a:p>
+                      <a:pPr lvl="0" algn="r"/>
+                      <a:r>
+                        <a:rPr lang="en-US" sz="2700" b="1" dirty="0">
+                          <a:solidFill>
+                            <a:srgbClr val="C30037"/>
+                          </a:solidFill>
+                          <a:latin typeface="+mn-lt"/>
+                        </a:rPr>
+                        <a:t>4 ns</a:t>
+                      </a:r>
+                    </a:p>
+                  </a:txBody>
+                  <a:tcPr marL="0" marR="121920" marT="0" marB="0" anchor="ctr">
+                    <a:lnL w="12700" cap="flat" cmpd="sng" algn="ctr">
+                      <a:noFill/>
+                      <a:prstDash val="solid"/>
+                      <a:round/>
+                      <a:headEnd type="none" w="med" len="med"/>
+                      <a:tailEnd type="none" w="med" len="med"/>
+                    </a:lnL>
+                    <a:lnR>
+                      <a:noFill/>
+                    </a:lnR>
+                    <a:lnT>
+                      <a:noFill/>
+                    </a:lnT>
+                    <a:lnB>
+                      <a:noFill/>
+                    </a:lnB>
+                    <a:lnTlToBr w="12700" cmpd="sng">
+                      <a:noFill/>
+                      <a:prstDash val="solid"/>
+                    </a:lnTlToBr>
+                    <a:lnBlToTr w="12700" cmpd="sng">
+                      <a:noFill/>
+                      <a:prstDash val="solid"/>
+                    </a:lnBlToTr>
+                    <a:solidFill>
+                      <a:schemeClr val="tx1">
+                        <a:alpha val="7000"/>
+                      </a:schemeClr>
+                    </a:solidFill>
+                  </a:tcPr>
+                </a:tc>
+                <a:tc>
+                  <a:txBody>
+                    <a:bodyPr/>
+                    <a:lstStyle/>
+                    <a:p>
+                      <a:pPr algn="l"/>
+                      <a:r>
+                        <a:rPr lang="en-US" sz="2700" dirty="0">
+                          <a:solidFill>
+                            <a:schemeClr val="tx1">
+                              <a:lumMod val="65000"/>
+                              <a:lumOff val="35000"/>
+                            </a:schemeClr>
+                          </a:solidFill>
+                          <a:latin typeface="+mn-lt"/>
+                        </a:rPr>
+                        <a:t>L2 Cache Ref</a:t>
+                      </a:r>
+                    </a:p>
+                  </a:txBody>
+                  <a:tcPr marL="0" marR="0" marT="0" marB="0" anchor="ctr">
+                    <a:lnL>
+                      <a:noFill/>
+                    </a:lnL>
+                    <a:lnR w="12700" cap="flat" cmpd="sng" algn="ctr">
+                      <a:noFill/>
+                      <a:prstDash val="solid"/>
+                      <a:round/>
+                      <a:headEnd type="none" w="med" len="med"/>
+                      <a:tailEnd type="none" w="med" len="med"/>
+                    </a:lnR>
+                    <a:lnT>
+                      <a:noFill/>
+                    </a:lnT>
+                    <a:lnB>
+                      <a:noFill/>
+                    </a:lnB>
+                    <a:lnTlToBr w="12700" cmpd="sng">
+                      <a:noFill/>
+                      <a:prstDash val="solid"/>
+                    </a:lnTlToBr>
+                    <a:lnBlToTr w="12700" cmpd="sng">
+                      <a:noFill/>
+                      <a:prstDash val="solid"/>
+                    </a:lnBlToTr>
+                    <a:solidFill>
+                      <a:schemeClr val="tx1">
+                        <a:alpha val="7000"/>
+                      </a:schemeClr>
+                    </a:solidFill>
+                  </a:tcPr>
+                </a:tc>
+                <a:extLst>
+                  <a:ext uri="{0D108BD9-81ED-4DB2-BD59-A6C34878D82A}">
+                    <a16:rowId xmlns:a16="http://schemas.microsoft.com/office/drawing/2014/main" val="10002"/>
+                  </a:ext>
+                </a:extLst>
+              </a:tr>
+              <a:tr h="592183">
+                <a:tc>
+                  <a:txBody>
+                    <a:bodyPr/>
+                    <a:lstStyle/>
+                    <a:p>
+                      <a:pPr lvl="0" algn="r"/>
+                      <a:r>
+                        <a:rPr lang="en-US" sz="2700" b="1" dirty="0">
+                          <a:solidFill>
+                            <a:srgbClr val="C30037"/>
+                          </a:solidFill>
+                          <a:latin typeface="+mn-lt"/>
+                        </a:rPr>
+                        <a:t>100 ns</a:t>
+                      </a:r>
+                    </a:p>
+                  </a:txBody>
+                  <a:tcPr marL="0" marR="121920" marT="0" marB="0" anchor="ctr">
+                    <a:lnL w="12700" cap="flat" cmpd="sng" algn="ctr">
+                      <a:noFill/>
+                      <a:prstDash val="solid"/>
+                      <a:round/>
+                      <a:headEnd type="none" w="med" len="med"/>
+                      <a:tailEnd type="none" w="med" len="med"/>
+                    </a:lnL>
+                    <a:lnR>
+                      <a:noFill/>
+                    </a:lnR>
+                    <a:lnT>
+                      <a:noFill/>
+                    </a:lnT>
+                    <a:lnB>
+                      <a:noFill/>
+                    </a:lnB>
+                    <a:lnTlToBr w="12700" cmpd="sng">
+                      <a:noFill/>
+                      <a:prstDash val="solid"/>
+                    </a:lnTlToBr>
+                    <a:lnBlToTr w="12700" cmpd="sng">
+                      <a:noFill/>
+                      <a:prstDash val="solid"/>
+                    </a:lnBlToTr>
+                    <a:solidFill>
+                      <a:schemeClr val="tx1">
+                        <a:alpha val="7000"/>
+                      </a:schemeClr>
+                    </a:solidFill>
+                  </a:tcPr>
+                </a:tc>
+                <a:tc>
+                  <a:txBody>
+                    <a:bodyPr/>
+                    <a:lstStyle/>
+                    <a:p>
+                      <a:pPr algn="l"/>
+                      <a:r>
+                        <a:rPr lang="en-US" sz="2700" dirty="0">
+                          <a:solidFill>
+                            <a:schemeClr val="tx1">
+                              <a:lumMod val="65000"/>
+                              <a:lumOff val="35000"/>
+                            </a:schemeClr>
+                          </a:solidFill>
+                          <a:latin typeface="+mn-lt"/>
+                        </a:rPr>
+                        <a:t>DRAM</a:t>
+                      </a:r>
+                    </a:p>
+                  </a:txBody>
+                  <a:tcPr marL="0" marR="0" marT="0" marB="0" anchor="ctr">
+                    <a:lnL>
+                      <a:noFill/>
+                    </a:lnL>
+                    <a:lnR w="12700" cap="flat" cmpd="sng" algn="ctr">
+                      <a:noFill/>
+                      <a:prstDash val="solid"/>
+                      <a:round/>
+                      <a:headEnd type="none" w="med" len="med"/>
+                      <a:tailEnd type="none" w="med" len="med"/>
+                    </a:lnR>
+                    <a:lnT>
+                      <a:noFill/>
+                    </a:lnT>
+                    <a:lnB>
+                      <a:noFill/>
+                    </a:lnB>
+                    <a:lnTlToBr w="12700" cmpd="sng">
+                      <a:noFill/>
+                      <a:prstDash val="solid"/>
+                    </a:lnTlToBr>
+                    <a:lnBlToTr w="12700" cmpd="sng">
+                      <a:noFill/>
+                      <a:prstDash val="solid"/>
+                    </a:lnBlToTr>
+                    <a:solidFill>
+                      <a:schemeClr val="tx1">
+                        <a:alpha val="7000"/>
+                      </a:schemeClr>
+                    </a:solidFill>
+                  </a:tcPr>
+                </a:tc>
+                <a:extLst>
+                  <a:ext uri="{0D108BD9-81ED-4DB2-BD59-A6C34878D82A}">
+                    <a16:rowId xmlns:a16="http://schemas.microsoft.com/office/drawing/2014/main" val="2054045550"/>
+                  </a:ext>
+                </a:extLst>
+              </a:tr>
+              <a:tr h="592183">
+                <a:tc>
+                  <a:txBody>
+                    <a:bodyPr/>
+                    <a:lstStyle/>
+                    <a:p>
+                      <a:pPr lvl="0" algn="r"/>
+                      <a:r>
+                        <a:rPr lang="en-US" sz="2700" b="1" dirty="0">
+                          <a:solidFill>
+                            <a:srgbClr val="C30037"/>
+                          </a:solidFill>
+                          <a:latin typeface="+mn-lt"/>
+                        </a:rPr>
+                        <a:t>16,000</a:t>
+                      </a:r>
+                      <a:r>
+                        <a:rPr lang="en-US" sz="2700" b="1" baseline="30000" dirty="0">
+                          <a:solidFill>
+                            <a:srgbClr val="C30037"/>
+                          </a:solidFill>
+                          <a:latin typeface="+mn-lt"/>
+                        </a:rPr>
+                        <a:t> </a:t>
+                      </a:r>
+                      <a:r>
+                        <a:rPr lang="en-US" sz="2700" b="1" baseline="0" dirty="0">
+                          <a:solidFill>
+                            <a:srgbClr val="C30037"/>
+                          </a:solidFill>
+                          <a:latin typeface="+mn-lt"/>
+                        </a:rPr>
+                        <a:t>ns</a:t>
+                      </a:r>
+                      <a:endParaRPr lang="en-US" sz="2700" b="1" baseline="30000" dirty="0">
+                        <a:solidFill>
+                          <a:srgbClr val="C30037"/>
+                        </a:solidFill>
+                        <a:latin typeface="+mn-lt"/>
+                      </a:endParaRPr>
+                    </a:p>
+                  </a:txBody>
+                  <a:tcPr marL="0" marR="121920" marT="0" marB="0" anchor="ctr">
+                    <a:lnL w="12700" cap="flat" cmpd="sng" algn="ctr">
+                      <a:noFill/>
+                      <a:prstDash val="solid"/>
+                      <a:round/>
+                      <a:headEnd type="none" w="med" len="med"/>
+                      <a:tailEnd type="none" w="med" len="med"/>
+                    </a:lnL>
+                    <a:lnR>
+                      <a:noFill/>
+                    </a:lnR>
+                    <a:lnT>
+                      <a:noFill/>
+                    </a:lnT>
+                    <a:lnB>
+                      <a:noFill/>
+                    </a:lnB>
+                    <a:lnTlToBr w="12700" cmpd="sng">
+                      <a:noFill/>
+                      <a:prstDash val="solid"/>
+                    </a:lnTlToBr>
+                    <a:lnBlToTr w="12700" cmpd="sng">
+                      <a:noFill/>
+                      <a:prstDash val="solid"/>
+                    </a:lnBlToTr>
+                    <a:solidFill>
+                      <a:schemeClr val="tx1">
+                        <a:alpha val="7000"/>
+                      </a:schemeClr>
+                    </a:solidFill>
+                  </a:tcPr>
+                </a:tc>
+                <a:tc>
+                  <a:txBody>
+                    <a:bodyPr/>
+                    <a:lstStyle/>
+                    <a:p>
+                      <a:pPr algn="l"/>
+                      <a:r>
+                        <a:rPr lang="en-US" sz="2700" dirty="0">
+                          <a:solidFill>
+                            <a:schemeClr val="tx1">
+                              <a:lumMod val="65000"/>
+                              <a:lumOff val="35000"/>
+                            </a:schemeClr>
+                          </a:solidFill>
+                          <a:latin typeface="+mn-lt"/>
+                        </a:rPr>
+                        <a:t>SSD</a:t>
+                      </a:r>
+                    </a:p>
+                  </a:txBody>
+                  <a:tcPr marL="0" marR="0" marT="0" marB="0" anchor="ctr">
+                    <a:lnL>
+                      <a:noFill/>
+                    </a:lnL>
+                    <a:lnR w="12700" cap="flat" cmpd="sng" algn="ctr">
+                      <a:noFill/>
+                      <a:prstDash val="solid"/>
+                      <a:round/>
+                      <a:headEnd type="none" w="med" len="med"/>
+                      <a:tailEnd type="none" w="med" len="med"/>
+                    </a:lnR>
+                    <a:lnT>
+                      <a:noFill/>
+                    </a:lnT>
+                    <a:lnB>
+                      <a:noFill/>
+                    </a:lnB>
+                    <a:lnTlToBr w="12700" cmpd="sng">
+                      <a:noFill/>
+                      <a:prstDash val="solid"/>
+                    </a:lnTlToBr>
+                    <a:lnBlToTr w="12700" cmpd="sng">
+                      <a:noFill/>
+                      <a:prstDash val="solid"/>
+                    </a:lnBlToTr>
+                    <a:solidFill>
+                      <a:schemeClr val="tx1">
+                        <a:alpha val="7000"/>
+                      </a:schemeClr>
+                    </a:solidFill>
+                  </a:tcPr>
+                </a:tc>
+                <a:extLst>
+                  <a:ext uri="{0D108BD9-81ED-4DB2-BD59-A6C34878D82A}">
+                    <a16:rowId xmlns:a16="http://schemas.microsoft.com/office/drawing/2014/main" val="10003"/>
+                  </a:ext>
+                </a:extLst>
+              </a:tr>
+              <a:tr h="592183">
+                <a:tc>
+                  <a:txBody>
+                    <a:bodyPr/>
+                    <a:lstStyle/>
+                    <a:p>
+                      <a:pPr lvl="0" algn="r"/>
+                      <a:r>
+                        <a:rPr lang="en-US" sz="2700" b="1" dirty="0">
+                          <a:solidFill>
+                            <a:srgbClr val="C30037"/>
+                          </a:solidFill>
+                          <a:latin typeface="+mn-lt"/>
+                        </a:rPr>
+                        <a:t>2</a:t>
+                      </a:r>
+                      <a:r>
+                        <a:rPr lang="en-US" sz="2700" b="1" baseline="0" dirty="0">
+                          <a:solidFill>
+                            <a:srgbClr val="C30037"/>
+                          </a:solidFill>
+                          <a:latin typeface="+mn-lt"/>
+                        </a:rPr>
+                        <a:t>,000,000 ns</a:t>
+                      </a:r>
+                    </a:p>
+                  </a:txBody>
+                  <a:tcPr marL="0" marR="121920" marT="0" marB="0" anchor="ctr">
+                    <a:lnL w="12700" cap="flat" cmpd="sng" algn="ctr">
+                      <a:noFill/>
+                      <a:prstDash val="solid"/>
+                      <a:round/>
+                      <a:headEnd type="none" w="med" len="med"/>
+                      <a:tailEnd type="none" w="med" len="med"/>
+                    </a:lnL>
+                    <a:lnR>
+                      <a:noFill/>
+                    </a:lnR>
+                    <a:lnT>
+                      <a:noFill/>
+                    </a:lnT>
+                    <a:lnB>
+                      <a:noFill/>
+                    </a:lnB>
+                    <a:lnTlToBr w="12700" cmpd="sng">
+                      <a:noFill/>
+                      <a:prstDash val="solid"/>
+                    </a:lnTlToBr>
+                    <a:lnBlToTr w="12700" cmpd="sng">
+                      <a:noFill/>
+                      <a:prstDash val="solid"/>
+                    </a:lnBlToTr>
+                    <a:solidFill>
+                      <a:schemeClr val="tx1">
+                        <a:alpha val="7000"/>
+                      </a:schemeClr>
+                    </a:solidFill>
+                  </a:tcPr>
+                </a:tc>
+                <a:tc>
+                  <a:txBody>
+                    <a:bodyPr/>
+                    <a:lstStyle/>
+                    <a:p>
+                      <a:pPr algn="l"/>
+                      <a:r>
+                        <a:rPr lang="en-US" sz="2700" dirty="0">
+                          <a:solidFill>
+                            <a:schemeClr val="tx1">
+                              <a:lumMod val="65000"/>
+                              <a:lumOff val="35000"/>
+                            </a:schemeClr>
+                          </a:solidFill>
+                          <a:latin typeface="+mn-lt"/>
+                        </a:rPr>
+                        <a:t>HDD</a:t>
+                      </a:r>
+                    </a:p>
+                  </a:txBody>
+                  <a:tcPr marL="0" marR="0" marT="0" marB="0" anchor="ctr">
+                    <a:lnL>
+                      <a:noFill/>
+                    </a:lnL>
+                    <a:lnR w="12700" cap="flat" cmpd="sng" algn="ctr">
+                      <a:noFill/>
+                      <a:prstDash val="solid"/>
+                      <a:round/>
+                      <a:headEnd type="none" w="med" len="med"/>
+                      <a:tailEnd type="none" w="med" len="med"/>
+                    </a:lnR>
+                    <a:lnT>
+                      <a:noFill/>
+                    </a:lnT>
+                    <a:lnB>
+                      <a:noFill/>
+                    </a:lnB>
+                    <a:lnTlToBr w="12700" cmpd="sng">
+                      <a:noFill/>
+                      <a:prstDash val="solid"/>
+                    </a:lnTlToBr>
+                    <a:lnBlToTr w="12700" cmpd="sng">
+                      <a:noFill/>
+                      <a:prstDash val="solid"/>
+                    </a:lnBlToTr>
+                    <a:solidFill>
+                      <a:schemeClr val="tx1">
+                        <a:alpha val="7000"/>
+                      </a:schemeClr>
+                    </a:solidFill>
+                  </a:tcPr>
+                </a:tc>
+                <a:extLst>
+                  <a:ext uri="{0D108BD9-81ED-4DB2-BD59-A6C34878D82A}">
+                    <a16:rowId xmlns:a16="http://schemas.microsoft.com/office/drawing/2014/main" val="3445743322"/>
+                  </a:ext>
+                </a:extLst>
+              </a:tr>
+              <a:tr h="592183">
+                <a:tc>
+                  <a:txBody>
+                    <a:bodyPr/>
+                    <a:lstStyle/>
+                    <a:p>
+                      <a:pPr lvl="0" algn="r"/>
+                      <a:r>
+                        <a:rPr lang="en-US" sz="2700" b="1" dirty="0">
+                          <a:solidFill>
+                            <a:srgbClr val="C30037"/>
+                          </a:solidFill>
+                          <a:latin typeface="+mn-lt"/>
+                        </a:rPr>
+                        <a:t>~50,000,000 ns</a:t>
+                      </a:r>
+                    </a:p>
+                  </a:txBody>
+                  <a:tcPr marL="0" marR="121920" marT="0" marB="0" anchor="ctr">
+                    <a:lnL w="12700" cap="flat" cmpd="sng" algn="ctr">
+                      <a:noFill/>
+                      <a:prstDash val="solid"/>
+                      <a:round/>
+                      <a:headEnd type="none" w="med" len="med"/>
+                      <a:tailEnd type="none" w="med" len="med"/>
+                    </a:lnL>
+                    <a:lnR>
+                      <a:noFill/>
+                    </a:lnR>
+                    <a:lnT>
+                      <a:noFill/>
+                    </a:lnT>
+                    <a:lnB>
+                      <a:noFill/>
+                    </a:lnB>
+                    <a:lnTlToBr w="12700" cmpd="sng">
+                      <a:noFill/>
+                      <a:prstDash val="solid"/>
+                    </a:lnTlToBr>
+                    <a:lnBlToTr w="12700" cmpd="sng">
+                      <a:noFill/>
+                      <a:prstDash val="solid"/>
+                    </a:lnBlToTr>
+                    <a:solidFill>
+                      <a:schemeClr val="tx1">
+                        <a:alpha val="7000"/>
+                      </a:schemeClr>
+                    </a:solidFill>
+                  </a:tcPr>
+                </a:tc>
+                <a:tc>
+                  <a:txBody>
+                    <a:bodyPr/>
+                    <a:lstStyle/>
+                    <a:p>
+                      <a:pPr algn="l"/>
+                      <a:r>
+                        <a:rPr lang="en-US" sz="2700" dirty="0">
+                          <a:solidFill>
+                            <a:schemeClr val="tx1">
+                              <a:lumMod val="65000"/>
+                              <a:lumOff val="35000"/>
+                            </a:schemeClr>
+                          </a:solidFill>
+                          <a:latin typeface="+mn-lt"/>
+                        </a:rPr>
+                        <a:t>Network Storage</a:t>
+                      </a:r>
+                    </a:p>
+                  </a:txBody>
+                  <a:tcPr marL="0" marR="0" marT="0" marB="0" anchor="ctr">
+                    <a:lnL>
+                      <a:noFill/>
+                    </a:lnL>
+                    <a:lnR w="12700" cap="flat" cmpd="sng" algn="ctr">
+                      <a:noFill/>
+                      <a:prstDash val="solid"/>
+                      <a:round/>
+                      <a:headEnd type="none" w="med" len="med"/>
+                      <a:tailEnd type="none" w="med" len="med"/>
+                    </a:lnR>
+                    <a:lnT>
+                      <a:noFill/>
+                    </a:lnT>
+                    <a:lnB>
+                      <a:noFill/>
+                    </a:lnB>
+                    <a:lnTlToBr w="12700" cmpd="sng">
+                      <a:noFill/>
+                      <a:prstDash val="solid"/>
+                    </a:lnTlToBr>
+                    <a:lnBlToTr w="12700" cmpd="sng">
+                      <a:noFill/>
+                      <a:prstDash val="solid"/>
+                    </a:lnBlToTr>
+                    <a:solidFill>
+                      <a:schemeClr val="tx1">
+                        <a:alpha val="7000"/>
+                      </a:schemeClr>
+                    </a:solidFill>
+                  </a:tcPr>
+                </a:tc>
+                <a:extLst>
+                  <a:ext uri="{0D108BD9-81ED-4DB2-BD59-A6C34878D82A}">
+                    <a16:rowId xmlns:a16="http://schemas.microsoft.com/office/drawing/2014/main" val="49878179"/>
+                  </a:ext>
+                </a:extLst>
+              </a:tr>
+              <a:tr h="592183">
+                <a:tc>
+                  <a:txBody>
+                    <a:bodyPr/>
+                    <a:lstStyle/>
+                    <a:p>
+                      <a:pPr lvl="0" algn="r"/>
+                      <a:r>
+                        <a:rPr lang="en-US" sz="2700" b="1" baseline="0" dirty="0">
+                          <a:solidFill>
+                            <a:srgbClr val="C30037"/>
+                          </a:solidFill>
+                          <a:latin typeface="+mn-lt"/>
+                        </a:rPr>
+                        <a:t>1,000,000,000 ns</a:t>
+                      </a:r>
+                    </a:p>
+                  </a:txBody>
+                  <a:tcPr marL="0" marR="121920" marT="0" marB="0" anchor="ctr">
+                    <a:lnL w="12700" cap="flat" cmpd="sng" algn="ctr">
+                      <a:noFill/>
+                      <a:prstDash val="solid"/>
+                      <a:round/>
+                      <a:headEnd type="none" w="med" len="med"/>
+                      <a:tailEnd type="none" w="med" len="med"/>
+                    </a:lnL>
+                    <a:lnR>
+                      <a:noFill/>
+                    </a:lnR>
+                    <a:lnT>
+                      <a:noFill/>
+                    </a:lnT>
+                    <a:lnB w="12700" cap="flat" cmpd="sng" algn="ctr">
+                      <a:noFill/>
+                      <a:prstDash val="solid"/>
+                      <a:round/>
+                      <a:headEnd type="none" w="med" len="med"/>
+                      <a:tailEnd type="none" w="med" len="med"/>
+                    </a:lnB>
+                    <a:lnTlToBr w="12700" cmpd="sng">
+                      <a:noFill/>
+                      <a:prstDash val="solid"/>
+                    </a:lnTlToBr>
+                    <a:lnBlToTr w="12700" cmpd="sng">
+                      <a:noFill/>
+                      <a:prstDash val="solid"/>
+                    </a:lnBlToTr>
+                    <a:solidFill>
+                      <a:schemeClr val="tx1">
+                        <a:alpha val="7000"/>
+                      </a:schemeClr>
+                    </a:solidFill>
+                  </a:tcPr>
+                </a:tc>
+                <a:tc>
+                  <a:txBody>
+                    <a:bodyPr/>
+                    <a:lstStyle/>
+                    <a:p>
+                      <a:pPr algn="l"/>
+                      <a:r>
+                        <a:rPr lang="en-US" sz="2700" dirty="0">
+                          <a:solidFill>
+                            <a:schemeClr val="tx1">
+                              <a:lumMod val="65000"/>
+                              <a:lumOff val="35000"/>
+                            </a:schemeClr>
+                          </a:solidFill>
+                          <a:latin typeface="+mn-lt"/>
+                        </a:rPr>
+                        <a:t>Tape Archives</a:t>
+                      </a:r>
+                    </a:p>
+                  </a:txBody>
+                  <a:tcPr marL="0" marR="0" marT="0" marB="0" anchor="ctr">
+                    <a:lnL>
+                      <a:noFill/>
+                    </a:lnL>
+                    <a:lnR w="12700" cap="flat" cmpd="sng" algn="ctr">
+                      <a:noFill/>
+                      <a:prstDash val="solid"/>
+                      <a:round/>
+                      <a:headEnd type="none" w="med" len="med"/>
+                      <a:tailEnd type="none" w="med" len="med"/>
+                    </a:lnR>
+                    <a:lnT>
+                      <a:noFill/>
+                    </a:lnT>
+                    <a:lnB w="12700" cap="flat" cmpd="sng" algn="ctr">
+                      <a:noFill/>
+                      <a:prstDash val="solid"/>
+                      <a:round/>
+                      <a:headEnd type="none" w="med" len="med"/>
+                      <a:tailEnd type="none" w="med" len="med"/>
+                    </a:lnB>
+                    <a:lnTlToBr w="12700" cmpd="sng">
+                      <a:noFill/>
+                      <a:prstDash val="solid"/>
+                    </a:lnTlToBr>
+                    <a:lnBlToTr w="12700" cmpd="sng">
+                      <a:noFill/>
+                      <a:prstDash val="solid"/>
+                    </a:lnBlToTr>
+                    <a:solidFill>
+                      <a:schemeClr val="tx1">
+                        <a:alpha val="7000"/>
+                      </a:schemeClr>
+                    </a:solidFill>
+                  </a:tcPr>
+                </a:tc>
+                <a:extLst>
+                  <a:ext uri="{0D108BD9-81ED-4DB2-BD59-A6C34878D82A}">
+                    <a16:rowId xmlns:a16="http://schemas.microsoft.com/office/drawing/2014/main" val="1136046997"/>
+                  </a:ext>
+                </a:extLst>
+              </a:tr>
+            </a:tbl>
+          </a:graphicData>
+        </a:graphic>
+      </p:graphicFrame>
+      <p:sp>
+        <p:nvSpPr>
+          <p:cNvPr id="20" name="TextBox 19">
+            <a:extLst>
+              <a:ext uri="{FF2B5EF4-FFF2-40B4-BE49-F238E27FC236}">
+                <a16:creationId xmlns:a16="http://schemas.microsoft.com/office/drawing/2014/main" id="{2ECD80B6-7844-27DF-5202-8E65AF59A4D3}"/>
+              </a:ext>
+            </a:extLst>
+          </p:cNvPr>
+          <p:cNvSpPr txBox="1"/>
+          <p:nvPr/>
+        </p:nvSpPr>
+        <p:spPr>
+          <a:xfrm>
+            <a:off x="10665236" y="6406595"/>
+            <a:ext cx="1526764" cy="451342"/>
+          </a:xfrm>
+          <a:prstGeom prst="rect">
+            <a:avLst/>
+          </a:prstGeom>
+          <a:noFill/>
+        </p:spPr>
+        <p:txBody>
+          <a:bodyPr wrap="none" lIns="0" tIns="0" rIns="97536" bIns="243840" rtlCol="0">
+            <a:spAutoFit/>
+          </a:bodyPr>
+          <a:lstStyle>
+            <a:defPPr>
+              <a:defRPr lang="en-US"/>
+            </a:defPPr>
+            <a:lvl1pPr lvl="0">
+              <a:defRPr kumimoji="0" sz="1000" b="0" i="0" u="none" strike="noStrike" cap="none" spc="0" normalizeH="0" baseline="0">
+                <a:ln>
+                  <a:noFill/>
+                </a:ln>
+                <a:solidFill>
+                  <a:prstClr val="black">
+                    <a:lumMod val="75000"/>
+                    <a:lumOff val="25000"/>
+                  </a:prstClr>
+                </a:solidFill>
+                <a:effectLst/>
+                <a:uLnTx/>
+                <a:uFillTx/>
+                <a:latin typeface="Museo Sans 300" panose="02000000000000000000" pitchFamily="50" charset="0"/>
+              </a:defRPr>
+            </a:lvl1pPr>
+          </a:lstStyle>
+          <a:p>
+            <a:pPr algn="r"/>
+            <a:r>
+              <a:rPr lang="en-US" sz="1333" dirty="0">
+                <a:latin typeface="Lato" panose="020F0502020204030203" pitchFamily="34" charset="0"/>
+              </a:rPr>
+              <a:t>Source: </a:t>
+            </a:r>
+            <a:r>
+              <a:rPr lang="en-US" sz="1333" dirty="0">
+                <a:latin typeface="Lato" panose="020F0502020204030203" pitchFamily="34" charset="0"/>
+                <a:hlinkClick r:id="rId3"/>
+              </a:rPr>
+              <a:t>Colin Scott</a:t>
+            </a:r>
+            <a:endParaRPr lang="en-US" sz="1333" dirty="0">
+              <a:latin typeface="Lato" panose="020F0502020204030203" pitchFamily="34" charset="0"/>
+            </a:endParaRPr>
+          </a:p>
+        </p:txBody>
+      </p:sp>
+      <p:sp>
+        <p:nvSpPr>
+          <p:cNvPr id="21" name="Slide Number Placeholder 3" descr=" 5">
+            <a:extLst>
+              <a:ext uri="{FF2B5EF4-FFF2-40B4-BE49-F238E27FC236}">
+                <a16:creationId xmlns:a16="http://schemas.microsoft.com/office/drawing/2014/main" id="{801EB65A-0424-61DE-09A6-77ECD9FEF324}"/>
+              </a:ext>
+            </a:extLst>
+          </p:cNvPr>
+          <p:cNvSpPr txBox="1">
+            <a:spLocks/>
+          </p:cNvSpPr>
+          <p:nvPr/>
+        </p:nvSpPr>
+        <p:spPr>
+          <a:xfrm>
+            <a:off x="11704320" y="0"/>
+            <a:ext cx="487680" cy="365125"/>
+          </a:xfrm>
+          <a:prstGeom prst="rect">
+            <a:avLst/>
+          </a:prstGeom>
+          <a:solidFill>
+            <a:schemeClr val="bg1">
+              <a:lumMod val="50000"/>
+            </a:schemeClr>
+          </a:solidFill>
+        </p:spPr>
+        <p:txBody>
+          <a:bodyPr vert="horz" wrap="square" lIns="0" tIns="60960" rIns="60960" bIns="60960" rtlCol="0" anchor="ctr"/>
+          <a:lstStyle>
+            <a:defPPr>
+              <a:defRPr lang="en-US"/>
+            </a:defPPr>
+            <a:lvl1pPr algn="r">
+              <a:defRPr sz="1200">
+                <a:solidFill>
+                  <a:schemeClr val="bg1">
+                    <a:lumMod val="95000"/>
+                  </a:schemeClr>
+                </a:solidFill>
+                <a:latin typeface="Consolas" panose="020B0609020204030204" pitchFamily="49" charset="0"/>
+              </a:defRPr>
+            </a:lvl1pPr>
+            <a:lvl2pPr marL="457200" algn="l" defTabSz="914400" rtl="0" eaLnBrk="1" latinLnBrk="0" hangingPunct="1">
+              <a:defRPr sz="1800" kern="1200">
+                <a:solidFill>
+                  <a:schemeClr val="tx1"/>
+                </a:solidFill>
+                <a:latin typeface="+mn-lt"/>
+                <a:ea typeface="+mn-ea"/>
+                <a:cs typeface="+mn-cs"/>
+              </a:defRPr>
+            </a:lvl2pPr>
+            <a:lvl3pPr marL="914400" algn="l" defTabSz="914400" rtl="0" eaLnBrk="1" latinLnBrk="0" hangingPunct="1">
+              <a:defRPr sz="1800" kern="1200">
+                <a:solidFill>
+                  <a:schemeClr val="tx1"/>
+                </a:solidFill>
+                <a:latin typeface="+mn-lt"/>
+                <a:ea typeface="+mn-ea"/>
+                <a:cs typeface="+mn-cs"/>
+              </a:defRPr>
+            </a:lvl3pPr>
+            <a:lvl4pPr marL="1371600" algn="l" defTabSz="914400" rtl="0" eaLnBrk="1" latinLnBrk="0" hangingPunct="1">
+              <a:defRPr sz="1800" kern="1200">
+                <a:solidFill>
+                  <a:schemeClr val="tx1"/>
+                </a:solidFill>
+                <a:latin typeface="+mn-lt"/>
+                <a:ea typeface="+mn-ea"/>
+                <a:cs typeface="+mn-cs"/>
+              </a:defRPr>
+            </a:lvl4pPr>
+            <a:lvl5pPr marL="1828800" algn="l" defTabSz="914400" rtl="0" eaLnBrk="1" latinLnBrk="0" hangingPunct="1">
+              <a:defRPr sz="1800" kern="1200">
+                <a:solidFill>
+                  <a:schemeClr val="tx1"/>
+                </a:solidFill>
+                <a:latin typeface="+mn-lt"/>
+                <a:ea typeface="+mn-ea"/>
+                <a:cs typeface="+mn-cs"/>
+              </a:defRPr>
+            </a:lvl5pPr>
+            <a:lvl6pPr marL="2286000" algn="l" defTabSz="914400" rtl="0" eaLnBrk="1" latinLnBrk="0" hangingPunct="1">
+              <a:defRPr sz="1800" kern="1200">
+                <a:solidFill>
+                  <a:schemeClr val="tx1"/>
+                </a:solidFill>
+                <a:latin typeface="+mn-lt"/>
+                <a:ea typeface="+mn-ea"/>
+                <a:cs typeface="+mn-cs"/>
+              </a:defRPr>
+            </a:lvl6pPr>
+            <a:lvl7pPr marL="2743200" algn="l" defTabSz="914400" rtl="0" eaLnBrk="1" latinLnBrk="0" hangingPunct="1">
+              <a:defRPr sz="1800" kern="1200">
+                <a:solidFill>
+                  <a:schemeClr val="tx1"/>
+                </a:solidFill>
+                <a:latin typeface="+mn-lt"/>
+                <a:ea typeface="+mn-ea"/>
+                <a:cs typeface="+mn-cs"/>
+              </a:defRPr>
+            </a:lvl7pPr>
+            <a:lvl8pPr marL="3200400" algn="l" defTabSz="914400" rtl="0" eaLnBrk="1" latinLnBrk="0" hangingPunct="1">
+              <a:defRPr sz="1800" kern="1200">
+                <a:solidFill>
+                  <a:schemeClr val="tx1"/>
+                </a:solidFill>
+                <a:latin typeface="+mn-lt"/>
+                <a:ea typeface="+mn-ea"/>
+                <a:cs typeface="+mn-cs"/>
+              </a:defRPr>
+            </a:lvl8pPr>
+            <a:lvl9pPr marL="3657600" algn="l" defTabSz="914400" rtl="0" eaLnBrk="1" latinLnBrk="0" hangingPunct="1">
+              <a:defRPr sz="1800" kern="1200">
+                <a:solidFill>
+                  <a:schemeClr val="tx1"/>
+                </a:solidFill>
+                <a:latin typeface="+mn-lt"/>
+                <a:ea typeface="+mn-ea"/>
+                <a:cs typeface="+mn-cs"/>
+              </a:defRPr>
+            </a:lvl9pPr>
+          </a:lstStyle>
+          <a:p>
+            <a:pPr defTabSz="1219170">
+              <a:defRPr/>
+            </a:pPr>
+            <a:fld id="{97DD1AB5-42BA-4E8A-BFEE-435884E16AAB}" type="slidenum">
+              <a:rPr lang="en-US" sz="1600">
+                <a:solidFill>
+                  <a:prstClr val="white">
+                    <a:lumMod val="95000"/>
+                  </a:prstClr>
+                </a:solidFill>
+              </a:rPr>
+              <a:pPr defTabSz="1219170">
+                <a:defRPr/>
+              </a:pPr>
+              <a:t>40</a:t>
+            </a:fld>
+            <a:endParaRPr lang="en-US" sz="1600" dirty="0">
+              <a:solidFill>
+                <a:prstClr val="white">
+                  <a:lumMod val="95000"/>
+                </a:prstClr>
+              </a:solidFill>
+            </a:endParaRPr>
+          </a:p>
+        </p:txBody>
+      </p:sp>
+      <p:sp>
+        <p:nvSpPr>
+          <p:cNvPr id="25" name="Rectangle 24">
+            <a:extLst>
+              <a:ext uri="{FF2B5EF4-FFF2-40B4-BE49-F238E27FC236}">
+                <a16:creationId xmlns:a16="http://schemas.microsoft.com/office/drawing/2014/main" id="{E64DD466-60B5-525A-B0D2-E4A83052CC3B}"/>
+              </a:ext>
+            </a:extLst>
+          </p:cNvPr>
+          <p:cNvSpPr/>
+          <p:nvPr/>
+        </p:nvSpPr>
+        <p:spPr>
+          <a:xfrm>
+            <a:off x="2424112" y="4395194"/>
+            <a:ext cx="3448050" cy="529368"/>
+          </a:xfrm>
+          <a:prstGeom prst="rect">
+            <a:avLst/>
+          </a:prstGeom>
+          <a:noFill/>
+          <a:ln w="82550">
+            <a:solidFill>
+              <a:schemeClr val="tx1"/>
+            </a:solidFill>
+          </a:ln>
+          <a:effectLst/>
+        </p:spPr>
+        <p:style>
+          <a:lnRef idx="1">
+            <a:schemeClr val="accent1"/>
+          </a:lnRef>
+          <a:fillRef idx="3">
+            <a:schemeClr val="accent1"/>
+          </a:fillRef>
+          <a:effectRef idx="2">
+            <a:schemeClr val="accent1"/>
+          </a:effectRef>
+          <a:fontRef idx="minor">
+            <a:schemeClr val="lt1"/>
+          </a:fontRef>
+        </p:style>
+        <p:txBody>
+          <a:bodyPr rtlCol="0" anchor="ctr"/>
+          <a:lstStyle/>
+          <a:p>
+            <a:pPr algn="ctr"/>
+            <a:endParaRPr lang="en-US"/>
+          </a:p>
+        </p:txBody>
+      </p:sp>
+      <p:sp>
+        <p:nvSpPr>
+          <p:cNvPr id="28" name="TextBox 27">
+            <a:extLst>
+              <a:ext uri="{FF2B5EF4-FFF2-40B4-BE49-F238E27FC236}">
+                <a16:creationId xmlns:a16="http://schemas.microsoft.com/office/drawing/2014/main" id="{C514509C-838C-6A25-47B7-26AD9D54028B}"/>
+              </a:ext>
+            </a:extLst>
+          </p:cNvPr>
+          <p:cNvSpPr txBox="1"/>
+          <p:nvPr/>
+        </p:nvSpPr>
+        <p:spPr>
+          <a:xfrm>
+            <a:off x="7412083" y="4182824"/>
+            <a:ext cx="4246879" cy="954107"/>
+          </a:xfrm>
+          <a:prstGeom prst="rect">
+            <a:avLst/>
+          </a:prstGeom>
+          <a:noFill/>
+        </p:spPr>
+        <p:txBody>
+          <a:bodyPr wrap="square" rtlCol="0">
+            <a:spAutoFit/>
+          </a:bodyPr>
+          <a:lstStyle/>
+          <a:p>
+            <a:r>
+              <a:rPr lang="en-US" sz="2800" dirty="0"/>
+              <a:t>Example: disk performance under different workloads</a:t>
+            </a:r>
+          </a:p>
+        </p:txBody>
+      </p:sp>
+    </p:spTree>
+    <p:extLst>
+      <p:ext uri="{BB962C8B-B14F-4D97-AF65-F5344CB8AC3E}">
+        <p14:creationId xmlns:p14="http://schemas.microsoft.com/office/powerpoint/2010/main" val="3947783722"/>
+      </p:ext>
+    </p:extLst>
+  </p:cSld>
+  <p:clrMapOvr>
+    <a:masterClrMapping/>
+  </p:clrMapOvr>
+  <p:timing>
+    <p:tnLst>
+      <p:par>
+        <p:cTn id="1" dur="indefinite" restart="never" nodeType="tmRoot">
+          <p:childTnLst>
+            <p:seq concurrent="1" nextAc="seek">
+              <p:cTn id="2" dur="indefinite" nodeType="mainSeq">
+                <p:childTnLst>
+                  <p:par>
+                    <p:cTn id="3" fill="hold">
+                      <p:stCondLst>
+                        <p:cond delay="indefinite"/>
+                      </p:stCondLst>
+                      <p:childTnLst>
+                        <p:par>
+                          <p:cTn id="4" fill="hold">
+                            <p:stCondLst>
+                              <p:cond delay="0"/>
+                            </p:stCondLst>
+                            <p:childTnLst>
+                              <p:par>
+                                <p:cTn id="5" presetID="1" presetClass="entr" presetSubtype="0" fill="hold" grpId="0" nodeType="clickEffect">
+                                  <p:stCondLst>
+                                    <p:cond delay="0"/>
+                                  </p:stCondLst>
+                                  <p:childTnLst>
+                                    <p:set>
+                                      <p:cBhvr>
+                                        <p:cTn id="6" dur="1" fill="hold">
+                                          <p:stCondLst>
+                                            <p:cond delay="0"/>
+                                          </p:stCondLst>
+                                        </p:cTn>
+                                        <p:tgtEl>
+                                          <p:spTgt spid="25"/>
+                                        </p:tgtEl>
+                                        <p:attrNameLst>
+                                          <p:attrName>style.visibility</p:attrName>
+                                        </p:attrNameLst>
+                                      </p:cBhvr>
+                                      <p:to>
+                                        <p:strVal val="visible"/>
+                                      </p:to>
+                                    </p:set>
+                                  </p:childTnLst>
+                                </p:cTn>
+                              </p:par>
+                              <p:par>
+                                <p:cTn id="7" presetID="1" presetClass="entr" presetSubtype="0" fill="hold" grpId="0" nodeType="withEffect">
+                                  <p:stCondLst>
+                                    <p:cond delay="0"/>
+                                  </p:stCondLst>
+                                  <p:childTnLst>
+                                    <p:set>
+                                      <p:cBhvr>
+                                        <p:cTn id="8" dur="1" fill="hold">
+                                          <p:stCondLst>
+                                            <p:cond delay="0"/>
+                                          </p:stCondLst>
+                                        </p:cTn>
+                                        <p:tgtEl>
+                                          <p:spTgt spid="28"/>
+                                        </p:tgtEl>
+                                        <p:attrNameLst>
+                                          <p:attrName>style.visibility</p:attrName>
+                                        </p:attrNameLst>
+                                      </p:cBhvr>
+                                      <p:to>
+                                        <p:strVal val="visible"/>
+                                      </p:to>
+                                    </p:set>
+                                  </p:childTnLst>
+                                </p:cTn>
+                              </p:par>
+                            </p:childTnLst>
+                          </p:cTn>
+                        </p:par>
+                      </p:childTnLst>
+                    </p:cTn>
+                  </p:par>
+                </p:childTnLst>
+              </p:cTn>
+              <p:prevCondLst>
+                <p:cond evt="onPrev" delay="0">
+                  <p:tgtEl>
+                    <p:sldTgt/>
+                  </p:tgtEl>
+                </p:cond>
+              </p:prevCondLst>
+              <p:nextCondLst>
+                <p:cond evt="onNext" delay="0">
+                  <p:tgtEl>
+                    <p:sldTgt/>
+                  </p:tgtEl>
+                </p:cond>
+              </p:nextCondLst>
+            </p:seq>
+          </p:childTnLst>
+        </p:cTn>
+      </p:par>
+    </p:tnLst>
+    <p:bldLst>
+      <p:bldP spid="25" grpId="0" animBg="1"/>
+      <p:bldP spid="28" grpId="0"/>
+    </p:bldLst>
+  </p:timing>
+</p:sld>
+</file>
+
+<file path=ppt/slides/slide41.xml><?xml version="1.0" encoding="utf-8"?>
 <p:sld xmlns:a="http://schemas.openxmlformats.org/drawingml/2006/main" xmlns:r="http://schemas.openxmlformats.org/officeDocument/2006/relationships" xmlns:p="http://schemas.openxmlformats.org/presentationml/2006/main">
   <p:cSld>
     <p:spTree>
@@ -34404,7 +30381,7 @@
 </p:sld>
 </file>
 
-<file path=ppt/slides/slide41.xml><?xml version="1.0" encoding="utf-8"?>
+<file path=ppt/slides/slide42.xml><?xml version="1.0" encoding="utf-8"?>
 <p:sld xmlns:a="http://schemas.openxmlformats.org/drawingml/2006/main" xmlns:r="http://schemas.openxmlformats.org/officeDocument/2006/relationships" xmlns:p="http://schemas.openxmlformats.org/presentationml/2006/main">
   <p:cSld>
     <p:spTree>
@@ -35078,7 +31055,7 @@
 </p:sld>
 </file>
 
-<file path=ppt/slides/slide42.xml><?xml version="1.0" encoding="utf-8"?>
+<file path=ppt/slides/slide43.xml><?xml version="1.0" encoding="utf-8"?>
 <p:sld xmlns:a="http://schemas.openxmlformats.org/drawingml/2006/main" xmlns:r="http://schemas.openxmlformats.org/officeDocument/2006/relationships" xmlns:p="http://schemas.openxmlformats.org/presentationml/2006/main">
   <p:cSld>
     <p:spTree>
@@ -35752,7 +31729,7 @@
 </p:sld>
 </file>
 
-<file path=ppt/slides/slide43.xml><?xml version="1.0" encoding="utf-8"?>
+<file path=ppt/slides/slide44.xml><?xml version="1.0" encoding="utf-8"?>
 <p:sld xmlns:a="http://schemas.openxmlformats.org/drawingml/2006/main" xmlns:r="http://schemas.openxmlformats.org/officeDocument/2006/relationships" xmlns:p="http://schemas.openxmlformats.org/presentationml/2006/main">
   <p:cSld>
     <p:spTree>
@@ -36518,7 +32495,7 @@
 </p:sld>
 </file>
 
-<file path=ppt/slides/slide44.xml><?xml version="1.0" encoding="utf-8"?>
+<file path=ppt/slides/slide45.xml><?xml version="1.0" encoding="utf-8"?>
 <p:sld xmlns:a="http://schemas.openxmlformats.org/drawingml/2006/main" xmlns:r="http://schemas.openxmlformats.org/officeDocument/2006/relationships" xmlns:p="http://schemas.openxmlformats.org/presentationml/2006/main">
   <p:cSld>
     <p:spTree>
@@ -37205,7 +33182,7 @@
 </p:sld>
 </file>
 
-<file path=ppt/slides/slide45.xml><?xml version="1.0" encoding="utf-8"?>
+<file path=ppt/slides/slide46.xml><?xml version="1.0" encoding="utf-8"?>
 <p:sld xmlns:a="http://schemas.openxmlformats.org/drawingml/2006/main" xmlns:r="http://schemas.openxmlformats.org/officeDocument/2006/relationships" xmlns:p="http://schemas.openxmlformats.org/presentationml/2006/main">
   <p:cSld>
     <p:spTree>
@@ -37892,7 +33869,7 @@
 </p:sld>
 </file>
 
-<file path=ppt/slides/slide46.xml><?xml version="1.0" encoding="utf-8"?>
+<file path=ppt/slides/slide47.xml><?xml version="1.0" encoding="utf-8"?>
 <p:sld xmlns:a="http://schemas.openxmlformats.org/drawingml/2006/main" xmlns:r="http://schemas.openxmlformats.org/officeDocument/2006/relationships" xmlns:p="http://schemas.openxmlformats.org/presentationml/2006/main">
   <p:cSld>
     <p:spTree>
@@ -38579,7 +34556,7 @@
 </p:sld>
 </file>
 
-<file path=ppt/slides/slide47.xml><?xml version="1.0" encoding="utf-8"?>
+<file path=ppt/slides/slide48.xml><?xml version="1.0" encoding="utf-8"?>
 <p:sld xmlns:a="http://schemas.openxmlformats.org/drawingml/2006/main" xmlns:r="http://schemas.openxmlformats.org/officeDocument/2006/relationships" xmlns:p="http://schemas.openxmlformats.org/presentationml/2006/main">
   <p:cSld>
     <p:spTree>
@@ -39357,7 +35334,7 @@
                 <a:avLst/>
               </a:prstGeom>
               <a:blipFill>
-                <a:blip r:embed="rId3"/>
+                <a:blip r:embed="rId2"/>
                 <a:stretch>
                   <a:fillRect l="-2721" t="-1322" r="-2721" b="-1982"/>
                 </a:stretch>
@@ -39715,7 +35692,7 @@
 </p:sld>
 </file>
 
-<file path=ppt/slides/slide48.xml><?xml version="1.0" encoding="utf-8"?>
+<file path=ppt/slides/slide49.xml><?xml version="1.0" encoding="utf-8"?>
 <p:sld xmlns:a="http://schemas.openxmlformats.org/drawingml/2006/main" xmlns:r="http://schemas.openxmlformats.org/officeDocument/2006/relationships" xmlns:p="http://schemas.openxmlformats.org/presentationml/2006/main">
   <p:cSld>
     <p:spTree>
@@ -40466,7 +36443,7 @@
                 <a:avLst/>
               </a:prstGeom>
               <a:blipFill>
-                <a:blip r:embed="rId3"/>
+                <a:blip r:embed="rId2"/>
                 <a:stretch>
                   <a:fillRect l="-3257" t="-14634" r="-2280" b="-31707"/>
                 </a:stretch>
@@ -41029,7 +37006,277 @@
 </p:sld>
 </file>
 
-<file path=ppt/slides/slide49.xml><?xml version="1.0" encoding="utf-8"?>
+<file path=ppt/slides/slide5.xml><?xml version="1.0" encoding="utf-8"?>
+<p:sld xmlns:a="http://schemas.openxmlformats.org/drawingml/2006/main" xmlns:r="http://schemas.openxmlformats.org/officeDocument/2006/relationships" xmlns:p="http://schemas.openxmlformats.org/presentationml/2006/main">
+  <p:cSld>
+    <p:spTree>
+      <p:nvGrpSpPr>
+        <p:cNvPr id="1" name=""/>
+        <p:cNvGrpSpPr/>
+        <p:nvPr/>
+      </p:nvGrpSpPr>
+      <p:grpSpPr>
+        <a:xfrm>
+          <a:off x="0" y="0"/>
+          <a:ext cx="0" cy="0"/>
+          <a:chOff x="0" y="0"/>
+          <a:chExt cx="0" cy="0"/>
+        </a:xfrm>
+      </p:grpSpPr>
+      <p:sp>
+        <p:nvSpPr>
+          <p:cNvPr id="3" name="Title 2">
+            <a:extLst>
+              <a:ext uri="{FF2B5EF4-FFF2-40B4-BE49-F238E27FC236}">
+                <a16:creationId xmlns:a16="http://schemas.microsoft.com/office/drawing/2014/main" id="{97833A1C-127C-474F-BA57-5C49700D9788}"/>
+              </a:ext>
+            </a:extLst>
+          </p:cNvPr>
+          <p:cNvSpPr>
+            <a:spLocks noGrp="1"/>
+          </p:cNvSpPr>
+          <p:nvPr>
+            <p:ph type="title"/>
+          </p:nvPr>
+        </p:nvSpPr>
+        <p:spPr/>
+        <p:txBody>
+          <a:bodyPr/>
+          <a:lstStyle/>
+          <a:p>
+            <a:r>
+              <a:rPr lang="en-US" dirty="0"/>
+              <a:t>Course Pages</a:t>
+            </a:r>
+          </a:p>
+        </p:txBody>
+      </p:sp>
+      <p:sp>
+        <p:nvSpPr>
+          <p:cNvPr id="4" name="Content Placeholder 3">
+            <a:extLst>
+              <a:ext uri="{FF2B5EF4-FFF2-40B4-BE49-F238E27FC236}">
+                <a16:creationId xmlns:a16="http://schemas.microsoft.com/office/drawing/2014/main" id="{D584EB81-8C1E-41E9-9452-3C8471C013CF}"/>
+              </a:ext>
+            </a:extLst>
+          </p:cNvPr>
+          <p:cNvSpPr>
+            <a:spLocks noGrp="1"/>
+          </p:cNvSpPr>
+          <p:nvPr>
+            <p:ph idx="1"/>
+          </p:nvPr>
+        </p:nvSpPr>
+        <p:spPr/>
+        <p:txBody>
+          <a:bodyPr>
+            <a:normAutofit/>
+          </a:bodyPr>
+          <a:lstStyle/>
+          <a:p>
+            <a:r>
+              <a:rPr lang="en-US" dirty="0"/>
+              <a:t>Project submission and </a:t>
+            </a:r>
+            <a:r>
+              <a:rPr lang="en-US" dirty="0" err="1"/>
+              <a:t>autograding</a:t>
+            </a:r>
+            <a:r>
+              <a:rPr lang="en-US" dirty="0"/>
+              <a:t>: </a:t>
+            </a:r>
+            <a:r>
+              <a:rPr lang="en-US" dirty="0">
+                <a:hlinkClick r:id="rId3"/>
+              </a:rPr>
+              <a:t>Gradescope</a:t>
+            </a:r>
+            <a:endParaRPr lang="en-US" dirty="0"/>
+          </a:p>
+        </p:txBody>
+      </p:sp>
+      <p:sp>
+        <p:nvSpPr>
+          <p:cNvPr id="5" name="Slide Number Placeholder 3">
+            <a:extLst>
+              <a:ext uri="{FF2B5EF4-FFF2-40B4-BE49-F238E27FC236}">
+                <a16:creationId xmlns:a16="http://schemas.microsoft.com/office/drawing/2014/main" id="{75C15DC4-A771-6939-068A-4C3D2F6E2469}"/>
+              </a:ext>
+            </a:extLst>
+          </p:cNvPr>
+          <p:cNvSpPr txBox="1">
+            <a:spLocks/>
+          </p:cNvSpPr>
+          <p:nvPr/>
+        </p:nvSpPr>
+        <p:spPr>
+          <a:xfrm>
+            <a:off x="11705168" y="0"/>
+            <a:ext cx="486833" cy="366184"/>
+          </a:xfrm>
+          <a:prstGeom prst="rect">
+            <a:avLst/>
+          </a:prstGeom>
+          <a:solidFill>
+            <a:schemeClr val="bg1">
+              <a:lumMod val="50000"/>
+            </a:schemeClr>
+          </a:solidFill>
+        </p:spPr>
+        <p:txBody>
+          <a:bodyPr vert="horz" lIns="0" tIns="60960" rIns="60960" bIns="60960" rtlCol="0" anchor="ctr"/>
+          <a:lstStyle>
+            <a:defPPr>
+              <a:defRPr lang="en-US"/>
+            </a:defPPr>
+            <a:lvl1pPr marL="0" algn="r" defTabSz="914400" rtl="0" eaLnBrk="1" latinLnBrk="0" hangingPunct="1">
+              <a:defRPr sz="1200" kern="1200">
+                <a:solidFill>
+                  <a:schemeClr val="bg1">
+                    <a:lumMod val="95000"/>
+                  </a:schemeClr>
+                </a:solidFill>
+                <a:latin typeface="Consolas" panose="020B0609020204030204" pitchFamily="49" charset="0"/>
+                <a:ea typeface="+mn-ea"/>
+                <a:cs typeface="+mn-cs"/>
+              </a:defRPr>
+            </a:lvl1pPr>
+            <a:lvl2pPr marL="457200" algn="l" defTabSz="914400" rtl="0" eaLnBrk="1" latinLnBrk="0" hangingPunct="1">
+              <a:defRPr sz="1800" kern="1200">
+                <a:solidFill>
+                  <a:schemeClr val="tx1"/>
+                </a:solidFill>
+                <a:latin typeface="+mn-lt"/>
+                <a:ea typeface="+mn-ea"/>
+                <a:cs typeface="+mn-cs"/>
+              </a:defRPr>
+            </a:lvl2pPr>
+            <a:lvl3pPr marL="914400" algn="l" defTabSz="914400" rtl="0" eaLnBrk="1" latinLnBrk="0" hangingPunct="1">
+              <a:defRPr sz="1800" kern="1200">
+                <a:solidFill>
+                  <a:schemeClr val="tx1"/>
+                </a:solidFill>
+                <a:latin typeface="+mn-lt"/>
+                <a:ea typeface="+mn-ea"/>
+                <a:cs typeface="+mn-cs"/>
+              </a:defRPr>
+            </a:lvl3pPr>
+            <a:lvl4pPr marL="1371600" algn="l" defTabSz="914400" rtl="0" eaLnBrk="1" latinLnBrk="0" hangingPunct="1">
+              <a:defRPr sz="1800" kern="1200">
+                <a:solidFill>
+                  <a:schemeClr val="tx1"/>
+                </a:solidFill>
+                <a:latin typeface="+mn-lt"/>
+                <a:ea typeface="+mn-ea"/>
+                <a:cs typeface="+mn-cs"/>
+              </a:defRPr>
+            </a:lvl4pPr>
+            <a:lvl5pPr marL="1828800" algn="l" defTabSz="914400" rtl="0" eaLnBrk="1" latinLnBrk="0" hangingPunct="1">
+              <a:defRPr sz="1800" kern="1200">
+                <a:solidFill>
+                  <a:schemeClr val="tx1"/>
+                </a:solidFill>
+                <a:latin typeface="+mn-lt"/>
+                <a:ea typeface="+mn-ea"/>
+                <a:cs typeface="+mn-cs"/>
+              </a:defRPr>
+            </a:lvl5pPr>
+            <a:lvl6pPr marL="2286000" algn="l" defTabSz="914400" rtl="0" eaLnBrk="1" latinLnBrk="0" hangingPunct="1">
+              <a:defRPr sz="1800" kern="1200">
+                <a:solidFill>
+                  <a:schemeClr val="tx1"/>
+                </a:solidFill>
+                <a:latin typeface="+mn-lt"/>
+                <a:ea typeface="+mn-ea"/>
+                <a:cs typeface="+mn-cs"/>
+              </a:defRPr>
+            </a:lvl6pPr>
+            <a:lvl7pPr marL="2743200" algn="l" defTabSz="914400" rtl="0" eaLnBrk="1" latinLnBrk="0" hangingPunct="1">
+              <a:defRPr sz="1800" kern="1200">
+                <a:solidFill>
+                  <a:schemeClr val="tx1"/>
+                </a:solidFill>
+                <a:latin typeface="+mn-lt"/>
+                <a:ea typeface="+mn-ea"/>
+                <a:cs typeface="+mn-cs"/>
+              </a:defRPr>
+            </a:lvl7pPr>
+            <a:lvl8pPr marL="3200400" algn="l" defTabSz="914400" rtl="0" eaLnBrk="1" latinLnBrk="0" hangingPunct="1">
+              <a:defRPr sz="1800" kern="1200">
+                <a:solidFill>
+                  <a:schemeClr val="tx1"/>
+                </a:solidFill>
+                <a:latin typeface="+mn-lt"/>
+                <a:ea typeface="+mn-ea"/>
+                <a:cs typeface="+mn-cs"/>
+              </a:defRPr>
+            </a:lvl8pPr>
+            <a:lvl9pPr marL="3657600" algn="l" defTabSz="914400" rtl="0" eaLnBrk="1" latinLnBrk="0" hangingPunct="1">
+              <a:defRPr sz="1800" kern="1200">
+                <a:solidFill>
+                  <a:schemeClr val="tx1"/>
+                </a:solidFill>
+                <a:latin typeface="+mn-lt"/>
+                <a:ea typeface="+mn-ea"/>
+                <a:cs typeface="+mn-cs"/>
+              </a:defRPr>
+            </a:lvl9pPr>
+          </a:lstStyle>
+          <a:p>
+            <a:fld id="{97DD1AB5-42BA-4E8A-BFEE-435884E16AAB}" type="slidenum">
+              <a:rPr lang="en-US" sz="1600"/>
+              <a:pPr/>
+              <a:t>5</a:t>
+            </a:fld>
+            <a:endParaRPr lang="en-US" sz="1600" dirty="0"/>
+          </a:p>
+        </p:txBody>
+      </p:sp>
+      <p:pic>
+        <p:nvPicPr>
+          <p:cNvPr id="6" name="Picture 5">
+            <a:extLst>
+              <a:ext uri="{FF2B5EF4-FFF2-40B4-BE49-F238E27FC236}">
+                <a16:creationId xmlns:a16="http://schemas.microsoft.com/office/drawing/2014/main" id="{289DB9D7-847C-CBA0-D0B2-F7980EA5EAE7}"/>
+              </a:ext>
+            </a:extLst>
+          </p:cNvPr>
+          <p:cNvPicPr>
+            <a:picLocks noChangeAspect="1"/>
+          </p:cNvPicPr>
+          <p:nvPr/>
+        </p:nvPicPr>
+        <p:blipFill>
+          <a:blip r:embed="rId4"/>
+          <a:stretch>
+            <a:fillRect/>
+          </a:stretch>
+        </p:blipFill>
+        <p:spPr>
+          <a:xfrm>
+            <a:off x="4187327" y="2076540"/>
+            <a:ext cx="3817345" cy="3817345"/>
+          </a:xfrm>
+          <a:prstGeom prst="rect">
+            <a:avLst/>
+          </a:prstGeom>
+        </p:spPr>
+      </p:pic>
+    </p:spTree>
+    <p:extLst>
+      <p:ext uri="{BB962C8B-B14F-4D97-AF65-F5344CB8AC3E}">
+        <p14:creationId xmlns:p14="http://schemas.microsoft.com/office/powerpoint/2010/main" val="2683024402"/>
+      </p:ext>
+    </p:extLst>
+  </p:cSld>
+  <p:clrMapOvr>
+    <a:masterClrMapping/>
+  </p:clrMapOvr>
+</p:sld>
+</file>
+
+<file path=ppt/slides/slide50.xml><?xml version="1.0" encoding="utf-8"?>
 <p:sld xmlns:a="http://schemas.openxmlformats.org/drawingml/2006/main" xmlns:r="http://schemas.openxmlformats.org/officeDocument/2006/relationships" xmlns:p="http://schemas.openxmlformats.org/presentationml/2006/main">
   <p:cSld>
     <p:spTree>
@@ -41935,277 +38182,7 @@
 </p:sld>
 </file>
 
-<file path=ppt/slides/slide5.xml><?xml version="1.0" encoding="utf-8"?>
-<p:sld xmlns:a="http://schemas.openxmlformats.org/drawingml/2006/main" xmlns:r="http://schemas.openxmlformats.org/officeDocument/2006/relationships" xmlns:p="http://schemas.openxmlformats.org/presentationml/2006/main">
-  <p:cSld>
-    <p:spTree>
-      <p:nvGrpSpPr>
-        <p:cNvPr id="1" name=""/>
-        <p:cNvGrpSpPr/>
-        <p:nvPr/>
-      </p:nvGrpSpPr>
-      <p:grpSpPr>
-        <a:xfrm>
-          <a:off x="0" y="0"/>
-          <a:ext cx="0" cy="0"/>
-          <a:chOff x="0" y="0"/>
-          <a:chExt cx="0" cy="0"/>
-        </a:xfrm>
-      </p:grpSpPr>
-      <p:sp>
-        <p:nvSpPr>
-          <p:cNvPr id="3" name="Title 2">
-            <a:extLst>
-              <a:ext uri="{FF2B5EF4-FFF2-40B4-BE49-F238E27FC236}">
-                <a16:creationId xmlns:a16="http://schemas.microsoft.com/office/drawing/2014/main" id="{97833A1C-127C-474F-BA57-5C49700D9788}"/>
-              </a:ext>
-            </a:extLst>
-          </p:cNvPr>
-          <p:cNvSpPr>
-            <a:spLocks noGrp="1"/>
-          </p:cNvSpPr>
-          <p:nvPr>
-            <p:ph type="title"/>
-          </p:nvPr>
-        </p:nvSpPr>
-        <p:spPr/>
-        <p:txBody>
-          <a:bodyPr/>
-          <a:lstStyle/>
-          <a:p>
-            <a:r>
-              <a:rPr lang="en-US" dirty="0"/>
-              <a:t>Course Pages</a:t>
-            </a:r>
-          </a:p>
-        </p:txBody>
-      </p:sp>
-      <p:sp>
-        <p:nvSpPr>
-          <p:cNvPr id="4" name="Content Placeholder 3">
-            <a:extLst>
-              <a:ext uri="{FF2B5EF4-FFF2-40B4-BE49-F238E27FC236}">
-                <a16:creationId xmlns:a16="http://schemas.microsoft.com/office/drawing/2014/main" id="{D584EB81-8C1E-41E9-9452-3C8471C013CF}"/>
-              </a:ext>
-            </a:extLst>
-          </p:cNvPr>
-          <p:cNvSpPr>
-            <a:spLocks noGrp="1"/>
-          </p:cNvSpPr>
-          <p:nvPr>
-            <p:ph idx="1"/>
-          </p:nvPr>
-        </p:nvSpPr>
-        <p:spPr/>
-        <p:txBody>
-          <a:bodyPr>
-            <a:normAutofit/>
-          </a:bodyPr>
-          <a:lstStyle/>
-          <a:p>
-            <a:r>
-              <a:rPr lang="en-US" dirty="0"/>
-              <a:t>Project submission and </a:t>
-            </a:r>
-            <a:r>
-              <a:rPr lang="en-US" dirty="0" err="1"/>
-              <a:t>autograding</a:t>
-            </a:r>
-            <a:r>
-              <a:rPr lang="en-US" dirty="0"/>
-              <a:t>: </a:t>
-            </a:r>
-            <a:r>
-              <a:rPr lang="en-US" dirty="0">
-                <a:hlinkClick r:id="rId3"/>
-              </a:rPr>
-              <a:t>Gradescope</a:t>
-            </a:r>
-            <a:endParaRPr lang="en-US" dirty="0"/>
-          </a:p>
-        </p:txBody>
-      </p:sp>
-      <p:sp>
-        <p:nvSpPr>
-          <p:cNvPr id="5" name="Slide Number Placeholder 3">
-            <a:extLst>
-              <a:ext uri="{FF2B5EF4-FFF2-40B4-BE49-F238E27FC236}">
-                <a16:creationId xmlns:a16="http://schemas.microsoft.com/office/drawing/2014/main" id="{75C15DC4-A771-6939-068A-4C3D2F6E2469}"/>
-              </a:ext>
-            </a:extLst>
-          </p:cNvPr>
-          <p:cNvSpPr txBox="1">
-            <a:spLocks/>
-          </p:cNvSpPr>
-          <p:nvPr/>
-        </p:nvSpPr>
-        <p:spPr>
-          <a:xfrm>
-            <a:off x="11705168" y="0"/>
-            <a:ext cx="486833" cy="366184"/>
-          </a:xfrm>
-          <a:prstGeom prst="rect">
-            <a:avLst/>
-          </a:prstGeom>
-          <a:solidFill>
-            <a:schemeClr val="bg1">
-              <a:lumMod val="50000"/>
-            </a:schemeClr>
-          </a:solidFill>
-        </p:spPr>
-        <p:txBody>
-          <a:bodyPr vert="horz" lIns="0" tIns="60960" rIns="60960" bIns="60960" rtlCol="0" anchor="ctr"/>
-          <a:lstStyle>
-            <a:defPPr>
-              <a:defRPr lang="en-US"/>
-            </a:defPPr>
-            <a:lvl1pPr marL="0" algn="r" defTabSz="914400" rtl="0" eaLnBrk="1" latinLnBrk="0" hangingPunct="1">
-              <a:defRPr sz="1200" kern="1200">
-                <a:solidFill>
-                  <a:schemeClr val="bg1">
-                    <a:lumMod val="95000"/>
-                  </a:schemeClr>
-                </a:solidFill>
-                <a:latin typeface="Consolas" panose="020B0609020204030204" pitchFamily="49" charset="0"/>
-                <a:ea typeface="+mn-ea"/>
-                <a:cs typeface="+mn-cs"/>
-              </a:defRPr>
-            </a:lvl1pPr>
-            <a:lvl2pPr marL="457200" algn="l" defTabSz="914400" rtl="0" eaLnBrk="1" latinLnBrk="0" hangingPunct="1">
-              <a:defRPr sz="1800" kern="1200">
-                <a:solidFill>
-                  <a:schemeClr val="tx1"/>
-                </a:solidFill>
-                <a:latin typeface="+mn-lt"/>
-                <a:ea typeface="+mn-ea"/>
-                <a:cs typeface="+mn-cs"/>
-              </a:defRPr>
-            </a:lvl2pPr>
-            <a:lvl3pPr marL="914400" algn="l" defTabSz="914400" rtl="0" eaLnBrk="1" latinLnBrk="0" hangingPunct="1">
-              <a:defRPr sz="1800" kern="1200">
-                <a:solidFill>
-                  <a:schemeClr val="tx1"/>
-                </a:solidFill>
-                <a:latin typeface="+mn-lt"/>
-                <a:ea typeface="+mn-ea"/>
-                <a:cs typeface="+mn-cs"/>
-              </a:defRPr>
-            </a:lvl3pPr>
-            <a:lvl4pPr marL="1371600" algn="l" defTabSz="914400" rtl="0" eaLnBrk="1" latinLnBrk="0" hangingPunct="1">
-              <a:defRPr sz="1800" kern="1200">
-                <a:solidFill>
-                  <a:schemeClr val="tx1"/>
-                </a:solidFill>
-                <a:latin typeface="+mn-lt"/>
-                <a:ea typeface="+mn-ea"/>
-                <a:cs typeface="+mn-cs"/>
-              </a:defRPr>
-            </a:lvl4pPr>
-            <a:lvl5pPr marL="1828800" algn="l" defTabSz="914400" rtl="0" eaLnBrk="1" latinLnBrk="0" hangingPunct="1">
-              <a:defRPr sz="1800" kern="1200">
-                <a:solidFill>
-                  <a:schemeClr val="tx1"/>
-                </a:solidFill>
-                <a:latin typeface="+mn-lt"/>
-                <a:ea typeface="+mn-ea"/>
-                <a:cs typeface="+mn-cs"/>
-              </a:defRPr>
-            </a:lvl5pPr>
-            <a:lvl6pPr marL="2286000" algn="l" defTabSz="914400" rtl="0" eaLnBrk="1" latinLnBrk="0" hangingPunct="1">
-              <a:defRPr sz="1800" kern="1200">
-                <a:solidFill>
-                  <a:schemeClr val="tx1"/>
-                </a:solidFill>
-                <a:latin typeface="+mn-lt"/>
-                <a:ea typeface="+mn-ea"/>
-                <a:cs typeface="+mn-cs"/>
-              </a:defRPr>
-            </a:lvl6pPr>
-            <a:lvl7pPr marL="2743200" algn="l" defTabSz="914400" rtl="0" eaLnBrk="1" latinLnBrk="0" hangingPunct="1">
-              <a:defRPr sz="1800" kern="1200">
-                <a:solidFill>
-                  <a:schemeClr val="tx1"/>
-                </a:solidFill>
-                <a:latin typeface="+mn-lt"/>
-                <a:ea typeface="+mn-ea"/>
-                <a:cs typeface="+mn-cs"/>
-              </a:defRPr>
-            </a:lvl7pPr>
-            <a:lvl8pPr marL="3200400" algn="l" defTabSz="914400" rtl="0" eaLnBrk="1" latinLnBrk="0" hangingPunct="1">
-              <a:defRPr sz="1800" kern="1200">
-                <a:solidFill>
-                  <a:schemeClr val="tx1"/>
-                </a:solidFill>
-                <a:latin typeface="+mn-lt"/>
-                <a:ea typeface="+mn-ea"/>
-                <a:cs typeface="+mn-cs"/>
-              </a:defRPr>
-            </a:lvl8pPr>
-            <a:lvl9pPr marL="3657600" algn="l" defTabSz="914400" rtl="0" eaLnBrk="1" latinLnBrk="0" hangingPunct="1">
-              <a:defRPr sz="1800" kern="1200">
-                <a:solidFill>
-                  <a:schemeClr val="tx1"/>
-                </a:solidFill>
-                <a:latin typeface="+mn-lt"/>
-                <a:ea typeface="+mn-ea"/>
-                <a:cs typeface="+mn-cs"/>
-              </a:defRPr>
-            </a:lvl9pPr>
-          </a:lstStyle>
-          <a:p>
-            <a:fld id="{97DD1AB5-42BA-4E8A-BFEE-435884E16AAB}" type="slidenum">
-              <a:rPr lang="en-US" sz="1600"/>
-              <a:pPr/>
-              <a:t>5</a:t>
-            </a:fld>
-            <a:endParaRPr lang="en-US" sz="1600" dirty="0"/>
-          </a:p>
-        </p:txBody>
-      </p:sp>
-      <p:pic>
-        <p:nvPicPr>
-          <p:cNvPr id="2" name="Picture 1">
-            <a:extLst>
-              <a:ext uri="{FF2B5EF4-FFF2-40B4-BE49-F238E27FC236}">
-                <a16:creationId xmlns:a16="http://schemas.microsoft.com/office/drawing/2014/main" id="{2A2548DD-E38C-C213-AE00-0C3E33F425AC}"/>
-              </a:ext>
-            </a:extLst>
-          </p:cNvPr>
-          <p:cNvPicPr>
-            <a:picLocks noChangeAspect="1"/>
-          </p:cNvPicPr>
-          <p:nvPr/>
-        </p:nvPicPr>
-        <p:blipFill>
-          <a:blip r:embed="rId4"/>
-          <a:stretch>
-            <a:fillRect/>
-          </a:stretch>
-        </p:blipFill>
-        <p:spPr>
-          <a:xfrm>
-            <a:off x="3871687" y="1689099"/>
-            <a:ext cx="4204786" cy="4204786"/>
-          </a:xfrm>
-          <a:prstGeom prst="rect">
-            <a:avLst/>
-          </a:prstGeom>
-        </p:spPr>
-      </p:pic>
-    </p:spTree>
-    <p:extLst>
-      <p:ext uri="{BB962C8B-B14F-4D97-AF65-F5344CB8AC3E}">
-        <p14:creationId xmlns:p14="http://schemas.microsoft.com/office/powerpoint/2010/main" val="2683024402"/>
-      </p:ext>
-    </p:extLst>
-  </p:cSld>
-  <p:clrMapOvr>
-    <a:masterClrMapping/>
-  </p:clrMapOvr>
-</p:sld>
-</file>
-
-<file path=ppt/slides/slide50.xml><?xml version="1.0" encoding="utf-8"?>
+<file path=ppt/slides/slide51.xml><?xml version="1.0" encoding="utf-8"?>
 <p:sld xmlns:a="http://schemas.openxmlformats.org/drawingml/2006/main" xmlns:r="http://schemas.openxmlformats.org/officeDocument/2006/relationships" xmlns:p="http://schemas.openxmlformats.org/presentationml/2006/main">
   <p:cSld>
     <p:spTree>
@@ -43386,7 +39363,7 @@
 </p:sld>
 </file>
 
-<file path=ppt/slides/slide51.xml><?xml version="1.0" encoding="utf-8"?>
+<file path=ppt/slides/slide52.xml><?xml version="1.0" encoding="utf-8"?>
 <p:sld xmlns:a="http://schemas.openxmlformats.org/drawingml/2006/main" xmlns:r="http://schemas.openxmlformats.org/officeDocument/2006/relationships" xmlns:p="http://schemas.openxmlformats.org/presentationml/2006/main">
   <p:cSld>
     <p:spTree>
@@ -44124,10 +40101,10 @@
       </p:sp>
       <p:pic>
         <p:nvPicPr>
-          <p:cNvPr id="2" name="Picture 1">
+          <p:cNvPr id="8" name="Picture 7">
             <a:extLst>
               <a:ext uri="{FF2B5EF4-FFF2-40B4-BE49-F238E27FC236}">
-                <a16:creationId xmlns:a16="http://schemas.microsoft.com/office/drawing/2014/main" id="{A64F63C4-7596-B3E1-E3A5-282BE601B7BE}"/>
+                <a16:creationId xmlns:a16="http://schemas.microsoft.com/office/drawing/2014/main" id="{128EA473-F82F-DFBD-11F5-1D862659EAC0}"/>
               </a:ext>
             </a:extLst>
           </p:cNvPr>
@@ -44144,8 +40121,8 @@
         </p:blipFill>
         <p:spPr>
           <a:xfrm>
-            <a:off x="4016216" y="1734318"/>
-            <a:ext cx="4159567" cy="4159567"/>
+            <a:off x="4093685" y="1880344"/>
+            <a:ext cx="4004630" cy="4004630"/>
           </a:xfrm>
           <a:prstGeom prst="rect">
             <a:avLst/>
@@ -44228,13 +40205,13 @@
         </p:nvSpPr>
         <p:spPr>
           <a:xfrm>
-            <a:off x="487680" y="964115"/>
-            <a:ext cx="10972800" cy="5193798"/>
+            <a:off x="2096452" y="964115"/>
+            <a:ext cx="4512945" cy="3484595"/>
           </a:xfrm>
         </p:spPr>
         <p:txBody>
           <a:bodyPr>
-            <a:normAutofit lnSpcReduction="10000"/>
+            <a:normAutofit/>
           </a:bodyPr>
           <a:lstStyle/>
           <a:p>
@@ -44244,75 +40221,64 @@
             </a:r>
             <a:r>
               <a:rPr lang="en-US" dirty="0"/>
-              <a:t> (70%)</a:t>
-            </a:r>
-          </a:p>
-          <a:p>
-            <a:pPr lvl="1"/>
+              <a:t> (45%)</a:t>
+            </a:r>
+          </a:p>
+          <a:p>
+            <a:pPr lvl="1">
+              <a:buFont typeface="Arial" panose="020B0604020202020204" pitchFamily="34" charset="0"/>
+              <a:buChar char="•"/>
+            </a:pPr>
             <a:r>
               <a:rPr lang="en-US" dirty="0"/>
-              <a:t>Project 0 (10%)</a:t>
-            </a:r>
-          </a:p>
-          <a:p>
-            <a:pPr lvl="1"/>
+              <a:t>Project 0 (5%)</a:t>
+            </a:r>
+          </a:p>
+          <a:p>
+            <a:pPr lvl="1">
+              <a:buFont typeface="Arial" panose="020B0604020202020204" pitchFamily="34" charset="0"/>
+              <a:buChar char="•"/>
+            </a:pPr>
             <a:r>
               <a:rPr lang="en-US" dirty="0"/>
-              <a:t>Project 1 (20%)</a:t>
-            </a:r>
-          </a:p>
-          <a:p>
-            <a:pPr lvl="1"/>
+              <a:t>Project 1 (10%)</a:t>
+            </a:r>
+          </a:p>
+          <a:p>
+            <a:pPr lvl="1">
+              <a:buFont typeface="Arial" panose="020B0604020202020204" pitchFamily="34" charset="0"/>
+              <a:buChar char="•"/>
+            </a:pPr>
             <a:r>
               <a:rPr lang="en-US" dirty="0"/>
-              <a:t>Project 2 (20%)</a:t>
-            </a:r>
-          </a:p>
-          <a:p>
-            <a:pPr lvl="1"/>
+              <a:t>Project 2 (10%)</a:t>
+            </a:r>
+          </a:p>
+          <a:p>
+            <a:pPr lvl="1">
+              <a:buFont typeface="Arial" panose="020B0604020202020204" pitchFamily="34" charset="0"/>
+              <a:buChar char="•"/>
+            </a:pPr>
             <a:r>
               <a:rPr lang="en-US" dirty="0"/>
-              <a:t>Project 3 (20%)</a:t>
-            </a:r>
-          </a:p>
-          <a:p>
-            <a:endParaRPr lang="en-US" dirty="0"/>
-          </a:p>
-          <a:p>
-            <a:r>
-              <a:rPr lang="en-US" b="1" dirty="0"/>
-              <a:t>Midterm Exam</a:t>
-            </a:r>
+              <a:t>Project 3 (10%)</a:t>
+            </a:r>
+          </a:p>
+          <a:p>
+            <a:pPr lvl="1">
+              <a:buFont typeface="Arial" panose="020B0604020202020204" pitchFamily="34" charset="0"/>
+              <a:buChar char="•"/>
+            </a:pPr>
             <a:r>
               <a:rPr lang="en-US" dirty="0"/>
-              <a:t> (10%)</a:t>
-            </a:r>
-          </a:p>
-          <a:p>
-            <a:r>
-              <a:rPr lang="en-US" b="1" dirty="0"/>
-              <a:t>Final Exam</a:t>
-            </a:r>
-            <a:r>
-              <a:rPr lang="en-US" dirty="0"/>
-              <a:t> (15%)</a:t>
-            </a:r>
-          </a:p>
-          <a:p>
-            <a:endParaRPr lang="en-US" dirty="0"/>
-          </a:p>
-          <a:p>
-            <a:r>
-              <a:rPr lang="en-US" b="1" dirty="0"/>
-              <a:t>Participation</a:t>
-            </a:r>
-            <a:r>
-              <a:rPr lang="en-US" dirty="0"/>
-              <a:t> (5%)</a:t>
-            </a:r>
-          </a:p>
-          <a:p>
-            <a:endParaRPr lang="en-US" dirty="0"/>
+              <a:t>Project 4 (10%)</a:t>
+            </a:r>
+          </a:p>
+          <a:p>
+            <a:pPr marL="0" indent="0">
+              <a:buNone/>
+            </a:pPr>
+            <a:endParaRPr lang="en-US" b="1" dirty="0"/>
           </a:p>
         </p:txBody>
       </p:sp>
@@ -44453,6 +40419,147 @@
           </a:p>
         </p:txBody>
       </p:sp>
+      <p:sp>
+        <p:nvSpPr>
+          <p:cNvPr id="2" name="TextBox 1">
+            <a:extLst>
+              <a:ext uri="{FF2B5EF4-FFF2-40B4-BE49-F238E27FC236}">
+                <a16:creationId xmlns:a16="http://schemas.microsoft.com/office/drawing/2014/main" id="{08C70D00-AC73-6C36-E7FE-5C37BA3258D1}"/>
+              </a:ext>
+            </a:extLst>
+          </p:cNvPr>
+          <p:cNvSpPr txBox="1"/>
+          <p:nvPr/>
+        </p:nvSpPr>
+        <p:spPr>
+          <a:xfrm>
+            <a:off x="2096452" y="4826626"/>
+            <a:ext cx="4054508" cy="1446550"/>
+          </a:xfrm>
+          <a:prstGeom prst="rect">
+            <a:avLst/>
+          </a:prstGeom>
+          <a:noFill/>
+        </p:spPr>
+        <p:txBody>
+          <a:bodyPr wrap="none" rtlCol="0">
+            <a:spAutoFit/>
+          </a:bodyPr>
+          <a:lstStyle/>
+          <a:p>
+            <a:pPr marL="457200" indent="-457200">
+              <a:buFont typeface="Arial" panose="020B0604020202020204" pitchFamily="34" charset="0"/>
+              <a:buChar char="•"/>
+            </a:pPr>
+            <a:r>
+              <a:rPr lang="en-US" sz="3200" b="1" dirty="0"/>
+              <a:t>Code Reviews</a:t>
+            </a:r>
+            <a:r>
+              <a:rPr lang="en-US" sz="3200" dirty="0"/>
+              <a:t> (15%)</a:t>
+            </a:r>
+          </a:p>
+          <a:p>
+            <a:pPr marL="914400" lvl="1" indent="-457200">
+              <a:buFont typeface="Arial" panose="020B0604020202020204" pitchFamily="34" charset="0"/>
+              <a:buChar char="•"/>
+            </a:pPr>
+            <a:r>
+              <a:rPr lang="en-US" sz="2800" dirty="0"/>
+              <a:t>Review 1 (7.5%)</a:t>
+            </a:r>
+          </a:p>
+          <a:p>
+            <a:pPr marL="914400" lvl="1" indent="-457200">
+              <a:buFont typeface="Arial" panose="020B0604020202020204" pitchFamily="34" charset="0"/>
+              <a:buChar char="•"/>
+            </a:pPr>
+            <a:r>
+              <a:rPr lang="en-US" sz="2800" dirty="0"/>
+              <a:t>Review 2 (7.5%)</a:t>
+            </a:r>
+          </a:p>
+        </p:txBody>
+      </p:sp>
+      <p:sp>
+        <p:nvSpPr>
+          <p:cNvPr id="6" name="TextBox 5">
+            <a:extLst>
+              <a:ext uri="{FF2B5EF4-FFF2-40B4-BE49-F238E27FC236}">
+                <a16:creationId xmlns:a16="http://schemas.microsoft.com/office/drawing/2014/main" id="{18D091AA-ABB4-52DE-6F1A-FACE914AA77B}"/>
+              </a:ext>
+            </a:extLst>
+          </p:cNvPr>
+          <p:cNvSpPr txBox="1"/>
+          <p:nvPr/>
+        </p:nvSpPr>
+        <p:spPr>
+          <a:xfrm>
+            <a:off x="7077543" y="964115"/>
+            <a:ext cx="4214423" cy="2062103"/>
+          </a:xfrm>
+          <a:prstGeom prst="rect">
+            <a:avLst/>
+          </a:prstGeom>
+          <a:noFill/>
+        </p:spPr>
+        <p:txBody>
+          <a:bodyPr wrap="none" rtlCol="0">
+            <a:spAutoFit/>
+          </a:bodyPr>
+          <a:lstStyle/>
+          <a:p>
+            <a:pPr marL="457200" indent="-457200">
+              <a:buFont typeface="Arial" panose="020B0604020202020204" pitchFamily="34" charset="0"/>
+              <a:buChar char="•"/>
+            </a:pPr>
+            <a:r>
+              <a:rPr lang="en-US" sz="3200" b="1" dirty="0"/>
+              <a:t>Midterm Exam</a:t>
+            </a:r>
+            <a:r>
+              <a:rPr lang="en-US" sz="3200" dirty="0"/>
+              <a:t> (15%)</a:t>
+            </a:r>
+          </a:p>
+          <a:p>
+            <a:pPr marL="457200" indent="-457200">
+              <a:buFont typeface="Arial" panose="020B0604020202020204" pitchFamily="34" charset="0"/>
+              <a:buChar char="•"/>
+            </a:pPr>
+            <a:r>
+              <a:rPr lang="en-US" sz="3200" b="1" dirty="0"/>
+              <a:t>Final Exam</a:t>
+            </a:r>
+            <a:r>
+              <a:rPr lang="en-US" sz="3200" dirty="0"/>
+              <a:t> (20%)</a:t>
+            </a:r>
+          </a:p>
+          <a:p>
+            <a:pPr marL="457200" indent="-457200">
+              <a:buFont typeface="Arial" panose="020B0604020202020204" pitchFamily="34" charset="0"/>
+              <a:buChar char="•"/>
+            </a:pPr>
+            <a:r>
+              <a:rPr lang="en-US" sz="3200" b="1" dirty="0"/>
+              <a:t>Participation</a:t>
+            </a:r>
+            <a:r>
+              <a:rPr lang="en-US" sz="3200" dirty="0"/>
+              <a:t> (5%)</a:t>
+            </a:r>
+          </a:p>
+          <a:p>
+            <a:pPr marL="457200" indent="-457200">
+              <a:buFont typeface="Arial" panose="020B0604020202020204" pitchFamily="34" charset="0"/>
+              <a:buChar char="•"/>
+            </a:pPr>
+            <a:endParaRPr lang="en-US" sz="3200" dirty="0"/>
+          </a:p>
+        </p:txBody>
+      </p:sp>
     </p:spTree>
     <p:extLst>
       <p:ext uri="{BB962C8B-B14F-4D97-AF65-F5344CB8AC3E}">
@@ -44463,6 +40570,335 @@
   <p:clrMapOvr>
     <a:masterClrMapping/>
   </p:clrMapOvr>
+  <p:timing>
+    <p:tnLst>
+      <p:par>
+        <p:cTn id="1" dur="indefinite" restart="never" nodeType="tmRoot">
+          <p:childTnLst>
+            <p:seq concurrent="1" nextAc="seek">
+              <p:cTn id="2" dur="indefinite" nodeType="mainSeq">
+                <p:childTnLst>
+                  <p:par>
+                    <p:cTn id="3" fill="hold">
+                      <p:stCondLst>
+                        <p:cond delay="indefinite"/>
+                      </p:stCondLst>
+                      <p:childTnLst>
+                        <p:par>
+                          <p:cTn id="4" fill="hold">
+                            <p:stCondLst>
+                              <p:cond delay="0"/>
+                            </p:stCondLst>
+                            <p:childTnLst>
+                              <p:par>
+                                <p:cTn id="5" presetID="1" presetClass="entr" presetSubtype="0" fill="hold" grpId="0" nodeType="clickEffect">
+                                  <p:stCondLst>
+                                    <p:cond delay="0"/>
+                                  </p:stCondLst>
+                                  <p:childTnLst>
+                                    <p:set>
+                                      <p:cBhvr>
+                                        <p:cTn id="6" dur="1" fill="hold">
+                                          <p:stCondLst>
+                                            <p:cond delay="0"/>
+                                          </p:stCondLst>
+                                        </p:cTn>
+                                        <p:tgtEl>
+                                          <p:spTgt spid="4">
+                                            <p:txEl>
+                                              <p:pRg st="0" end="0"/>
+                                            </p:txEl>
+                                          </p:spTgt>
+                                        </p:tgtEl>
+                                        <p:attrNameLst>
+                                          <p:attrName>style.visibility</p:attrName>
+                                        </p:attrNameLst>
+                                      </p:cBhvr>
+                                      <p:to>
+                                        <p:strVal val="visible"/>
+                                      </p:to>
+                                    </p:set>
+                                  </p:childTnLst>
+                                </p:cTn>
+                              </p:par>
+                              <p:par>
+                                <p:cTn id="7" presetID="1" presetClass="entr" presetSubtype="0" fill="hold" grpId="0" nodeType="withEffect">
+                                  <p:stCondLst>
+                                    <p:cond delay="0"/>
+                                  </p:stCondLst>
+                                  <p:childTnLst>
+                                    <p:set>
+                                      <p:cBhvr>
+                                        <p:cTn id="8" dur="1" fill="hold">
+                                          <p:stCondLst>
+                                            <p:cond delay="0"/>
+                                          </p:stCondLst>
+                                        </p:cTn>
+                                        <p:tgtEl>
+                                          <p:spTgt spid="4">
+                                            <p:txEl>
+                                              <p:pRg st="1" end="1"/>
+                                            </p:txEl>
+                                          </p:spTgt>
+                                        </p:tgtEl>
+                                        <p:attrNameLst>
+                                          <p:attrName>style.visibility</p:attrName>
+                                        </p:attrNameLst>
+                                      </p:cBhvr>
+                                      <p:to>
+                                        <p:strVal val="visible"/>
+                                      </p:to>
+                                    </p:set>
+                                  </p:childTnLst>
+                                </p:cTn>
+                              </p:par>
+                              <p:par>
+                                <p:cTn id="9" presetID="1" presetClass="entr" presetSubtype="0" fill="hold" grpId="0" nodeType="withEffect">
+                                  <p:stCondLst>
+                                    <p:cond delay="0"/>
+                                  </p:stCondLst>
+                                  <p:childTnLst>
+                                    <p:set>
+                                      <p:cBhvr>
+                                        <p:cTn id="10" dur="1" fill="hold">
+                                          <p:stCondLst>
+                                            <p:cond delay="0"/>
+                                          </p:stCondLst>
+                                        </p:cTn>
+                                        <p:tgtEl>
+                                          <p:spTgt spid="4">
+                                            <p:txEl>
+                                              <p:pRg st="2" end="2"/>
+                                            </p:txEl>
+                                          </p:spTgt>
+                                        </p:tgtEl>
+                                        <p:attrNameLst>
+                                          <p:attrName>style.visibility</p:attrName>
+                                        </p:attrNameLst>
+                                      </p:cBhvr>
+                                      <p:to>
+                                        <p:strVal val="visible"/>
+                                      </p:to>
+                                    </p:set>
+                                  </p:childTnLst>
+                                </p:cTn>
+                              </p:par>
+                              <p:par>
+                                <p:cTn id="11" presetID="1" presetClass="entr" presetSubtype="0" fill="hold" grpId="0" nodeType="withEffect">
+                                  <p:stCondLst>
+                                    <p:cond delay="0"/>
+                                  </p:stCondLst>
+                                  <p:childTnLst>
+                                    <p:set>
+                                      <p:cBhvr>
+                                        <p:cTn id="12" dur="1" fill="hold">
+                                          <p:stCondLst>
+                                            <p:cond delay="0"/>
+                                          </p:stCondLst>
+                                        </p:cTn>
+                                        <p:tgtEl>
+                                          <p:spTgt spid="4">
+                                            <p:txEl>
+                                              <p:pRg st="3" end="3"/>
+                                            </p:txEl>
+                                          </p:spTgt>
+                                        </p:tgtEl>
+                                        <p:attrNameLst>
+                                          <p:attrName>style.visibility</p:attrName>
+                                        </p:attrNameLst>
+                                      </p:cBhvr>
+                                      <p:to>
+                                        <p:strVal val="visible"/>
+                                      </p:to>
+                                    </p:set>
+                                  </p:childTnLst>
+                                </p:cTn>
+                              </p:par>
+                              <p:par>
+                                <p:cTn id="13" presetID="1" presetClass="entr" presetSubtype="0" fill="hold" grpId="0" nodeType="withEffect">
+                                  <p:stCondLst>
+                                    <p:cond delay="0"/>
+                                  </p:stCondLst>
+                                  <p:childTnLst>
+                                    <p:set>
+                                      <p:cBhvr>
+                                        <p:cTn id="14" dur="1" fill="hold">
+                                          <p:stCondLst>
+                                            <p:cond delay="0"/>
+                                          </p:stCondLst>
+                                        </p:cTn>
+                                        <p:tgtEl>
+                                          <p:spTgt spid="4">
+                                            <p:txEl>
+                                              <p:pRg st="4" end="4"/>
+                                            </p:txEl>
+                                          </p:spTgt>
+                                        </p:tgtEl>
+                                        <p:attrNameLst>
+                                          <p:attrName>style.visibility</p:attrName>
+                                        </p:attrNameLst>
+                                      </p:cBhvr>
+                                      <p:to>
+                                        <p:strVal val="visible"/>
+                                      </p:to>
+                                    </p:set>
+                                  </p:childTnLst>
+                                </p:cTn>
+                              </p:par>
+                              <p:par>
+                                <p:cTn id="15" presetID="1" presetClass="entr" presetSubtype="0" fill="hold" grpId="0" nodeType="withEffect">
+                                  <p:stCondLst>
+                                    <p:cond delay="0"/>
+                                  </p:stCondLst>
+                                  <p:childTnLst>
+                                    <p:set>
+                                      <p:cBhvr>
+                                        <p:cTn id="16" dur="1" fill="hold">
+                                          <p:stCondLst>
+                                            <p:cond delay="0"/>
+                                          </p:stCondLst>
+                                        </p:cTn>
+                                        <p:tgtEl>
+                                          <p:spTgt spid="4">
+                                            <p:txEl>
+                                              <p:pRg st="5" end="5"/>
+                                            </p:txEl>
+                                          </p:spTgt>
+                                        </p:tgtEl>
+                                        <p:attrNameLst>
+                                          <p:attrName>style.visibility</p:attrName>
+                                        </p:attrNameLst>
+                                      </p:cBhvr>
+                                      <p:to>
+                                        <p:strVal val="visible"/>
+                                      </p:to>
+                                    </p:set>
+                                  </p:childTnLst>
+                                </p:cTn>
+                              </p:par>
+                            </p:childTnLst>
+                          </p:cTn>
+                        </p:par>
+                      </p:childTnLst>
+                    </p:cTn>
+                  </p:par>
+                  <p:par>
+                    <p:cTn id="17" fill="hold">
+                      <p:stCondLst>
+                        <p:cond delay="indefinite"/>
+                      </p:stCondLst>
+                      <p:childTnLst>
+                        <p:par>
+                          <p:cTn id="18" fill="hold">
+                            <p:stCondLst>
+                              <p:cond delay="0"/>
+                            </p:stCondLst>
+                            <p:childTnLst>
+                              <p:par>
+                                <p:cTn id="19" presetID="1" presetClass="entr" presetSubtype="0" fill="hold" grpId="0" nodeType="clickEffect">
+                                  <p:stCondLst>
+                                    <p:cond delay="0"/>
+                                  </p:stCondLst>
+                                  <p:childTnLst>
+                                    <p:set>
+                                      <p:cBhvr>
+                                        <p:cTn id="20" dur="1" fill="hold">
+                                          <p:stCondLst>
+                                            <p:cond delay="0"/>
+                                          </p:stCondLst>
+                                        </p:cTn>
+                                        <p:tgtEl>
+                                          <p:spTgt spid="2"/>
+                                        </p:tgtEl>
+                                        <p:attrNameLst>
+                                          <p:attrName>style.visibility</p:attrName>
+                                        </p:attrNameLst>
+                                      </p:cBhvr>
+                                      <p:to>
+                                        <p:strVal val="visible"/>
+                                      </p:to>
+                                    </p:set>
+                                  </p:childTnLst>
+                                </p:cTn>
+                              </p:par>
+                            </p:childTnLst>
+                          </p:cTn>
+                        </p:par>
+                      </p:childTnLst>
+                    </p:cTn>
+                  </p:par>
+                  <p:par>
+                    <p:cTn id="21" fill="hold">
+                      <p:stCondLst>
+                        <p:cond delay="indefinite"/>
+                      </p:stCondLst>
+                      <p:childTnLst>
+                        <p:par>
+                          <p:cTn id="22" fill="hold">
+                            <p:stCondLst>
+                              <p:cond delay="0"/>
+                            </p:stCondLst>
+                            <p:childTnLst>
+                              <p:par>
+                                <p:cTn id="23" presetID="1" presetClass="entr" presetSubtype="0" fill="hold" grpId="0" nodeType="clickEffect">
+                                  <p:stCondLst>
+                                    <p:cond delay="0"/>
+                                  </p:stCondLst>
+                                  <p:childTnLst>
+                                    <p:set>
+                                      <p:cBhvr>
+                                        <p:cTn id="24" dur="1" fill="hold">
+                                          <p:stCondLst>
+                                            <p:cond delay="0"/>
+                                          </p:stCondLst>
+                                        </p:cTn>
+                                        <p:tgtEl>
+                                          <p:spTgt spid="6"/>
+                                        </p:tgtEl>
+                                        <p:attrNameLst>
+                                          <p:attrName>style.visibility</p:attrName>
+                                        </p:attrNameLst>
+                                      </p:cBhvr>
+                                      <p:to>
+                                        <p:strVal val="visible"/>
+                                      </p:to>
+                                    </p:set>
+                                  </p:childTnLst>
+                                </p:cTn>
+                              </p:par>
+                            </p:childTnLst>
+                          </p:cTn>
+                        </p:par>
+                      </p:childTnLst>
+                    </p:cTn>
+                  </p:par>
+                </p:childTnLst>
+              </p:cTn>
+              <p:prevCondLst>
+                <p:cond evt="onPrev" delay="0">
+                  <p:tgtEl>
+                    <p:sldTgt/>
+                  </p:tgtEl>
+                </p:cond>
+              </p:prevCondLst>
+              <p:nextCondLst>
+                <p:cond evt="onNext" delay="0">
+                  <p:tgtEl>
+                    <p:sldTgt/>
+                  </p:tgtEl>
+                </p:cond>
+              </p:nextCondLst>
+            </p:seq>
+          </p:childTnLst>
+        </p:cTn>
+      </p:par>
+    </p:tnLst>
+    <p:bldLst>
+      <p:bldP spid="4" grpId="0" uiExpand="1" build="p"/>
+      <p:bldP spid="2" grpId="0"/>
+      <p:bldP spid="6" grpId="0"/>
+    </p:bldLst>
+  </p:timing>
 </p:sld>
 </file>
 
@@ -44547,7 +40983,7 @@
             </a:r>
             <a:r>
               <a:rPr lang="en-US" dirty="0">
-                <a:hlinkClick r:id="rId3"/>
+                <a:hlinkClick r:id="rId2"/>
               </a:rPr>
               <a:t>BusTub</a:t>
             </a:r>
@@ -44733,10 +41169,10 @@
       </p:sp>
       <p:pic>
         <p:nvPicPr>
-          <p:cNvPr id="3" name="Picture 2">
+          <p:cNvPr id="4" name="Picture 3">
             <a:extLst>
               <a:ext uri="{FF2B5EF4-FFF2-40B4-BE49-F238E27FC236}">
-                <a16:creationId xmlns:a16="http://schemas.microsoft.com/office/drawing/2014/main" id="{B5774155-1E00-F858-517B-0696AA97CA83}"/>
+                <a16:creationId xmlns:a16="http://schemas.microsoft.com/office/drawing/2014/main" id="{7C0C2A7C-1049-8F41-7CF7-273B3D3D487F}"/>
               </a:ext>
             </a:extLst>
           </p:cNvPr>
@@ -44746,15 +41182,15 @@
           <p:nvPr/>
         </p:nvPicPr>
         <p:blipFill>
-          <a:blip r:embed="rId4"/>
+          <a:blip r:embed="rId3"/>
           <a:stretch>
             <a:fillRect/>
           </a:stretch>
         </p:blipFill>
         <p:spPr>
           <a:xfrm>
-            <a:off x="7804681" y="1651476"/>
-            <a:ext cx="3900487" cy="3900487"/>
+            <a:off x="8116841" y="1634836"/>
+            <a:ext cx="3588327" cy="3588327"/>
           </a:xfrm>
           <a:prstGeom prst="rect">
             <a:avLst/>

--- a/docs/421_f26/lectures/L0.pptx
+++ b/docs/421_f26/lectures/L0.pptx
@@ -5,7 +5,7 @@
     <p:sldMasterId id="2147483660" r:id="rId1"/>
   </p:sldMasterIdLst>
   <p:notesMasterIdLst>
-    <p:notesMasterId r:id="rId54"/>
+    <p:notesMasterId r:id="rId56"/>
   </p:notesMasterIdLst>
   <p:sldIdLst>
     <p:sldId id="257" r:id="rId2"/>
@@ -20,46 +20,48 @@
     <p:sldId id="985" r:id="rId11"/>
     <p:sldId id="1139" r:id="rId12"/>
     <p:sldId id="1137" r:id="rId13"/>
-    <p:sldId id="1138" r:id="rId14"/>
-    <p:sldId id="1141" r:id="rId15"/>
-    <p:sldId id="479" r:id="rId16"/>
-    <p:sldId id="1166" r:id="rId17"/>
-    <p:sldId id="1140" r:id="rId18"/>
-    <p:sldId id="1142" r:id="rId19"/>
-    <p:sldId id="1104" r:id="rId20"/>
-    <p:sldId id="473" r:id="rId21"/>
-    <p:sldId id="1128" r:id="rId22"/>
-    <p:sldId id="1168" r:id="rId23"/>
-    <p:sldId id="1132" r:id="rId24"/>
-    <p:sldId id="1131" r:id="rId25"/>
-    <p:sldId id="1134" r:id="rId26"/>
-    <p:sldId id="1135" r:id="rId27"/>
-    <p:sldId id="1127" r:id="rId28"/>
-    <p:sldId id="1136" r:id="rId29"/>
-    <p:sldId id="1143" r:id="rId30"/>
-    <p:sldId id="1144" r:id="rId31"/>
-    <p:sldId id="1145" r:id="rId32"/>
-    <p:sldId id="574" r:id="rId33"/>
-    <p:sldId id="1146" r:id="rId34"/>
-    <p:sldId id="1154" r:id="rId35"/>
-    <p:sldId id="1155" r:id="rId36"/>
-    <p:sldId id="1156" r:id="rId37"/>
-    <p:sldId id="1157" r:id="rId38"/>
-    <p:sldId id="1158" r:id="rId39"/>
-    <p:sldId id="1159" r:id="rId40"/>
-    <p:sldId id="1160" r:id="rId41"/>
-    <p:sldId id="1147" r:id="rId42"/>
-    <p:sldId id="1148" r:id="rId43"/>
-    <p:sldId id="1149" r:id="rId44"/>
-    <p:sldId id="1150" r:id="rId45"/>
-    <p:sldId id="1163" r:id="rId46"/>
-    <p:sldId id="1164" r:id="rId47"/>
-    <p:sldId id="1165" r:id="rId48"/>
-    <p:sldId id="1167" r:id="rId49"/>
-    <p:sldId id="1151" r:id="rId50"/>
-    <p:sldId id="1152" r:id="rId51"/>
-    <p:sldId id="1161" r:id="rId52"/>
-    <p:sldId id="1162" r:id="rId53"/>
+    <p:sldId id="1169" r:id="rId14"/>
+    <p:sldId id="1138" r:id="rId15"/>
+    <p:sldId id="1141" r:id="rId16"/>
+    <p:sldId id="479" r:id="rId17"/>
+    <p:sldId id="1166" r:id="rId18"/>
+    <p:sldId id="1140" r:id="rId19"/>
+    <p:sldId id="1142" r:id="rId20"/>
+    <p:sldId id="1104" r:id="rId21"/>
+    <p:sldId id="473" r:id="rId22"/>
+    <p:sldId id="1128" r:id="rId23"/>
+    <p:sldId id="1168" r:id="rId24"/>
+    <p:sldId id="1132" r:id="rId25"/>
+    <p:sldId id="1131" r:id="rId26"/>
+    <p:sldId id="1170" r:id="rId27"/>
+    <p:sldId id="1134" r:id="rId28"/>
+    <p:sldId id="1135" r:id="rId29"/>
+    <p:sldId id="1127" r:id="rId30"/>
+    <p:sldId id="1136" r:id="rId31"/>
+    <p:sldId id="1143" r:id="rId32"/>
+    <p:sldId id="1144" r:id="rId33"/>
+    <p:sldId id="1145" r:id="rId34"/>
+    <p:sldId id="574" r:id="rId35"/>
+    <p:sldId id="1146" r:id="rId36"/>
+    <p:sldId id="1154" r:id="rId37"/>
+    <p:sldId id="1155" r:id="rId38"/>
+    <p:sldId id="1156" r:id="rId39"/>
+    <p:sldId id="1157" r:id="rId40"/>
+    <p:sldId id="1158" r:id="rId41"/>
+    <p:sldId id="1159" r:id="rId42"/>
+    <p:sldId id="1160" r:id="rId43"/>
+    <p:sldId id="1147" r:id="rId44"/>
+    <p:sldId id="1148" r:id="rId45"/>
+    <p:sldId id="1149" r:id="rId46"/>
+    <p:sldId id="1150" r:id="rId47"/>
+    <p:sldId id="1163" r:id="rId48"/>
+    <p:sldId id="1164" r:id="rId49"/>
+    <p:sldId id="1165" r:id="rId50"/>
+    <p:sldId id="1167" r:id="rId51"/>
+    <p:sldId id="1151" r:id="rId52"/>
+    <p:sldId id="1152" r:id="rId53"/>
+    <p:sldId id="1161" r:id="rId54"/>
+    <p:sldId id="1162" r:id="rId55"/>
   </p:sldIdLst>
   <p:sldSz cx="12192000" cy="6858000"/>
   <p:notesSz cx="6858000" cy="9144000"/>
@@ -513,6 +515,2039 @@
     </a:lvl9pPr>
   </p:notesStyle>
 </p:notesMaster>
+</file>
+
+<file path=ppt/notesSlides/notesSlide1.xml><?xml version="1.0" encoding="utf-8"?>
+<p:notes xmlns:a="http://schemas.openxmlformats.org/drawingml/2006/main" xmlns:r="http://schemas.openxmlformats.org/officeDocument/2006/relationships" xmlns:p="http://schemas.openxmlformats.org/presentationml/2006/main">
+  <p:cSld>
+    <p:spTree>
+      <p:nvGrpSpPr>
+        <p:cNvPr id="1" name=""/>
+        <p:cNvGrpSpPr/>
+        <p:nvPr/>
+      </p:nvGrpSpPr>
+      <p:grpSpPr>
+        <a:xfrm>
+          <a:off x="0" y="0"/>
+          <a:ext cx="0" cy="0"/>
+          <a:chOff x="0" y="0"/>
+          <a:chExt cx="0" cy="0"/>
+        </a:xfrm>
+      </p:grpSpPr>
+      <p:sp>
+        <p:nvSpPr>
+          <p:cNvPr id="2" name="Slide Image Placeholder 1"/>
+          <p:cNvSpPr>
+            <a:spLocks noGrp="1" noRot="1" noChangeAspect="1"/>
+          </p:cNvSpPr>
+          <p:nvPr>
+            <p:ph type="sldImg"/>
+          </p:nvPr>
+        </p:nvSpPr>
+        <p:spPr/>
+      </p:sp>
+      <p:sp>
+        <p:nvSpPr>
+          <p:cNvPr id="3" name="Notes Placeholder 2"/>
+          <p:cNvSpPr>
+            <a:spLocks noGrp="1"/>
+          </p:cNvSpPr>
+          <p:nvPr>
+            <p:ph type="body" idx="1"/>
+          </p:nvPr>
+        </p:nvSpPr>
+        <p:spPr/>
+        <p:txBody>
+          <a:bodyPr/>
+          <a:lstStyle/>
+          <a:p>
+            <a:endParaRPr lang="en-US" dirty="0"/>
+          </a:p>
+        </p:txBody>
+      </p:sp>
+      <p:sp>
+        <p:nvSpPr>
+          <p:cNvPr id="4" name="Slide Number Placeholder 3"/>
+          <p:cNvSpPr>
+            <a:spLocks noGrp="1"/>
+          </p:cNvSpPr>
+          <p:nvPr>
+            <p:ph type="sldNum" sz="quarter" idx="5"/>
+          </p:nvPr>
+        </p:nvSpPr>
+        <p:spPr/>
+        <p:txBody>
+          <a:bodyPr/>
+          <a:lstStyle/>
+          <a:p>
+            <a:fld id="{EEBB2FDE-2E55-4B3D-B7EA-09D0CC108070}" type="slidenum">
+              <a:rPr lang="en-US" smtClean="0"/>
+              <a:t>2</a:t>
+            </a:fld>
+            <a:endParaRPr lang="en-US" dirty="0"/>
+          </a:p>
+        </p:txBody>
+      </p:sp>
+    </p:spTree>
+    <p:extLst>
+      <p:ext uri="{BB962C8B-B14F-4D97-AF65-F5344CB8AC3E}">
+        <p14:creationId xmlns:p14="http://schemas.microsoft.com/office/powerpoint/2010/main" val="3125886555"/>
+      </p:ext>
+    </p:extLst>
+  </p:cSld>
+  <p:clrMapOvr>
+    <a:masterClrMapping/>
+  </p:clrMapOvr>
+</p:notes>
+</file>
+
+<file path=ppt/notesSlides/notesSlide10.xml><?xml version="1.0" encoding="utf-8"?>
+<p:notes xmlns:a="http://schemas.openxmlformats.org/drawingml/2006/main" xmlns:r="http://schemas.openxmlformats.org/officeDocument/2006/relationships" xmlns:p="http://schemas.openxmlformats.org/presentationml/2006/main">
+  <p:cSld>
+    <p:spTree>
+      <p:nvGrpSpPr>
+        <p:cNvPr id="1" name=""/>
+        <p:cNvGrpSpPr/>
+        <p:nvPr/>
+      </p:nvGrpSpPr>
+      <p:grpSpPr>
+        <a:xfrm>
+          <a:off x="0" y="0"/>
+          <a:ext cx="0" cy="0"/>
+          <a:chOff x="0" y="0"/>
+          <a:chExt cx="0" cy="0"/>
+        </a:xfrm>
+      </p:grpSpPr>
+      <p:sp>
+        <p:nvSpPr>
+          <p:cNvPr id="2" name="Slide Image Placeholder 1"/>
+          <p:cNvSpPr>
+            <a:spLocks noGrp="1" noRot="1" noChangeAspect="1"/>
+          </p:cNvSpPr>
+          <p:nvPr>
+            <p:ph type="sldImg"/>
+          </p:nvPr>
+        </p:nvSpPr>
+        <p:spPr/>
+      </p:sp>
+      <p:sp>
+        <p:nvSpPr>
+          <p:cNvPr id="3" name="Notes Placeholder 2"/>
+          <p:cNvSpPr>
+            <a:spLocks noGrp="1"/>
+          </p:cNvSpPr>
+          <p:nvPr>
+            <p:ph type="body" idx="1"/>
+          </p:nvPr>
+        </p:nvSpPr>
+        <p:spPr/>
+        <p:txBody>
+          <a:bodyPr/>
+          <a:lstStyle/>
+          <a:p>
+            <a:r>
+              <a:rPr lang="en-US" dirty="0"/>
+              <a:t>6</a:t>
+            </a:r>
+            <a:r>
+              <a:rPr lang="en-US" baseline="30000" dirty="0"/>
+              <a:t>th</a:t>
+            </a:r>
+            <a:r>
+              <a:rPr lang="en-US" dirty="0"/>
+              <a:t> vs 7</a:t>
+            </a:r>
+            <a:r>
+              <a:rPr lang="en-US" baseline="30000" dirty="0"/>
+              <a:t>th</a:t>
+            </a:r>
+            <a:r>
+              <a:rPr lang="en-US" dirty="0"/>
+              <a:t> edition</a:t>
+            </a:r>
+          </a:p>
+        </p:txBody>
+      </p:sp>
+      <p:sp>
+        <p:nvSpPr>
+          <p:cNvPr id="4" name="Slide Number Placeholder 3"/>
+          <p:cNvSpPr>
+            <a:spLocks noGrp="1"/>
+          </p:cNvSpPr>
+          <p:nvPr>
+            <p:ph type="sldNum" sz="quarter" idx="5"/>
+          </p:nvPr>
+        </p:nvSpPr>
+        <p:spPr/>
+        <p:txBody>
+          <a:bodyPr/>
+          <a:lstStyle/>
+          <a:p>
+            <a:fld id="{EEBB2FDE-2E55-4B3D-B7EA-09D0CC108070}" type="slidenum">
+              <a:rPr lang="en-US" smtClean="0"/>
+              <a:t>22</a:t>
+            </a:fld>
+            <a:endParaRPr lang="en-US" dirty="0"/>
+          </a:p>
+        </p:txBody>
+      </p:sp>
+    </p:spTree>
+    <p:extLst>
+      <p:ext uri="{BB962C8B-B14F-4D97-AF65-F5344CB8AC3E}">
+        <p14:creationId xmlns:p14="http://schemas.microsoft.com/office/powerpoint/2010/main" val="1479852563"/>
+      </p:ext>
+    </p:extLst>
+  </p:cSld>
+  <p:clrMapOvr>
+    <a:masterClrMapping/>
+  </p:clrMapOvr>
+</p:notes>
+</file>
+
+<file path=ppt/notesSlides/notesSlide11.xml><?xml version="1.0" encoding="utf-8"?>
+<p:notes xmlns:a="http://schemas.openxmlformats.org/drawingml/2006/main" xmlns:r="http://schemas.openxmlformats.org/officeDocument/2006/relationships" xmlns:p="http://schemas.openxmlformats.org/presentationml/2006/main">
+  <p:cSld>
+    <p:spTree>
+      <p:nvGrpSpPr>
+        <p:cNvPr id="1" name=""/>
+        <p:cNvGrpSpPr/>
+        <p:nvPr/>
+      </p:nvGrpSpPr>
+      <p:grpSpPr>
+        <a:xfrm>
+          <a:off x="0" y="0"/>
+          <a:ext cx="0" cy="0"/>
+          <a:chOff x="0" y="0"/>
+          <a:chExt cx="0" cy="0"/>
+        </a:xfrm>
+      </p:grpSpPr>
+      <p:sp>
+        <p:nvSpPr>
+          <p:cNvPr id="2" name="Slide Image Placeholder 1"/>
+          <p:cNvSpPr>
+            <a:spLocks noGrp="1" noRot="1" noChangeAspect="1"/>
+          </p:cNvSpPr>
+          <p:nvPr>
+            <p:ph type="sldImg"/>
+          </p:nvPr>
+        </p:nvSpPr>
+        <p:spPr/>
+      </p:sp>
+      <p:sp>
+        <p:nvSpPr>
+          <p:cNvPr id="3" name="Notes Placeholder 2"/>
+          <p:cNvSpPr>
+            <a:spLocks noGrp="1"/>
+          </p:cNvSpPr>
+          <p:nvPr>
+            <p:ph type="body" idx="1"/>
+          </p:nvPr>
+        </p:nvSpPr>
+        <p:spPr/>
+        <p:txBody>
+          <a:bodyPr/>
+          <a:lstStyle/>
+          <a:p>
+            <a:endParaRPr lang="en-US" dirty="0"/>
+          </a:p>
+        </p:txBody>
+      </p:sp>
+      <p:sp>
+        <p:nvSpPr>
+          <p:cNvPr id="4" name="Slide Number Placeholder 3"/>
+          <p:cNvSpPr>
+            <a:spLocks noGrp="1"/>
+          </p:cNvSpPr>
+          <p:nvPr>
+            <p:ph type="sldNum" sz="quarter" idx="5"/>
+          </p:nvPr>
+        </p:nvSpPr>
+        <p:spPr/>
+        <p:txBody>
+          <a:bodyPr/>
+          <a:lstStyle/>
+          <a:p>
+            <a:fld id="{CA7A126E-F83C-3346-AAFA-D1DBAAF91EA3}" type="slidenum">
+              <a:rPr lang="en-US" smtClean="0"/>
+              <a:t>23</a:t>
+            </a:fld>
+            <a:endParaRPr lang="en-US"/>
+          </a:p>
+        </p:txBody>
+      </p:sp>
+    </p:spTree>
+    <p:extLst>
+      <p:ext uri="{BB962C8B-B14F-4D97-AF65-F5344CB8AC3E}">
+        <p14:creationId xmlns:p14="http://schemas.microsoft.com/office/powerpoint/2010/main" val="500294443"/>
+      </p:ext>
+    </p:extLst>
+  </p:cSld>
+  <p:clrMapOvr>
+    <a:masterClrMapping/>
+  </p:clrMapOvr>
+</p:notes>
+</file>
+
+<file path=ppt/notesSlides/notesSlide12.xml><?xml version="1.0" encoding="utf-8"?>
+<p:notes xmlns:a="http://schemas.openxmlformats.org/drawingml/2006/main" xmlns:r="http://schemas.openxmlformats.org/officeDocument/2006/relationships" xmlns:p="http://schemas.openxmlformats.org/presentationml/2006/main">
+  <p:cSld>
+    <p:spTree>
+      <p:nvGrpSpPr>
+        <p:cNvPr id="1" name=""/>
+        <p:cNvGrpSpPr/>
+        <p:nvPr/>
+      </p:nvGrpSpPr>
+      <p:grpSpPr>
+        <a:xfrm>
+          <a:off x="0" y="0"/>
+          <a:ext cx="0" cy="0"/>
+          <a:chOff x="0" y="0"/>
+          <a:chExt cx="0" cy="0"/>
+        </a:xfrm>
+      </p:grpSpPr>
+      <p:sp>
+        <p:nvSpPr>
+          <p:cNvPr id="2" name="Slide Image Placeholder 1"/>
+          <p:cNvSpPr>
+            <a:spLocks noGrp="1" noRot="1" noChangeAspect="1"/>
+          </p:cNvSpPr>
+          <p:nvPr>
+            <p:ph type="sldImg"/>
+          </p:nvPr>
+        </p:nvSpPr>
+        <p:spPr/>
+      </p:sp>
+      <p:sp>
+        <p:nvSpPr>
+          <p:cNvPr id="3" name="Notes Placeholder 2"/>
+          <p:cNvSpPr>
+            <a:spLocks noGrp="1"/>
+          </p:cNvSpPr>
+          <p:nvPr>
+            <p:ph type="body" idx="1"/>
+          </p:nvPr>
+        </p:nvSpPr>
+        <p:spPr/>
+        <p:txBody>
+          <a:bodyPr/>
+          <a:lstStyle/>
+          <a:p>
+            <a:endParaRPr lang="en-US" dirty="0"/>
+          </a:p>
+        </p:txBody>
+      </p:sp>
+      <p:sp>
+        <p:nvSpPr>
+          <p:cNvPr id="4" name="Slide Number Placeholder 3"/>
+          <p:cNvSpPr>
+            <a:spLocks noGrp="1"/>
+          </p:cNvSpPr>
+          <p:nvPr>
+            <p:ph type="sldNum" sz="quarter" idx="5"/>
+          </p:nvPr>
+        </p:nvSpPr>
+        <p:spPr/>
+        <p:txBody>
+          <a:bodyPr/>
+          <a:lstStyle/>
+          <a:p>
+            <a:fld id="{EEBB2FDE-2E55-4B3D-B7EA-09D0CC108070}" type="slidenum">
+              <a:rPr lang="en-US" smtClean="0"/>
+              <a:t>24</a:t>
+            </a:fld>
+            <a:endParaRPr lang="en-US" dirty="0"/>
+          </a:p>
+        </p:txBody>
+      </p:sp>
+    </p:spTree>
+    <p:extLst>
+      <p:ext uri="{BB962C8B-B14F-4D97-AF65-F5344CB8AC3E}">
+        <p14:creationId xmlns:p14="http://schemas.microsoft.com/office/powerpoint/2010/main" val="1850074559"/>
+      </p:ext>
+    </p:extLst>
+  </p:cSld>
+  <p:clrMapOvr>
+    <a:masterClrMapping/>
+  </p:clrMapOvr>
+</p:notes>
+</file>
+
+<file path=ppt/notesSlides/notesSlide13.xml><?xml version="1.0" encoding="utf-8"?>
+<p:notes xmlns:a="http://schemas.openxmlformats.org/drawingml/2006/main" xmlns:r="http://schemas.openxmlformats.org/officeDocument/2006/relationships" xmlns:p="http://schemas.openxmlformats.org/presentationml/2006/main">
+  <p:cSld>
+    <p:spTree>
+      <p:nvGrpSpPr>
+        <p:cNvPr id="1" name=""/>
+        <p:cNvGrpSpPr/>
+        <p:nvPr/>
+      </p:nvGrpSpPr>
+      <p:grpSpPr>
+        <a:xfrm>
+          <a:off x="0" y="0"/>
+          <a:ext cx="0" cy="0"/>
+          <a:chOff x="0" y="0"/>
+          <a:chExt cx="0" cy="0"/>
+        </a:xfrm>
+      </p:grpSpPr>
+      <p:sp>
+        <p:nvSpPr>
+          <p:cNvPr id="2" name="Slide Image Placeholder 1"/>
+          <p:cNvSpPr>
+            <a:spLocks noGrp="1" noRot="1" noChangeAspect="1"/>
+          </p:cNvSpPr>
+          <p:nvPr>
+            <p:ph type="sldImg"/>
+          </p:nvPr>
+        </p:nvSpPr>
+        <p:spPr/>
+      </p:sp>
+      <p:sp>
+        <p:nvSpPr>
+          <p:cNvPr id="3" name="Notes Placeholder 2"/>
+          <p:cNvSpPr>
+            <a:spLocks noGrp="1"/>
+          </p:cNvSpPr>
+          <p:nvPr>
+            <p:ph type="body" idx="1"/>
+          </p:nvPr>
+        </p:nvSpPr>
+        <p:spPr/>
+        <p:txBody>
+          <a:bodyPr/>
+          <a:lstStyle/>
+          <a:p>
+            <a:endParaRPr lang="en-US" dirty="0"/>
+          </a:p>
+        </p:txBody>
+      </p:sp>
+      <p:sp>
+        <p:nvSpPr>
+          <p:cNvPr id="4" name="Slide Number Placeholder 3"/>
+          <p:cNvSpPr>
+            <a:spLocks noGrp="1"/>
+          </p:cNvSpPr>
+          <p:nvPr>
+            <p:ph type="sldNum" sz="quarter" idx="5"/>
+          </p:nvPr>
+        </p:nvSpPr>
+        <p:spPr/>
+        <p:txBody>
+          <a:bodyPr/>
+          <a:lstStyle/>
+          <a:p>
+            <a:fld id="{EEBB2FDE-2E55-4B3D-B7EA-09D0CC108070}" type="slidenum">
+              <a:rPr lang="en-US" smtClean="0"/>
+              <a:t>25</a:t>
+            </a:fld>
+            <a:endParaRPr lang="en-US" dirty="0"/>
+          </a:p>
+        </p:txBody>
+      </p:sp>
+    </p:spTree>
+    <p:extLst>
+      <p:ext uri="{BB962C8B-B14F-4D97-AF65-F5344CB8AC3E}">
+        <p14:creationId xmlns:p14="http://schemas.microsoft.com/office/powerpoint/2010/main" val="1505046937"/>
+      </p:ext>
+    </p:extLst>
+  </p:cSld>
+  <p:clrMapOvr>
+    <a:masterClrMapping/>
+  </p:clrMapOvr>
+</p:notes>
+</file>
+
+<file path=ppt/notesSlides/notesSlide14.xml><?xml version="1.0" encoding="utf-8"?>
+<p:notes xmlns:a="http://schemas.openxmlformats.org/drawingml/2006/main" xmlns:r="http://schemas.openxmlformats.org/officeDocument/2006/relationships" xmlns:p="http://schemas.openxmlformats.org/presentationml/2006/main">
+  <p:cSld>
+    <p:spTree>
+      <p:nvGrpSpPr>
+        <p:cNvPr id="1" name="">
+          <a:extLst>
+            <a:ext uri="{FF2B5EF4-FFF2-40B4-BE49-F238E27FC236}">
+              <a16:creationId xmlns:a16="http://schemas.microsoft.com/office/drawing/2014/main" id="{B3B2F09D-A241-C1F6-7D66-F3820EDED129}"/>
+            </a:ext>
+          </a:extLst>
+        </p:cNvPr>
+        <p:cNvGrpSpPr/>
+        <p:nvPr/>
+      </p:nvGrpSpPr>
+      <p:grpSpPr>
+        <a:xfrm>
+          <a:off x="0" y="0"/>
+          <a:ext cx="0" cy="0"/>
+          <a:chOff x="0" y="0"/>
+          <a:chExt cx="0" cy="0"/>
+        </a:xfrm>
+      </p:grpSpPr>
+      <p:sp>
+        <p:nvSpPr>
+          <p:cNvPr id="2" name="Slide Image Placeholder 1">
+            <a:extLst>
+              <a:ext uri="{FF2B5EF4-FFF2-40B4-BE49-F238E27FC236}">
+                <a16:creationId xmlns:a16="http://schemas.microsoft.com/office/drawing/2014/main" id="{FEAA021B-EAC8-4C6B-C8A7-7ADB43E7FFAE}"/>
+              </a:ext>
+            </a:extLst>
+          </p:cNvPr>
+          <p:cNvSpPr>
+            <a:spLocks noGrp="1" noRot="1" noChangeAspect="1"/>
+          </p:cNvSpPr>
+          <p:nvPr>
+            <p:ph type="sldImg"/>
+          </p:nvPr>
+        </p:nvSpPr>
+        <p:spPr/>
+      </p:sp>
+      <p:sp>
+        <p:nvSpPr>
+          <p:cNvPr id="3" name="Notes Placeholder 2">
+            <a:extLst>
+              <a:ext uri="{FF2B5EF4-FFF2-40B4-BE49-F238E27FC236}">
+                <a16:creationId xmlns:a16="http://schemas.microsoft.com/office/drawing/2014/main" id="{902D9301-C5CC-D498-E63B-0A849C76180E}"/>
+              </a:ext>
+            </a:extLst>
+          </p:cNvPr>
+          <p:cNvSpPr>
+            <a:spLocks noGrp="1"/>
+          </p:cNvSpPr>
+          <p:nvPr>
+            <p:ph type="body" idx="1"/>
+          </p:nvPr>
+        </p:nvSpPr>
+        <p:spPr/>
+        <p:txBody>
+          <a:bodyPr/>
+          <a:lstStyle/>
+          <a:p>
+            <a:endParaRPr lang="en-US" dirty="0"/>
+          </a:p>
+        </p:txBody>
+      </p:sp>
+      <p:sp>
+        <p:nvSpPr>
+          <p:cNvPr id="4" name="Slide Number Placeholder 3">
+            <a:extLst>
+              <a:ext uri="{FF2B5EF4-FFF2-40B4-BE49-F238E27FC236}">
+                <a16:creationId xmlns:a16="http://schemas.microsoft.com/office/drawing/2014/main" id="{D2CB79AB-7AD8-1805-23A6-D740CFE541F4}"/>
+              </a:ext>
+            </a:extLst>
+          </p:cNvPr>
+          <p:cNvSpPr>
+            <a:spLocks noGrp="1"/>
+          </p:cNvSpPr>
+          <p:nvPr>
+            <p:ph type="sldNum" sz="quarter" idx="5"/>
+          </p:nvPr>
+        </p:nvSpPr>
+        <p:spPr/>
+        <p:txBody>
+          <a:bodyPr/>
+          <a:lstStyle/>
+          <a:p>
+            <a:fld id="{EEBB2FDE-2E55-4B3D-B7EA-09D0CC108070}" type="slidenum">
+              <a:rPr lang="en-US" smtClean="0"/>
+              <a:t>26</a:t>
+            </a:fld>
+            <a:endParaRPr lang="en-US" dirty="0"/>
+          </a:p>
+        </p:txBody>
+      </p:sp>
+    </p:spTree>
+    <p:extLst>
+      <p:ext uri="{BB962C8B-B14F-4D97-AF65-F5344CB8AC3E}">
+        <p14:creationId xmlns:p14="http://schemas.microsoft.com/office/powerpoint/2010/main" val="2518344224"/>
+      </p:ext>
+    </p:extLst>
+  </p:cSld>
+  <p:clrMapOvr>
+    <a:masterClrMapping/>
+  </p:clrMapOvr>
+</p:notes>
+</file>
+
+<file path=ppt/notesSlides/notesSlide15.xml><?xml version="1.0" encoding="utf-8"?>
+<p:notes xmlns:a="http://schemas.openxmlformats.org/drawingml/2006/main" xmlns:r="http://schemas.openxmlformats.org/officeDocument/2006/relationships" xmlns:p="http://schemas.openxmlformats.org/presentationml/2006/main">
+  <p:cSld>
+    <p:spTree>
+      <p:nvGrpSpPr>
+        <p:cNvPr id="1" name=""/>
+        <p:cNvGrpSpPr/>
+        <p:nvPr/>
+      </p:nvGrpSpPr>
+      <p:grpSpPr>
+        <a:xfrm>
+          <a:off x="0" y="0"/>
+          <a:ext cx="0" cy="0"/>
+          <a:chOff x="0" y="0"/>
+          <a:chExt cx="0" cy="0"/>
+        </a:xfrm>
+      </p:grpSpPr>
+      <p:sp>
+        <p:nvSpPr>
+          <p:cNvPr id="2" name="Slide Image Placeholder 1"/>
+          <p:cNvSpPr>
+            <a:spLocks noGrp="1" noRot="1" noChangeAspect="1"/>
+          </p:cNvSpPr>
+          <p:nvPr>
+            <p:ph type="sldImg"/>
+          </p:nvPr>
+        </p:nvSpPr>
+        <p:spPr/>
+      </p:sp>
+      <p:sp>
+        <p:nvSpPr>
+          <p:cNvPr id="3" name="Notes Placeholder 2"/>
+          <p:cNvSpPr>
+            <a:spLocks noGrp="1"/>
+          </p:cNvSpPr>
+          <p:nvPr>
+            <p:ph type="body" idx="1"/>
+          </p:nvPr>
+        </p:nvSpPr>
+        <p:spPr/>
+        <p:txBody>
+          <a:bodyPr/>
+          <a:lstStyle/>
+          <a:p>
+            <a:endParaRPr lang="en-US" dirty="0"/>
+          </a:p>
+        </p:txBody>
+      </p:sp>
+      <p:sp>
+        <p:nvSpPr>
+          <p:cNvPr id="4" name="Slide Number Placeholder 3"/>
+          <p:cNvSpPr>
+            <a:spLocks noGrp="1"/>
+          </p:cNvSpPr>
+          <p:nvPr>
+            <p:ph type="sldNum" sz="quarter" idx="5"/>
+          </p:nvPr>
+        </p:nvSpPr>
+        <p:spPr/>
+        <p:txBody>
+          <a:bodyPr/>
+          <a:lstStyle/>
+          <a:p>
+            <a:fld id="{EEBB2FDE-2E55-4B3D-B7EA-09D0CC108070}" type="slidenum">
+              <a:rPr lang="en-US" smtClean="0"/>
+              <a:t>28</a:t>
+            </a:fld>
+            <a:endParaRPr lang="en-US" dirty="0"/>
+          </a:p>
+        </p:txBody>
+      </p:sp>
+    </p:spTree>
+    <p:extLst>
+      <p:ext uri="{BB962C8B-B14F-4D97-AF65-F5344CB8AC3E}">
+        <p14:creationId xmlns:p14="http://schemas.microsoft.com/office/powerpoint/2010/main" val="2767105446"/>
+      </p:ext>
+    </p:extLst>
+  </p:cSld>
+  <p:clrMapOvr>
+    <a:masterClrMapping/>
+  </p:clrMapOvr>
+</p:notes>
+</file>
+
+<file path=ppt/notesSlides/notesSlide16.xml><?xml version="1.0" encoding="utf-8"?>
+<p:notes xmlns:a="http://schemas.openxmlformats.org/drawingml/2006/main" xmlns:r="http://schemas.openxmlformats.org/officeDocument/2006/relationships" xmlns:p="http://schemas.openxmlformats.org/presentationml/2006/main">
+  <p:cSld>
+    <p:spTree>
+      <p:nvGrpSpPr>
+        <p:cNvPr id="1" name=""/>
+        <p:cNvGrpSpPr/>
+        <p:nvPr/>
+      </p:nvGrpSpPr>
+      <p:grpSpPr>
+        <a:xfrm>
+          <a:off x="0" y="0"/>
+          <a:ext cx="0" cy="0"/>
+          <a:chOff x="0" y="0"/>
+          <a:chExt cx="0" cy="0"/>
+        </a:xfrm>
+      </p:grpSpPr>
+      <p:sp>
+        <p:nvSpPr>
+          <p:cNvPr id="2" name="Slide Image Placeholder 1"/>
+          <p:cNvSpPr>
+            <a:spLocks noGrp="1" noRot="1" noChangeAspect="1"/>
+          </p:cNvSpPr>
+          <p:nvPr>
+            <p:ph type="sldImg"/>
+          </p:nvPr>
+        </p:nvSpPr>
+        <p:spPr/>
+      </p:sp>
+      <p:sp>
+        <p:nvSpPr>
+          <p:cNvPr id="3" name="Notes Placeholder 2"/>
+          <p:cNvSpPr>
+            <a:spLocks noGrp="1"/>
+          </p:cNvSpPr>
+          <p:nvPr>
+            <p:ph type="body" idx="1"/>
+          </p:nvPr>
+        </p:nvSpPr>
+        <p:spPr/>
+        <p:txBody>
+          <a:bodyPr/>
+          <a:lstStyle/>
+          <a:p>
+            <a:endParaRPr lang="en-US" dirty="0"/>
+          </a:p>
+        </p:txBody>
+      </p:sp>
+      <p:sp>
+        <p:nvSpPr>
+          <p:cNvPr id="4" name="Slide Number Placeholder 3"/>
+          <p:cNvSpPr>
+            <a:spLocks noGrp="1"/>
+          </p:cNvSpPr>
+          <p:nvPr>
+            <p:ph type="sldNum" sz="quarter" idx="5"/>
+          </p:nvPr>
+        </p:nvSpPr>
+        <p:spPr/>
+        <p:txBody>
+          <a:bodyPr/>
+          <a:lstStyle/>
+          <a:p>
+            <a:fld id="{EEBB2FDE-2E55-4B3D-B7EA-09D0CC108070}" type="slidenum">
+              <a:rPr lang="en-US" smtClean="0"/>
+              <a:t>29</a:t>
+            </a:fld>
+            <a:endParaRPr lang="en-US" dirty="0"/>
+          </a:p>
+        </p:txBody>
+      </p:sp>
+    </p:spTree>
+    <p:extLst>
+      <p:ext uri="{BB962C8B-B14F-4D97-AF65-F5344CB8AC3E}">
+        <p14:creationId xmlns:p14="http://schemas.microsoft.com/office/powerpoint/2010/main" val="1681185838"/>
+      </p:ext>
+    </p:extLst>
+  </p:cSld>
+  <p:clrMapOvr>
+    <a:masterClrMapping/>
+  </p:clrMapOvr>
+</p:notes>
+</file>
+
+<file path=ppt/notesSlides/notesSlide17.xml><?xml version="1.0" encoding="utf-8"?>
+<p:notes xmlns:a="http://schemas.openxmlformats.org/drawingml/2006/main" xmlns:r="http://schemas.openxmlformats.org/officeDocument/2006/relationships" xmlns:p="http://schemas.openxmlformats.org/presentationml/2006/main">
+  <p:cSld>
+    <p:spTree>
+      <p:nvGrpSpPr>
+        <p:cNvPr id="1" name=""/>
+        <p:cNvGrpSpPr/>
+        <p:nvPr/>
+      </p:nvGrpSpPr>
+      <p:grpSpPr>
+        <a:xfrm>
+          <a:off x="0" y="0"/>
+          <a:ext cx="0" cy="0"/>
+          <a:chOff x="0" y="0"/>
+          <a:chExt cx="0" cy="0"/>
+        </a:xfrm>
+      </p:grpSpPr>
+      <p:sp>
+        <p:nvSpPr>
+          <p:cNvPr id="2" name="Slide Image Placeholder 1"/>
+          <p:cNvSpPr>
+            <a:spLocks noGrp="1" noRot="1" noChangeAspect="1"/>
+          </p:cNvSpPr>
+          <p:nvPr>
+            <p:ph type="sldImg"/>
+          </p:nvPr>
+        </p:nvSpPr>
+        <p:spPr/>
+      </p:sp>
+      <p:sp>
+        <p:nvSpPr>
+          <p:cNvPr id="3" name="Notes Placeholder 2"/>
+          <p:cNvSpPr>
+            <a:spLocks noGrp="1"/>
+          </p:cNvSpPr>
+          <p:nvPr>
+            <p:ph type="body" idx="1"/>
+          </p:nvPr>
+        </p:nvSpPr>
+        <p:spPr/>
+        <p:txBody>
+          <a:bodyPr/>
+          <a:lstStyle/>
+          <a:p>
+            <a:endParaRPr lang="en-US" dirty="0"/>
+          </a:p>
+        </p:txBody>
+      </p:sp>
+      <p:sp>
+        <p:nvSpPr>
+          <p:cNvPr id="4" name="Slide Number Placeholder 3"/>
+          <p:cNvSpPr>
+            <a:spLocks noGrp="1"/>
+          </p:cNvSpPr>
+          <p:nvPr>
+            <p:ph type="sldNum" sz="quarter" idx="5"/>
+          </p:nvPr>
+        </p:nvSpPr>
+        <p:spPr/>
+        <p:txBody>
+          <a:bodyPr/>
+          <a:lstStyle/>
+          <a:p>
+            <a:fld id="{EEBB2FDE-2E55-4B3D-B7EA-09D0CC108070}" type="slidenum">
+              <a:rPr lang="en-US" smtClean="0"/>
+              <a:t>30</a:t>
+            </a:fld>
+            <a:endParaRPr lang="en-US" dirty="0"/>
+          </a:p>
+        </p:txBody>
+      </p:sp>
+    </p:spTree>
+    <p:extLst>
+      <p:ext uri="{BB962C8B-B14F-4D97-AF65-F5344CB8AC3E}">
+        <p14:creationId xmlns:p14="http://schemas.microsoft.com/office/powerpoint/2010/main" val="1365910940"/>
+      </p:ext>
+    </p:extLst>
+  </p:cSld>
+  <p:clrMapOvr>
+    <a:masterClrMapping/>
+  </p:clrMapOvr>
+</p:notes>
+</file>
+
+<file path=ppt/notesSlides/notesSlide18.xml><?xml version="1.0" encoding="utf-8"?>
+<p:notes xmlns:a="http://schemas.openxmlformats.org/drawingml/2006/main" xmlns:r="http://schemas.openxmlformats.org/officeDocument/2006/relationships" xmlns:p="http://schemas.openxmlformats.org/presentationml/2006/main">
+  <p:cSld>
+    <p:spTree>
+      <p:nvGrpSpPr>
+        <p:cNvPr id="1" name=""/>
+        <p:cNvGrpSpPr/>
+        <p:nvPr/>
+      </p:nvGrpSpPr>
+      <p:grpSpPr>
+        <a:xfrm>
+          <a:off x="0" y="0"/>
+          <a:ext cx="0" cy="0"/>
+          <a:chOff x="0" y="0"/>
+          <a:chExt cx="0" cy="0"/>
+        </a:xfrm>
+      </p:grpSpPr>
+      <p:sp>
+        <p:nvSpPr>
+          <p:cNvPr id="2" name="Slide Image Placeholder 1"/>
+          <p:cNvSpPr>
+            <a:spLocks noGrp="1" noRot="1" noChangeAspect="1"/>
+          </p:cNvSpPr>
+          <p:nvPr>
+            <p:ph type="sldImg"/>
+          </p:nvPr>
+        </p:nvSpPr>
+        <p:spPr/>
+      </p:sp>
+      <p:sp>
+        <p:nvSpPr>
+          <p:cNvPr id="3" name="Notes Placeholder 2"/>
+          <p:cNvSpPr>
+            <a:spLocks noGrp="1"/>
+          </p:cNvSpPr>
+          <p:nvPr>
+            <p:ph type="body" idx="1"/>
+          </p:nvPr>
+        </p:nvSpPr>
+        <p:spPr/>
+        <p:txBody>
+          <a:bodyPr/>
+          <a:lstStyle/>
+          <a:p>
+            <a:r>
+              <a:rPr lang="en-US" dirty="0"/>
+              <a:t>But getting data from disk is really expensive. Consider accessing 64-bits of data from L1. If you assume that is equivalent to 1 sec, then accessing data from non-volatile storage can be measured in days, weeks, months, and years.</a:t>
+            </a:r>
+          </a:p>
+        </p:txBody>
+      </p:sp>
+      <p:sp>
+        <p:nvSpPr>
+          <p:cNvPr id="4" name="Slide Number Placeholder 3"/>
+          <p:cNvSpPr>
+            <a:spLocks noGrp="1"/>
+          </p:cNvSpPr>
+          <p:nvPr>
+            <p:ph type="sldNum" sz="quarter" idx="10"/>
+          </p:nvPr>
+        </p:nvSpPr>
+        <p:spPr/>
+        <p:txBody>
+          <a:bodyPr/>
+          <a:lstStyle/>
+          <a:p>
+            <a:fld id="{EEBB2FDE-2E55-4B3D-B7EA-09D0CC108070}" type="slidenum">
+              <a:rPr lang="en-US" smtClean="0"/>
+              <a:t>34</a:t>
+            </a:fld>
+            <a:endParaRPr lang="en-US" dirty="0"/>
+          </a:p>
+        </p:txBody>
+      </p:sp>
+    </p:spTree>
+    <p:extLst>
+      <p:ext uri="{BB962C8B-B14F-4D97-AF65-F5344CB8AC3E}">
+        <p14:creationId xmlns:p14="http://schemas.microsoft.com/office/powerpoint/2010/main" val="1543309411"/>
+      </p:ext>
+    </p:extLst>
+  </p:cSld>
+  <p:clrMapOvr>
+    <a:masterClrMapping/>
+  </p:clrMapOvr>
+</p:notes>
+</file>
+
+<file path=ppt/notesSlides/notesSlide19.xml><?xml version="1.0" encoding="utf-8"?>
+<p:notes xmlns:a="http://schemas.openxmlformats.org/drawingml/2006/main" xmlns:r="http://schemas.openxmlformats.org/officeDocument/2006/relationships" xmlns:p="http://schemas.openxmlformats.org/presentationml/2006/main">
+  <p:cSld>
+    <p:spTree>
+      <p:nvGrpSpPr>
+        <p:cNvPr id="1" name=""/>
+        <p:cNvGrpSpPr/>
+        <p:nvPr/>
+      </p:nvGrpSpPr>
+      <p:grpSpPr>
+        <a:xfrm>
+          <a:off x="0" y="0"/>
+          <a:ext cx="0" cy="0"/>
+          <a:chOff x="0" y="0"/>
+          <a:chExt cx="0" cy="0"/>
+        </a:xfrm>
+      </p:grpSpPr>
+      <p:sp>
+        <p:nvSpPr>
+          <p:cNvPr id="2" name="Slide Image Placeholder 1"/>
+          <p:cNvSpPr>
+            <a:spLocks noGrp="1" noRot="1" noChangeAspect="1"/>
+          </p:cNvSpPr>
+          <p:nvPr>
+            <p:ph type="sldImg"/>
+          </p:nvPr>
+        </p:nvSpPr>
+        <p:spPr/>
+      </p:sp>
+      <p:sp>
+        <p:nvSpPr>
+          <p:cNvPr id="3" name="Notes Placeholder 2"/>
+          <p:cNvSpPr>
+            <a:spLocks noGrp="1"/>
+          </p:cNvSpPr>
+          <p:nvPr>
+            <p:ph type="body" idx="1"/>
+          </p:nvPr>
+        </p:nvSpPr>
+        <p:spPr/>
+        <p:txBody>
+          <a:bodyPr/>
+          <a:lstStyle/>
+          <a:p>
+            <a:r>
+              <a:rPr lang="en-US" dirty="0"/>
+              <a:t>But getting data from disk is really expensive. Consider accessing 64-bits of data from L1. If you assume that is equivalent to 1 sec, then accessing data from non-volatile storage can be measured in days, weeks, months, and years.</a:t>
+            </a:r>
+          </a:p>
+        </p:txBody>
+      </p:sp>
+      <p:sp>
+        <p:nvSpPr>
+          <p:cNvPr id="4" name="Slide Number Placeholder 3"/>
+          <p:cNvSpPr>
+            <a:spLocks noGrp="1"/>
+          </p:cNvSpPr>
+          <p:nvPr>
+            <p:ph type="sldNum" sz="quarter" idx="10"/>
+          </p:nvPr>
+        </p:nvSpPr>
+        <p:spPr/>
+        <p:txBody>
+          <a:bodyPr/>
+          <a:lstStyle/>
+          <a:p>
+            <a:fld id="{EEBB2FDE-2E55-4B3D-B7EA-09D0CC108070}" type="slidenum">
+              <a:rPr lang="en-US" smtClean="0"/>
+              <a:t>35</a:t>
+            </a:fld>
+            <a:endParaRPr lang="en-US" dirty="0"/>
+          </a:p>
+        </p:txBody>
+      </p:sp>
+    </p:spTree>
+    <p:extLst>
+      <p:ext uri="{BB962C8B-B14F-4D97-AF65-F5344CB8AC3E}">
+        <p14:creationId xmlns:p14="http://schemas.microsoft.com/office/powerpoint/2010/main" val="224503001"/>
+      </p:ext>
+    </p:extLst>
+  </p:cSld>
+  <p:clrMapOvr>
+    <a:masterClrMapping/>
+  </p:clrMapOvr>
+</p:notes>
+</file>
+
+<file path=ppt/notesSlides/notesSlide2.xml><?xml version="1.0" encoding="utf-8"?>
+<p:notes xmlns:a="http://schemas.openxmlformats.org/drawingml/2006/main" xmlns:r="http://schemas.openxmlformats.org/officeDocument/2006/relationships" xmlns:p="http://schemas.openxmlformats.org/presentationml/2006/main">
+  <p:cSld>
+    <p:spTree>
+      <p:nvGrpSpPr>
+        <p:cNvPr id="1" name=""/>
+        <p:cNvGrpSpPr/>
+        <p:nvPr/>
+      </p:nvGrpSpPr>
+      <p:grpSpPr>
+        <a:xfrm>
+          <a:off x="0" y="0"/>
+          <a:ext cx="0" cy="0"/>
+          <a:chOff x="0" y="0"/>
+          <a:chExt cx="0" cy="0"/>
+        </a:xfrm>
+      </p:grpSpPr>
+      <p:sp>
+        <p:nvSpPr>
+          <p:cNvPr id="2" name="Slide Image Placeholder 1"/>
+          <p:cNvSpPr>
+            <a:spLocks noGrp="1" noRot="1" noChangeAspect="1"/>
+          </p:cNvSpPr>
+          <p:nvPr>
+            <p:ph type="sldImg"/>
+          </p:nvPr>
+        </p:nvSpPr>
+        <p:spPr/>
+      </p:sp>
+      <p:sp>
+        <p:nvSpPr>
+          <p:cNvPr id="3" name="Notes Placeholder 2"/>
+          <p:cNvSpPr>
+            <a:spLocks noGrp="1"/>
+          </p:cNvSpPr>
+          <p:nvPr>
+            <p:ph type="body" idx="1"/>
+          </p:nvPr>
+        </p:nvSpPr>
+        <p:spPr/>
+        <p:txBody>
+          <a:bodyPr/>
+          <a:lstStyle/>
+          <a:p>
+            <a:endParaRPr lang="en-US" dirty="0"/>
+          </a:p>
+        </p:txBody>
+      </p:sp>
+      <p:sp>
+        <p:nvSpPr>
+          <p:cNvPr id="4" name="Slide Number Placeholder 3"/>
+          <p:cNvSpPr>
+            <a:spLocks noGrp="1"/>
+          </p:cNvSpPr>
+          <p:nvPr>
+            <p:ph type="sldNum" sz="quarter" idx="5"/>
+          </p:nvPr>
+        </p:nvSpPr>
+        <p:spPr/>
+        <p:txBody>
+          <a:bodyPr/>
+          <a:lstStyle/>
+          <a:p>
+            <a:fld id="{EEBB2FDE-2E55-4B3D-B7EA-09D0CC108070}" type="slidenum">
+              <a:rPr lang="en-US" smtClean="0"/>
+              <a:t>3</a:t>
+            </a:fld>
+            <a:endParaRPr lang="en-US" dirty="0"/>
+          </a:p>
+        </p:txBody>
+      </p:sp>
+    </p:spTree>
+    <p:extLst>
+      <p:ext uri="{BB962C8B-B14F-4D97-AF65-F5344CB8AC3E}">
+        <p14:creationId xmlns:p14="http://schemas.microsoft.com/office/powerpoint/2010/main" val="1709614520"/>
+      </p:ext>
+    </p:extLst>
+  </p:cSld>
+  <p:clrMapOvr>
+    <a:masterClrMapping/>
+  </p:clrMapOvr>
+</p:notes>
+</file>
+
+<file path=ppt/notesSlides/notesSlide20.xml><?xml version="1.0" encoding="utf-8"?>
+<p:notes xmlns:a="http://schemas.openxmlformats.org/drawingml/2006/main" xmlns:r="http://schemas.openxmlformats.org/officeDocument/2006/relationships" xmlns:p="http://schemas.openxmlformats.org/presentationml/2006/main">
+  <p:cSld>
+    <p:spTree>
+      <p:nvGrpSpPr>
+        <p:cNvPr id="1" name=""/>
+        <p:cNvGrpSpPr/>
+        <p:nvPr/>
+      </p:nvGrpSpPr>
+      <p:grpSpPr>
+        <a:xfrm>
+          <a:off x="0" y="0"/>
+          <a:ext cx="0" cy="0"/>
+          <a:chOff x="0" y="0"/>
+          <a:chExt cx="0" cy="0"/>
+        </a:xfrm>
+      </p:grpSpPr>
+      <p:sp>
+        <p:nvSpPr>
+          <p:cNvPr id="2" name="Slide Image Placeholder 1"/>
+          <p:cNvSpPr>
+            <a:spLocks noGrp="1" noRot="1" noChangeAspect="1"/>
+          </p:cNvSpPr>
+          <p:nvPr>
+            <p:ph type="sldImg"/>
+          </p:nvPr>
+        </p:nvSpPr>
+        <p:spPr/>
+      </p:sp>
+      <p:sp>
+        <p:nvSpPr>
+          <p:cNvPr id="3" name="Notes Placeholder 2"/>
+          <p:cNvSpPr>
+            <a:spLocks noGrp="1"/>
+          </p:cNvSpPr>
+          <p:nvPr>
+            <p:ph type="body" idx="1"/>
+          </p:nvPr>
+        </p:nvSpPr>
+        <p:spPr/>
+        <p:txBody>
+          <a:bodyPr/>
+          <a:lstStyle/>
+          <a:p>
+            <a:r>
+              <a:rPr lang="en-US" dirty="0"/>
+              <a:t>But getting data from disk is really expensive. Consider accessing 64-bits of data from L1. If you assume that is equivalent to 1 sec, then accessing data from non-volatile storage can be measured in days, weeks, months, and years.</a:t>
+            </a:r>
+          </a:p>
+        </p:txBody>
+      </p:sp>
+      <p:sp>
+        <p:nvSpPr>
+          <p:cNvPr id="4" name="Slide Number Placeholder 3"/>
+          <p:cNvSpPr>
+            <a:spLocks noGrp="1"/>
+          </p:cNvSpPr>
+          <p:nvPr>
+            <p:ph type="sldNum" sz="quarter" idx="10"/>
+          </p:nvPr>
+        </p:nvSpPr>
+        <p:spPr/>
+        <p:txBody>
+          <a:bodyPr/>
+          <a:lstStyle/>
+          <a:p>
+            <a:fld id="{EEBB2FDE-2E55-4B3D-B7EA-09D0CC108070}" type="slidenum">
+              <a:rPr lang="en-US" smtClean="0"/>
+              <a:t>37</a:t>
+            </a:fld>
+            <a:endParaRPr lang="en-US" dirty="0"/>
+          </a:p>
+        </p:txBody>
+      </p:sp>
+    </p:spTree>
+    <p:extLst>
+      <p:ext uri="{BB962C8B-B14F-4D97-AF65-F5344CB8AC3E}">
+        <p14:creationId xmlns:p14="http://schemas.microsoft.com/office/powerpoint/2010/main" val="3862682959"/>
+      </p:ext>
+    </p:extLst>
+  </p:cSld>
+  <p:clrMapOvr>
+    <a:masterClrMapping/>
+  </p:clrMapOvr>
+</p:notes>
+</file>
+
+<file path=ppt/notesSlides/notesSlide21.xml><?xml version="1.0" encoding="utf-8"?>
+<p:notes xmlns:a="http://schemas.openxmlformats.org/drawingml/2006/main" xmlns:r="http://schemas.openxmlformats.org/officeDocument/2006/relationships" xmlns:p="http://schemas.openxmlformats.org/presentationml/2006/main">
+  <p:cSld>
+    <p:spTree>
+      <p:nvGrpSpPr>
+        <p:cNvPr id="1" name=""/>
+        <p:cNvGrpSpPr/>
+        <p:nvPr/>
+      </p:nvGrpSpPr>
+      <p:grpSpPr>
+        <a:xfrm>
+          <a:off x="0" y="0"/>
+          <a:ext cx="0" cy="0"/>
+          <a:chOff x="0" y="0"/>
+          <a:chExt cx="0" cy="0"/>
+        </a:xfrm>
+      </p:grpSpPr>
+      <p:sp>
+        <p:nvSpPr>
+          <p:cNvPr id="2" name="Slide Image Placeholder 1"/>
+          <p:cNvSpPr>
+            <a:spLocks noGrp="1" noRot="1" noChangeAspect="1"/>
+          </p:cNvSpPr>
+          <p:nvPr>
+            <p:ph type="sldImg"/>
+          </p:nvPr>
+        </p:nvSpPr>
+        <p:spPr/>
+      </p:sp>
+      <p:sp>
+        <p:nvSpPr>
+          <p:cNvPr id="3" name="Notes Placeholder 2"/>
+          <p:cNvSpPr>
+            <a:spLocks noGrp="1"/>
+          </p:cNvSpPr>
+          <p:nvPr>
+            <p:ph type="body" idx="1"/>
+          </p:nvPr>
+        </p:nvSpPr>
+        <p:spPr/>
+        <p:txBody>
+          <a:bodyPr/>
+          <a:lstStyle/>
+          <a:p>
+            <a:r>
+              <a:rPr lang="en-US" dirty="0"/>
+              <a:t>But getting data from disk is really expensive. Consider accessing 64-bits of data from L1. If you assume that is equivalent to 1 sec, then accessing data from non-volatile storage can be measured in days, weeks, months, and years.</a:t>
+            </a:r>
+          </a:p>
+        </p:txBody>
+      </p:sp>
+      <p:sp>
+        <p:nvSpPr>
+          <p:cNvPr id="4" name="Slide Number Placeholder 3"/>
+          <p:cNvSpPr>
+            <a:spLocks noGrp="1"/>
+          </p:cNvSpPr>
+          <p:nvPr>
+            <p:ph type="sldNum" sz="quarter" idx="10"/>
+          </p:nvPr>
+        </p:nvSpPr>
+        <p:spPr/>
+        <p:txBody>
+          <a:bodyPr/>
+          <a:lstStyle/>
+          <a:p>
+            <a:fld id="{EEBB2FDE-2E55-4B3D-B7EA-09D0CC108070}" type="slidenum">
+              <a:rPr lang="en-US" smtClean="0"/>
+              <a:t>39</a:t>
+            </a:fld>
+            <a:endParaRPr lang="en-US" dirty="0"/>
+          </a:p>
+        </p:txBody>
+      </p:sp>
+    </p:spTree>
+    <p:extLst>
+      <p:ext uri="{BB962C8B-B14F-4D97-AF65-F5344CB8AC3E}">
+        <p14:creationId xmlns:p14="http://schemas.microsoft.com/office/powerpoint/2010/main" val="3568688516"/>
+      </p:ext>
+    </p:extLst>
+  </p:cSld>
+  <p:clrMapOvr>
+    <a:masterClrMapping/>
+  </p:clrMapOvr>
+</p:notes>
+</file>
+
+<file path=ppt/notesSlides/notesSlide22.xml><?xml version="1.0" encoding="utf-8"?>
+<p:notes xmlns:a="http://schemas.openxmlformats.org/drawingml/2006/main" xmlns:r="http://schemas.openxmlformats.org/officeDocument/2006/relationships" xmlns:p="http://schemas.openxmlformats.org/presentationml/2006/main">
+  <p:cSld>
+    <p:spTree>
+      <p:nvGrpSpPr>
+        <p:cNvPr id="1" name=""/>
+        <p:cNvGrpSpPr/>
+        <p:nvPr/>
+      </p:nvGrpSpPr>
+      <p:grpSpPr>
+        <a:xfrm>
+          <a:off x="0" y="0"/>
+          <a:ext cx="0" cy="0"/>
+          <a:chOff x="0" y="0"/>
+          <a:chExt cx="0" cy="0"/>
+        </a:xfrm>
+      </p:grpSpPr>
+      <p:sp>
+        <p:nvSpPr>
+          <p:cNvPr id="2" name="Slide Image Placeholder 1"/>
+          <p:cNvSpPr>
+            <a:spLocks noGrp="1" noRot="1" noChangeAspect="1"/>
+          </p:cNvSpPr>
+          <p:nvPr>
+            <p:ph type="sldImg"/>
+          </p:nvPr>
+        </p:nvSpPr>
+        <p:spPr/>
+      </p:sp>
+      <p:sp>
+        <p:nvSpPr>
+          <p:cNvPr id="3" name="Notes Placeholder 2"/>
+          <p:cNvSpPr>
+            <a:spLocks noGrp="1"/>
+          </p:cNvSpPr>
+          <p:nvPr>
+            <p:ph type="body" idx="1"/>
+          </p:nvPr>
+        </p:nvSpPr>
+        <p:spPr/>
+        <p:txBody>
+          <a:bodyPr/>
+          <a:lstStyle/>
+          <a:p>
+            <a:r>
+              <a:rPr lang="en-US" dirty="0"/>
+              <a:t>But getting data from disk is really expensive. Consider accessing 64-bits of data from L1. If you assume that is equivalent to 1 sec, then accessing data from non-volatile storage can be measured in days, weeks, months, and years.</a:t>
+            </a:r>
+          </a:p>
+        </p:txBody>
+      </p:sp>
+      <p:sp>
+        <p:nvSpPr>
+          <p:cNvPr id="4" name="Slide Number Placeholder 3"/>
+          <p:cNvSpPr>
+            <a:spLocks noGrp="1"/>
+          </p:cNvSpPr>
+          <p:nvPr>
+            <p:ph type="sldNum" sz="quarter" idx="10"/>
+          </p:nvPr>
+        </p:nvSpPr>
+        <p:spPr/>
+        <p:txBody>
+          <a:bodyPr/>
+          <a:lstStyle/>
+          <a:p>
+            <a:fld id="{EEBB2FDE-2E55-4B3D-B7EA-09D0CC108070}" type="slidenum">
+              <a:rPr lang="en-US" smtClean="0"/>
+              <a:t>40</a:t>
+            </a:fld>
+            <a:endParaRPr lang="en-US" dirty="0"/>
+          </a:p>
+        </p:txBody>
+      </p:sp>
+    </p:spTree>
+    <p:extLst>
+      <p:ext uri="{BB962C8B-B14F-4D97-AF65-F5344CB8AC3E}">
+        <p14:creationId xmlns:p14="http://schemas.microsoft.com/office/powerpoint/2010/main" val="658999283"/>
+      </p:ext>
+    </p:extLst>
+  </p:cSld>
+  <p:clrMapOvr>
+    <a:masterClrMapping/>
+  </p:clrMapOvr>
+</p:notes>
+</file>
+
+<file path=ppt/notesSlides/notesSlide23.xml><?xml version="1.0" encoding="utf-8"?>
+<p:notes xmlns:a="http://schemas.openxmlformats.org/drawingml/2006/main" xmlns:r="http://schemas.openxmlformats.org/officeDocument/2006/relationships" xmlns:p="http://schemas.openxmlformats.org/presentationml/2006/main">
+  <p:cSld>
+    <p:spTree>
+      <p:nvGrpSpPr>
+        <p:cNvPr id="1" name=""/>
+        <p:cNvGrpSpPr/>
+        <p:nvPr/>
+      </p:nvGrpSpPr>
+      <p:grpSpPr>
+        <a:xfrm>
+          <a:off x="0" y="0"/>
+          <a:ext cx="0" cy="0"/>
+          <a:chOff x="0" y="0"/>
+          <a:chExt cx="0" cy="0"/>
+        </a:xfrm>
+      </p:grpSpPr>
+      <p:sp>
+        <p:nvSpPr>
+          <p:cNvPr id="2" name="Slide Image Placeholder 1"/>
+          <p:cNvSpPr>
+            <a:spLocks noGrp="1" noRot="1" noChangeAspect="1"/>
+          </p:cNvSpPr>
+          <p:nvPr>
+            <p:ph type="sldImg"/>
+          </p:nvPr>
+        </p:nvSpPr>
+        <p:spPr/>
+      </p:sp>
+      <p:sp>
+        <p:nvSpPr>
+          <p:cNvPr id="3" name="Notes Placeholder 2"/>
+          <p:cNvSpPr>
+            <a:spLocks noGrp="1"/>
+          </p:cNvSpPr>
+          <p:nvPr>
+            <p:ph type="body" idx="1"/>
+          </p:nvPr>
+        </p:nvSpPr>
+        <p:spPr/>
+        <p:txBody>
+          <a:bodyPr/>
+          <a:lstStyle/>
+          <a:p>
+            <a:r>
+              <a:rPr lang="en-US" dirty="0"/>
+              <a:t>But getting data from disk is really expensive. Consider accessing 64-bits of data from L1. If you assume that is equivalent to 1 sec, then accessing data from non-volatile storage can be measured in days, weeks, months, and years.</a:t>
+            </a:r>
+          </a:p>
+        </p:txBody>
+      </p:sp>
+      <p:sp>
+        <p:nvSpPr>
+          <p:cNvPr id="4" name="Slide Number Placeholder 3"/>
+          <p:cNvSpPr>
+            <a:spLocks noGrp="1"/>
+          </p:cNvSpPr>
+          <p:nvPr>
+            <p:ph type="sldNum" sz="quarter" idx="10"/>
+          </p:nvPr>
+        </p:nvSpPr>
+        <p:spPr/>
+        <p:txBody>
+          <a:bodyPr/>
+          <a:lstStyle/>
+          <a:p>
+            <a:fld id="{EEBB2FDE-2E55-4B3D-B7EA-09D0CC108070}" type="slidenum">
+              <a:rPr lang="en-US" smtClean="0"/>
+              <a:t>42</a:t>
+            </a:fld>
+            <a:endParaRPr lang="en-US" dirty="0"/>
+          </a:p>
+        </p:txBody>
+      </p:sp>
+    </p:spTree>
+    <p:extLst>
+      <p:ext uri="{BB962C8B-B14F-4D97-AF65-F5344CB8AC3E}">
+        <p14:creationId xmlns:p14="http://schemas.microsoft.com/office/powerpoint/2010/main" val="3224729461"/>
+      </p:ext>
+    </p:extLst>
+  </p:cSld>
+  <p:clrMapOvr>
+    <a:masterClrMapping/>
+  </p:clrMapOvr>
+</p:notes>
+</file>
+
+<file path=ppt/notesSlides/notesSlide3.xml><?xml version="1.0" encoding="utf-8"?>
+<p:notes xmlns:a="http://schemas.openxmlformats.org/drawingml/2006/main" xmlns:r="http://schemas.openxmlformats.org/officeDocument/2006/relationships" xmlns:p="http://schemas.openxmlformats.org/presentationml/2006/main">
+  <p:cSld>
+    <p:spTree>
+      <p:nvGrpSpPr>
+        <p:cNvPr id="1" name=""/>
+        <p:cNvGrpSpPr/>
+        <p:nvPr/>
+      </p:nvGrpSpPr>
+      <p:grpSpPr>
+        <a:xfrm>
+          <a:off x="0" y="0"/>
+          <a:ext cx="0" cy="0"/>
+          <a:chOff x="0" y="0"/>
+          <a:chExt cx="0" cy="0"/>
+        </a:xfrm>
+      </p:grpSpPr>
+      <p:sp>
+        <p:nvSpPr>
+          <p:cNvPr id="2" name="Slide Image Placeholder 1"/>
+          <p:cNvSpPr>
+            <a:spLocks noGrp="1" noRot="1" noChangeAspect="1"/>
+          </p:cNvSpPr>
+          <p:nvPr>
+            <p:ph type="sldImg"/>
+          </p:nvPr>
+        </p:nvSpPr>
+        <p:spPr/>
+      </p:sp>
+      <p:sp>
+        <p:nvSpPr>
+          <p:cNvPr id="3" name="Notes Placeholder 2"/>
+          <p:cNvSpPr>
+            <a:spLocks noGrp="1"/>
+          </p:cNvSpPr>
+          <p:nvPr>
+            <p:ph type="body" idx="1"/>
+          </p:nvPr>
+        </p:nvSpPr>
+        <p:spPr/>
+        <p:txBody>
+          <a:bodyPr/>
+          <a:lstStyle/>
+          <a:p>
+            <a:endParaRPr lang="en-US" dirty="0"/>
+          </a:p>
+        </p:txBody>
+      </p:sp>
+      <p:sp>
+        <p:nvSpPr>
+          <p:cNvPr id="4" name="Slide Number Placeholder 3"/>
+          <p:cNvSpPr>
+            <a:spLocks noGrp="1"/>
+          </p:cNvSpPr>
+          <p:nvPr>
+            <p:ph type="sldNum" sz="quarter" idx="5"/>
+          </p:nvPr>
+        </p:nvSpPr>
+        <p:spPr/>
+        <p:txBody>
+          <a:bodyPr/>
+          <a:lstStyle/>
+          <a:p>
+            <a:fld id="{EEBB2FDE-2E55-4B3D-B7EA-09D0CC108070}" type="slidenum">
+              <a:rPr lang="en-US" smtClean="0"/>
+              <a:t>4</a:t>
+            </a:fld>
+            <a:endParaRPr lang="en-US" dirty="0"/>
+          </a:p>
+        </p:txBody>
+      </p:sp>
+    </p:spTree>
+    <p:extLst>
+      <p:ext uri="{BB962C8B-B14F-4D97-AF65-F5344CB8AC3E}">
+        <p14:creationId xmlns:p14="http://schemas.microsoft.com/office/powerpoint/2010/main" val="2278422132"/>
+      </p:ext>
+    </p:extLst>
+  </p:cSld>
+  <p:clrMapOvr>
+    <a:masterClrMapping/>
+  </p:clrMapOvr>
+</p:notes>
+</file>
+
+<file path=ppt/notesSlides/notesSlide4.xml><?xml version="1.0" encoding="utf-8"?>
+<p:notes xmlns:a="http://schemas.openxmlformats.org/drawingml/2006/main" xmlns:r="http://schemas.openxmlformats.org/officeDocument/2006/relationships" xmlns:p="http://schemas.openxmlformats.org/presentationml/2006/main">
+  <p:cSld>
+    <p:spTree>
+      <p:nvGrpSpPr>
+        <p:cNvPr id="1" name=""/>
+        <p:cNvGrpSpPr/>
+        <p:nvPr/>
+      </p:nvGrpSpPr>
+      <p:grpSpPr>
+        <a:xfrm>
+          <a:off x="0" y="0"/>
+          <a:ext cx="0" cy="0"/>
+          <a:chOff x="0" y="0"/>
+          <a:chExt cx="0" cy="0"/>
+        </a:xfrm>
+      </p:grpSpPr>
+      <p:sp>
+        <p:nvSpPr>
+          <p:cNvPr id="2" name="Slide Image Placeholder 1"/>
+          <p:cNvSpPr>
+            <a:spLocks noGrp="1" noRot="1" noChangeAspect="1"/>
+          </p:cNvSpPr>
+          <p:nvPr>
+            <p:ph type="sldImg"/>
+          </p:nvPr>
+        </p:nvSpPr>
+        <p:spPr/>
+      </p:sp>
+      <p:sp>
+        <p:nvSpPr>
+          <p:cNvPr id="3" name="Notes Placeholder 2"/>
+          <p:cNvSpPr>
+            <a:spLocks noGrp="1"/>
+          </p:cNvSpPr>
+          <p:nvPr>
+            <p:ph type="body" idx="1"/>
+          </p:nvPr>
+        </p:nvSpPr>
+        <p:spPr/>
+        <p:txBody>
+          <a:bodyPr/>
+          <a:lstStyle/>
+          <a:p>
+            <a:endParaRPr lang="en-US" dirty="0"/>
+          </a:p>
+        </p:txBody>
+      </p:sp>
+      <p:sp>
+        <p:nvSpPr>
+          <p:cNvPr id="4" name="Slide Number Placeholder 3"/>
+          <p:cNvSpPr>
+            <a:spLocks noGrp="1"/>
+          </p:cNvSpPr>
+          <p:nvPr>
+            <p:ph type="sldNum" sz="quarter" idx="5"/>
+          </p:nvPr>
+        </p:nvSpPr>
+        <p:spPr/>
+        <p:txBody>
+          <a:bodyPr/>
+          <a:lstStyle/>
+          <a:p>
+            <a:fld id="{EEBB2FDE-2E55-4B3D-B7EA-09D0CC108070}" type="slidenum">
+              <a:rPr lang="en-US" smtClean="0"/>
+              <a:t>5</a:t>
+            </a:fld>
+            <a:endParaRPr lang="en-US" dirty="0"/>
+          </a:p>
+        </p:txBody>
+      </p:sp>
+    </p:spTree>
+    <p:extLst>
+      <p:ext uri="{BB962C8B-B14F-4D97-AF65-F5344CB8AC3E}">
+        <p14:creationId xmlns:p14="http://schemas.microsoft.com/office/powerpoint/2010/main" val="2824334396"/>
+      </p:ext>
+    </p:extLst>
+  </p:cSld>
+  <p:clrMapOvr>
+    <a:masterClrMapping/>
+  </p:clrMapOvr>
+</p:notes>
+</file>
+
+<file path=ppt/notesSlides/notesSlide5.xml><?xml version="1.0" encoding="utf-8"?>
+<p:notes xmlns:a="http://schemas.openxmlformats.org/drawingml/2006/main" xmlns:r="http://schemas.openxmlformats.org/officeDocument/2006/relationships" xmlns:p="http://schemas.openxmlformats.org/presentationml/2006/main">
+  <p:cSld>
+    <p:spTree>
+      <p:nvGrpSpPr>
+        <p:cNvPr id="1" name=""/>
+        <p:cNvGrpSpPr/>
+        <p:nvPr/>
+      </p:nvGrpSpPr>
+      <p:grpSpPr>
+        <a:xfrm>
+          <a:off x="0" y="0"/>
+          <a:ext cx="0" cy="0"/>
+          <a:chOff x="0" y="0"/>
+          <a:chExt cx="0" cy="0"/>
+        </a:xfrm>
+      </p:grpSpPr>
+      <p:sp>
+        <p:nvSpPr>
+          <p:cNvPr id="2" name="Slide Image Placeholder 1"/>
+          <p:cNvSpPr>
+            <a:spLocks noGrp="1" noRot="1" noChangeAspect="1"/>
+          </p:cNvSpPr>
+          <p:nvPr>
+            <p:ph type="sldImg"/>
+          </p:nvPr>
+        </p:nvSpPr>
+        <p:spPr/>
+      </p:sp>
+      <p:sp>
+        <p:nvSpPr>
+          <p:cNvPr id="3" name="Notes Placeholder 2"/>
+          <p:cNvSpPr>
+            <a:spLocks noGrp="1"/>
+          </p:cNvSpPr>
+          <p:nvPr>
+            <p:ph type="body" idx="1"/>
+          </p:nvPr>
+        </p:nvSpPr>
+        <p:spPr/>
+        <p:txBody>
+          <a:bodyPr/>
+          <a:lstStyle/>
+          <a:p>
+            <a:endParaRPr lang="en-US" dirty="0"/>
+          </a:p>
+        </p:txBody>
+      </p:sp>
+      <p:sp>
+        <p:nvSpPr>
+          <p:cNvPr id="4" name="Slide Number Placeholder 3"/>
+          <p:cNvSpPr>
+            <a:spLocks noGrp="1"/>
+          </p:cNvSpPr>
+          <p:nvPr>
+            <p:ph type="sldNum" sz="quarter" idx="5"/>
+          </p:nvPr>
+        </p:nvSpPr>
+        <p:spPr/>
+        <p:txBody>
+          <a:bodyPr/>
+          <a:lstStyle/>
+          <a:p>
+            <a:fld id="{EEBB2FDE-2E55-4B3D-B7EA-09D0CC108070}" type="slidenum">
+              <a:rPr lang="en-US" smtClean="0"/>
+              <a:t>6</a:t>
+            </a:fld>
+            <a:endParaRPr lang="en-US" dirty="0"/>
+          </a:p>
+        </p:txBody>
+      </p:sp>
+    </p:spTree>
+    <p:extLst>
+      <p:ext uri="{BB962C8B-B14F-4D97-AF65-F5344CB8AC3E}">
+        <p14:creationId xmlns:p14="http://schemas.microsoft.com/office/powerpoint/2010/main" val="258168079"/>
+      </p:ext>
+    </p:extLst>
+  </p:cSld>
+  <p:clrMapOvr>
+    <a:masterClrMapping/>
+  </p:clrMapOvr>
+</p:notes>
+</file>
+
+<file path=ppt/notesSlides/notesSlide6.xml><?xml version="1.0" encoding="utf-8"?>
+<p:notes xmlns:a="http://schemas.openxmlformats.org/drawingml/2006/main" xmlns:r="http://schemas.openxmlformats.org/officeDocument/2006/relationships" xmlns:p="http://schemas.openxmlformats.org/presentationml/2006/main">
+  <p:cSld>
+    <p:spTree>
+      <p:nvGrpSpPr>
+        <p:cNvPr id="1" name=""/>
+        <p:cNvGrpSpPr/>
+        <p:nvPr/>
+      </p:nvGrpSpPr>
+      <p:grpSpPr>
+        <a:xfrm>
+          <a:off x="0" y="0"/>
+          <a:ext cx="0" cy="0"/>
+          <a:chOff x="0" y="0"/>
+          <a:chExt cx="0" cy="0"/>
+        </a:xfrm>
+      </p:grpSpPr>
+      <p:sp>
+        <p:nvSpPr>
+          <p:cNvPr id="2" name="Slide Image Placeholder 1"/>
+          <p:cNvSpPr>
+            <a:spLocks noGrp="1" noRot="1" noChangeAspect="1"/>
+          </p:cNvSpPr>
+          <p:nvPr>
+            <p:ph type="sldImg"/>
+          </p:nvPr>
+        </p:nvSpPr>
+        <p:spPr/>
+      </p:sp>
+      <p:sp>
+        <p:nvSpPr>
+          <p:cNvPr id="3" name="Notes Placeholder 2"/>
+          <p:cNvSpPr>
+            <a:spLocks noGrp="1"/>
+          </p:cNvSpPr>
+          <p:nvPr>
+            <p:ph type="body" idx="1"/>
+          </p:nvPr>
+        </p:nvSpPr>
+        <p:spPr/>
+        <p:txBody>
+          <a:bodyPr/>
+          <a:lstStyle/>
+          <a:p>
+            <a:r>
+              <a:rPr lang="en-US" dirty="0"/>
+              <a:t>Late days are rounded up to the nearest integer. For example, if it is 4 hours late, it will count as 1 day late.</a:t>
+            </a:r>
+          </a:p>
+          <a:p>
+            <a:endParaRPr lang="en-US" dirty="0"/>
+          </a:p>
+          <a:p>
+            <a:r>
+              <a:rPr lang="en-US" dirty="0"/>
+              <a:t>You may allocate them as you wish. For example, you could hand in one project 4 days late, or 4 projects each one day late.</a:t>
+            </a:r>
+          </a:p>
+          <a:p>
+            <a:endParaRPr lang="en-US" dirty="0"/>
+          </a:p>
+          <a:p>
+            <a:r>
+              <a:rPr lang="en-US" dirty="0"/>
+              <a:t>Cannot use late days on Project #0, must be completed on time.</a:t>
+            </a:r>
+          </a:p>
+        </p:txBody>
+      </p:sp>
+      <p:sp>
+        <p:nvSpPr>
+          <p:cNvPr id="4" name="Slide Number Placeholder 3"/>
+          <p:cNvSpPr>
+            <a:spLocks noGrp="1"/>
+          </p:cNvSpPr>
+          <p:nvPr>
+            <p:ph type="sldNum" sz="quarter" idx="5"/>
+          </p:nvPr>
+        </p:nvSpPr>
+        <p:spPr/>
+        <p:txBody>
+          <a:bodyPr/>
+          <a:lstStyle/>
+          <a:p>
+            <a:fld id="{EEBB2FDE-2E55-4B3D-B7EA-09D0CC108070}" type="slidenum">
+              <a:rPr lang="en-US" smtClean="0"/>
+              <a:t>9</a:t>
+            </a:fld>
+            <a:endParaRPr lang="en-US" dirty="0"/>
+          </a:p>
+        </p:txBody>
+      </p:sp>
+    </p:spTree>
+    <p:extLst>
+      <p:ext uri="{BB962C8B-B14F-4D97-AF65-F5344CB8AC3E}">
+        <p14:creationId xmlns:p14="http://schemas.microsoft.com/office/powerpoint/2010/main" val="2717941944"/>
+      </p:ext>
+    </p:extLst>
+  </p:cSld>
+  <p:clrMapOvr>
+    <a:masterClrMapping/>
+  </p:clrMapOvr>
+</p:notes>
+</file>
+
+<file path=ppt/notesSlides/notesSlide7.xml><?xml version="1.0" encoding="utf-8"?>
+<p:notes xmlns:a="http://schemas.openxmlformats.org/drawingml/2006/main" xmlns:r="http://schemas.openxmlformats.org/officeDocument/2006/relationships" xmlns:p="http://schemas.openxmlformats.org/presentationml/2006/main">
+  <p:cSld>
+    <p:spTree>
+      <p:nvGrpSpPr>
+        <p:cNvPr id="1" name=""/>
+        <p:cNvGrpSpPr/>
+        <p:nvPr/>
+      </p:nvGrpSpPr>
+      <p:grpSpPr>
+        <a:xfrm>
+          <a:off x="0" y="0"/>
+          <a:ext cx="0" cy="0"/>
+          <a:chOff x="0" y="0"/>
+          <a:chExt cx="0" cy="0"/>
+        </a:xfrm>
+      </p:grpSpPr>
+      <p:sp>
+        <p:nvSpPr>
+          <p:cNvPr id="2" name="Slide Image Placeholder 1"/>
+          <p:cNvSpPr>
+            <a:spLocks noGrp="1" noRot="1" noChangeAspect="1"/>
+          </p:cNvSpPr>
+          <p:nvPr>
+            <p:ph type="sldImg"/>
+          </p:nvPr>
+        </p:nvSpPr>
+        <p:spPr/>
+      </p:sp>
+      <p:sp>
+        <p:nvSpPr>
+          <p:cNvPr id="3" name="Notes Placeholder 2"/>
+          <p:cNvSpPr>
+            <a:spLocks noGrp="1"/>
+          </p:cNvSpPr>
+          <p:nvPr>
+            <p:ph type="body" idx="1"/>
+          </p:nvPr>
+        </p:nvSpPr>
+        <p:spPr/>
+        <p:txBody>
+          <a:bodyPr/>
+          <a:lstStyle/>
+          <a:p>
+            <a:endParaRPr lang="en-US" dirty="0"/>
+          </a:p>
+        </p:txBody>
+      </p:sp>
+      <p:sp>
+        <p:nvSpPr>
+          <p:cNvPr id="4" name="Slide Number Placeholder 3"/>
+          <p:cNvSpPr>
+            <a:spLocks noGrp="1"/>
+          </p:cNvSpPr>
+          <p:nvPr>
+            <p:ph type="sldNum" sz="quarter" idx="5"/>
+          </p:nvPr>
+        </p:nvSpPr>
+        <p:spPr/>
+        <p:txBody>
+          <a:bodyPr/>
+          <a:lstStyle/>
+          <a:p>
+            <a:fld id="{CA7A126E-F83C-3346-AAFA-D1DBAAF91EA3}" type="slidenum">
+              <a:rPr lang="en-US" smtClean="0"/>
+              <a:t>16</a:t>
+            </a:fld>
+            <a:endParaRPr lang="en-US"/>
+          </a:p>
+        </p:txBody>
+      </p:sp>
+    </p:spTree>
+    <p:extLst>
+      <p:ext uri="{BB962C8B-B14F-4D97-AF65-F5344CB8AC3E}">
+        <p14:creationId xmlns:p14="http://schemas.microsoft.com/office/powerpoint/2010/main" val="87837289"/>
+      </p:ext>
+    </p:extLst>
+  </p:cSld>
+  <p:clrMapOvr>
+    <a:masterClrMapping/>
+  </p:clrMapOvr>
+</p:notes>
+</file>
+
+<file path=ppt/notesSlides/notesSlide8.xml><?xml version="1.0" encoding="utf-8"?>
+<p:notes xmlns:a="http://schemas.openxmlformats.org/drawingml/2006/main" xmlns:r="http://schemas.openxmlformats.org/officeDocument/2006/relationships" xmlns:p="http://schemas.openxmlformats.org/presentationml/2006/main">
+  <p:cSld>
+    <p:spTree>
+      <p:nvGrpSpPr>
+        <p:cNvPr id="1" name=""/>
+        <p:cNvGrpSpPr/>
+        <p:nvPr/>
+      </p:nvGrpSpPr>
+      <p:grpSpPr>
+        <a:xfrm>
+          <a:off x="0" y="0"/>
+          <a:ext cx="0" cy="0"/>
+          <a:chOff x="0" y="0"/>
+          <a:chExt cx="0" cy="0"/>
+        </a:xfrm>
+      </p:grpSpPr>
+      <p:sp>
+        <p:nvSpPr>
+          <p:cNvPr id="2" name="Slide Image Placeholder 1"/>
+          <p:cNvSpPr>
+            <a:spLocks noGrp="1" noRot="1" noChangeAspect="1"/>
+          </p:cNvSpPr>
+          <p:nvPr>
+            <p:ph type="sldImg"/>
+          </p:nvPr>
+        </p:nvSpPr>
+        <p:spPr/>
+      </p:sp>
+      <p:sp>
+        <p:nvSpPr>
+          <p:cNvPr id="3" name="Notes Placeholder 2"/>
+          <p:cNvSpPr>
+            <a:spLocks noGrp="1"/>
+          </p:cNvSpPr>
+          <p:nvPr>
+            <p:ph type="body" idx="1"/>
+          </p:nvPr>
+        </p:nvSpPr>
+        <p:spPr/>
+        <p:txBody>
+          <a:bodyPr/>
+          <a:lstStyle/>
+          <a:p>
+            <a:endParaRPr lang="en-US" dirty="0"/>
+          </a:p>
+        </p:txBody>
+      </p:sp>
+      <p:sp>
+        <p:nvSpPr>
+          <p:cNvPr id="4" name="Slide Number Placeholder 3"/>
+          <p:cNvSpPr>
+            <a:spLocks noGrp="1"/>
+          </p:cNvSpPr>
+          <p:nvPr>
+            <p:ph type="sldNum" sz="quarter" idx="5"/>
+          </p:nvPr>
+        </p:nvSpPr>
+        <p:spPr/>
+        <p:txBody>
+          <a:bodyPr/>
+          <a:lstStyle/>
+          <a:p>
+            <a:fld id="{EEBB2FDE-2E55-4B3D-B7EA-09D0CC108070}" type="slidenum">
+              <a:rPr lang="en-US" smtClean="0"/>
+              <a:t>20</a:t>
+            </a:fld>
+            <a:endParaRPr lang="en-US" dirty="0"/>
+          </a:p>
+        </p:txBody>
+      </p:sp>
+    </p:spTree>
+    <p:extLst>
+      <p:ext uri="{BB962C8B-B14F-4D97-AF65-F5344CB8AC3E}">
+        <p14:creationId xmlns:p14="http://schemas.microsoft.com/office/powerpoint/2010/main" val="3731795292"/>
+      </p:ext>
+    </p:extLst>
+  </p:cSld>
+  <p:clrMapOvr>
+    <a:masterClrMapping/>
+  </p:clrMapOvr>
+</p:notes>
+</file>
+
+<file path=ppt/notesSlides/notesSlide9.xml><?xml version="1.0" encoding="utf-8"?>
+<p:notes xmlns:a="http://schemas.openxmlformats.org/drawingml/2006/main" xmlns:r="http://schemas.openxmlformats.org/officeDocument/2006/relationships" xmlns:p="http://schemas.openxmlformats.org/presentationml/2006/main">
+  <p:cSld>
+    <p:spTree>
+      <p:nvGrpSpPr>
+        <p:cNvPr id="1" name=""/>
+        <p:cNvGrpSpPr/>
+        <p:nvPr/>
+      </p:nvGrpSpPr>
+      <p:grpSpPr>
+        <a:xfrm>
+          <a:off x="0" y="0"/>
+          <a:ext cx="0" cy="0"/>
+          <a:chOff x="0" y="0"/>
+          <a:chExt cx="0" cy="0"/>
+        </a:xfrm>
+      </p:grpSpPr>
+      <p:sp>
+        <p:nvSpPr>
+          <p:cNvPr id="2" name="Slide Image Placeholder 1"/>
+          <p:cNvSpPr>
+            <a:spLocks noGrp="1" noRot="1" noChangeAspect="1"/>
+          </p:cNvSpPr>
+          <p:nvPr>
+            <p:ph type="sldImg"/>
+          </p:nvPr>
+        </p:nvSpPr>
+        <p:spPr/>
+      </p:sp>
+      <p:sp>
+        <p:nvSpPr>
+          <p:cNvPr id="3" name="Notes Placeholder 2"/>
+          <p:cNvSpPr>
+            <a:spLocks noGrp="1"/>
+          </p:cNvSpPr>
+          <p:nvPr>
+            <p:ph type="body" idx="1"/>
+          </p:nvPr>
+        </p:nvSpPr>
+        <p:spPr/>
+        <p:txBody>
+          <a:bodyPr/>
+          <a:lstStyle/>
+          <a:p>
+            <a:r>
+              <a:rPr lang="en-US" dirty="0"/>
+              <a:t>6</a:t>
+            </a:r>
+            <a:r>
+              <a:rPr lang="en-US" baseline="30000" dirty="0"/>
+              <a:t>th</a:t>
+            </a:r>
+            <a:r>
+              <a:rPr lang="en-US" dirty="0"/>
+              <a:t> vs 7</a:t>
+            </a:r>
+            <a:r>
+              <a:rPr lang="en-US" baseline="30000" dirty="0"/>
+              <a:t>th</a:t>
+            </a:r>
+            <a:r>
+              <a:rPr lang="en-US" dirty="0"/>
+              <a:t> edition</a:t>
+            </a:r>
+          </a:p>
+        </p:txBody>
+      </p:sp>
+      <p:sp>
+        <p:nvSpPr>
+          <p:cNvPr id="4" name="Slide Number Placeholder 3"/>
+          <p:cNvSpPr>
+            <a:spLocks noGrp="1"/>
+          </p:cNvSpPr>
+          <p:nvPr>
+            <p:ph type="sldNum" sz="quarter" idx="5"/>
+          </p:nvPr>
+        </p:nvSpPr>
+        <p:spPr/>
+        <p:txBody>
+          <a:bodyPr/>
+          <a:lstStyle/>
+          <a:p>
+            <a:fld id="{EEBB2FDE-2E55-4B3D-B7EA-09D0CC108070}" type="slidenum">
+              <a:rPr lang="en-US" smtClean="0"/>
+              <a:t>21</a:t>
+            </a:fld>
+            <a:endParaRPr lang="en-US" dirty="0"/>
+          </a:p>
+        </p:txBody>
+      </p:sp>
+    </p:spTree>
+    <p:extLst>
+      <p:ext uri="{BB962C8B-B14F-4D97-AF65-F5344CB8AC3E}">
+        <p14:creationId xmlns:p14="http://schemas.microsoft.com/office/powerpoint/2010/main" val="2957338251"/>
+      </p:ext>
+    </p:extLst>
+  </p:cSld>
+  <p:clrMapOvr>
+    <a:masterClrMapping/>
+  </p:clrMapOvr>
+</p:notes>
 </file>
 
 <file path=ppt/slideLayouts/slideLayout1.xml><?xml version="1.0" encoding="utf-8"?>
@@ -2197,14 +4232,21 @@
             <p:ph idx="1"/>
           </p:nvPr>
         </p:nvSpPr>
-        <p:spPr/>
+        <p:spPr>
+          <a:xfrm>
+            <a:off x="609600" y="1166018"/>
+            <a:ext cx="10972800" cy="4525963"/>
+          </a:xfrm>
+        </p:spPr>
         <p:txBody>
-          <a:bodyPr/>
+          <a:bodyPr>
+            <a:normAutofit fontScale="92500" lnSpcReduction="20000"/>
+          </a:bodyPr>
           <a:lstStyle/>
           <a:p>
             <a:r>
               <a:rPr lang="en-US" dirty="0"/>
-              <a:t>Instructors and TAs will hold office hours on weekdays (Mon-Fri) at different times.</a:t>
+              <a:t>Instructors will hold office hours on weekdays (Mon-Fri), schedule TBD</a:t>
             </a:r>
           </a:p>
           <a:p>
@@ -2224,6 +4266,18 @@
               <a:rPr lang="en-US" dirty="0"/>
               <a:t>We need your help to schedule these, scheduling survey will arrive via email this week</a:t>
             </a:r>
+          </a:p>
+          <a:p>
+            <a:endParaRPr lang="en-US" dirty="0"/>
+          </a:p>
+          <a:p>
+            <a:r>
+              <a:rPr lang="en-US" dirty="0"/>
+              <a:t>Some office hour time will be devoted to Code Reviews</a:t>
+            </a:r>
+          </a:p>
+          <a:p>
+            <a:endParaRPr lang="en-US" dirty="0"/>
           </a:p>
           <a:p>
             <a:endParaRPr lang="en-US" dirty="0"/>
@@ -3177,6 +5231,288 @@
   <p:cSld>
     <p:spTree>
       <p:nvGrpSpPr>
+        <p:cNvPr id="1" name="">
+          <a:extLst>
+            <a:ext uri="{FF2B5EF4-FFF2-40B4-BE49-F238E27FC236}">
+              <a16:creationId xmlns:a16="http://schemas.microsoft.com/office/drawing/2014/main" id="{7BB1D822-4D89-2948-5642-588F286804DF}"/>
+            </a:ext>
+          </a:extLst>
+        </p:cNvPr>
+        <p:cNvGrpSpPr/>
+        <p:nvPr/>
+      </p:nvGrpSpPr>
+      <p:grpSpPr>
+        <a:xfrm>
+          <a:off x="0" y="0"/>
+          <a:ext cx="0" cy="0"/>
+          <a:chOff x="0" y="0"/>
+          <a:chExt cx="0" cy="0"/>
+        </a:xfrm>
+      </p:grpSpPr>
+      <p:sp>
+        <p:nvSpPr>
+          <p:cNvPr id="2" name="Title 1">
+            <a:extLst>
+              <a:ext uri="{FF2B5EF4-FFF2-40B4-BE49-F238E27FC236}">
+                <a16:creationId xmlns:a16="http://schemas.microsoft.com/office/drawing/2014/main" id="{4D9F49A3-D52E-9F97-6A0D-5C97BED4350E}"/>
+              </a:ext>
+            </a:extLst>
+          </p:cNvPr>
+          <p:cNvSpPr>
+            <a:spLocks noGrp="1"/>
+          </p:cNvSpPr>
+          <p:nvPr>
+            <p:ph type="title"/>
+          </p:nvPr>
+        </p:nvSpPr>
+        <p:spPr/>
+        <p:txBody>
+          <a:bodyPr/>
+          <a:lstStyle/>
+          <a:p>
+            <a:r>
+              <a:rPr lang="en-US" dirty="0"/>
+              <a:t>AI Policy</a:t>
+            </a:r>
+          </a:p>
+        </p:txBody>
+      </p:sp>
+      <p:sp>
+        <p:nvSpPr>
+          <p:cNvPr id="4" name="Slide Number Placeholder 3">
+            <a:extLst>
+              <a:ext uri="{FF2B5EF4-FFF2-40B4-BE49-F238E27FC236}">
+                <a16:creationId xmlns:a16="http://schemas.microsoft.com/office/drawing/2014/main" id="{56A842B2-9361-D38A-0276-386597E1A7DD}"/>
+              </a:ext>
+            </a:extLst>
+          </p:cNvPr>
+          <p:cNvSpPr>
+            <a:spLocks noGrp="1"/>
+          </p:cNvSpPr>
+          <p:nvPr>
+            <p:ph type="sldNum" sz="quarter" idx="12"/>
+          </p:nvPr>
+        </p:nvSpPr>
+        <p:spPr>
+          <a:xfrm>
+            <a:off x="11705168" y="0"/>
+            <a:ext cx="486833" cy="366184"/>
+          </a:xfrm>
+        </p:spPr>
+        <p:txBody>
+          <a:bodyPr/>
+          <a:lstStyle/>
+          <a:p>
+            <a:fld id="{97DD1AB5-42BA-4E8A-BFEE-435884E16AAB}" type="slidenum">
+              <a:rPr lang="en-US" smtClean="0"/>
+              <a:pPr/>
+              <a:t>13</a:t>
+            </a:fld>
+            <a:endParaRPr lang="en-US" dirty="0"/>
+          </a:p>
+        </p:txBody>
+      </p:sp>
+      <p:pic>
+        <p:nvPicPr>
+          <p:cNvPr id="8" name="Content Placeholder 7">
+            <a:extLst>
+              <a:ext uri="{FF2B5EF4-FFF2-40B4-BE49-F238E27FC236}">
+                <a16:creationId xmlns:a16="http://schemas.microsoft.com/office/drawing/2014/main" id="{E54814CE-31D2-21D6-9DCD-2CEAE197AB06}"/>
+              </a:ext>
+            </a:extLst>
+          </p:cNvPr>
+          <p:cNvPicPr>
+            <a:picLocks noGrp="1" noChangeAspect="1"/>
+          </p:cNvPicPr>
+          <p:nvPr>
+            <p:ph idx="1"/>
+          </p:nvPr>
+        </p:nvPicPr>
+        <p:blipFill>
+          <a:blip r:embed="rId2"/>
+          <a:stretch>
+            <a:fillRect/>
+          </a:stretch>
+        </p:blipFill>
+        <p:spPr>
+          <a:xfrm>
+            <a:off x="1027211" y="1047604"/>
+            <a:ext cx="4051268" cy="5422468"/>
+          </a:xfrm>
+          <a:prstGeom prst="rect">
+            <a:avLst/>
+          </a:prstGeom>
+        </p:spPr>
+      </p:pic>
+      <p:pic>
+        <p:nvPicPr>
+          <p:cNvPr id="10" name="Picture 9">
+            <a:extLst>
+              <a:ext uri="{FF2B5EF4-FFF2-40B4-BE49-F238E27FC236}">
+                <a16:creationId xmlns:a16="http://schemas.microsoft.com/office/drawing/2014/main" id="{2E13FECF-BE0E-6581-79F7-4E3A00F323F3}"/>
+              </a:ext>
+            </a:extLst>
+          </p:cNvPr>
+          <p:cNvPicPr>
+            <a:picLocks noChangeAspect="1"/>
+          </p:cNvPicPr>
+          <p:nvPr/>
+        </p:nvPicPr>
+        <p:blipFill>
+          <a:blip r:embed="rId3"/>
+          <a:srcRect t="33693" b="42919"/>
+          <a:stretch>
+            <a:fillRect/>
+          </a:stretch>
+        </p:blipFill>
+        <p:spPr>
+          <a:xfrm>
+            <a:off x="5383279" y="2491147"/>
+            <a:ext cx="8099133" cy="2535382"/>
+          </a:xfrm>
+          <a:prstGeom prst="rect">
+            <a:avLst/>
+          </a:prstGeom>
+        </p:spPr>
+      </p:pic>
+    </p:spTree>
+    <p:extLst>
+      <p:ext uri="{BB962C8B-B14F-4D97-AF65-F5344CB8AC3E}">
+        <p14:creationId xmlns:p14="http://schemas.microsoft.com/office/powerpoint/2010/main" val="2730852386"/>
+      </p:ext>
+    </p:extLst>
+  </p:cSld>
+  <p:clrMapOvr>
+    <a:masterClrMapping/>
+  </p:clrMapOvr>
+  <p:timing>
+    <p:tnLst>
+      <p:par>
+        <p:cTn id="1" dur="indefinite" restart="never" nodeType="tmRoot">
+          <p:childTnLst>
+            <p:seq concurrent="1" nextAc="seek">
+              <p:cTn id="2" dur="indefinite" nodeType="mainSeq">
+                <p:childTnLst>
+                  <p:par>
+                    <p:cTn id="3" fill="hold">
+                      <p:stCondLst>
+                        <p:cond delay="indefinite"/>
+                      </p:stCondLst>
+                      <p:childTnLst>
+                        <p:par>
+                          <p:cTn id="4" fill="hold">
+                            <p:stCondLst>
+                              <p:cond delay="0"/>
+                            </p:stCondLst>
+                            <p:childTnLst>
+                              <p:par>
+                                <p:cTn id="5" presetID="1" presetClass="entr" presetSubtype="0" fill="hold" nodeType="clickEffect">
+                                  <p:stCondLst>
+                                    <p:cond delay="0"/>
+                                  </p:stCondLst>
+                                  <p:childTnLst>
+                                    <p:set>
+                                      <p:cBhvr>
+                                        <p:cTn id="6" dur="1" fill="hold">
+                                          <p:stCondLst>
+                                            <p:cond delay="0"/>
+                                          </p:stCondLst>
+                                        </p:cTn>
+                                        <p:tgtEl>
+                                          <p:spTgt spid="8"/>
+                                        </p:tgtEl>
+                                        <p:attrNameLst>
+                                          <p:attrName>style.visibility</p:attrName>
+                                        </p:attrNameLst>
+                                      </p:cBhvr>
+                                      <p:to>
+                                        <p:strVal val="visible"/>
+                                      </p:to>
+                                    </p:set>
+                                  </p:childTnLst>
+                                </p:cTn>
+                              </p:par>
+                            </p:childTnLst>
+                          </p:cTn>
+                        </p:par>
+                      </p:childTnLst>
+                    </p:cTn>
+                  </p:par>
+                  <p:par>
+                    <p:cTn id="7" fill="hold">
+                      <p:stCondLst>
+                        <p:cond delay="indefinite"/>
+                      </p:stCondLst>
+                      <p:childTnLst>
+                        <p:par>
+                          <p:cTn id="8" fill="hold">
+                            <p:stCondLst>
+                              <p:cond delay="0"/>
+                            </p:stCondLst>
+                            <p:childTnLst>
+                              <p:par>
+                                <p:cTn id="9" presetID="1" presetClass="entr" presetSubtype="0" fill="hold" nodeType="clickEffect">
+                                  <p:stCondLst>
+                                    <p:cond delay="0"/>
+                                  </p:stCondLst>
+                                  <p:childTnLst>
+                                    <p:set>
+                                      <p:cBhvr>
+                                        <p:cTn id="10" dur="1" fill="hold">
+                                          <p:stCondLst>
+                                            <p:cond delay="0"/>
+                                          </p:stCondLst>
+                                        </p:cTn>
+                                        <p:tgtEl>
+                                          <p:spTgt spid="10"/>
+                                        </p:tgtEl>
+                                        <p:attrNameLst>
+                                          <p:attrName>style.visibility</p:attrName>
+                                        </p:attrNameLst>
+                                      </p:cBhvr>
+                                      <p:to>
+                                        <p:strVal val="visible"/>
+                                      </p:to>
+                                    </p:set>
+                                  </p:childTnLst>
+                                </p:cTn>
+                              </p:par>
+                            </p:childTnLst>
+                          </p:cTn>
+                        </p:par>
+                      </p:childTnLst>
+                    </p:cTn>
+                  </p:par>
+                </p:childTnLst>
+              </p:cTn>
+              <p:prevCondLst>
+                <p:cond evt="onPrev" delay="0">
+                  <p:tgtEl>
+                    <p:sldTgt/>
+                  </p:tgtEl>
+                </p:cond>
+              </p:prevCondLst>
+              <p:nextCondLst>
+                <p:cond evt="onNext" delay="0">
+                  <p:tgtEl>
+                    <p:sldTgt/>
+                  </p:tgtEl>
+                </p:cond>
+              </p:nextCondLst>
+            </p:seq>
+          </p:childTnLst>
+        </p:cTn>
+      </p:par>
+    </p:tnLst>
+  </p:timing>
+</p:sld>
+</file>
+
+<file path=ppt/slides/slide14.xml><?xml version="1.0" encoding="utf-8"?>
+<p:sld xmlns:a="http://schemas.openxmlformats.org/drawingml/2006/main" xmlns:r="http://schemas.openxmlformats.org/officeDocument/2006/relationships" xmlns:p="http://schemas.openxmlformats.org/presentationml/2006/main">
+  <p:cSld>
+    <p:spTree>
+      <p:nvGrpSpPr>
         <p:cNvPr id="1" name=""/>
         <p:cNvGrpSpPr/>
         <p:nvPr/>
@@ -3315,7 +5651,7 @@
             <a:fld id="{97DD1AB5-42BA-4E8A-BFEE-435884E16AAB}" type="slidenum">
               <a:rPr lang="en-US" smtClean="0"/>
               <a:pPr/>
-              <a:t>13</a:t>
+              <a:t>14</a:t>
             </a:fld>
             <a:endParaRPr lang="en-US" dirty="0"/>
           </a:p>
@@ -3560,7 +5896,7 @@
 </p:sld>
 </file>
 
-<file path=ppt/slides/slide14.xml><?xml version="1.0" encoding="utf-8"?>
+<file path=ppt/slides/slide15.xml><?xml version="1.0" encoding="utf-8"?>
 <p:sld xmlns:a="http://schemas.openxmlformats.org/drawingml/2006/main" xmlns:r="http://schemas.openxmlformats.org/officeDocument/2006/relationships" xmlns:p="http://schemas.openxmlformats.org/presentationml/2006/main">
   <p:cSld>
     <p:spTree>
@@ -3600,7 +5936,7 @@
           <a:p>
             <a:r>
               <a:rPr lang="en-US" dirty="0"/>
-              <a:t>Some Advice</a:t>
+              <a:t>AI Policy</a:t>
             </a:r>
           </a:p>
         </p:txBody>
@@ -3621,9 +5957,16 @@
             <p:ph idx="1"/>
           </p:nvPr>
         </p:nvSpPr>
-        <p:spPr/>
+        <p:spPr>
+          <a:xfrm>
+            <a:off x="487680" y="964115"/>
+            <a:ext cx="11094720" cy="5547521"/>
+          </a:xfrm>
+        </p:spPr>
         <p:txBody>
-          <a:bodyPr/>
+          <a:bodyPr>
+            <a:normAutofit fontScale="85000" lnSpcReduction="10000"/>
+          </a:bodyPr>
           <a:lstStyle/>
           <a:p>
             <a:r>
@@ -3635,8 +5978,67 @@
             <a:pPr lvl="1"/>
             <a:r>
               <a:rPr lang="en-US" dirty="0"/>
-              <a:t>Especially on Project 0</a:t>
-            </a:r>
+              <a:t>There is a "going to the gym" argument against these tools</a:t>
+            </a:r>
+          </a:p>
+          <a:p>
+            <a:pPr lvl="1"/>
+            <a:r>
+              <a:rPr lang="en-US" dirty="0"/>
+              <a:t>In this course, mostly applies to Project 0</a:t>
+            </a:r>
+          </a:p>
+          <a:p>
+            <a:pPr lvl="1"/>
+            <a:endParaRPr lang="en-US" dirty="0"/>
+          </a:p>
+          <a:p>
+            <a:r>
+              <a:rPr lang="en-US" dirty="0"/>
+              <a:t>Course grade weightings reflect our best prediction of how you will spend time in the course</a:t>
+            </a:r>
+          </a:p>
+          <a:p>
+            <a:endParaRPr lang="en-US" dirty="0"/>
+          </a:p>
+          <a:p>
+            <a:r>
+              <a:rPr lang="en-US" dirty="0"/>
+              <a:t>In an effort to evaluate success at "differently difficult" skills, two </a:t>
+            </a:r>
+            <a:r>
+              <a:rPr lang="en-US" b="1" dirty="0"/>
+              <a:t>Code Reviews</a:t>
+            </a:r>
+            <a:r>
+              <a:rPr lang="en-US" dirty="0"/>
+              <a:t>, 1-on-1 with instructors</a:t>
+            </a:r>
+          </a:p>
+          <a:p>
+            <a:pPr lvl="1"/>
+            <a:r>
+              <a:rPr lang="en-US" dirty="0"/>
+              <a:t>Do you have a mental model of the system/projects?</a:t>
+            </a:r>
+          </a:p>
+          <a:p>
+            <a:pPr lvl="1"/>
+            <a:r>
+              <a:rPr lang="en-US" dirty="0"/>
+              <a:t>Can you reason about your code and validate ideas by looking under the hood?</a:t>
+            </a:r>
+          </a:p>
+          <a:p>
+            <a:pPr lvl="1"/>
+            <a:r>
+              <a:rPr lang="en-US" dirty="0"/>
+              <a:t>Can you weigh competing claims about how different optimizations are likely to help?</a:t>
+            </a:r>
+          </a:p>
+          <a:p>
+            <a:pPr lvl="1"/>
+            <a:endParaRPr lang="en-US" dirty="0"/>
           </a:p>
         </p:txBody>
       </p:sp>
@@ -3756,6 +6158,300 @@
                       </p:childTnLst>
                     </p:cTn>
                   </p:par>
+                  <p:par>
+                    <p:cTn id="11" fill="hold">
+                      <p:stCondLst>
+                        <p:cond delay="indefinite"/>
+                      </p:stCondLst>
+                      <p:childTnLst>
+                        <p:par>
+                          <p:cTn id="12" fill="hold">
+                            <p:stCondLst>
+                              <p:cond delay="0"/>
+                            </p:stCondLst>
+                            <p:childTnLst>
+                              <p:par>
+                                <p:cTn id="13" presetID="1" presetClass="entr" presetSubtype="0" fill="hold" nodeType="clickEffect">
+                                  <p:stCondLst>
+                                    <p:cond delay="0"/>
+                                  </p:stCondLst>
+                                  <p:childTnLst>
+                                    <p:set>
+                                      <p:cBhvr>
+                                        <p:cTn id="14" dur="1" fill="hold">
+                                          <p:stCondLst>
+                                            <p:cond delay="0"/>
+                                          </p:stCondLst>
+                                        </p:cTn>
+                                        <p:tgtEl>
+                                          <p:spTgt spid="3">
+                                            <p:txEl>
+                                              <p:pRg st="2" end="2"/>
+                                            </p:txEl>
+                                          </p:spTgt>
+                                        </p:tgtEl>
+                                        <p:attrNameLst>
+                                          <p:attrName>style.visibility</p:attrName>
+                                        </p:attrNameLst>
+                                      </p:cBhvr>
+                                      <p:to>
+                                        <p:strVal val="visible"/>
+                                      </p:to>
+                                    </p:set>
+                                  </p:childTnLst>
+                                </p:cTn>
+                              </p:par>
+                            </p:childTnLst>
+                          </p:cTn>
+                        </p:par>
+                      </p:childTnLst>
+                    </p:cTn>
+                  </p:par>
+                  <p:par>
+                    <p:cTn id="15" fill="hold">
+                      <p:stCondLst>
+                        <p:cond delay="indefinite"/>
+                      </p:stCondLst>
+                      <p:childTnLst>
+                        <p:par>
+                          <p:cTn id="16" fill="hold">
+                            <p:stCondLst>
+                              <p:cond delay="0"/>
+                            </p:stCondLst>
+                            <p:childTnLst>
+                              <p:par>
+                                <p:cTn id="17" presetID="1" presetClass="entr" presetSubtype="0" fill="hold" nodeType="clickEffect">
+                                  <p:stCondLst>
+                                    <p:cond delay="0"/>
+                                  </p:stCondLst>
+                                  <p:childTnLst>
+                                    <p:set>
+                                      <p:cBhvr>
+                                        <p:cTn id="18" dur="1" fill="hold">
+                                          <p:stCondLst>
+                                            <p:cond delay="0"/>
+                                          </p:stCondLst>
+                                        </p:cTn>
+                                        <p:tgtEl>
+                                          <p:spTgt spid="3">
+                                            <p:txEl>
+                                              <p:pRg st="4" end="4"/>
+                                            </p:txEl>
+                                          </p:spTgt>
+                                        </p:tgtEl>
+                                        <p:attrNameLst>
+                                          <p:attrName>style.visibility</p:attrName>
+                                        </p:attrNameLst>
+                                      </p:cBhvr>
+                                      <p:to>
+                                        <p:strVal val="visible"/>
+                                      </p:to>
+                                    </p:set>
+                                  </p:childTnLst>
+                                </p:cTn>
+                              </p:par>
+                            </p:childTnLst>
+                          </p:cTn>
+                        </p:par>
+                      </p:childTnLst>
+                    </p:cTn>
+                  </p:par>
+                  <p:par>
+                    <p:cTn id="19" fill="hold">
+                      <p:stCondLst>
+                        <p:cond delay="indefinite"/>
+                      </p:stCondLst>
+                      <p:childTnLst>
+                        <p:par>
+                          <p:cTn id="20" fill="hold">
+                            <p:stCondLst>
+                              <p:cond delay="0"/>
+                            </p:stCondLst>
+                            <p:childTnLst>
+                              <p:par>
+                                <p:cTn id="21" presetID="1" presetClass="entr" presetSubtype="0" fill="hold" nodeType="clickEffect">
+                                  <p:stCondLst>
+                                    <p:cond delay="0"/>
+                                  </p:stCondLst>
+                                  <p:childTnLst>
+                                    <p:set>
+                                      <p:cBhvr>
+                                        <p:cTn id="22" dur="1" fill="hold">
+                                          <p:stCondLst>
+                                            <p:cond delay="0"/>
+                                          </p:stCondLst>
+                                        </p:cTn>
+                                        <p:tgtEl>
+                                          <p:spTgt spid="3">
+                                            <p:txEl>
+                                              <p:pRg st="6" end="6"/>
+                                            </p:txEl>
+                                          </p:spTgt>
+                                        </p:tgtEl>
+                                        <p:attrNameLst>
+                                          <p:attrName>style.visibility</p:attrName>
+                                        </p:attrNameLst>
+                                      </p:cBhvr>
+                                      <p:to>
+                                        <p:strVal val="visible"/>
+                                      </p:to>
+                                    </p:set>
+                                  </p:childTnLst>
+                                </p:cTn>
+                              </p:par>
+                            </p:childTnLst>
+                          </p:cTn>
+                        </p:par>
+                      </p:childTnLst>
+                    </p:cTn>
+                  </p:par>
+                  <p:par>
+                    <p:cTn id="23" fill="hold">
+                      <p:stCondLst>
+                        <p:cond delay="indefinite"/>
+                      </p:stCondLst>
+                      <p:childTnLst>
+                        <p:par>
+                          <p:cTn id="24" fill="hold">
+                            <p:stCondLst>
+                              <p:cond delay="0"/>
+                            </p:stCondLst>
+                            <p:childTnLst>
+                              <p:par>
+                                <p:cTn id="25" presetID="1" presetClass="entr" presetSubtype="0" fill="hold" nodeType="clickEffect">
+                                  <p:stCondLst>
+                                    <p:cond delay="0"/>
+                                  </p:stCondLst>
+                                  <p:childTnLst>
+                                    <p:set>
+                                      <p:cBhvr>
+                                        <p:cTn id="26" dur="1" fill="hold">
+                                          <p:stCondLst>
+                                            <p:cond delay="0"/>
+                                          </p:stCondLst>
+                                        </p:cTn>
+                                        <p:tgtEl>
+                                          <p:spTgt spid="3">
+                                            <p:txEl>
+                                              <p:pRg st="7" end="7"/>
+                                            </p:txEl>
+                                          </p:spTgt>
+                                        </p:tgtEl>
+                                        <p:attrNameLst>
+                                          <p:attrName>style.visibility</p:attrName>
+                                        </p:attrNameLst>
+                                      </p:cBhvr>
+                                      <p:to>
+                                        <p:strVal val="visible"/>
+                                      </p:to>
+                                    </p:set>
+                                  </p:childTnLst>
+                                </p:cTn>
+                              </p:par>
+                            </p:childTnLst>
+                          </p:cTn>
+                        </p:par>
+                      </p:childTnLst>
+                    </p:cTn>
+                  </p:par>
+                  <p:par>
+                    <p:cTn id="27" fill="hold">
+                      <p:stCondLst>
+                        <p:cond delay="indefinite"/>
+                      </p:stCondLst>
+                      <p:childTnLst>
+                        <p:par>
+                          <p:cTn id="28" fill="hold">
+                            <p:stCondLst>
+                              <p:cond delay="0"/>
+                            </p:stCondLst>
+                            <p:childTnLst>
+                              <p:par>
+                                <p:cTn id="29" presetID="1" presetClass="entr" presetSubtype="0" fill="hold" nodeType="clickEffect">
+                                  <p:stCondLst>
+                                    <p:cond delay="0"/>
+                                  </p:stCondLst>
+                                  <p:childTnLst>
+                                    <p:set>
+                                      <p:cBhvr>
+                                        <p:cTn id="30" dur="1" fill="hold">
+                                          <p:stCondLst>
+                                            <p:cond delay="0"/>
+                                          </p:stCondLst>
+                                        </p:cTn>
+                                        <p:tgtEl>
+                                          <p:spTgt spid="3">
+                                            <p:txEl>
+                                              <p:pRg st="8" end="8"/>
+                                            </p:txEl>
+                                          </p:spTgt>
+                                        </p:tgtEl>
+                                        <p:attrNameLst>
+                                          <p:attrName>style.visibility</p:attrName>
+                                        </p:attrNameLst>
+                                      </p:cBhvr>
+                                      <p:to>
+                                        <p:strVal val="visible"/>
+                                      </p:to>
+                                    </p:set>
+                                  </p:childTnLst>
+                                </p:cTn>
+                              </p:par>
+                            </p:childTnLst>
+                          </p:cTn>
+                        </p:par>
+                      </p:childTnLst>
+                    </p:cTn>
+                  </p:par>
+                  <p:par>
+                    <p:cTn id="31" fill="hold">
+                      <p:stCondLst>
+                        <p:cond delay="indefinite"/>
+                      </p:stCondLst>
+                      <p:childTnLst>
+                        <p:par>
+                          <p:cTn id="32" fill="hold">
+                            <p:stCondLst>
+                              <p:cond delay="0"/>
+                            </p:stCondLst>
+                            <p:childTnLst>
+                              <p:par>
+                                <p:cTn id="33" presetID="1" presetClass="entr" presetSubtype="0" fill="hold" nodeType="clickEffect">
+                                  <p:stCondLst>
+                                    <p:cond delay="0"/>
+                                  </p:stCondLst>
+                                  <p:childTnLst>
+                                    <p:set>
+                                      <p:cBhvr>
+                                        <p:cTn id="34" dur="1" fill="hold">
+                                          <p:stCondLst>
+                                            <p:cond delay="0"/>
+                                          </p:stCondLst>
+                                        </p:cTn>
+                                        <p:tgtEl>
+                                          <p:spTgt spid="3">
+                                            <p:txEl>
+                                              <p:pRg st="9" end="9"/>
+                                            </p:txEl>
+                                          </p:spTgt>
+                                        </p:tgtEl>
+                                        <p:attrNameLst>
+                                          <p:attrName>style.visibility</p:attrName>
+                                        </p:attrNameLst>
+                                      </p:cBhvr>
+                                      <p:to>
+                                        <p:strVal val="visible"/>
+                                      </p:to>
+                                    </p:set>
+                                  </p:childTnLst>
+                                </p:cTn>
+                              </p:par>
+                            </p:childTnLst>
+                          </p:cTn>
+                        </p:par>
+                      </p:childTnLst>
+                    </p:cTn>
+                  </p:par>
                 </p:childTnLst>
               </p:cTn>
               <p:prevCondLst>
@@ -3781,7 +6477,7 @@
 </p:sld>
 </file>
 
-<file path=ppt/slides/slide15.xml><?xml version="1.0" encoding="utf-8"?>
+<file path=ppt/slides/slide16.xml><?xml version="1.0" encoding="utf-8"?>
 <p:sld xmlns:a="http://schemas.openxmlformats.org/drawingml/2006/main" xmlns:r="http://schemas.openxmlformats.org/officeDocument/2006/relationships" xmlns:p="http://schemas.openxmlformats.org/presentationml/2006/main">
   <p:cSld>
     <p:spTree>
@@ -4129,7 +6825,7 @@
             <a:fld id="{97DD1AB5-42BA-4E8A-BFEE-435884E16AAB}" type="slidenum">
               <a:rPr lang="en-US" sz="1600"/>
               <a:pPr/>
-              <a:t>15</a:t>
+              <a:t>16</a:t>
             </a:fld>
             <a:endParaRPr lang="en-US" sz="1600" dirty="0"/>
           </a:p>
@@ -4521,7 +7217,7 @@
 </p:sld>
 </file>
 
-<file path=ppt/slides/slide16.xml><?xml version="1.0" encoding="utf-8"?>
+<file path=ppt/slides/slide17.xml><?xml version="1.0" encoding="utf-8"?>
 <p:sld xmlns:a="http://schemas.openxmlformats.org/drawingml/2006/main" xmlns:r="http://schemas.openxmlformats.org/officeDocument/2006/relationships" xmlns:p="http://schemas.openxmlformats.org/presentationml/2006/main">
   <p:cSld>
     <p:spTree>
@@ -5103,69 +7799,6 @@
 </p:sld>
 </file>
 
-<file path=ppt/slides/slide17.xml><?xml version="1.0" encoding="utf-8"?>
-<p:sld xmlns:a="http://schemas.openxmlformats.org/drawingml/2006/main" xmlns:r="http://schemas.openxmlformats.org/officeDocument/2006/relationships" xmlns:p="http://schemas.openxmlformats.org/presentationml/2006/main">
-  <p:cSld>
-    <p:spTree>
-      <p:nvGrpSpPr>
-        <p:cNvPr id="1" name=""/>
-        <p:cNvGrpSpPr/>
-        <p:nvPr/>
-      </p:nvGrpSpPr>
-      <p:grpSpPr>
-        <a:xfrm>
-          <a:off x="0" y="0"/>
-          <a:ext cx="0" cy="0"/>
-          <a:chOff x="0" y="0"/>
-          <a:chExt cx="0" cy="0"/>
-        </a:xfrm>
-      </p:grpSpPr>
-      <p:sp>
-        <p:nvSpPr>
-          <p:cNvPr id="2" name="Title 1">
-            <a:extLst>
-              <a:ext uri="{FF2B5EF4-FFF2-40B4-BE49-F238E27FC236}">
-                <a16:creationId xmlns:a16="http://schemas.microsoft.com/office/drawing/2014/main" id="{3FEC6B43-2D78-6373-5217-ED7601CA8340}"/>
-              </a:ext>
-            </a:extLst>
-          </p:cNvPr>
-          <p:cNvSpPr>
-            <a:spLocks noGrp="1"/>
-          </p:cNvSpPr>
-          <p:nvPr>
-            <p:ph type="title"/>
-          </p:nvPr>
-        </p:nvSpPr>
-        <p:spPr>
-          <a:xfrm>
-            <a:off x="0" y="2743200"/>
-            <a:ext cx="12192000" cy="881350"/>
-          </a:xfrm>
-        </p:spPr>
-        <p:txBody>
-          <a:bodyPr/>
-          <a:lstStyle/>
-          <a:p>
-            <a:r>
-              <a:rPr lang="en-US" dirty="0"/>
-              <a:t>&lt;/serious&gt;</a:t>
-            </a:r>
-          </a:p>
-        </p:txBody>
-      </p:sp>
-    </p:spTree>
-    <p:extLst>
-      <p:ext uri="{BB962C8B-B14F-4D97-AF65-F5344CB8AC3E}">
-        <p14:creationId xmlns:p14="http://schemas.microsoft.com/office/powerpoint/2010/main" val="1346091847"/>
-      </p:ext>
-    </p:extLst>
-  </p:cSld>
-  <p:clrMapOvr>
-    <a:masterClrMapping/>
-  </p:clrMapOvr>
-</p:sld>
-</file>
-
 <file path=ppt/slides/slide18.xml><?xml version="1.0" encoding="utf-8"?>
 <p:sld xmlns:a="http://schemas.openxmlformats.org/drawingml/2006/main" xmlns:r="http://schemas.openxmlformats.org/officeDocument/2006/relationships" xmlns:p="http://schemas.openxmlformats.org/presentationml/2006/main">
   <p:cSld>
@@ -5211,6 +7844,69 @@
           <a:p>
             <a:r>
               <a:rPr lang="en-US" dirty="0"/>
+              <a:t>&lt;/serious&gt;</a:t>
+            </a:r>
+          </a:p>
+        </p:txBody>
+      </p:sp>
+    </p:spTree>
+    <p:extLst>
+      <p:ext uri="{BB962C8B-B14F-4D97-AF65-F5344CB8AC3E}">
+        <p14:creationId xmlns:p14="http://schemas.microsoft.com/office/powerpoint/2010/main" val="1346091847"/>
+      </p:ext>
+    </p:extLst>
+  </p:cSld>
+  <p:clrMapOvr>
+    <a:masterClrMapping/>
+  </p:clrMapOvr>
+</p:sld>
+</file>
+
+<file path=ppt/slides/slide19.xml><?xml version="1.0" encoding="utf-8"?>
+<p:sld xmlns:a="http://schemas.openxmlformats.org/drawingml/2006/main" xmlns:r="http://schemas.openxmlformats.org/officeDocument/2006/relationships" xmlns:p="http://schemas.openxmlformats.org/presentationml/2006/main">
+  <p:cSld>
+    <p:spTree>
+      <p:nvGrpSpPr>
+        <p:cNvPr id="1" name=""/>
+        <p:cNvGrpSpPr/>
+        <p:nvPr/>
+      </p:nvGrpSpPr>
+      <p:grpSpPr>
+        <a:xfrm>
+          <a:off x="0" y="0"/>
+          <a:ext cx="0" cy="0"/>
+          <a:chOff x="0" y="0"/>
+          <a:chExt cx="0" cy="0"/>
+        </a:xfrm>
+      </p:grpSpPr>
+      <p:sp>
+        <p:nvSpPr>
+          <p:cNvPr id="2" name="Title 1">
+            <a:extLst>
+              <a:ext uri="{FF2B5EF4-FFF2-40B4-BE49-F238E27FC236}">
+                <a16:creationId xmlns:a16="http://schemas.microsoft.com/office/drawing/2014/main" id="{3FEC6B43-2D78-6373-5217-ED7601CA8340}"/>
+              </a:ext>
+            </a:extLst>
+          </p:cNvPr>
+          <p:cNvSpPr>
+            <a:spLocks noGrp="1"/>
+          </p:cNvSpPr>
+          <p:nvPr>
+            <p:ph type="title"/>
+          </p:nvPr>
+        </p:nvSpPr>
+        <p:spPr>
+          <a:xfrm>
+            <a:off x="0" y="2743200"/>
+            <a:ext cx="12192000" cy="881350"/>
+          </a:xfrm>
+        </p:spPr>
+        <p:txBody>
+          <a:bodyPr/>
+          <a:lstStyle/>
+          <a:p>
+            <a:r>
+              <a:rPr lang="en-US" dirty="0"/>
               <a:t>Project 0</a:t>
             </a:r>
           </a:p>
@@ -5229,8 +7925,8 @@
 </p:sld>
 </file>
 
-<file path=ppt/slides/slide19.xml><?xml version="1.0" encoding="utf-8"?>
-<p:sld xmlns:a="http://schemas.openxmlformats.org/drawingml/2006/main" xmlns:r="http://schemas.openxmlformats.org/officeDocument/2006/relationships" xmlns:p="http://schemas.openxmlformats.org/presentationml/2006/main">
+<file path=ppt/slides/slide2.xml><?xml version="1.0" encoding="utf-8"?>
+<p:sld xmlns:a="http://schemas.openxmlformats.org/drawingml/2006/main" xmlns:r="http://schemas.openxmlformats.org/officeDocument/2006/relationships" xmlns:p="http://schemas.openxmlformats.org/presentationml/2006/main" show="0">
   <p:cSld>
     <p:spTree>
       <p:nvGrpSpPr>
@@ -5269,7 +7965,7 @@
           <a:p>
             <a:r>
               <a:rPr lang="en-US" dirty="0"/>
-              <a:t>C++ Bootcamp</a:t>
+              <a:t>Wait List</a:t>
             </a:r>
           </a:p>
         </p:txBody>
@@ -5279,7 +7975,7 @@
           <p:cNvPr id="4" name="Content Placeholder 3">
             <a:extLst>
               <a:ext uri="{FF2B5EF4-FFF2-40B4-BE49-F238E27FC236}">
-                <a16:creationId xmlns:a16="http://schemas.microsoft.com/office/drawing/2014/main" id="{AC7F89A2-23A9-1BA5-6DA9-BA0BDF8659ED}"/>
+                <a16:creationId xmlns:a16="http://schemas.microsoft.com/office/drawing/2014/main" id="{D584EB81-8C1E-41E9-9452-3C8471C013CF}"/>
               </a:ext>
             </a:extLst>
           </p:cNvPr>
@@ -5290,69 +7986,41 @@
             <p:ph idx="1"/>
           </p:nvPr>
         </p:nvSpPr>
-        <p:spPr>
-          <a:xfrm>
-            <a:off x="487679" y="964115"/>
-            <a:ext cx="11485245" cy="4525963"/>
-          </a:xfrm>
-        </p:spPr>
+        <p:spPr/>
         <p:txBody>
           <a:bodyPr>
             <a:normAutofit/>
           </a:bodyPr>
           <a:lstStyle/>
           <a:p>
+            <a:pPr marL="609585" indent="-609585">
+              <a:buFont typeface="Arial" panose="020B0604020202020204" pitchFamily="34" charset="0"/>
+              <a:buChar char="•"/>
+            </a:pPr>
             <a:r>
               <a:rPr lang="en-US" dirty="0"/>
-              <a:t>Need to get up to speed quickly on C++.  Three main approaches</a:t>
-            </a:r>
-          </a:p>
-          <a:p>
-            <a:pPr lvl="1"/>
-            <a:r>
-              <a:rPr lang="en-US" b="1" dirty="0"/>
-              <a:t>Reading.</a:t>
-            </a:r>
+              <a:t>I cannot make waitlist guarantees at this time</a:t>
+            </a:r>
+          </a:p>
+          <a:p>
+            <a:pPr marL="609585" indent="-609585">
+              <a:buFont typeface="Arial" panose="020B0604020202020204" pitchFamily="34" charset="0"/>
+              <a:buChar char="•"/>
+            </a:pPr>
             <a:r>
               <a:rPr lang="en-US" dirty="0"/>
-              <a:t>  </a:t>
-            </a:r>
-            <a:r>
-              <a:rPr lang="en-US" dirty="0">
-                <a:hlinkClick r:id="rId3"/>
-              </a:rPr>
-              <a:t>Links on website </a:t>
-            </a:r>
+              <a:t>To improve your chances of getting into the class (though not a guarantee), stay in the class and complete P0.</a:t>
+            </a:r>
+          </a:p>
+          <a:p>
+            <a:pPr marL="609585" indent="-609585">
+              <a:buFont typeface="Arial" panose="020B0604020202020204" pitchFamily="34" charset="0"/>
+              <a:buChar char="•"/>
+            </a:pPr>
             <a:r>
               <a:rPr lang="en-US" dirty="0"/>
-              <a:t>to online tutorials, examples, books</a:t>
-            </a:r>
-          </a:p>
-          <a:p>
-            <a:pPr lvl="1"/>
-            <a:r>
-              <a:rPr lang="en-US" b="1" dirty="0"/>
-              <a:t>Recitation.</a:t>
-            </a:r>
-            <a:r>
-              <a:rPr lang="en-US" dirty="0"/>
-              <a:t>  Instructor-led sessions to go through C++ features, examples, pitfalls.  For students coming from Java / C.</a:t>
-            </a:r>
-          </a:p>
-          <a:p>
-            <a:pPr lvl="1"/>
-            <a:r>
-              <a:rPr lang="en-US" b="1" dirty="0"/>
-              <a:t>Writing. </a:t>
-            </a:r>
-            <a:r>
-              <a:rPr lang="en-US" dirty="0"/>
-              <a:t>Project 0 will give a tour of C++ and the dev environment for the semester.  Future projects will be harder.</a:t>
-            </a:r>
-            <a:br>
-              <a:rPr lang="en-US" dirty="0"/>
-            </a:br>
-            <a:endParaRPr lang="en-US" b="1" dirty="0"/>
+              <a:t>Waitlist decisions will be made according to some fair metric, so please do not email us specific requests.  We will not return these emails.</a:t>
+            </a:r>
           </a:p>
         </p:txBody>
       </p:sp>
@@ -5487,7 +8155,284 @@
             <a:fld id="{97DD1AB5-42BA-4E8A-BFEE-435884E16AAB}" type="slidenum">
               <a:rPr lang="en-US" sz="1600"/>
               <a:pPr/>
-              <a:t>19</a:t>
+              <a:t>2</a:t>
+            </a:fld>
+            <a:endParaRPr lang="en-US" sz="1600" dirty="0"/>
+          </a:p>
+        </p:txBody>
+      </p:sp>
+    </p:spTree>
+    <p:extLst>
+      <p:ext uri="{BB962C8B-B14F-4D97-AF65-F5344CB8AC3E}">
+        <p14:creationId xmlns:p14="http://schemas.microsoft.com/office/powerpoint/2010/main" val="2681866698"/>
+      </p:ext>
+    </p:extLst>
+  </p:cSld>
+  <p:clrMapOvr>
+    <a:masterClrMapping/>
+  </p:clrMapOvr>
+</p:sld>
+</file>
+
+<file path=ppt/slides/slide20.xml><?xml version="1.0" encoding="utf-8"?>
+<p:sld xmlns:a="http://schemas.openxmlformats.org/drawingml/2006/main" xmlns:r="http://schemas.openxmlformats.org/officeDocument/2006/relationships" xmlns:p="http://schemas.openxmlformats.org/presentationml/2006/main">
+  <p:cSld>
+    <p:spTree>
+      <p:nvGrpSpPr>
+        <p:cNvPr id="1" name=""/>
+        <p:cNvGrpSpPr/>
+        <p:nvPr/>
+      </p:nvGrpSpPr>
+      <p:grpSpPr>
+        <a:xfrm>
+          <a:off x="0" y="0"/>
+          <a:ext cx="0" cy="0"/>
+          <a:chOff x="0" y="0"/>
+          <a:chExt cx="0" cy="0"/>
+        </a:xfrm>
+      </p:grpSpPr>
+      <p:sp>
+        <p:nvSpPr>
+          <p:cNvPr id="3" name="Title 2">
+            <a:extLst>
+              <a:ext uri="{FF2B5EF4-FFF2-40B4-BE49-F238E27FC236}">
+                <a16:creationId xmlns:a16="http://schemas.microsoft.com/office/drawing/2014/main" id="{97833A1C-127C-474F-BA57-5C49700D9788}"/>
+              </a:ext>
+            </a:extLst>
+          </p:cNvPr>
+          <p:cNvSpPr>
+            <a:spLocks noGrp="1"/>
+          </p:cNvSpPr>
+          <p:nvPr>
+            <p:ph type="title"/>
+          </p:nvPr>
+        </p:nvSpPr>
+        <p:spPr/>
+        <p:txBody>
+          <a:bodyPr/>
+          <a:lstStyle/>
+          <a:p>
+            <a:r>
+              <a:rPr lang="en-US" dirty="0"/>
+              <a:t>C++ Bootcamp</a:t>
+            </a:r>
+          </a:p>
+        </p:txBody>
+      </p:sp>
+      <p:sp>
+        <p:nvSpPr>
+          <p:cNvPr id="4" name="Content Placeholder 3">
+            <a:extLst>
+              <a:ext uri="{FF2B5EF4-FFF2-40B4-BE49-F238E27FC236}">
+                <a16:creationId xmlns:a16="http://schemas.microsoft.com/office/drawing/2014/main" id="{AC7F89A2-23A9-1BA5-6DA9-BA0BDF8659ED}"/>
+              </a:ext>
+            </a:extLst>
+          </p:cNvPr>
+          <p:cNvSpPr>
+            <a:spLocks noGrp="1"/>
+          </p:cNvSpPr>
+          <p:nvPr>
+            <p:ph idx="1"/>
+          </p:nvPr>
+        </p:nvSpPr>
+        <p:spPr>
+          <a:xfrm>
+            <a:off x="487679" y="964115"/>
+            <a:ext cx="11485245" cy="4525963"/>
+          </a:xfrm>
+        </p:spPr>
+        <p:txBody>
+          <a:bodyPr>
+            <a:normAutofit/>
+          </a:bodyPr>
+          <a:lstStyle/>
+          <a:p>
+            <a:r>
+              <a:rPr lang="en-US" dirty="0"/>
+              <a:t>Need to get up to speed quickly on C++.  Three main approaches</a:t>
+            </a:r>
+          </a:p>
+          <a:p>
+            <a:pPr lvl="1"/>
+            <a:r>
+              <a:rPr lang="en-US" b="1" dirty="0"/>
+              <a:t>Reading.</a:t>
+            </a:r>
+            <a:r>
+              <a:rPr lang="en-US" dirty="0"/>
+              <a:t>  </a:t>
+            </a:r>
+            <a:r>
+              <a:rPr lang="en-US" dirty="0">
+                <a:hlinkClick r:id="rId3"/>
+              </a:rPr>
+              <a:t>Links on website </a:t>
+            </a:r>
+            <a:r>
+              <a:rPr lang="en-US" dirty="0"/>
+              <a:t>to online tutorials, examples, books</a:t>
+            </a:r>
+          </a:p>
+          <a:p>
+            <a:pPr lvl="1"/>
+            <a:r>
+              <a:rPr lang="en-US" b="1" dirty="0"/>
+              <a:t>Recitation.</a:t>
+            </a:r>
+            <a:r>
+              <a:rPr lang="en-US" dirty="0"/>
+              <a:t>  Instructor-led sessions to go through C++ features, examples, pitfalls.  For students coming from Java / C.</a:t>
+            </a:r>
+          </a:p>
+          <a:p>
+            <a:pPr lvl="1"/>
+            <a:r>
+              <a:rPr lang="en-US" b="1" dirty="0"/>
+              <a:t>Writing. </a:t>
+            </a:r>
+            <a:r>
+              <a:rPr lang="en-US" dirty="0"/>
+              <a:t>Project 0 will give a tour of C++ and the dev environment for the semester.  Future projects will be harder.</a:t>
+            </a:r>
+            <a:br>
+              <a:rPr lang="en-US" dirty="0"/>
+            </a:br>
+            <a:endParaRPr lang="en-US" b="1" dirty="0"/>
+          </a:p>
+        </p:txBody>
+      </p:sp>
+      <p:sp>
+        <p:nvSpPr>
+          <p:cNvPr id="5" name="Slide Number Placeholder 3">
+            <a:extLst>
+              <a:ext uri="{FF2B5EF4-FFF2-40B4-BE49-F238E27FC236}">
+                <a16:creationId xmlns:a16="http://schemas.microsoft.com/office/drawing/2014/main" id="{75C15DC4-A771-6939-068A-4C3D2F6E2469}"/>
+              </a:ext>
+            </a:extLst>
+          </p:cNvPr>
+          <p:cNvSpPr txBox="1">
+            <a:spLocks/>
+          </p:cNvSpPr>
+          <p:nvPr/>
+        </p:nvSpPr>
+        <p:spPr>
+          <a:xfrm>
+            <a:off x="11705168" y="0"/>
+            <a:ext cx="486833" cy="366184"/>
+          </a:xfrm>
+          <a:prstGeom prst="rect">
+            <a:avLst/>
+          </a:prstGeom>
+          <a:solidFill>
+            <a:schemeClr val="bg1">
+              <a:lumMod val="50000"/>
+            </a:schemeClr>
+          </a:solidFill>
+        </p:spPr>
+        <p:txBody>
+          <a:bodyPr vert="horz" lIns="0" tIns="60960" rIns="60960" bIns="60960" rtlCol="0" anchor="ctr"/>
+          <a:lstStyle>
+            <a:defPPr>
+              <a:defRPr lang="en-US"/>
+            </a:defPPr>
+            <a:lvl1pPr marL="0" algn="r" defTabSz="914400" rtl="0" eaLnBrk="1" latinLnBrk="0" hangingPunct="1">
+              <a:defRPr sz="1200" kern="1200">
+                <a:solidFill>
+                  <a:schemeClr val="bg1">
+                    <a:lumMod val="95000"/>
+                  </a:schemeClr>
+                </a:solidFill>
+                <a:latin typeface="Consolas" panose="020B0609020204030204" pitchFamily="49" charset="0"/>
+                <a:ea typeface="+mn-ea"/>
+                <a:cs typeface="+mn-cs"/>
+              </a:defRPr>
+            </a:lvl1pPr>
+            <a:lvl2pPr marL="457200" algn="l" defTabSz="914400" rtl="0" eaLnBrk="1" latinLnBrk="0" hangingPunct="1">
+              <a:defRPr sz="1800" kern="1200">
+                <a:solidFill>
+                  <a:schemeClr val="tx1"/>
+                </a:solidFill>
+                <a:latin typeface="+mn-lt"/>
+                <a:ea typeface="+mn-ea"/>
+                <a:cs typeface="+mn-cs"/>
+              </a:defRPr>
+            </a:lvl2pPr>
+            <a:lvl3pPr marL="914400" algn="l" defTabSz="914400" rtl="0" eaLnBrk="1" latinLnBrk="0" hangingPunct="1">
+              <a:defRPr sz="1800" kern="1200">
+                <a:solidFill>
+                  <a:schemeClr val="tx1"/>
+                </a:solidFill>
+                <a:latin typeface="+mn-lt"/>
+                <a:ea typeface="+mn-ea"/>
+                <a:cs typeface="+mn-cs"/>
+              </a:defRPr>
+            </a:lvl3pPr>
+            <a:lvl4pPr marL="1371600" algn="l" defTabSz="914400" rtl="0" eaLnBrk="1" latinLnBrk="0" hangingPunct="1">
+              <a:defRPr sz="1800" kern="1200">
+                <a:solidFill>
+                  <a:schemeClr val="tx1"/>
+                </a:solidFill>
+                <a:latin typeface="+mn-lt"/>
+                <a:ea typeface="+mn-ea"/>
+                <a:cs typeface="+mn-cs"/>
+              </a:defRPr>
+            </a:lvl4pPr>
+            <a:lvl5pPr marL="1828800" algn="l" defTabSz="914400" rtl="0" eaLnBrk="1" latinLnBrk="0" hangingPunct="1">
+              <a:defRPr sz="1800" kern="1200">
+                <a:solidFill>
+                  <a:schemeClr val="tx1"/>
+                </a:solidFill>
+                <a:latin typeface="+mn-lt"/>
+                <a:ea typeface="+mn-ea"/>
+                <a:cs typeface="+mn-cs"/>
+              </a:defRPr>
+            </a:lvl5pPr>
+            <a:lvl6pPr marL="2286000" algn="l" defTabSz="914400" rtl="0" eaLnBrk="1" latinLnBrk="0" hangingPunct="1">
+              <a:defRPr sz="1800" kern="1200">
+                <a:solidFill>
+                  <a:schemeClr val="tx1"/>
+                </a:solidFill>
+                <a:latin typeface="+mn-lt"/>
+                <a:ea typeface="+mn-ea"/>
+                <a:cs typeface="+mn-cs"/>
+              </a:defRPr>
+            </a:lvl6pPr>
+            <a:lvl7pPr marL="2743200" algn="l" defTabSz="914400" rtl="0" eaLnBrk="1" latinLnBrk="0" hangingPunct="1">
+              <a:defRPr sz="1800" kern="1200">
+                <a:solidFill>
+                  <a:schemeClr val="tx1"/>
+                </a:solidFill>
+                <a:latin typeface="+mn-lt"/>
+                <a:ea typeface="+mn-ea"/>
+                <a:cs typeface="+mn-cs"/>
+              </a:defRPr>
+            </a:lvl7pPr>
+            <a:lvl8pPr marL="3200400" algn="l" defTabSz="914400" rtl="0" eaLnBrk="1" latinLnBrk="0" hangingPunct="1">
+              <a:defRPr sz="1800" kern="1200">
+                <a:solidFill>
+                  <a:schemeClr val="tx1"/>
+                </a:solidFill>
+                <a:latin typeface="+mn-lt"/>
+                <a:ea typeface="+mn-ea"/>
+                <a:cs typeface="+mn-cs"/>
+              </a:defRPr>
+            </a:lvl8pPr>
+            <a:lvl9pPr marL="3657600" algn="l" defTabSz="914400" rtl="0" eaLnBrk="1" latinLnBrk="0" hangingPunct="1">
+              <a:defRPr sz="1800" kern="1200">
+                <a:solidFill>
+                  <a:schemeClr val="tx1"/>
+                </a:solidFill>
+                <a:latin typeface="+mn-lt"/>
+                <a:ea typeface="+mn-ea"/>
+                <a:cs typeface="+mn-cs"/>
+              </a:defRPr>
+            </a:lvl9pPr>
+          </a:lstStyle>
+          <a:p>
+            <a:fld id="{97DD1AB5-42BA-4E8A-BFEE-435884E16AAB}" type="slidenum">
+              <a:rPr lang="en-US" sz="1600"/>
+              <a:pPr/>
+              <a:t>20</a:t>
             </a:fld>
             <a:endParaRPr lang="en-US" sz="1600" dirty="0"/>
           </a:p>
@@ -5831,256 +8776,7 @@
 </p:sld>
 </file>
 
-<file path=ppt/slides/slide2.xml><?xml version="1.0" encoding="utf-8"?>
-<p:sld xmlns:a="http://schemas.openxmlformats.org/drawingml/2006/main" xmlns:r="http://schemas.openxmlformats.org/officeDocument/2006/relationships" xmlns:p="http://schemas.openxmlformats.org/presentationml/2006/main" show="0">
-  <p:cSld>
-    <p:spTree>
-      <p:nvGrpSpPr>
-        <p:cNvPr id="1" name=""/>
-        <p:cNvGrpSpPr/>
-        <p:nvPr/>
-      </p:nvGrpSpPr>
-      <p:grpSpPr>
-        <a:xfrm>
-          <a:off x="0" y="0"/>
-          <a:ext cx="0" cy="0"/>
-          <a:chOff x="0" y="0"/>
-          <a:chExt cx="0" cy="0"/>
-        </a:xfrm>
-      </p:grpSpPr>
-      <p:sp>
-        <p:nvSpPr>
-          <p:cNvPr id="3" name="Title 2">
-            <a:extLst>
-              <a:ext uri="{FF2B5EF4-FFF2-40B4-BE49-F238E27FC236}">
-                <a16:creationId xmlns:a16="http://schemas.microsoft.com/office/drawing/2014/main" id="{97833A1C-127C-474F-BA57-5C49700D9788}"/>
-              </a:ext>
-            </a:extLst>
-          </p:cNvPr>
-          <p:cNvSpPr>
-            <a:spLocks noGrp="1"/>
-          </p:cNvSpPr>
-          <p:nvPr>
-            <p:ph type="title"/>
-          </p:nvPr>
-        </p:nvSpPr>
-        <p:spPr/>
-        <p:txBody>
-          <a:bodyPr/>
-          <a:lstStyle/>
-          <a:p>
-            <a:r>
-              <a:rPr lang="en-US" dirty="0"/>
-              <a:t>Wait List</a:t>
-            </a:r>
-          </a:p>
-        </p:txBody>
-      </p:sp>
-      <p:sp>
-        <p:nvSpPr>
-          <p:cNvPr id="4" name="Content Placeholder 3">
-            <a:extLst>
-              <a:ext uri="{FF2B5EF4-FFF2-40B4-BE49-F238E27FC236}">
-                <a16:creationId xmlns:a16="http://schemas.microsoft.com/office/drawing/2014/main" id="{D584EB81-8C1E-41E9-9452-3C8471C013CF}"/>
-              </a:ext>
-            </a:extLst>
-          </p:cNvPr>
-          <p:cNvSpPr>
-            <a:spLocks noGrp="1"/>
-          </p:cNvSpPr>
-          <p:nvPr>
-            <p:ph idx="1"/>
-          </p:nvPr>
-        </p:nvSpPr>
-        <p:spPr/>
-        <p:txBody>
-          <a:bodyPr>
-            <a:normAutofit/>
-          </a:bodyPr>
-          <a:lstStyle/>
-          <a:p>
-            <a:pPr marL="609585" indent="-609585">
-              <a:buFont typeface="Arial" panose="020B0604020202020204" pitchFamily="34" charset="0"/>
-              <a:buChar char="•"/>
-            </a:pPr>
-            <a:r>
-              <a:rPr lang="en-US" dirty="0"/>
-              <a:t>I cannot make waitlist guarantees at this time</a:t>
-            </a:r>
-          </a:p>
-          <a:p>
-            <a:pPr marL="609585" indent="-609585">
-              <a:buFont typeface="Arial" panose="020B0604020202020204" pitchFamily="34" charset="0"/>
-              <a:buChar char="•"/>
-            </a:pPr>
-            <a:r>
-              <a:rPr lang="en-US" dirty="0"/>
-              <a:t>To improve your chances of getting into the class (though not a guarantee), stay in the class and complete P0.</a:t>
-            </a:r>
-          </a:p>
-          <a:p>
-            <a:pPr marL="609585" indent="-609585">
-              <a:buFont typeface="Arial" panose="020B0604020202020204" pitchFamily="34" charset="0"/>
-              <a:buChar char="•"/>
-            </a:pPr>
-            <a:r>
-              <a:rPr lang="en-US" dirty="0"/>
-              <a:t>Waitlist decisions will be made according to some fair metric, so please do not email us specific requests.  We will not return these emails.</a:t>
-            </a:r>
-          </a:p>
-        </p:txBody>
-      </p:sp>
-      <p:sp>
-        <p:nvSpPr>
-          <p:cNvPr id="5" name="Slide Number Placeholder 3">
-            <a:extLst>
-              <a:ext uri="{FF2B5EF4-FFF2-40B4-BE49-F238E27FC236}">
-                <a16:creationId xmlns:a16="http://schemas.microsoft.com/office/drawing/2014/main" id="{75C15DC4-A771-6939-068A-4C3D2F6E2469}"/>
-              </a:ext>
-            </a:extLst>
-          </p:cNvPr>
-          <p:cNvSpPr txBox="1">
-            <a:spLocks/>
-          </p:cNvSpPr>
-          <p:nvPr/>
-        </p:nvSpPr>
-        <p:spPr>
-          <a:xfrm>
-            <a:off x="11705168" y="0"/>
-            <a:ext cx="486833" cy="366184"/>
-          </a:xfrm>
-          <a:prstGeom prst="rect">
-            <a:avLst/>
-          </a:prstGeom>
-          <a:solidFill>
-            <a:schemeClr val="bg1">
-              <a:lumMod val="50000"/>
-            </a:schemeClr>
-          </a:solidFill>
-        </p:spPr>
-        <p:txBody>
-          <a:bodyPr vert="horz" lIns="0" tIns="60960" rIns="60960" bIns="60960" rtlCol="0" anchor="ctr"/>
-          <a:lstStyle>
-            <a:defPPr>
-              <a:defRPr lang="en-US"/>
-            </a:defPPr>
-            <a:lvl1pPr marL="0" algn="r" defTabSz="914400" rtl="0" eaLnBrk="1" latinLnBrk="0" hangingPunct="1">
-              <a:defRPr sz="1200" kern="1200">
-                <a:solidFill>
-                  <a:schemeClr val="bg1">
-                    <a:lumMod val="95000"/>
-                  </a:schemeClr>
-                </a:solidFill>
-                <a:latin typeface="Consolas" panose="020B0609020204030204" pitchFamily="49" charset="0"/>
-                <a:ea typeface="+mn-ea"/>
-                <a:cs typeface="+mn-cs"/>
-              </a:defRPr>
-            </a:lvl1pPr>
-            <a:lvl2pPr marL="457200" algn="l" defTabSz="914400" rtl="0" eaLnBrk="1" latinLnBrk="0" hangingPunct="1">
-              <a:defRPr sz="1800" kern="1200">
-                <a:solidFill>
-                  <a:schemeClr val="tx1"/>
-                </a:solidFill>
-                <a:latin typeface="+mn-lt"/>
-                <a:ea typeface="+mn-ea"/>
-                <a:cs typeface="+mn-cs"/>
-              </a:defRPr>
-            </a:lvl2pPr>
-            <a:lvl3pPr marL="914400" algn="l" defTabSz="914400" rtl="0" eaLnBrk="1" latinLnBrk="0" hangingPunct="1">
-              <a:defRPr sz="1800" kern="1200">
-                <a:solidFill>
-                  <a:schemeClr val="tx1"/>
-                </a:solidFill>
-                <a:latin typeface="+mn-lt"/>
-                <a:ea typeface="+mn-ea"/>
-                <a:cs typeface="+mn-cs"/>
-              </a:defRPr>
-            </a:lvl3pPr>
-            <a:lvl4pPr marL="1371600" algn="l" defTabSz="914400" rtl="0" eaLnBrk="1" latinLnBrk="0" hangingPunct="1">
-              <a:defRPr sz="1800" kern="1200">
-                <a:solidFill>
-                  <a:schemeClr val="tx1"/>
-                </a:solidFill>
-                <a:latin typeface="+mn-lt"/>
-                <a:ea typeface="+mn-ea"/>
-                <a:cs typeface="+mn-cs"/>
-              </a:defRPr>
-            </a:lvl4pPr>
-            <a:lvl5pPr marL="1828800" algn="l" defTabSz="914400" rtl="0" eaLnBrk="1" latinLnBrk="0" hangingPunct="1">
-              <a:defRPr sz="1800" kern="1200">
-                <a:solidFill>
-                  <a:schemeClr val="tx1"/>
-                </a:solidFill>
-                <a:latin typeface="+mn-lt"/>
-                <a:ea typeface="+mn-ea"/>
-                <a:cs typeface="+mn-cs"/>
-              </a:defRPr>
-            </a:lvl5pPr>
-            <a:lvl6pPr marL="2286000" algn="l" defTabSz="914400" rtl="0" eaLnBrk="1" latinLnBrk="0" hangingPunct="1">
-              <a:defRPr sz="1800" kern="1200">
-                <a:solidFill>
-                  <a:schemeClr val="tx1"/>
-                </a:solidFill>
-                <a:latin typeface="+mn-lt"/>
-                <a:ea typeface="+mn-ea"/>
-                <a:cs typeface="+mn-cs"/>
-              </a:defRPr>
-            </a:lvl6pPr>
-            <a:lvl7pPr marL="2743200" algn="l" defTabSz="914400" rtl="0" eaLnBrk="1" latinLnBrk="0" hangingPunct="1">
-              <a:defRPr sz="1800" kern="1200">
-                <a:solidFill>
-                  <a:schemeClr val="tx1"/>
-                </a:solidFill>
-                <a:latin typeface="+mn-lt"/>
-                <a:ea typeface="+mn-ea"/>
-                <a:cs typeface="+mn-cs"/>
-              </a:defRPr>
-            </a:lvl7pPr>
-            <a:lvl8pPr marL="3200400" algn="l" defTabSz="914400" rtl="0" eaLnBrk="1" latinLnBrk="0" hangingPunct="1">
-              <a:defRPr sz="1800" kern="1200">
-                <a:solidFill>
-                  <a:schemeClr val="tx1"/>
-                </a:solidFill>
-                <a:latin typeface="+mn-lt"/>
-                <a:ea typeface="+mn-ea"/>
-                <a:cs typeface="+mn-cs"/>
-              </a:defRPr>
-            </a:lvl8pPr>
-            <a:lvl9pPr marL="3657600" algn="l" defTabSz="914400" rtl="0" eaLnBrk="1" latinLnBrk="0" hangingPunct="1">
-              <a:defRPr sz="1800" kern="1200">
-                <a:solidFill>
-                  <a:schemeClr val="tx1"/>
-                </a:solidFill>
-                <a:latin typeface="+mn-lt"/>
-                <a:ea typeface="+mn-ea"/>
-                <a:cs typeface="+mn-cs"/>
-              </a:defRPr>
-            </a:lvl9pPr>
-          </a:lstStyle>
-          <a:p>
-            <a:fld id="{97DD1AB5-42BA-4E8A-BFEE-435884E16AAB}" type="slidenum">
-              <a:rPr lang="en-US" sz="1600"/>
-              <a:pPr/>
-              <a:t>2</a:t>
-            </a:fld>
-            <a:endParaRPr lang="en-US" sz="1600" dirty="0"/>
-          </a:p>
-        </p:txBody>
-      </p:sp>
-    </p:spTree>
-    <p:extLst>
-      <p:ext uri="{BB962C8B-B14F-4D97-AF65-F5344CB8AC3E}">
-        <p14:creationId xmlns:p14="http://schemas.microsoft.com/office/powerpoint/2010/main" val="2681866698"/>
-      </p:ext>
-    </p:extLst>
-  </p:cSld>
-  <p:clrMapOvr>
-    <a:masterClrMapping/>
-  </p:clrMapOvr>
-</p:sld>
-</file>
-
-<file path=ppt/slides/slide20.xml><?xml version="1.0" encoding="utf-8"?>
+<file path=ppt/slides/slide21.xml><?xml version="1.0" encoding="utf-8"?>
 <p:sld xmlns:a="http://schemas.openxmlformats.org/drawingml/2006/main" xmlns:r="http://schemas.openxmlformats.org/officeDocument/2006/relationships" xmlns:p="http://schemas.openxmlformats.org/presentationml/2006/main">
   <p:cSld>
     <p:spTree>
@@ -6357,7 +9053,7 @@
             <a:fld id="{97DD1AB5-42BA-4E8A-BFEE-435884E16AAB}" type="slidenum">
               <a:rPr lang="en-US" sz="1600"/>
               <a:pPr/>
-              <a:t>20</a:t>
+              <a:t>21</a:t>
             </a:fld>
             <a:endParaRPr lang="en-US" sz="1600" dirty="0"/>
           </a:p>
@@ -6415,7 +9111,7 @@
 </p:sld>
 </file>
 
-<file path=ppt/slides/slide21.xml><?xml version="1.0" encoding="utf-8"?>
+<file path=ppt/slides/slide22.xml><?xml version="1.0" encoding="utf-8"?>
 <p:sld xmlns:a="http://schemas.openxmlformats.org/drawingml/2006/main" xmlns:r="http://schemas.openxmlformats.org/officeDocument/2006/relationships" xmlns:p="http://schemas.openxmlformats.org/presentationml/2006/main">
   <p:cSld>
     <p:spTree>
@@ -6712,7 +9408,7 @@
             <a:fld id="{97DD1AB5-42BA-4E8A-BFEE-435884E16AAB}" type="slidenum">
               <a:rPr lang="en-US" sz="1600"/>
               <a:pPr/>
-              <a:t>21</a:t>
+              <a:t>22</a:t>
             </a:fld>
             <a:endParaRPr lang="en-US" sz="1600" dirty="0"/>
           </a:p>
@@ -6955,7 +9651,7 @@
 </p:sld>
 </file>
 
-<file path=ppt/slides/slide22.xml><?xml version="1.0" encoding="utf-8"?>
+<file path=ppt/slides/slide23.xml><?xml version="1.0" encoding="utf-8"?>
 <p:sld xmlns:a="http://schemas.openxmlformats.org/drawingml/2006/main" xmlns:r="http://schemas.openxmlformats.org/officeDocument/2006/relationships" xmlns:p="http://schemas.openxmlformats.org/presentationml/2006/main">
   <p:cSld>
     <p:spTree>
@@ -7244,7 +9940,7 @@
 </p:sld>
 </file>
 
-<file path=ppt/slides/slide23.xml><?xml version="1.0" encoding="utf-8"?>
+<file path=ppt/slides/slide24.xml><?xml version="1.0" encoding="utf-8"?>
 <p:sld xmlns:a="http://schemas.openxmlformats.org/drawingml/2006/main" xmlns:r="http://schemas.openxmlformats.org/officeDocument/2006/relationships" xmlns:p="http://schemas.openxmlformats.org/presentationml/2006/main">
   <p:cSld>
     <p:spTree>
@@ -7502,7 +10198,7 @@
             <a:fld id="{97DD1AB5-42BA-4E8A-BFEE-435884E16AAB}" type="slidenum">
               <a:rPr lang="en-US" sz="1600"/>
               <a:pPr/>
-              <a:t>23</a:t>
+              <a:t>24</a:t>
             </a:fld>
             <a:endParaRPr lang="en-US" sz="1600" dirty="0"/>
           </a:p>
@@ -7737,7 +10433,7 @@
 </p:sld>
 </file>
 
-<file path=ppt/slides/slide24.xml><?xml version="1.0" encoding="utf-8"?>
+<file path=ppt/slides/slide25.xml><?xml version="1.0" encoding="utf-8"?>
 <p:sld xmlns:a="http://schemas.openxmlformats.org/drawingml/2006/main" xmlns:r="http://schemas.openxmlformats.org/officeDocument/2006/relationships" xmlns:p="http://schemas.openxmlformats.org/presentationml/2006/main">
   <p:cSld>
     <p:spTree>
@@ -7951,7 +10647,7 @@
             <a:fld id="{97DD1AB5-42BA-4E8A-BFEE-435884E16AAB}" type="slidenum">
               <a:rPr lang="en-US" sz="1600"/>
               <a:pPr/>
-              <a:t>24</a:t>
+              <a:t>25</a:t>
             </a:fld>
             <a:endParaRPr lang="en-US" sz="1600" dirty="0"/>
           </a:p>
@@ -8728,7 +11424,546 @@
 </p:sld>
 </file>
 
-<file path=ppt/slides/slide25.xml><?xml version="1.0" encoding="utf-8"?>
+<file path=ppt/slides/slide26.xml><?xml version="1.0" encoding="utf-8"?>
+<p:sld xmlns:a="http://schemas.openxmlformats.org/drawingml/2006/main" xmlns:r="http://schemas.openxmlformats.org/officeDocument/2006/relationships" xmlns:p="http://schemas.openxmlformats.org/presentationml/2006/main">
+  <p:cSld>
+    <p:spTree>
+      <p:nvGrpSpPr>
+        <p:cNvPr id="1" name="">
+          <a:extLst>
+            <a:ext uri="{FF2B5EF4-FFF2-40B4-BE49-F238E27FC236}">
+              <a16:creationId xmlns:a16="http://schemas.microsoft.com/office/drawing/2014/main" id="{9E4ED695-BB28-6CD6-5CF6-921B78A2C320}"/>
+            </a:ext>
+          </a:extLst>
+        </p:cNvPr>
+        <p:cNvGrpSpPr/>
+        <p:nvPr/>
+      </p:nvGrpSpPr>
+      <p:grpSpPr>
+        <a:xfrm>
+          <a:off x="0" y="0"/>
+          <a:ext cx="0" cy="0"/>
+          <a:chOff x="0" y="0"/>
+          <a:chExt cx="0" cy="0"/>
+        </a:xfrm>
+      </p:grpSpPr>
+      <p:sp>
+        <p:nvSpPr>
+          <p:cNvPr id="3" name="Title 2">
+            <a:extLst>
+              <a:ext uri="{FF2B5EF4-FFF2-40B4-BE49-F238E27FC236}">
+                <a16:creationId xmlns:a16="http://schemas.microsoft.com/office/drawing/2014/main" id="{14313CB3-B129-B048-7787-F64D1B2E8602}"/>
+              </a:ext>
+            </a:extLst>
+          </p:cNvPr>
+          <p:cNvSpPr>
+            <a:spLocks noGrp="1"/>
+          </p:cNvSpPr>
+          <p:nvPr>
+            <p:ph type="title"/>
+          </p:nvPr>
+        </p:nvSpPr>
+        <p:spPr/>
+        <p:txBody>
+          <a:bodyPr/>
+          <a:lstStyle/>
+          <a:p>
+            <a:r>
+              <a:rPr lang="en-US" dirty="0"/>
+              <a:t>Bootcamp 1: Week of 8/25</a:t>
+            </a:r>
+          </a:p>
+        </p:txBody>
+      </p:sp>
+      <p:sp>
+        <p:nvSpPr>
+          <p:cNvPr id="4" name="Content Placeholder 3">
+            <a:extLst>
+              <a:ext uri="{FF2B5EF4-FFF2-40B4-BE49-F238E27FC236}">
+                <a16:creationId xmlns:a16="http://schemas.microsoft.com/office/drawing/2014/main" id="{50663ED6-70D9-B8A0-354F-A350F9CEB530}"/>
+              </a:ext>
+            </a:extLst>
+          </p:cNvPr>
+          <p:cNvSpPr>
+            <a:spLocks noGrp="1"/>
+          </p:cNvSpPr>
+          <p:nvPr>
+            <p:ph idx="1"/>
+          </p:nvPr>
+        </p:nvSpPr>
+        <p:spPr>
+          <a:xfrm>
+            <a:off x="487679" y="964115"/>
+            <a:ext cx="11485245" cy="4525963"/>
+          </a:xfrm>
+        </p:spPr>
+        <p:txBody>
+          <a:bodyPr>
+            <a:normAutofit/>
+          </a:bodyPr>
+          <a:lstStyle/>
+          <a:p>
+            <a:pPr marL="0" indent="0">
+              <a:buNone/>
+            </a:pPr>
+            <a:br>
+              <a:rPr lang="en-US" dirty="0"/>
+            </a:br>
+            <a:endParaRPr lang="en-US" b="1" dirty="0"/>
+          </a:p>
+        </p:txBody>
+      </p:sp>
+      <p:sp>
+        <p:nvSpPr>
+          <p:cNvPr id="5" name="Slide Number Placeholder 3">
+            <a:extLst>
+              <a:ext uri="{FF2B5EF4-FFF2-40B4-BE49-F238E27FC236}">
+                <a16:creationId xmlns:a16="http://schemas.microsoft.com/office/drawing/2014/main" id="{667613F9-DF68-1C16-2944-6330C2659CC5}"/>
+              </a:ext>
+            </a:extLst>
+          </p:cNvPr>
+          <p:cNvSpPr txBox="1">
+            <a:spLocks/>
+          </p:cNvSpPr>
+          <p:nvPr/>
+        </p:nvSpPr>
+        <p:spPr>
+          <a:xfrm>
+            <a:off x="11705168" y="0"/>
+            <a:ext cx="486833" cy="366184"/>
+          </a:xfrm>
+          <a:prstGeom prst="rect">
+            <a:avLst/>
+          </a:prstGeom>
+          <a:solidFill>
+            <a:schemeClr val="bg1">
+              <a:lumMod val="50000"/>
+            </a:schemeClr>
+          </a:solidFill>
+        </p:spPr>
+        <p:txBody>
+          <a:bodyPr vert="horz" lIns="0" tIns="60960" rIns="60960" bIns="60960" rtlCol="0" anchor="ctr"/>
+          <a:lstStyle>
+            <a:defPPr>
+              <a:defRPr lang="en-US"/>
+            </a:defPPr>
+            <a:lvl1pPr marL="0" algn="r" defTabSz="914400" rtl="0" eaLnBrk="1" latinLnBrk="0" hangingPunct="1">
+              <a:defRPr sz="1200" kern="1200">
+                <a:solidFill>
+                  <a:schemeClr val="bg1">
+                    <a:lumMod val="95000"/>
+                  </a:schemeClr>
+                </a:solidFill>
+                <a:latin typeface="Consolas" panose="020B0609020204030204" pitchFamily="49" charset="0"/>
+                <a:ea typeface="+mn-ea"/>
+                <a:cs typeface="+mn-cs"/>
+              </a:defRPr>
+            </a:lvl1pPr>
+            <a:lvl2pPr marL="457200" algn="l" defTabSz="914400" rtl="0" eaLnBrk="1" latinLnBrk="0" hangingPunct="1">
+              <a:defRPr sz="1800" kern="1200">
+                <a:solidFill>
+                  <a:schemeClr val="tx1"/>
+                </a:solidFill>
+                <a:latin typeface="+mn-lt"/>
+                <a:ea typeface="+mn-ea"/>
+                <a:cs typeface="+mn-cs"/>
+              </a:defRPr>
+            </a:lvl2pPr>
+            <a:lvl3pPr marL="914400" algn="l" defTabSz="914400" rtl="0" eaLnBrk="1" latinLnBrk="0" hangingPunct="1">
+              <a:defRPr sz="1800" kern="1200">
+                <a:solidFill>
+                  <a:schemeClr val="tx1"/>
+                </a:solidFill>
+                <a:latin typeface="+mn-lt"/>
+                <a:ea typeface="+mn-ea"/>
+                <a:cs typeface="+mn-cs"/>
+              </a:defRPr>
+            </a:lvl3pPr>
+            <a:lvl4pPr marL="1371600" algn="l" defTabSz="914400" rtl="0" eaLnBrk="1" latinLnBrk="0" hangingPunct="1">
+              <a:defRPr sz="1800" kern="1200">
+                <a:solidFill>
+                  <a:schemeClr val="tx1"/>
+                </a:solidFill>
+                <a:latin typeface="+mn-lt"/>
+                <a:ea typeface="+mn-ea"/>
+                <a:cs typeface="+mn-cs"/>
+              </a:defRPr>
+            </a:lvl4pPr>
+            <a:lvl5pPr marL="1828800" algn="l" defTabSz="914400" rtl="0" eaLnBrk="1" latinLnBrk="0" hangingPunct="1">
+              <a:defRPr sz="1800" kern="1200">
+                <a:solidFill>
+                  <a:schemeClr val="tx1"/>
+                </a:solidFill>
+                <a:latin typeface="+mn-lt"/>
+                <a:ea typeface="+mn-ea"/>
+                <a:cs typeface="+mn-cs"/>
+              </a:defRPr>
+            </a:lvl5pPr>
+            <a:lvl6pPr marL="2286000" algn="l" defTabSz="914400" rtl="0" eaLnBrk="1" latinLnBrk="0" hangingPunct="1">
+              <a:defRPr sz="1800" kern="1200">
+                <a:solidFill>
+                  <a:schemeClr val="tx1"/>
+                </a:solidFill>
+                <a:latin typeface="+mn-lt"/>
+                <a:ea typeface="+mn-ea"/>
+                <a:cs typeface="+mn-cs"/>
+              </a:defRPr>
+            </a:lvl6pPr>
+            <a:lvl7pPr marL="2743200" algn="l" defTabSz="914400" rtl="0" eaLnBrk="1" latinLnBrk="0" hangingPunct="1">
+              <a:defRPr sz="1800" kern="1200">
+                <a:solidFill>
+                  <a:schemeClr val="tx1"/>
+                </a:solidFill>
+                <a:latin typeface="+mn-lt"/>
+                <a:ea typeface="+mn-ea"/>
+                <a:cs typeface="+mn-cs"/>
+              </a:defRPr>
+            </a:lvl7pPr>
+            <a:lvl8pPr marL="3200400" algn="l" defTabSz="914400" rtl="0" eaLnBrk="1" latinLnBrk="0" hangingPunct="1">
+              <a:defRPr sz="1800" kern="1200">
+                <a:solidFill>
+                  <a:schemeClr val="tx1"/>
+                </a:solidFill>
+                <a:latin typeface="+mn-lt"/>
+                <a:ea typeface="+mn-ea"/>
+                <a:cs typeface="+mn-cs"/>
+              </a:defRPr>
+            </a:lvl8pPr>
+            <a:lvl9pPr marL="3657600" algn="l" defTabSz="914400" rtl="0" eaLnBrk="1" latinLnBrk="0" hangingPunct="1">
+              <a:defRPr sz="1800" kern="1200">
+                <a:solidFill>
+                  <a:schemeClr val="tx1"/>
+                </a:solidFill>
+                <a:latin typeface="+mn-lt"/>
+                <a:ea typeface="+mn-ea"/>
+                <a:cs typeface="+mn-cs"/>
+              </a:defRPr>
+            </a:lvl9pPr>
+          </a:lstStyle>
+          <a:p>
+            <a:fld id="{97DD1AB5-42BA-4E8A-BFEE-435884E16AAB}" type="slidenum">
+              <a:rPr lang="en-US" sz="1600"/>
+              <a:pPr/>
+              <a:t>26</a:t>
+            </a:fld>
+            <a:endParaRPr lang="en-US" sz="1600" dirty="0"/>
+          </a:p>
+        </p:txBody>
+      </p:sp>
+      <p:sp>
+        <p:nvSpPr>
+          <p:cNvPr id="2" name="TextBox 1">
+            <a:extLst>
+              <a:ext uri="{FF2B5EF4-FFF2-40B4-BE49-F238E27FC236}">
+                <a16:creationId xmlns:a16="http://schemas.microsoft.com/office/drawing/2014/main" id="{DA5A3CFC-ACE3-F579-3432-FBAF97F113B5}"/>
+              </a:ext>
+            </a:extLst>
+          </p:cNvPr>
+          <p:cNvSpPr txBox="1"/>
+          <p:nvPr/>
+        </p:nvSpPr>
+        <p:spPr>
+          <a:xfrm>
+            <a:off x="2619695" y="891379"/>
+            <a:ext cx="6952609" cy="584775"/>
+          </a:xfrm>
+          <a:prstGeom prst="rect">
+            <a:avLst/>
+          </a:prstGeom>
+          <a:noFill/>
+        </p:spPr>
+        <p:txBody>
+          <a:bodyPr wrap="none" rtlCol="0">
+            <a:spAutoFit/>
+          </a:bodyPr>
+          <a:lstStyle/>
+          <a:p>
+            <a:r>
+              <a:rPr lang="en-US" sz="3200" dirty="0"/>
+              <a:t>Two identical 1 hour sessions (pick one):</a:t>
+            </a:r>
+          </a:p>
+        </p:txBody>
+      </p:sp>
+      <p:sp>
+        <p:nvSpPr>
+          <p:cNvPr id="7" name="TextBox 6">
+            <a:extLst>
+              <a:ext uri="{FF2B5EF4-FFF2-40B4-BE49-F238E27FC236}">
+                <a16:creationId xmlns:a16="http://schemas.microsoft.com/office/drawing/2014/main" id="{925EE9DA-5E58-254E-FC46-372BF2F128EC}"/>
+              </a:ext>
+            </a:extLst>
+          </p:cNvPr>
+          <p:cNvSpPr txBox="1"/>
+          <p:nvPr/>
+        </p:nvSpPr>
+        <p:spPr>
+          <a:xfrm>
+            <a:off x="2697203" y="1506944"/>
+            <a:ext cx="2558713" cy="954107"/>
+          </a:xfrm>
+          <a:prstGeom prst="rect">
+            <a:avLst/>
+          </a:prstGeom>
+          <a:noFill/>
+        </p:spPr>
+        <p:txBody>
+          <a:bodyPr wrap="none" rtlCol="0">
+            <a:spAutoFit/>
+          </a:bodyPr>
+          <a:lstStyle/>
+          <a:p>
+            <a:pPr algn="ctr"/>
+            <a:r>
+              <a:rPr lang="en-US" sz="2800" dirty="0"/>
+              <a:t>8/25 @ 6:30 pm</a:t>
+            </a:r>
+          </a:p>
+          <a:p>
+            <a:pPr algn="ctr"/>
+            <a:endParaRPr lang="en-US" sz="2800" dirty="0"/>
+          </a:p>
+        </p:txBody>
+      </p:sp>
+      <p:sp>
+        <p:nvSpPr>
+          <p:cNvPr id="8" name="TextBox 7">
+            <a:extLst>
+              <a:ext uri="{FF2B5EF4-FFF2-40B4-BE49-F238E27FC236}">
+                <a16:creationId xmlns:a16="http://schemas.microsoft.com/office/drawing/2014/main" id="{B1CC36DC-24FE-8EC6-49DE-11CD165E0DFA}"/>
+              </a:ext>
+            </a:extLst>
+          </p:cNvPr>
+          <p:cNvSpPr txBox="1"/>
+          <p:nvPr/>
+        </p:nvSpPr>
+        <p:spPr>
+          <a:xfrm>
+            <a:off x="7450178" y="1537497"/>
+            <a:ext cx="2558713" cy="954107"/>
+          </a:xfrm>
+          <a:prstGeom prst="rect">
+            <a:avLst/>
+          </a:prstGeom>
+          <a:noFill/>
+        </p:spPr>
+        <p:txBody>
+          <a:bodyPr wrap="none" rtlCol="0">
+            <a:spAutoFit/>
+          </a:bodyPr>
+          <a:lstStyle/>
+          <a:p>
+            <a:pPr algn="ctr"/>
+            <a:r>
+              <a:rPr lang="en-US" sz="2800" dirty="0"/>
+              <a:t>8/26 @ 6:30 pm</a:t>
+            </a:r>
+          </a:p>
+          <a:p>
+            <a:pPr algn="ctr"/>
+            <a:endParaRPr lang="en-US" sz="2800" dirty="0"/>
+          </a:p>
+        </p:txBody>
+      </p:sp>
+      <p:sp>
+        <p:nvSpPr>
+          <p:cNvPr id="13" name="TextBox 12">
+            <a:extLst>
+              <a:ext uri="{FF2B5EF4-FFF2-40B4-BE49-F238E27FC236}">
+                <a16:creationId xmlns:a16="http://schemas.microsoft.com/office/drawing/2014/main" id="{8DFF7ED5-6458-984B-D08B-8205A319ADD0}"/>
+              </a:ext>
+            </a:extLst>
+          </p:cNvPr>
+          <p:cNvSpPr txBox="1"/>
+          <p:nvPr/>
+        </p:nvSpPr>
+        <p:spPr>
+          <a:xfrm>
+            <a:off x="2297912" y="3064986"/>
+            <a:ext cx="7864777" cy="1569660"/>
+          </a:xfrm>
+          <a:prstGeom prst="rect">
+            <a:avLst/>
+          </a:prstGeom>
+          <a:noFill/>
+        </p:spPr>
+        <p:txBody>
+          <a:bodyPr wrap="square" rtlCol="0">
+            <a:spAutoFit/>
+          </a:bodyPr>
+          <a:lstStyle/>
+          <a:p>
+            <a:r>
+              <a:rPr lang="en-US" sz="3200" dirty="0"/>
+              <a:t>Your ticket in to bootcamp is an environment that builds </a:t>
+            </a:r>
+            <a:r>
+              <a:rPr lang="en-US" sz="3200" dirty="0" err="1"/>
+              <a:t>bustub</a:t>
+            </a:r>
+            <a:r>
+              <a:rPr lang="en-US" sz="3200" dirty="0"/>
+              <a:t>.  See the </a:t>
+            </a:r>
+            <a:r>
+              <a:rPr lang="en-US" sz="3200" dirty="0" err="1"/>
+              <a:t>github</a:t>
+            </a:r>
+            <a:r>
+              <a:rPr lang="en-US" sz="3200" dirty="0"/>
+              <a:t> README or course Documentation tab for instructions.</a:t>
+            </a:r>
+          </a:p>
+        </p:txBody>
+      </p:sp>
+    </p:spTree>
+    <p:extLst>
+      <p:ext uri="{BB962C8B-B14F-4D97-AF65-F5344CB8AC3E}">
+        <p14:creationId xmlns:p14="http://schemas.microsoft.com/office/powerpoint/2010/main" val="3139812024"/>
+      </p:ext>
+    </p:extLst>
+  </p:cSld>
+  <p:clrMapOvr>
+    <a:masterClrMapping/>
+  </p:clrMapOvr>
+  <p:timing>
+    <p:tnLst>
+      <p:par>
+        <p:cTn id="1" dur="indefinite" restart="never" nodeType="tmRoot">
+          <p:childTnLst>
+            <p:seq concurrent="1" nextAc="seek">
+              <p:cTn id="2" dur="indefinite" nodeType="mainSeq">
+                <p:childTnLst>
+                  <p:par>
+                    <p:cTn id="3" fill="hold">
+                      <p:stCondLst>
+                        <p:cond delay="indefinite"/>
+                      </p:stCondLst>
+                      <p:childTnLst>
+                        <p:par>
+                          <p:cTn id="4" fill="hold">
+                            <p:stCondLst>
+                              <p:cond delay="0"/>
+                            </p:stCondLst>
+                            <p:childTnLst>
+                              <p:par>
+                                <p:cTn id="5" presetID="1" presetClass="entr" presetSubtype="0" fill="hold" grpId="0" nodeType="clickEffect">
+                                  <p:stCondLst>
+                                    <p:cond delay="0"/>
+                                  </p:stCondLst>
+                                  <p:childTnLst>
+                                    <p:set>
+                                      <p:cBhvr>
+                                        <p:cTn id="6" dur="1" fill="hold">
+                                          <p:stCondLst>
+                                            <p:cond delay="0"/>
+                                          </p:stCondLst>
+                                        </p:cTn>
+                                        <p:tgtEl>
+                                          <p:spTgt spid="2"/>
+                                        </p:tgtEl>
+                                        <p:attrNameLst>
+                                          <p:attrName>style.visibility</p:attrName>
+                                        </p:attrNameLst>
+                                      </p:cBhvr>
+                                      <p:to>
+                                        <p:strVal val="visible"/>
+                                      </p:to>
+                                    </p:set>
+                                  </p:childTnLst>
+                                </p:cTn>
+                              </p:par>
+                              <p:par>
+                                <p:cTn id="7" presetID="1" presetClass="entr" presetSubtype="0" fill="hold" grpId="0" nodeType="withEffect">
+                                  <p:stCondLst>
+                                    <p:cond delay="0"/>
+                                  </p:stCondLst>
+                                  <p:childTnLst>
+                                    <p:set>
+                                      <p:cBhvr>
+                                        <p:cTn id="8" dur="1" fill="hold">
+                                          <p:stCondLst>
+                                            <p:cond delay="0"/>
+                                          </p:stCondLst>
+                                        </p:cTn>
+                                        <p:tgtEl>
+                                          <p:spTgt spid="7"/>
+                                        </p:tgtEl>
+                                        <p:attrNameLst>
+                                          <p:attrName>style.visibility</p:attrName>
+                                        </p:attrNameLst>
+                                      </p:cBhvr>
+                                      <p:to>
+                                        <p:strVal val="visible"/>
+                                      </p:to>
+                                    </p:set>
+                                  </p:childTnLst>
+                                </p:cTn>
+                              </p:par>
+                              <p:par>
+                                <p:cTn id="9" presetID="1" presetClass="entr" presetSubtype="0" fill="hold" grpId="0" nodeType="withEffect">
+                                  <p:stCondLst>
+                                    <p:cond delay="0"/>
+                                  </p:stCondLst>
+                                  <p:childTnLst>
+                                    <p:set>
+                                      <p:cBhvr>
+                                        <p:cTn id="10" dur="1" fill="hold">
+                                          <p:stCondLst>
+                                            <p:cond delay="0"/>
+                                          </p:stCondLst>
+                                        </p:cTn>
+                                        <p:tgtEl>
+                                          <p:spTgt spid="8"/>
+                                        </p:tgtEl>
+                                        <p:attrNameLst>
+                                          <p:attrName>style.visibility</p:attrName>
+                                        </p:attrNameLst>
+                                      </p:cBhvr>
+                                      <p:to>
+                                        <p:strVal val="visible"/>
+                                      </p:to>
+                                    </p:set>
+                                  </p:childTnLst>
+                                </p:cTn>
+                              </p:par>
+                            </p:childTnLst>
+                          </p:cTn>
+                        </p:par>
+                      </p:childTnLst>
+                    </p:cTn>
+                  </p:par>
+                </p:childTnLst>
+              </p:cTn>
+              <p:prevCondLst>
+                <p:cond evt="onPrev" delay="0">
+                  <p:tgtEl>
+                    <p:sldTgt/>
+                  </p:tgtEl>
+                </p:cond>
+              </p:prevCondLst>
+              <p:nextCondLst>
+                <p:cond evt="onNext" delay="0">
+                  <p:tgtEl>
+                    <p:sldTgt/>
+                  </p:tgtEl>
+                </p:cond>
+              </p:nextCondLst>
+            </p:seq>
+          </p:childTnLst>
+        </p:cTn>
+      </p:par>
+    </p:tnLst>
+    <p:bldLst>
+      <p:bldP spid="2" grpId="0"/>
+      <p:bldP spid="7" grpId="0"/>
+      <p:bldP spid="8" grpId="0"/>
+    </p:bldLst>
+  </p:timing>
+</p:sld>
+</file>
+
+<file path=ppt/slides/slide27.xml><?xml version="1.0" encoding="utf-8"?>
 <p:sld xmlns:a="http://schemas.openxmlformats.org/drawingml/2006/main" xmlns:r="http://schemas.openxmlformats.org/officeDocument/2006/relationships" xmlns:p="http://schemas.openxmlformats.org/presentationml/2006/main">
   <p:cSld>
     <p:spTree>
@@ -8826,7 +12061,7 @@
 </p:sld>
 </file>
 
-<file path=ppt/slides/slide26.xml><?xml version="1.0" encoding="utf-8"?>
+<file path=ppt/slides/slide28.xml><?xml version="1.0" encoding="utf-8"?>
 <p:sld xmlns:a="http://schemas.openxmlformats.org/drawingml/2006/main" xmlns:r="http://schemas.openxmlformats.org/officeDocument/2006/relationships" xmlns:p="http://schemas.openxmlformats.org/presentationml/2006/main">
   <p:cSld>
     <p:spTree>
@@ -9084,7 +12319,7 @@
             <a:fld id="{97DD1AB5-42BA-4E8A-BFEE-435884E16AAB}" type="slidenum">
               <a:rPr lang="en-US" sz="1600"/>
               <a:pPr/>
-              <a:t>26</a:t>
+              <a:t>28</a:t>
             </a:fld>
             <a:endParaRPr lang="en-US" sz="1600" dirty="0"/>
           </a:p>
@@ -9319,7 +12554,7 @@
 </p:sld>
 </file>
 
-<file path=ppt/slides/slide27.xml><?xml version="1.0" encoding="utf-8"?>
+<file path=ppt/slides/slide29.xml><?xml version="1.0" encoding="utf-8"?>
 <p:sld xmlns:a="http://schemas.openxmlformats.org/drawingml/2006/main" xmlns:r="http://schemas.openxmlformats.org/officeDocument/2006/relationships" xmlns:p="http://schemas.openxmlformats.org/presentationml/2006/main">
   <p:cSld>
     <p:spTree>
@@ -9496,7 +12731,7 @@
             </a:r>
             <a:r>
               <a:rPr lang="en-US" dirty="0"/>
-              <a:t>; due 9/3/25 @ 11:59:59. </a:t>
+              <a:t>; due 8/28/26 @ 11:59:59. </a:t>
             </a:r>
           </a:p>
           <a:p>
@@ -9648,7 +12883,7 @@
             <a:fld id="{97DD1AB5-42BA-4E8A-BFEE-435884E16AAB}" type="slidenum">
               <a:rPr lang="en-US" sz="1600"/>
               <a:pPr/>
-              <a:t>27</a:t>
+              <a:t>29</a:t>
             </a:fld>
             <a:endParaRPr lang="en-US" sz="1600" dirty="0"/>
           </a:p>
@@ -10220,7 +13455,431 @@
 </p:sld>
 </file>
 
-<file path=ppt/slides/slide28.xml><?xml version="1.0" encoding="utf-8"?>
+<file path=ppt/slides/slide3.xml><?xml version="1.0" encoding="utf-8"?>
+<p:sld xmlns:a="http://schemas.openxmlformats.org/drawingml/2006/main" xmlns:r="http://schemas.openxmlformats.org/officeDocument/2006/relationships" xmlns:p="http://schemas.openxmlformats.org/presentationml/2006/main">
+  <p:cSld>
+    <p:spTree>
+      <p:nvGrpSpPr>
+        <p:cNvPr id="1" name=""/>
+        <p:cNvGrpSpPr/>
+        <p:nvPr/>
+      </p:nvGrpSpPr>
+      <p:grpSpPr>
+        <a:xfrm>
+          <a:off x="0" y="0"/>
+          <a:ext cx="0" cy="0"/>
+          <a:chOff x="0" y="0"/>
+          <a:chExt cx="0" cy="0"/>
+        </a:xfrm>
+      </p:grpSpPr>
+      <p:sp>
+        <p:nvSpPr>
+          <p:cNvPr id="3" name="Title 2">
+            <a:extLst>
+              <a:ext uri="{FF2B5EF4-FFF2-40B4-BE49-F238E27FC236}">
+                <a16:creationId xmlns:a16="http://schemas.microsoft.com/office/drawing/2014/main" id="{DD1C2DC9-ED04-44ED-ABB0-446B79CFAAFB}"/>
+              </a:ext>
+            </a:extLst>
+          </p:cNvPr>
+          <p:cNvSpPr>
+            <a:spLocks noGrp="1"/>
+          </p:cNvSpPr>
+          <p:nvPr>
+            <p:ph type="title"/>
+          </p:nvPr>
+        </p:nvSpPr>
+        <p:spPr/>
+        <p:txBody>
+          <a:bodyPr/>
+          <a:lstStyle/>
+          <a:p>
+            <a:r>
+              <a:rPr lang="en-US" dirty="0"/>
+              <a:t>Course Overview</a:t>
+            </a:r>
+          </a:p>
+        </p:txBody>
+      </p:sp>
+      <p:sp>
+        <p:nvSpPr>
+          <p:cNvPr id="4" name="Content Placeholder 3">
+            <a:extLst>
+              <a:ext uri="{FF2B5EF4-FFF2-40B4-BE49-F238E27FC236}">
+                <a16:creationId xmlns:a16="http://schemas.microsoft.com/office/drawing/2014/main" id="{04D848B9-76CF-42A0-8E98-3FAE7A311548}"/>
+              </a:ext>
+            </a:extLst>
+          </p:cNvPr>
+          <p:cNvSpPr>
+            <a:spLocks noGrp="1"/>
+          </p:cNvSpPr>
+          <p:nvPr>
+            <p:ph idx="1"/>
+          </p:nvPr>
+        </p:nvSpPr>
+        <p:spPr/>
+        <p:txBody>
+          <a:bodyPr/>
+          <a:lstStyle/>
+          <a:p>
+            <a:r>
+              <a:rPr lang="en-US" dirty="0"/>
+              <a:t>This course is about the design/implementation of database management systems (DBMSs).</a:t>
+            </a:r>
+          </a:p>
+          <a:p>
+            <a:endParaRPr lang="en-US" sz="1600" dirty="0"/>
+          </a:p>
+          <a:p>
+            <a:r>
+              <a:rPr lang="en-US" dirty="0"/>
+              <a:t>This is </a:t>
+            </a:r>
+            <a:r>
+              <a:rPr lang="en-US" b="1" u="sng" dirty="0"/>
+              <a:t>not</a:t>
+            </a:r>
+            <a:r>
+              <a:rPr lang="en-US" dirty="0"/>
+              <a:t> a course about how to use a DBMS to build applications or how to administer a DBMS.</a:t>
+            </a:r>
+          </a:p>
+          <a:p>
+            <a:pPr lvl="1"/>
+            <a:r>
+              <a:rPr lang="en-US" dirty="0"/>
+              <a:t>See SILS, STOR, and more</a:t>
+            </a:r>
+          </a:p>
+        </p:txBody>
+      </p:sp>
+      <p:sp>
+        <p:nvSpPr>
+          <p:cNvPr id="7" name="Slide Number Placeholder 3">
+            <a:extLst>
+              <a:ext uri="{FF2B5EF4-FFF2-40B4-BE49-F238E27FC236}">
+                <a16:creationId xmlns:a16="http://schemas.microsoft.com/office/drawing/2014/main" id="{D7C6CE97-CD41-06D7-18DC-DADA9ABBEF89}"/>
+              </a:ext>
+            </a:extLst>
+          </p:cNvPr>
+          <p:cNvSpPr txBox="1">
+            <a:spLocks/>
+          </p:cNvSpPr>
+          <p:nvPr/>
+        </p:nvSpPr>
+        <p:spPr>
+          <a:xfrm>
+            <a:off x="11705168" y="0"/>
+            <a:ext cx="486833" cy="366184"/>
+          </a:xfrm>
+          <a:prstGeom prst="rect">
+            <a:avLst/>
+          </a:prstGeom>
+          <a:solidFill>
+            <a:schemeClr val="bg1">
+              <a:lumMod val="50000"/>
+            </a:schemeClr>
+          </a:solidFill>
+        </p:spPr>
+        <p:txBody>
+          <a:bodyPr vert="horz" lIns="0" tIns="60960" rIns="60960" bIns="60960" rtlCol="0" anchor="ctr"/>
+          <a:lstStyle>
+            <a:defPPr>
+              <a:defRPr lang="en-US"/>
+            </a:defPPr>
+            <a:lvl1pPr marL="0" algn="r" defTabSz="914400" rtl="0" eaLnBrk="1" latinLnBrk="0" hangingPunct="1">
+              <a:defRPr sz="1200" kern="1200">
+                <a:solidFill>
+                  <a:schemeClr val="bg1">
+                    <a:lumMod val="95000"/>
+                  </a:schemeClr>
+                </a:solidFill>
+                <a:latin typeface="Consolas" panose="020B0609020204030204" pitchFamily="49" charset="0"/>
+                <a:ea typeface="+mn-ea"/>
+                <a:cs typeface="+mn-cs"/>
+              </a:defRPr>
+            </a:lvl1pPr>
+            <a:lvl2pPr marL="457200" algn="l" defTabSz="914400" rtl="0" eaLnBrk="1" latinLnBrk="0" hangingPunct="1">
+              <a:defRPr sz="1800" kern="1200">
+                <a:solidFill>
+                  <a:schemeClr val="tx1"/>
+                </a:solidFill>
+                <a:latin typeface="+mn-lt"/>
+                <a:ea typeface="+mn-ea"/>
+                <a:cs typeface="+mn-cs"/>
+              </a:defRPr>
+            </a:lvl2pPr>
+            <a:lvl3pPr marL="914400" algn="l" defTabSz="914400" rtl="0" eaLnBrk="1" latinLnBrk="0" hangingPunct="1">
+              <a:defRPr sz="1800" kern="1200">
+                <a:solidFill>
+                  <a:schemeClr val="tx1"/>
+                </a:solidFill>
+                <a:latin typeface="+mn-lt"/>
+                <a:ea typeface="+mn-ea"/>
+                <a:cs typeface="+mn-cs"/>
+              </a:defRPr>
+            </a:lvl3pPr>
+            <a:lvl4pPr marL="1371600" algn="l" defTabSz="914400" rtl="0" eaLnBrk="1" latinLnBrk="0" hangingPunct="1">
+              <a:defRPr sz="1800" kern="1200">
+                <a:solidFill>
+                  <a:schemeClr val="tx1"/>
+                </a:solidFill>
+                <a:latin typeface="+mn-lt"/>
+                <a:ea typeface="+mn-ea"/>
+                <a:cs typeface="+mn-cs"/>
+              </a:defRPr>
+            </a:lvl4pPr>
+            <a:lvl5pPr marL="1828800" algn="l" defTabSz="914400" rtl="0" eaLnBrk="1" latinLnBrk="0" hangingPunct="1">
+              <a:defRPr sz="1800" kern="1200">
+                <a:solidFill>
+                  <a:schemeClr val="tx1"/>
+                </a:solidFill>
+                <a:latin typeface="+mn-lt"/>
+                <a:ea typeface="+mn-ea"/>
+                <a:cs typeface="+mn-cs"/>
+              </a:defRPr>
+            </a:lvl5pPr>
+            <a:lvl6pPr marL="2286000" algn="l" defTabSz="914400" rtl="0" eaLnBrk="1" latinLnBrk="0" hangingPunct="1">
+              <a:defRPr sz="1800" kern="1200">
+                <a:solidFill>
+                  <a:schemeClr val="tx1"/>
+                </a:solidFill>
+                <a:latin typeface="+mn-lt"/>
+                <a:ea typeface="+mn-ea"/>
+                <a:cs typeface="+mn-cs"/>
+              </a:defRPr>
+            </a:lvl6pPr>
+            <a:lvl7pPr marL="2743200" algn="l" defTabSz="914400" rtl="0" eaLnBrk="1" latinLnBrk="0" hangingPunct="1">
+              <a:defRPr sz="1800" kern="1200">
+                <a:solidFill>
+                  <a:schemeClr val="tx1"/>
+                </a:solidFill>
+                <a:latin typeface="+mn-lt"/>
+                <a:ea typeface="+mn-ea"/>
+                <a:cs typeface="+mn-cs"/>
+              </a:defRPr>
+            </a:lvl7pPr>
+            <a:lvl8pPr marL="3200400" algn="l" defTabSz="914400" rtl="0" eaLnBrk="1" latinLnBrk="0" hangingPunct="1">
+              <a:defRPr sz="1800" kern="1200">
+                <a:solidFill>
+                  <a:schemeClr val="tx1"/>
+                </a:solidFill>
+                <a:latin typeface="+mn-lt"/>
+                <a:ea typeface="+mn-ea"/>
+                <a:cs typeface="+mn-cs"/>
+              </a:defRPr>
+            </a:lvl8pPr>
+            <a:lvl9pPr marL="3657600" algn="l" defTabSz="914400" rtl="0" eaLnBrk="1" latinLnBrk="0" hangingPunct="1">
+              <a:defRPr sz="1800" kern="1200">
+                <a:solidFill>
+                  <a:schemeClr val="tx1"/>
+                </a:solidFill>
+                <a:latin typeface="+mn-lt"/>
+                <a:ea typeface="+mn-ea"/>
+                <a:cs typeface="+mn-cs"/>
+              </a:defRPr>
+            </a:lvl9pPr>
+          </a:lstStyle>
+          <a:p>
+            <a:fld id="{97DD1AB5-42BA-4E8A-BFEE-435884E16AAB}" type="slidenum">
+              <a:rPr lang="en-US" sz="1600"/>
+              <a:pPr/>
+              <a:t>3</a:t>
+            </a:fld>
+            <a:endParaRPr lang="en-US" sz="1600" dirty="0"/>
+          </a:p>
+        </p:txBody>
+      </p:sp>
+    </p:spTree>
+    <p:extLst>
+      <p:ext uri="{BB962C8B-B14F-4D97-AF65-F5344CB8AC3E}">
+        <p14:creationId xmlns:p14="http://schemas.microsoft.com/office/powerpoint/2010/main" val="3238806972"/>
+      </p:ext>
+    </p:extLst>
+  </p:cSld>
+  <p:clrMapOvr>
+    <a:masterClrMapping/>
+  </p:clrMapOvr>
+  <p:timing>
+    <p:tnLst>
+      <p:par>
+        <p:cTn id="1" dur="indefinite" restart="never" nodeType="tmRoot">
+          <p:childTnLst>
+            <p:seq concurrent="1" nextAc="seek">
+              <p:cTn id="2" dur="indefinite" nodeType="mainSeq">
+                <p:childTnLst>
+                  <p:par>
+                    <p:cTn id="3" fill="hold">
+                      <p:stCondLst>
+                        <p:cond delay="indefinite"/>
+                      </p:stCondLst>
+                      <p:childTnLst>
+                        <p:par>
+                          <p:cTn id="4" fill="hold">
+                            <p:stCondLst>
+                              <p:cond delay="0"/>
+                            </p:stCondLst>
+                            <p:childTnLst>
+                              <p:par>
+                                <p:cTn id="5" presetID="1" presetClass="entr" presetSubtype="0" fill="hold" nodeType="clickEffect">
+                                  <p:stCondLst>
+                                    <p:cond delay="0"/>
+                                  </p:stCondLst>
+                                  <p:childTnLst>
+                                    <p:set>
+                                      <p:cBhvr>
+                                        <p:cTn id="6" dur="1" fill="hold">
+                                          <p:stCondLst>
+                                            <p:cond delay="0"/>
+                                          </p:stCondLst>
+                                        </p:cTn>
+                                        <p:tgtEl>
+                                          <p:spTgt spid="4">
+                                            <p:txEl>
+                                              <p:pRg st="0" end="0"/>
+                                            </p:txEl>
+                                          </p:spTgt>
+                                        </p:tgtEl>
+                                        <p:attrNameLst>
+                                          <p:attrName>style.visibility</p:attrName>
+                                        </p:attrNameLst>
+                                      </p:cBhvr>
+                                      <p:to>
+                                        <p:strVal val="visible"/>
+                                      </p:to>
+                                    </p:set>
+                                  </p:childTnLst>
+                                </p:cTn>
+                              </p:par>
+                            </p:childTnLst>
+                          </p:cTn>
+                        </p:par>
+                      </p:childTnLst>
+                    </p:cTn>
+                  </p:par>
+                  <p:par>
+                    <p:cTn id="7" fill="hold">
+                      <p:stCondLst>
+                        <p:cond delay="indefinite"/>
+                      </p:stCondLst>
+                      <p:childTnLst>
+                        <p:par>
+                          <p:cTn id="8" fill="hold">
+                            <p:stCondLst>
+                              <p:cond delay="0"/>
+                            </p:stCondLst>
+                            <p:childTnLst>
+                              <p:par>
+                                <p:cTn id="9" presetID="1" presetClass="entr" presetSubtype="0" fill="hold" nodeType="clickEffect">
+                                  <p:stCondLst>
+                                    <p:cond delay="0"/>
+                                  </p:stCondLst>
+                                  <p:childTnLst>
+                                    <p:set>
+                                      <p:cBhvr>
+                                        <p:cTn id="10" dur="1" fill="hold">
+                                          <p:stCondLst>
+                                            <p:cond delay="0"/>
+                                          </p:stCondLst>
+                                        </p:cTn>
+                                        <p:tgtEl>
+                                          <p:spTgt spid="4">
+                                            <p:txEl>
+                                              <p:pRg st="2" end="2"/>
+                                            </p:txEl>
+                                          </p:spTgt>
+                                        </p:tgtEl>
+                                        <p:attrNameLst>
+                                          <p:attrName>style.visibility</p:attrName>
+                                        </p:attrNameLst>
+                                      </p:cBhvr>
+                                      <p:to>
+                                        <p:strVal val="visible"/>
+                                      </p:to>
+                                    </p:set>
+                                  </p:childTnLst>
+                                </p:cTn>
+                              </p:par>
+                            </p:childTnLst>
+                          </p:cTn>
+                        </p:par>
+                      </p:childTnLst>
+                    </p:cTn>
+                  </p:par>
+                  <p:par>
+                    <p:cTn id="11" fill="hold">
+                      <p:stCondLst>
+                        <p:cond delay="indefinite"/>
+                      </p:stCondLst>
+                      <p:childTnLst>
+                        <p:par>
+                          <p:cTn id="12" fill="hold">
+                            <p:stCondLst>
+                              <p:cond delay="0"/>
+                            </p:stCondLst>
+                            <p:childTnLst>
+                              <p:par>
+                                <p:cTn id="13" presetID="1" presetClass="entr" presetSubtype="0" fill="hold" nodeType="clickEffect">
+                                  <p:stCondLst>
+                                    <p:cond delay="0"/>
+                                  </p:stCondLst>
+                                  <p:childTnLst>
+                                    <p:set>
+                                      <p:cBhvr>
+                                        <p:cTn id="14" dur="1" fill="hold">
+                                          <p:stCondLst>
+                                            <p:cond delay="0"/>
+                                          </p:stCondLst>
+                                        </p:cTn>
+                                        <p:tgtEl>
+                                          <p:spTgt spid="4">
+                                            <p:txEl>
+                                              <p:pRg st="3" end="3"/>
+                                            </p:txEl>
+                                          </p:spTgt>
+                                        </p:tgtEl>
+                                        <p:attrNameLst>
+                                          <p:attrName>style.visibility</p:attrName>
+                                        </p:attrNameLst>
+                                      </p:cBhvr>
+                                      <p:to>
+                                        <p:strVal val="visible"/>
+                                      </p:to>
+                                    </p:set>
+                                  </p:childTnLst>
+                                </p:cTn>
+                              </p:par>
+                            </p:childTnLst>
+                          </p:cTn>
+                        </p:par>
+                      </p:childTnLst>
+                    </p:cTn>
+                  </p:par>
+                </p:childTnLst>
+              </p:cTn>
+              <p:prevCondLst>
+                <p:cond evt="onPrev" delay="0">
+                  <p:tgtEl>
+                    <p:sldTgt/>
+                  </p:tgtEl>
+                </p:cond>
+              </p:prevCondLst>
+              <p:nextCondLst>
+                <p:cond evt="onNext" delay="0">
+                  <p:tgtEl>
+                    <p:sldTgt/>
+                  </p:tgtEl>
+                </p:cond>
+              </p:nextCondLst>
+            </p:seq>
+          </p:childTnLst>
+        </p:cTn>
+      </p:par>
+    </p:tnLst>
+  </p:timing>
+</p:sld>
+</file>
+
+<file path=ppt/slides/slide30.xml><?xml version="1.0" encoding="utf-8"?>
 <p:sld xmlns:a="http://schemas.openxmlformats.org/drawingml/2006/main" xmlns:r="http://schemas.openxmlformats.org/officeDocument/2006/relationships" xmlns:p="http://schemas.openxmlformats.org/presentationml/2006/main">
   <p:cSld>
     <p:spTree>
@@ -10619,7 +14278,7 @@
             <a:fld id="{97DD1AB5-42BA-4E8A-BFEE-435884E16AAB}" type="slidenum">
               <a:rPr lang="en-US" sz="1600"/>
               <a:pPr/>
-              <a:t>28</a:t>
+              <a:t>30</a:t>
             </a:fld>
             <a:endParaRPr lang="en-US" sz="1600" dirty="0"/>
           </a:p>
@@ -10913,7 +14572,7 @@
 </p:sld>
 </file>
 
-<file path=ppt/slides/slide29.xml><?xml version="1.0" encoding="utf-8"?>
+<file path=ppt/slides/slide31.xml><?xml version="1.0" encoding="utf-8"?>
 <p:sld xmlns:a="http://schemas.openxmlformats.org/drawingml/2006/main" xmlns:r="http://schemas.openxmlformats.org/officeDocument/2006/relationships" xmlns:p="http://schemas.openxmlformats.org/presentationml/2006/main">
   <p:cSld>
     <p:spTree>
@@ -10976,7 +14635,7 @@
 </p:sld>
 </file>
 
-<file path=ppt/slides/slide3.xml><?xml version="1.0" encoding="utf-8"?>
+<file path=ppt/slides/slide32.xml><?xml version="1.0" encoding="utf-8"?>
 <p:sld xmlns:a="http://schemas.openxmlformats.org/drawingml/2006/main" xmlns:r="http://schemas.openxmlformats.org/officeDocument/2006/relationships" xmlns:p="http://schemas.openxmlformats.org/presentationml/2006/main">
   <p:cSld>
     <p:spTree>
@@ -10995,10 +14654,10 @@
       </p:grpSpPr>
       <p:sp>
         <p:nvSpPr>
-          <p:cNvPr id="3" name="Title 2">
+          <p:cNvPr id="2" name="Title 1">
             <a:extLst>
               <a:ext uri="{FF2B5EF4-FFF2-40B4-BE49-F238E27FC236}">
-                <a16:creationId xmlns:a16="http://schemas.microsoft.com/office/drawing/2014/main" id="{DD1C2DC9-ED04-44ED-ABB0-446B79CFAAFB}"/>
+                <a16:creationId xmlns:a16="http://schemas.microsoft.com/office/drawing/2014/main" id="{8F9F4EBE-18C1-9B7F-D1FE-0017698BA018}"/>
               </a:ext>
             </a:extLst>
           </p:cNvPr>
@@ -11016,213 +14675,17 @@
           <a:p>
             <a:r>
               <a:rPr lang="en-US" dirty="0"/>
-              <a:t>Course Overview</a:t>
-            </a:r>
-          </a:p>
-        </p:txBody>
-      </p:sp>
-      <p:sp>
-        <p:nvSpPr>
-          <p:cNvPr id="4" name="Content Placeholder 3">
-            <a:extLst>
-              <a:ext uri="{FF2B5EF4-FFF2-40B4-BE49-F238E27FC236}">
-                <a16:creationId xmlns:a16="http://schemas.microsoft.com/office/drawing/2014/main" id="{04D848B9-76CF-42A0-8E98-3FAE7A311548}"/>
-              </a:ext>
-            </a:extLst>
-          </p:cNvPr>
-          <p:cNvSpPr>
-            <a:spLocks noGrp="1"/>
-          </p:cNvSpPr>
-          <p:nvPr>
-            <p:ph idx="1"/>
-          </p:nvPr>
-        </p:nvSpPr>
-        <p:spPr/>
-        <p:txBody>
-          <a:bodyPr/>
-          <a:lstStyle/>
-          <a:p>
-            <a:r>
-              <a:rPr lang="en-US" dirty="0"/>
-              <a:t>This course is about the design/implementation of database management systems (DBMSs).</a:t>
-            </a:r>
-          </a:p>
-          <a:p>
-            <a:endParaRPr lang="en-US" sz="1600" dirty="0"/>
-          </a:p>
-          <a:p>
-            <a:r>
-              <a:rPr lang="en-US" dirty="0"/>
-              <a:t>This is </a:t>
-            </a:r>
-            <a:r>
-              <a:rPr lang="en-US" b="1" u="sng" dirty="0"/>
-              <a:t>not</a:t>
-            </a:r>
-            <a:r>
-              <a:rPr lang="en-US" dirty="0"/>
-              <a:t> a course about how to use a DBMS to build applications or how to administer a DBMS.</a:t>
-            </a:r>
-          </a:p>
-          <a:p>
-            <a:pPr lvl="1"/>
-            <a:r>
-              <a:rPr lang="en-US" dirty="0"/>
-              <a:t>See SILS, STOR, and more</a:t>
-            </a:r>
-          </a:p>
-          <a:p>
-            <a:pPr lvl="1"/>
-            <a:r>
-              <a:rPr lang="en-US" dirty="0"/>
-              <a:t>You all have seen my memo at this point.</a:t>
-            </a:r>
-          </a:p>
-        </p:txBody>
-      </p:sp>
-      <p:sp>
-        <p:nvSpPr>
-          <p:cNvPr id="7" name="Slide Number Placeholder 3">
-            <a:extLst>
-              <a:ext uri="{FF2B5EF4-FFF2-40B4-BE49-F238E27FC236}">
-                <a16:creationId xmlns:a16="http://schemas.microsoft.com/office/drawing/2014/main" id="{D7C6CE97-CD41-06D7-18DC-DADA9ABBEF89}"/>
-              </a:ext>
-            </a:extLst>
-          </p:cNvPr>
-          <p:cNvSpPr txBox="1">
-            <a:spLocks/>
-          </p:cNvSpPr>
-          <p:nvPr/>
-        </p:nvSpPr>
-        <p:spPr>
-          <a:xfrm>
-            <a:off x="11705168" y="0"/>
-            <a:ext cx="486833" cy="366184"/>
-          </a:xfrm>
-          <a:prstGeom prst="rect">
-            <a:avLst/>
-          </a:prstGeom>
-          <a:solidFill>
-            <a:schemeClr val="bg1">
-              <a:lumMod val="50000"/>
-            </a:schemeClr>
-          </a:solidFill>
-        </p:spPr>
-        <p:txBody>
-          <a:bodyPr vert="horz" lIns="0" tIns="60960" rIns="60960" bIns="60960" rtlCol="0" anchor="ctr"/>
-          <a:lstStyle>
-            <a:defPPr>
-              <a:defRPr lang="en-US"/>
-            </a:defPPr>
-            <a:lvl1pPr marL="0" algn="r" defTabSz="914400" rtl="0" eaLnBrk="1" latinLnBrk="0" hangingPunct="1">
-              <a:defRPr sz="1200" kern="1200">
-                <a:solidFill>
-                  <a:schemeClr val="bg1">
-                    <a:lumMod val="95000"/>
-                  </a:schemeClr>
-                </a:solidFill>
-                <a:latin typeface="Consolas" panose="020B0609020204030204" pitchFamily="49" charset="0"/>
-                <a:ea typeface="+mn-ea"/>
-                <a:cs typeface="+mn-cs"/>
-              </a:defRPr>
-            </a:lvl1pPr>
-            <a:lvl2pPr marL="457200" algn="l" defTabSz="914400" rtl="0" eaLnBrk="1" latinLnBrk="0" hangingPunct="1">
-              <a:defRPr sz="1800" kern="1200">
-                <a:solidFill>
-                  <a:schemeClr val="tx1"/>
-                </a:solidFill>
-                <a:latin typeface="+mn-lt"/>
-                <a:ea typeface="+mn-ea"/>
-                <a:cs typeface="+mn-cs"/>
-              </a:defRPr>
-            </a:lvl2pPr>
-            <a:lvl3pPr marL="914400" algn="l" defTabSz="914400" rtl="0" eaLnBrk="1" latinLnBrk="0" hangingPunct="1">
-              <a:defRPr sz="1800" kern="1200">
-                <a:solidFill>
-                  <a:schemeClr val="tx1"/>
-                </a:solidFill>
-                <a:latin typeface="+mn-lt"/>
-                <a:ea typeface="+mn-ea"/>
-                <a:cs typeface="+mn-cs"/>
-              </a:defRPr>
-            </a:lvl3pPr>
-            <a:lvl4pPr marL="1371600" algn="l" defTabSz="914400" rtl="0" eaLnBrk="1" latinLnBrk="0" hangingPunct="1">
-              <a:defRPr sz="1800" kern="1200">
-                <a:solidFill>
-                  <a:schemeClr val="tx1"/>
-                </a:solidFill>
-                <a:latin typeface="+mn-lt"/>
-                <a:ea typeface="+mn-ea"/>
-                <a:cs typeface="+mn-cs"/>
-              </a:defRPr>
-            </a:lvl4pPr>
-            <a:lvl5pPr marL="1828800" algn="l" defTabSz="914400" rtl="0" eaLnBrk="1" latinLnBrk="0" hangingPunct="1">
-              <a:defRPr sz="1800" kern="1200">
-                <a:solidFill>
-                  <a:schemeClr val="tx1"/>
-                </a:solidFill>
-                <a:latin typeface="+mn-lt"/>
-                <a:ea typeface="+mn-ea"/>
-                <a:cs typeface="+mn-cs"/>
-              </a:defRPr>
-            </a:lvl5pPr>
-            <a:lvl6pPr marL="2286000" algn="l" defTabSz="914400" rtl="0" eaLnBrk="1" latinLnBrk="0" hangingPunct="1">
-              <a:defRPr sz="1800" kern="1200">
-                <a:solidFill>
-                  <a:schemeClr val="tx1"/>
-                </a:solidFill>
-                <a:latin typeface="+mn-lt"/>
-                <a:ea typeface="+mn-ea"/>
-                <a:cs typeface="+mn-cs"/>
-              </a:defRPr>
-            </a:lvl6pPr>
-            <a:lvl7pPr marL="2743200" algn="l" defTabSz="914400" rtl="0" eaLnBrk="1" latinLnBrk="0" hangingPunct="1">
-              <a:defRPr sz="1800" kern="1200">
-                <a:solidFill>
-                  <a:schemeClr val="tx1"/>
-                </a:solidFill>
-                <a:latin typeface="+mn-lt"/>
-                <a:ea typeface="+mn-ea"/>
-                <a:cs typeface="+mn-cs"/>
-              </a:defRPr>
-            </a:lvl7pPr>
-            <a:lvl8pPr marL="3200400" algn="l" defTabSz="914400" rtl="0" eaLnBrk="1" latinLnBrk="0" hangingPunct="1">
-              <a:defRPr sz="1800" kern="1200">
-                <a:solidFill>
-                  <a:schemeClr val="tx1"/>
-                </a:solidFill>
-                <a:latin typeface="+mn-lt"/>
-                <a:ea typeface="+mn-ea"/>
-                <a:cs typeface="+mn-cs"/>
-              </a:defRPr>
-            </a:lvl8pPr>
-            <a:lvl9pPr marL="3657600" algn="l" defTabSz="914400" rtl="0" eaLnBrk="1" latinLnBrk="0" hangingPunct="1">
-              <a:defRPr sz="1800" kern="1200">
-                <a:solidFill>
-                  <a:schemeClr val="tx1"/>
-                </a:solidFill>
-                <a:latin typeface="+mn-lt"/>
-                <a:ea typeface="+mn-ea"/>
-                <a:cs typeface="+mn-cs"/>
-              </a:defRPr>
-            </a:lvl9pPr>
-          </a:lstStyle>
-          <a:p>
-            <a:fld id="{97DD1AB5-42BA-4E8A-BFEE-435884E16AAB}" type="slidenum">
-              <a:rPr lang="en-US" sz="1600"/>
-              <a:pPr/>
-              <a:t>3</a:t>
-            </a:fld>
-            <a:endParaRPr lang="en-US" sz="1600" dirty="0"/>
+              <a:t>High-level Problem</a:t>
+            </a:r>
           </a:p>
         </p:txBody>
       </p:sp>
       <p:pic>
         <p:nvPicPr>
-          <p:cNvPr id="3074" name="Picture 2" descr="Image of It was a mission statement.">
+          <p:cNvPr id="8194" name="Picture 2">
             <a:extLst>
               <a:ext uri="{FF2B5EF4-FFF2-40B4-BE49-F238E27FC236}">
-                <a16:creationId xmlns:a16="http://schemas.microsoft.com/office/drawing/2014/main" id="{4F6ABA53-557C-3EE0-B5EE-079B98CFB72B}"/>
+                <a16:creationId xmlns:a16="http://schemas.microsoft.com/office/drawing/2014/main" id="{9C92A016-44F9-0D53-F3E4-DA4DB716BECB}"/>
               </a:ext>
             </a:extLst>
           </p:cNvPr>
@@ -11232,7 +14695,7 @@
           <p:nvPr/>
         </p:nvPicPr>
         <p:blipFill>
-          <a:blip r:embed="rId3">
+          <a:blip r:embed="rId2">
             <a:extLst>
               <a:ext uri="{28A0092B-C50C-407E-A947-70E740481C1C}">
                 <a14:useLocalDpi xmlns:a14="http://schemas.microsoft.com/office/drawing/2010/main" val="0"/>
@@ -11246,8 +14709,8 @@
         </p:blipFill>
         <p:spPr bwMode="auto">
           <a:xfrm>
-            <a:off x="7410735" y="4172722"/>
-            <a:ext cx="4631140" cy="2523971"/>
+            <a:off x="2603140" y="1028645"/>
+            <a:ext cx="6985720" cy="4319209"/>
           </a:xfrm>
           <a:prstGeom prst="rect">
             <a:avLst/>
@@ -11264,10 +14727,45 @@
           </a:extLst>
         </p:spPr>
       </p:pic>
+      <p:sp>
+        <p:nvSpPr>
+          <p:cNvPr id="3" name="TextBox 2">
+            <a:extLst>
+              <a:ext uri="{FF2B5EF4-FFF2-40B4-BE49-F238E27FC236}">
+                <a16:creationId xmlns:a16="http://schemas.microsoft.com/office/drawing/2014/main" id="{C341A12C-14CA-A186-55E1-76EC455FE32E}"/>
+              </a:ext>
+            </a:extLst>
+          </p:cNvPr>
+          <p:cNvSpPr txBox="1"/>
+          <p:nvPr/>
+        </p:nvSpPr>
+        <p:spPr>
+          <a:xfrm>
+            <a:off x="789709" y="5495149"/>
+            <a:ext cx="10870476" cy="523220"/>
+          </a:xfrm>
+          <a:prstGeom prst="rect">
+            <a:avLst/>
+          </a:prstGeom>
+          <a:noFill/>
+        </p:spPr>
+        <p:txBody>
+          <a:bodyPr wrap="none" rtlCol="0">
+            <a:spAutoFit/>
+          </a:bodyPr>
+          <a:lstStyle/>
+          <a:p>
+            <a:r>
+              <a:rPr lang="en-US" sz="2800" dirty="0"/>
+              <a:t>Estimates of total cloud storage in 2026: 100 Zettabytes (100 B Terabytes)</a:t>
+            </a:r>
+          </a:p>
+        </p:txBody>
+      </p:sp>
     </p:spTree>
     <p:extLst>
       <p:ext uri="{BB962C8B-B14F-4D97-AF65-F5344CB8AC3E}">
-        <p14:creationId xmlns:p14="http://schemas.microsoft.com/office/powerpoint/2010/main" val="3238806972"/>
+        <p14:creationId xmlns:p14="http://schemas.microsoft.com/office/powerpoint/2010/main" val="761739978"/>
       </p:ext>
     </p:extLst>
   </p:cSld>
@@ -11308,11 +14806,7 @@
                                           </p:stCondLst>
                                         </p:cTn>
                                         <p:tgtEl>
-                                          <p:spTgt spid="4">
-                                            <p:txEl>
-                                              <p:pRg st="0" end="0"/>
-                                            </p:txEl>
-                                          </p:spTgt>
+                                          <p:spTgt spid="8194"/>
                                         </p:tgtEl>
                                         <p:attrNameLst>
                                           <p:attrName>style.visibility</p:attrName>
@@ -11344,7 +14838,7 @@
                             </p:stCondLst>
                             <p:childTnLst>
                               <p:par>
-                                <p:cTn id="9" presetID="1" presetClass="entr" presetSubtype="0" fill="hold" nodeType="clickEffect">
+                                <p:cTn id="9" presetID="1" presetClass="entr" presetSubtype="0" fill="hold" grpId="0" nodeType="clickEffect">
                                   <p:stCondLst>
                                     <p:cond delay="0"/>
                                   </p:stCondLst>
@@ -11357,154 +14851,7 @@
                                           </p:stCondLst>
                                         </p:cTn>
                                         <p:tgtEl>
-                                          <p:spTgt spid="4">
-                                            <p:txEl>
-                                              <p:pRg st="2" end="2"/>
-                                            </p:txEl>
-                                          </p:spTgt>
-                                        </p:tgtEl>
-                                        <p:attrNameLst>
-                                          <p:attrName>style.visibility</p:attrName>
-                                        </p:attrNameLst>
-                                      </p:cBhvr>
-                                      <p:to>
-                                        <p:strVal val="visible"/>
-                                      </p:to>
-                                    </p:set>
-                                  </p:childTnLst>
-                                </p:cTn>
-                              </p:par>
-                            </p:childTnLst>
-                          </p:cTn>
-                        </p:par>
-                      </p:childTnLst>
-                    </p:cTn>
-                  </p:par>
-                  <p:par>
-                    <p:cTn id="11" fill="hold">
-                      <p:stCondLst>
-                        <p:cond delay="indefinite"/>
-                      </p:stCondLst>
-                      <p:childTnLst>
-                        <p:par>
-                          <p:cTn id="12" fill="hold">
-                            <p:stCondLst>
-                              <p:cond delay="0"/>
-                            </p:stCondLst>
-                            <p:childTnLst>
-                              <p:par>
-                                <p:cTn id="13" presetID="1" presetClass="entr" presetSubtype="0" fill="hold" nodeType="clickEffect">
-                                  <p:stCondLst>
-                                    <p:cond delay="0"/>
-                                  </p:stCondLst>
-                                  <p:childTnLst>
-                                    <p:set>
-                                      <p:cBhvr>
-                                        <p:cTn id="14" dur="1" fill="hold">
-                                          <p:stCondLst>
-                                            <p:cond delay="0"/>
-                                          </p:stCondLst>
-                                        </p:cTn>
-                                        <p:tgtEl>
-                                          <p:spTgt spid="4">
-                                            <p:txEl>
-                                              <p:pRg st="3" end="3"/>
-                                            </p:txEl>
-                                          </p:spTgt>
-                                        </p:tgtEl>
-                                        <p:attrNameLst>
-                                          <p:attrName>style.visibility</p:attrName>
-                                        </p:attrNameLst>
-                                      </p:cBhvr>
-                                      <p:to>
-                                        <p:strVal val="visible"/>
-                                      </p:to>
-                                    </p:set>
-                                  </p:childTnLst>
-                                </p:cTn>
-                              </p:par>
-                            </p:childTnLst>
-                          </p:cTn>
-                        </p:par>
-                      </p:childTnLst>
-                    </p:cTn>
-                  </p:par>
-                  <p:par>
-                    <p:cTn id="15" fill="hold">
-                      <p:stCondLst>
-                        <p:cond delay="indefinite"/>
-                      </p:stCondLst>
-                      <p:childTnLst>
-                        <p:par>
-                          <p:cTn id="16" fill="hold">
-                            <p:stCondLst>
-                              <p:cond delay="0"/>
-                            </p:stCondLst>
-                            <p:childTnLst>
-                              <p:par>
-                                <p:cTn id="17" presetID="1" presetClass="entr" presetSubtype="0" fill="hold" nodeType="clickEffect">
-                                  <p:stCondLst>
-                                    <p:cond delay="0"/>
-                                  </p:stCondLst>
-                                  <p:childTnLst>
-                                    <p:set>
-                                      <p:cBhvr>
-                                        <p:cTn id="18" dur="1" fill="hold">
-                                          <p:stCondLst>
-                                            <p:cond delay="0"/>
-                                          </p:stCondLst>
-                                        </p:cTn>
-                                        <p:tgtEl>
-                                          <p:spTgt spid="4">
-                                            <p:txEl>
-                                              <p:pRg st="4" end="4"/>
-                                            </p:txEl>
-                                          </p:spTgt>
-                                        </p:tgtEl>
-                                        <p:attrNameLst>
-                                          <p:attrName>style.visibility</p:attrName>
-                                        </p:attrNameLst>
-                                      </p:cBhvr>
-                                      <p:to>
-                                        <p:strVal val="visible"/>
-                                      </p:to>
-                                    </p:set>
-                                  </p:childTnLst>
-                                </p:cTn>
-                              </p:par>
-                            </p:childTnLst>
-                          </p:cTn>
-                        </p:par>
-                      </p:childTnLst>
-                    </p:cTn>
-                  </p:par>
-                  <p:par>
-                    <p:cTn id="19" fill="hold">
-                      <p:stCondLst>
-                        <p:cond delay="indefinite"/>
-                      </p:stCondLst>
-                      <p:childTnLst>
-                        <p:par>
-                          <p:cTn id="20" fill="hold">
-                            <p:stCondLst>
-                              <p:cond delay="0"/>
-                            </p:stCondLst>
-                            <p:childTnLst>
-                              <p:par>
-                                <p:cTn id="21" presetID="1" presetClass="entr" presetSubtype="0" fill="hold" nodeType="clickEffect">
-                                  <p:stCondLst>
-                                    <p:cond delay="0"/>
-                                  </p:stCondLst>
-                                  <p:childTnLst>
-                                    <p:set>
-                                      <p:cBhvr>
-                                        <p:cTn id="22" dur="1" fill="hold">
-                                          <p:stCondLst>
-                                            <p:cond delay="0"/>
-                                          </p:stCondLst>
-                                        </p:cTn>
-                                        <p:tgtEl>
-                                          <p:spTgt spid="3074"/>
+                                          <p:spTgt spid="3"/>
                                         </p:tgtEl>
                                         <p:attrNameLst>
                                           <p:attrName>style.visibility</p:attrName>
@@ -11544,116 +14891,14 @@
         </p:cTn>
       </p:par>
     </p:tnLst>
+    <p:bldLst>
+      <p:bldP spid="3" grpId="0"/>
+    </p:bldLst>
   </p:timing>
 </p:sld>
 </file>
 
-<file path=ppt/slides/slide30.xml><?xml version="1.0" encoding="utf-8"?>
-<p:sld xmlns:a="http://schemas.openxmlformats.org/drawingml/2006/main" xmlns:r="http://schemas.openxmlformats.org/officeDocument/2006/relationships" xmlns:p="http://schemas.openxmlformats.org/presentationml/2006/main">
-  <p:cSld>
-    <p:spTree>
-      <p:nvGrpSpPr>
-        <p:cNvPr id="1" name=""/>
-        <p:cNvGrpSpPr/>
-        <p:nvPr/>
-      </p:nvGrpSpPr>
-      <p:grpSpPr>
-        <a:xfrm>
-          <a:off x="0" y="0"/>
-          <a:ext cx="0" cy="0"/>
-          <a:chOff x="0" y="0"/>
-          <a:chExt cx="0" cy="0"/>
-        </a:xfrm>
-      </p:grpSpPr>
-      <p:sp>
-        <p:nvSpPr>
-          <p:cNvPr id="2" name="Title 1">
-            <a:extLst>
-              <a:ext uri="{FF2B5EF4-FFF2-40B4-BE49-F238E27FC236}">
-                <a16:creationId xmlns:a16="http://schemas.microsoft.com/office/drawing/2014/main" id="{8F9F4EBE-18C1-9B7F-D1FE-0017698BA018}"/>
-              </a:ext>
-            </a:extLst>
-          </p:cNvPr>
-          <p:cNvSpPr>
-            <a:spLocks noGrp="1"/>
-          </p:cNvSpPr>
-          <p:nvPr>
-            <p:ph type="title"/>
-          </p:nvPr>
-        </p:nvSpPr>
-        <p:spPr/>
-        <p:txBody>
-          <a:bodyPr/>
-          <a:lstStyle/>
-          <a:p>
-            <a:r>
-              <a:rPr lang="en-US" dirty="0"/>
-              <a:t>High-level Problem</a:t>
-            </a:r>
-          </a:p>
-        </p:txBody>
-      </p:sp>
-      <p:pic>
-        <p:nvPicPr>
-          <p:cNvPr id="8194" name="Picture 2">
-            <a:extLst>
-              <a:ext uri="{FF2B5EF4-FFF2-40B4-BE49-F238E27FC236}">
-                <a16:creationId xmlns:a16="http://schemas.microsoft.com/office/drawing/2014/main" id="{9C92A016-44F9-0D53-F3E4-DA4DB716BECB}"/>
-              </a:ext>
-            </a:extLst>
-          </p:cNvPr>
-          <p:cNvPicPr>
-            <a:picLocks noChangeAspect="1" noChangeArrowheads="1"/>
-          </p:cNvPicPr>
-          <p:nvPr/>
-        </p:nvPicPr>
-        <p:blipFill>
-          <a:blip r:embed="rId2">
-            <a:extLst>
-              <a:ext uri="{28A0092B-C50C-407E-A947-70E740481C1C}">
-                <a14:useLocalDpi xmlns:a14="http://schemas.microsoft.com/office/drawing/2010/main" val="0"/>
-              </a:ext>
-            </a:extLst>
-          </a:blip>
-          <a:srcRect/>
-          <a:stretch>
-            <a:fillRect/>
-          </a:stretch>
-        </p:blipFill>
-        <p:spPr bwMode="auto">
-          <a:xfrm>
-            <a:off x="1510673" y="945518"/>
-            <a:ext cx="9170654" cy="5670134"/>
-          </a:xfrm>
-          <a:prstGeom prst="rect">
-            <a:avLst/>
-          </a:prstGeom>
-          <a:noFill/>
-          <a:extLst>
-            <a:ext uri="{909E8E84-426E-40DD-AFC4-6F175D3DCCD1}">
-              <a14:hiddenFill xmlns:a14="http://schemas.microsoft.com/office/drawing/2010/main">
-                <a:solidFill>
-                  <a:srgbClr val="FFFFFF"/>
-                </a:solidFill>
-              </a14:hiddenFill>
-            </a:ext>
-          </a:extLst>
-        </p:spPr>
-      </p:pic>
-    </p:spTree>
-    <p:extLst>
-      <p:ext uri="{BB962C8B-B14F-4D97-AF65-F5344CB8AC3E}">
-        <p14:creationId xmlns:p14="http://schemas.microsoft.com/office/powerpoint/2010/main" val="761739978"/>
-      </p:ext>
-    </p:extLst>
-  </p:cSld>
-  <p:clrMapOvr>
-    <a:masterClrMapping/>
-  </p:clrMapOvr>
-</p:sld>
-</file>
-
-<file path=ppt/slides/slide31.xml><?xml version="1.0" encoding="utf-8"?>
+<file path=ppt/slides/slide33.xml><?xml version="1.0" encoding="utf-8"?>
 <p:sld xmlns:a="http://schemas.openxmlformats.org/drawingml/2006/main" xmlns:r="http://schemas.openxmlformats.org/officeDocument/2006/relationships" xmlns:p="http://schemas.openxmlformats.org/presentationml/2006/main">
   <p:cSld>
     <p:spTree>
@@ -12164,7 +15409,7 @@
 </p:sld>
 </file>
 
-<file path=ppt/slides/slide32.xml><?xml version="1.0" encoding="utf-8"?>
+<file path=ppt/slides/slide34.xml><?xml version="1.0" encoding="utf-8"?>
 <p:sld xmlns:a="http://schemas.openxmlformats.org/drawingml/2006/main" xmlns:r="http://schemas.openxmlformats.org/officeDocument/2006/relationships" xmlns:p="http://schemas.openxmlformats.org/presentationml/2006/main">
   <p:cSld>
     <p:spTree>
@@ -14803,7 +18048,7 @@
               <a:pPr defTabSz="1219170">
                 <a:defRPr/>
               </a:pPr>
-              <a:t>32</a:t>
+              <a:t>34</a:t>
             </a:fld>
             <a:endParaRPr lang="en-US" sz="1600" dirty="0">
               <a:solidFill>
@@ -15334,7 +18579,7 @@
 </p:sld>
 </file>
 
-<file path=ppt/slides/slide33.xml><?xml version="1.0" encoding="utf-8"?>
+<file path=ppt/slides/slide35.xml><?xml version="1.0" encoding="utf-8"?>
 <p:sld xmlns:a="http://schemas.openxmlformats.org/drawingml/2006/main" xmlns:r="http://schemas.openxmlformats.org/officeDocument/2006/relationships" xmlns:p="http://schemas.openxmlformats.org/presentationml/2006/main">
   <p:cSld>
     <p:spTree>
@@ -16451,7 +19696,7 @@
               <a:pPr defTabSz="1219170">
                 <a:defRPr/>
               </a:pPr>
-              <a:t>33</a:t>
+              <a:t>35</a:t>
             </a:fld>
             <a:endParaRPr lang="en-US" sz="1600" dirty="0">
               <a:solidFill>
@@ -16901,7 +20146,7 @@
 </p:sld>
 </file>
 
-<file path=ppt/slides/slide34.xml><?xml version="1.0" encoding="utf-8"?>
+<file path=ppt/slides/slide36.xml><?xml version="1.0" encoding="utf-8"?>
 <p:sld xmlns:a="http://schemas.openxmlformats.org/drawingml/2006/main" xmlns:r="http://schemas.openxmlformats.org/officeDocument/2006/relationships" xmlns:p="http://schemas.openxmlformats.org/presentationml/2006/main">
   <p:cSld>
     <p:spTree>
@@ -17220,7 +20465,7 @@
 </p:sld>
 </file>
 
-<file path=ppt/slides/slide35.xml><?xml version="1.0" encoding="utf-8"?>
+<file path=ppt/slides/slide37.xml><?xml version="1.0" encoding="utf-8"?>
 <p:sld xmlns:a="http://schemas.openxmlformats.org/drawingml/2006/main" xmlns:r="http://schemas.openxmlformats.org/officeDocument/2006/relationships" xmlns:p="http://schemas.openxmlformats.org/presentationml/2006/main">
   <p:cSld>
     <p:spTree>
@@ -18331,7 +21576,7 @@
               <a:pPr defTabSz="1219170">
                 <a:defRPr/>
               </a:pPr>
-              <a:t>35</a:t>
+              <a:t>37</a:t>
             </a:fld>
             <a:endParaRPr lang="en-US" sz="1600" dirty="0">
               <a:solidFill>
@@ -20655,7 +23900,7 @@
 </p:sld>
 </file>
 
-<file path=ppt/slides/slide36.xml><?xml version="1.0" encoding="utf-8"?>
+<file path=ppt/slides/slide38.xml><?xml version="1.0" encoding="utf-8"?>
 <p:sld xmlns:a="http://schemas.openxmlformats.org/drawingml/2006/main" xmlns:r="http://schemas.openxmlformats.org/officeDocument/2006/relationships" xmlns:p="http://schemas.openxmlformats.org/presentationml/2006/main">
   <p:cSld>
     <p:spTree>
@@ -21016,7 +24261,7 @@
 </p:sld>
 </file>
 
-<file path=ppt/slides/slide37.xml><?xml version="1.0" encoding="utf-8"?>
+<file path=ppt/slides/slide39.xml><?xml version="1.0" encoding="utf-8"?>
 <p:sld xmlns:a="http://schemas.openxmlformats.org/drawingml/2006/main" xmlns:r="http://schemas.openxmlformats.org/officeDocument/2006/relationships" xmlns:p="http://schemas.openxmlformats.org/presentationml/2006/main">
   <p:cSld>
     <p:spTree>
@@ -22127,7 +25372,7 @@
               <a:pPr defTabSz="1219170">
                 <a:defRPr/>
               </a:pPr>
-              <a:t>37</a:t>
+              <a:t>39</a:t>
             </a:fld>
             <a:endParaRPr lang="en-US" sz="1600" dirty="0">
               <a:solidFill>
@@ -24058,7 +27303,274 @@
 </p:sld>
 </file>
 
-<file path=ppt/slides/slide38.xml><?xml version="1.0" encoding="utf-8"?>
+<file path=ppt/slides/slide4.xml><?xml version="1.0" encoding="utf-8"?>
+<p:sld xmlns:a="http://schemas.openxmlformats.org/drawingml/2006/main" xmlns:r="http://schemas.openxmlformats.org/officeDocument/2006/relationships" xmlns:p="http://schemas.openxmlformats.org/presentationml/2006/main">
+  <p:cSld>
+    <p:spTree>
+      <p:nvGrpSpPr>
+        <p:cNvPr id="1" name=""/>
+        <p:cNvGrpSpPr/>
+        <p:nvPr/>
+      </p:nvGrpSpPr>
+      <p:grpSpPr>
+        <a:xfrm>
+          <a:off x="0" y="0"/>
+          <a:ext cx="0" cy="0"/>
+          <a:chOff x="0" y="0"/>
+          <a:chExt cx="0" cy="0"/>
+        </a:xfrm>
+      </p:grpSpPr>
+      <p:sp>
+        <p:nvSpPr>
+          <p:cNvPr id="3" name="Title 2">
+            <a:extLst>
+              <a:ext uri="{FF2B5EF4-FFF2-40B4-BE49-F238E27FC236}">
+                <a16:creationId xmlns:a16="http://schemas.microsoft.com/office/drawing/2014/main" id="{97833A1C-127C-474F-BA57-5C49700D9788}"/>
+              </a:ext>
+            </a:extLst>
+          </p:cNvPr>
+          <p:cNvSpPr>
+            <a:spLocks noGrp="1"/>
+          </p:cNvSpPr>
+          <p:nvPr>
+            <p:ph type="title"/>
+          </p:nvPr>
+        </p:nvSpPr>
+        <p:spPr/>
+        <p:txBody>
+          <a:bodyPr/>
+          <a:lstStyle/>
+          <a:p>
+            <a:r>
+              <a:rPr lang="en-US" dirty="0"/>
+              <a:t>Course Pages</a:t>
+            </a:r>
+          </a:p>
+        </p:txBody>
+      </p:sp>
+      <p:sp>
+        <p:nvSpPr>
+          <p:cNvPr id="4" name="Content Placeholder 3">
+            <a:extLst>
+              <a:ext uri="{FF2B5EF4-FFF2-40B4-BE49-F238E27FC236}">
+                <a16:creationId xmlns:a16="http://schemas.microsoft.com/office/drawing/2014/main" id="{D584EB81-8C1E-41E9-9452-3C8471C013CF}"/>
+              </a:ext>
+            </a:extLst>
+          </p:cNvPr>
+          <p:cNvSpPr>
+            <a:spLocks noGrp="1"/>
+          </p:cNvSpPr>
+          <p:nvPr>
+            <p:ph idx="1"/>
+          </p:nvPr>
+        </p:nvSpPr>
+        <p:spPr>
+          <a:xfrm>
+            <a:off x="500066" y="964115"/>
+            <a:ext cx="11572875" cy="4525963"/>
+          </a:xfrm>
+        </p:spPr>
+        <p:txBody>
+          <a:bodyPr>
+            <a:normAutofit/>
+          </a:bodyPr>
+          <a:lstStyle/>
+          <a:p>
+            <a:r>
+              <a:rPr lang="en-US" dirty="0"/>
+              <a:t>Course Schedule, Syllabus, Policies, Projects: </a:t>
+            </a:r>
+            <a:r>
+              <a:rPr lang="en-US" dirty="0">
+                <a:hlinkClick r:id="rId3"/>
+              </a:rPr>
+              <a:t>Course Web Page</a:t>
+            </a:r>
+            <a:endParaRPr lang="en-US" dirty="0"/>
+          </a:p>
+        </p:txBody>
+      </p:sp>
+      <p:sp>
+        <p:nvSpPr>
+          <p:cNvPr id="5" name="Slide Number Placeholder 3">
+            <a:extLst>
+              <a:ext uri="{FF2B5EF4-FFF2-40B4-BE49-F238E27FC236}">
+                <a16:creationId xmlns:a16="http://schemas.microsoft.com/office/drawing/2014/main" id="{75C15DC4-A771-6939-068A-4C3D2F6E2469}"/>
+              </a:ext>
+            </a:extLst>
+          </p:cNvPr>
+          <p:cNvSpPr txBox="1">
+            <a:spLocks/>
+          </p:cNvSpPr>
+          <p:nvPr/>
+        </p:nvSpPr>
+        <p:spPr>
+          <a:xfrm>
+            <a:off x="11705168" y="0"/>
+            <a:ext cx="486833" cy="366184"/>
+          </a:xfrm>
+          <a:prstGeom prst="rect">
+            <a:avLst/>
+          </a:prstGeom>
+          <a:solidFill>
+            <a:schemeClr val="bg1">
+              <a:lumMod val="50000"/>
+            </a:schemeClr>
+          </a:solidFill>
+        </p:spPr>
+        <p:txBody>
+          <a:bodyPr vert="horz" lIns="0" tIns="60960" rIns="60960" bIns="60960" rtlCol="0" anchor="ctr"/>
+          <a:lstStyle>
+            <a:defPPr>
+              <a:defRPr lang="en-US"/>
+            </a:defPPr>
+            <a:lvl1pPr marL="0" algn="r" defTabSz="914400" rtl="0" eaLnBrk="1" latinLnBrk="0" hangingPunct="1">
+              <a:defRPr sz="1200" kern="1200">
+                <a:solidFill>
+                  <a:schemeClr val="bg1">
+                    <a:lumMod val="95000"/>
+                  </a:schemeClr>
+                </a:solidFill>
+                <a:latin typeface="Consolas" panose="020B0609020204030204" pitchFamily="49" charset="0"/>
+                <a:ea typeface="+mn-ea"/>
+                <a:cs typeface="+mn-cs"/>
+              </a:defRPr>
+            </a:lvl1pPr>
+            <a:lvl2pPr marL="457200" algn="l" defTabSz="914400" rtl="0" eaLnBrk="1" latinLnBrk="0" hangingPunct="1">
+              <a:defRPr sz="1800" kern="1200">
+                <a:solidFill>
+                  <a:schemeClr val="tx1"/>
+                </a:solidFill>
+                <a:latin typeface="+mn-lt"/>
+                <a:ea typeface="+mn-ea"/>
+                <a:cs typeface="+mn-cs"/>
+              </a:defRPr>
+            </a:lvl2pPr>
+            <a:lvl3pPr marL="914400" algn="l" defTabSz="914400" rtl="0" eaLnBrk="1" latinLnBrk="0" hangingPunct="1">
+              <a:defRPr sz="1800" kern="1200">
+                <a:solidFill>
+                  <a:schemeClr val="tx1"/>
+                </a:solidFill>
+                <a:latin typeface="+mn-lt"/>
+                <a:ea typeface="+mn-ea"/>
+                <a:cs typeface="+mn-cs"/>
+              </a:defRPr>
+            </a:lvl3pPr>
+            <a:lvl4pPr marL="1371600" algn="l" defTabSz="914400" rtl="0" eaLnBrk="1" latinLnBrk="0" hangingPunct="1">
+              <a:defRPr sz="1800" kern="1200">
+                <a:solidFill>
+                  <a:schemeClr val="tx1"/>
+                </a:solidFill>
+                <a:latin typeface="+mn-lt"/>
+                <a:ea typeface="+mn-ea"/>
+                <a:cs typeface="+mn-cs"/>
+              </a:defRPr>
+            </a:lvl4pPr>
+            <a:lvl5pPr marL="1828800" algn="l" defTabSz="914400" rtl="0" eaLnBrk="1" latinLnBrk="0" hangingPunct="1">
+              <a:defRPr sz="1800" kern="1200">
+                <a:solidFill>
+                  <a:schemeClr val="tx1"/>
+                </a:solidFill>
+                <a:latin typeface="+mn-lt"/>
+                <a:ea typeface="+mn-ea"/>
+                <a:cs typeface="+mn-cs"/>
+              </a:defRPr>
+            </a:lvl5pPr>
+            <a:lvl6pPr marL="2286000" algn="l" defTabSz="914400" rtl="0" eaLnBrk="1" latinLnBrk="0" hangingPunct="1">
+              <a:defRPr sz="1800" kern="1200">
+                <a:solidFill>
+                  <a:schemeClr val="tx1"/>
+                </a:solidFill>
+                <a:latin typeface="+mn-lt"/>
+                <a:ea typeface="+mn-ea"/>
+                <a:cs typeface="+mn-cs"/>
+              </a:defRPr>
+            </a:lvl6pPr>
+            <a:lvl7pPr marL="2743200" algn="l" defTabSz="914400" rtl="0" eaLnBrk="1" latinLnBrk="0" hangingPunct="1">
+              <a:defRPr sz="1800" kern="1200">
+                <a:solidFill>
+                  <a:schemeClr val="tx1"/>
+                </a:solidFill>
+                <a:latin typeface="+mn-lt"/>
+                <a:ea typeface="+mn-ea"/>
+                <a:cs typeface="+mn-cs"/>
+              </a:defRPr>
+            </a:lvl7pPr>
+            <a:lvl8pPr marL="3200400" algn="l" defTabSz="914400" rtl="0" eaLnBrk="1" latinLnBrk="0" hangingPunct="1">
+              <a:defRPr sz="1800" kern="1200">
+                <a:solidFill>
+                  <a:schemeClr val="tx1"/>
+                </a:solidFill>
+                <a:latin typeface="+mn-lt"/>
+                <a:ea typeface="+mn-ea"/>
+                <a:cs typeface="+mn-cs"/>
+              </a:defRPr>
+            </a:lvl8pPr>
+            <a:lvl9pPr marL="3657600" algn="l" defTabSz="914400" rtl="0" eaLnBrk="1" latinLnBrk="0" hangingPunct="1">
+              <a:defRPr sz="1800" kern="1200">
+                <a:solidFill>
+                  <a:schemeClr val="tx1"/>
+                </a:solidFill>
+                <a:latin typeface="+mn-lt"/>
+                <a:ea typeface="+mn-ea"/>
+                <a:cs typeface="+mn-cs"/>
+              </a:defRPr>
+            </a:lvl9pPr>
+          </a:lstStyle>
+          <a:p>
+            <a:fld id="{97DD1AB5-42BA-4E8A-BFEE-435884E16AAB}" type="slidenum">
+              <a:rPr lang="en-US" sz="1600"/>
+              <a:pPr/>
+              <a:t>4</a:t>
+            </a:fld>
+            <a:endParaRPr lang="en-US" sz="1600" dirty="0"/>
+          </a:p>
+        </p:txBody>
+      </p:sp>
+      <p:pic>
+        <p:nvPicPr>
+          <p:cNvPr id="7" name="Picture 6">
+            <a:extLst>
+              <a:ext uri="{FF2B5EF4-FFF2-40B4-BE49-F238E27FC236}">
+                <a16:creationId xmlns:a16="http://schemas.microsoft.com/office/drawing/2014/main" id="{5BA48FDB-2524-E9E9-495E-EB7EAFCEE23A}"/>
+              </a:ext>
+            </a:extLst>
+          </p:cNvPr>
+          <p:cNvPicPr>
+            <a:picLocks noChangeAspect="1"/>
+          </p:cNvPicPr>
+          <p:nvPr/>
+        </p:nvPicPr>
+        <p:blipFill>
+          <a:blip r:embed="rId4"/>
+          <a:stretch>
+            <a:fillRect/>
+          </a:stretch>
+        </p:blipFill>
+        <p:spPr>
+          <a:xfrm>
+            <a:off x="4093685" y="1889255"/>
+            <a:ext cx="4004630" cy="4004630"/>
+          </a:xfrm>
+          <a:prstGeom prst="rect">
+            <a:avLst/>
+          </a:prstGeom>
+        </p:spPr>
+      </p:pic>
+    </p:spTree>
+    <p:extLst>
+      <p:ext uri="{BB962C8B-B14F-4D97-AF65-F5344CB8AC3E}">
+        <p14:creationId xmlns:p14="http://schemas.microsoft.com/office/powerpoint/2010/main" val="87508725"/>
+      </p:ext>
+    </p:extLst>
+  </p:cSld>
+  <p:clrMapOvr>
+    <a:masterClrMapping/>
+  </p:clrMapOvr>
+</p:sld>
+</file>
+
+<file path=ppt/slides/slide40.xml><?xml version="1.0" encoding="utf-8"?>
 <p:sld xmlns:a="http://schemas.openxmlformats.org/drawingml/2006/main" xmlns:r="http://schemas.openxmlformats.org/officeDocument/2006/relationships" xmlns:p="http://schemas.openxmlformats.org/presentationml/2006/main">
   <p:cSld>
     <p:spTree>
@@ -25169,7 +28681,7 @@
               <a:pPr defTabSz="1219170">
                 <a:defRPr/>
               </a:pPr>
-              <a:t>38</a:t>
+              <a:t>40</a:t>
             </a:fld>
             <a:endParaRPr lang="en-US" sz="1600" dirty="0">
               <a:solidFill>
@@ -27025,7 +30537,7 @@
 </p:sld>
 </file>
 
-<file path=ppt/slides/slide39.xml><?xml version="1.0" encoding="utf-8"?>
+<file path=ppt/slides/slide41.xml><?xml version="1.0" encoding="utf-8"?>
 <p:sld xmlns:a="http://schemas.openxmlformats.org/drawingml/2006/main" xmlns:r="http://schemas.openxmlformats.org/officeDocument/2006/relationships" xmlns:p="http://schemas.openxmlformats.org/presentationml/2006/main">
   <p:cSld>
     <p:spTree>
@@ -27480,274 +30992,7 @@
 </p:sld>
 </file>
 
-<file path=ppt/slides/slide4.xml><?xml version="1.0" encoding="utf-8"?>
-<p:sld xmlns:a="http://schemas.openxmlformats.org/drawingml/2006/main" xmlns:r="http://schemas.openxmlformats.org/officeDocument/2006/relationships" xmlns:p="http://schemas.openxmlformats.org/presentationml/2006/main">
-  <p:cSld>
-    <p:spTree>
-      <p:nvGrpSpPr>
-        <p:cNvPr id="1" name=""/>
-        <p:cNvGrpSpPr/>
-        <p:nvPr/>
-      </p:nvGrpSpPr>
-      <p:grpSpPr>
-        <a:xfrm>
-          <a:off x="0" y="0"/>
-          <a:ext cx="0" cy="0"/>
-          <a:chOff x="0" y="0"/>
-          <a:chExt cx="0" cy="0"/>
-        </a:xfrm>
-      </p:grpSpPr>
-      <p:sp>
-        <p:nvSpPr>
-          <p:cNvPr id="3" name="Title 2">
-            <a:extLst>
-              <a:ext uri="{FF2B5EF4-FFF2-40B4-BE49-F238E27FC236}">
-                <a16:creationId xmlns:a16="http://schemas.microsoft.com/office/drawing/2014/main" id="{97833A1C-127C-474F-BA57-5C49700D9788}"/>
-              </a:ext>
-            </a:extLst>
-          </p:cNvPr>
-          <p:cNvSpPr>
-            <a:spLocks noGrp="1"/>
-          </p:cNvSpPr>
-          <p:nvPr>
-            <p:ph type="title"/>
-          </p:nvPr>
-        </p:nvSpPr>
-        <p:spPr/>
-        <p:txBody>
-          <a:bodyPr/>
-          <a:lstStyle/>
-          <a:p>
-            <a:r>
-              <a:rPr lang="en-US" dirty="0"/>
-              <a:t>Course Pages</a:t>
-            </a:r>
-          </a:p>
-        </p:txBody>
-      </p:sp>
-      <p:sp>
-        <p:nvSpPr>
-          <p:cNvPr id="4" name="Content Placeholder 3">
-            <a:extLst>
-              <a:ext uri="{FF2B5EF4-FFF2-40B4-BE49-F238E27FC236}">
-                <a16:creationId xmlns:a16="http://schemas.microsoft.com/office/drawing/2014/main" id="{D584EB81-8C1E-41E9-9452-3C8471C013CF}"/>
-              </a:ext>
-            </a:extLst>
-          </p:cNvPr>
-          <p:cNvSpPr>
-            <a:spLocks noGrp="1"/>
-          </p:cNvSpPr>
-          <p:nvPr>
-            <p:ph idx="1"/>
-          </p:nvPr>
-        </p:nvSpPr>
-        <p:spPr>
-          <a:xfrm>
-            <a:off x="500066" y="964115"/>
-            <a:ext cx="11572875" cy="4525963"/>
-          </a:xfrm>
-        </p:spPr>
-        <p:txBody>
-          <a:bodyPr>
-            <a:normAutofit/>
-          </a:bodyPr>
-          <a:lstStyle/>
-          <a:p>
-            <a:r>
-              <a:rPr lang="en-US" dirty="0"/>
-              <a:t>Course Schedule, Syllabus, Policies, Projects: </a:t>
-            </a:r>
-            <a:r>
-              <a:rPr lang="en-US" dirty="0">
-                <a:hlinkClick r:id="rId3"/>
-              </a:rPr>
-              <a:t>Course Web Page</a:t>
-            </a:r>
-            <a:endParaRPr lang="en-US" dirty="0"/>
-          </a:p>
-        </p:txBody>
-      </p:sp>
-      <p:sp>
-        <p:nvSpPr>
-          <p:cNvPr id="5" name="Slide Number Placeholder 3">
-            <a:extLst>
-              <a:ext uri="{FF2B5EF4-FFF2-40B4-BE49-F238E27FC236}">
-                <a16:creationId xmlns:a16="http://schemas.microsoft.com/office/drawing/2014/main" id="{75C15DC4-A771-6939-068A-4C3D2F6E2469}"/>
-              </a:ext>
-            </a:extLst>
-          </p:cNvPr>
-          <p:cNvSpPr txBox="1">
-            <a:spLocks/>
-          </p:cNvSpPr>
-          <p:nvPr/>
-        </p:nvSpPr>
-        <p:spPr>
-          <a:xfrm>
-            <a:off x="11705168" y="0"/>
-            <a:ext cx="486833" cy="366184"/>
-          </a:xfrm>
-          <a:prstGeom prst="rect">
-            <a:avLst/>
-          </a:prstGeom>
-          <a:solidFill>
-            <a:schemeClr val="bg1">
-              <a:lumMod val="50000"/>
-            </a:schemeClr>
-          </a:solidFill>
-        </p:spPr>
-        <p:txBody>
-          <a:bodyPr vert="horz" lIns="0" tIns="60960" rIns="60960" bIns="60960" rtlCol="0" anchor="ctr"/>
-          <a:lstStyle>
-            <a:defPPr>
-              <a:defRPr lang="en-US"/>
-            </a:defPPr>
-            <a:lvl1pPr marL="0" algn="r" defTabSz="914400" rtl="0" eaLnBrk="1" latinLnBrk="0" hangingPunct="1">
-              <a:defRPr sz="1200" kern="1200">
-                <a:solidFill>
-                  <a:schemeClr val="bg1">
-                    <a:lumMod val="95000"/>
-                  </a:schemeClr>
-                </a:solidFill>
-                <a:latin typeface="Consolas" panose="020B0609020204030204" pitchFamily="49" charset="0"/>
-                <a:ea typeface="+mn-ea"/>
-                <a:cs typeface="+mn-cs"/>
-              </a:defRPr>
-            </a:lvl1pPr>
-            <a:lvl2pPr marL="457200" algn="l" defTabSz="914400" rtl="0" eaLnBrk="1" latinLnBrk="0" hangingPunct="1">
-              <a:defRPr sz="1800" kern="1200">
-                <a:solidFill>
-                  <a:schemeClr val="tx1"/>
-                </a:solidFill>
-                <a:latin typeface="+mn-lt"/>
-                <a:ea typeface="+mn-ea"/>
-                <a:cs typeface="+mn-cs"/>
-              </a:defRPr>
-            </a:lvl2pPr>
-            <a:lvl3pPr marL="914400" algn="l" defTabSz="914400" rtl="0" eaLnBrk="1" latinLnBrk="0" hangingPunct="1">
-              <a:defRPr sz="1800" kern="1200">
-                <a:solidFill>
-                  <a:schemeClr val="tx1"/>
-                </a:solidFill>
-                <a:latin typeface="+mn-lt"/>
-                <a:ea typeface="+mn-ea"/>
-                <a:cs typeface="+mn-cs"/>
-              </a:defRPr>
-            </a:lvl3pPr>
-            <a:lvl4pPr marL="1371600" algn="l" defTabSz="914400" rtl="0" eaLnBrk="1" latinLnBrk="0" hangingPunct="1">
-              <a:defRPr sz="1800" kern="1200">
-                <a:solidFill>
-                  <a:schemeClr val="tx1"/>
-                </a:solidFill>
-                <a:latin typeface="+mn-lt"/>
-                <a:ea typeface="+mn-ea"/>
-                <a:cs typeface="+mn-cs"/>
-              </a:defRPr>
-            </a:lvl4pPr>
-            <a:lvl5pPr marL="1828800" algn="l" defTabSz="914400" rtl="0" eaLnBrk="1" latinLnBrk="0" hangingPunct="1">
-              <a:defRPr sz="1800" kern="1200">
-                <a:solidFill>
-                  <a:schemeClr val="tx1"/>
-                </a:solidFill>
-                <a:latin typeface="+mn-lt"/>
-                <a:ea typeface="+mn-ea"/>
-                <a:cs typeface="+mn-cs"/>
-              </a:defRPr>
-            </a:lvl5pPr>
-            <a:lvl6pPr marL="2286000" algn="l" defTabSz="914400" rtl="0" eaLnBrk="1" latinLnBrk="0" hangingPunct="1">
-              <a:defRPr sz="1800" kern="1200">
-                <a:solidFill>
-                  <a:schemeClr val="tx1"/>
-                </a:solidFill>
-                <a:latin typeface="+mn-lt"/>
-                <a:ea typeface="+mn-ea"/>
-                <a:cs typeface="+mn-cs"/>
-              </a:defRPr>
-            </a:lvl6pPr>
-            <a:lvl7pPr marL="2743200" algn="l" defTabSz="914400" rtl="0" eaLnBrk="1" latinLnBrk="0" hangingPunct="1">
-              <a:defRPr sz="1800" kern="1200">
-                <a:solidFill>
-                  <a:schemeClr val="tx1"/>
-                </a:solidFill>
-                <a:latin typeface="+mn-lt"/>
-                <a:ea typeface="+mn-ea"/>
-                <a:cs typeface="+mn-cs"/>
-              </a:defRPr>
-            </a:lvl7pPr>
-            <a:lvl8pPr marL="3200400" algn="l" defTabSz="914400" rtl="0" eaLnBrk="1" latinLnBrk="0" hangingPunct="1">
-              <a:defRPr sz="1800" kern="1200">
-                <a:solidFill>
-                  <a:schemeClr val="tx1"/>
-                </a:solidFill>
-                <a:latin typeface="+mn-lt"/>
-                <a:ea typeface="+mn-ea"/>
-                <a:cs typeface="+mn-cs"/>
-              </a:defRPr>
-            </a:lvl8pPr>
-            <a:lvl9pPr marL="3657600" algn="l" defTabSz="914400" rtl="0" eaLnBrk="1" latinLnBrk="0" hangingPunct="1">
-              <a:defRPr sz="1800" kern="1200">
-                <a:solidFill>
-                  <a:schemeClr val="tx1"/>
-                </a:solidFill>
-                <a:latin typeface="+mn-lt"/>
-                <a:ea typeface="+mn-ea"/>
-                <a:cs typeface="+mn-cs"/>
-              </a:defRPr>
-            </a:lvl9pPr>
-          </a:lstStyle>
-          <a:p>
-            <a:fld id="{97DD1AB5-42BA-4E8A-BFEE-435884E16AAB}" type="slidenum">
-              <a:rPr lang="en-US" sz="1600"/>
-              <a:pPr/>
-              <a:t>4</a:t>
-            </a:fld>
-            <a:endParaRPr lang="en-US" sz="1600" dirty="0"/>
-          </a:p>
-        </p:txBody>
-      </p:sp>
-      <p:pic>
-        <p:nvPicPr>
-          <p:cNvPr id="6" name="Picture 5">
-            <a:extLst>
-              <a:ext uri="{FF2B5EF4-FFF2-40B4-BE49-F238E27FC236}">
-                <a16:creationId xmlns:a16="http://schemas.microsoft.com/office/drawing/2014/main" id="{0BA97ACF-1F8C-7791-DDE9-8355EE5F4753}"/>
-              </a:ext>
-            </a:extLst>
-          </p:cNvPr>
-          <p:cNvPicPr>
-            <a:picLocks noChangeAspect="1"/>
-          </p:cNvPicPr>
-          <p:nvPr/>
-        </p:nvPicPr>
-        <p:blipFill>
-          <a:blip r:embed="rId4"/>
-          <a:stretch>
-            <a:fillRect/>
-          </a:stretch>
-        </p:blipFill>
-        <p:spPr>
-          <a:xfrm>
-            <a:off x="4223202" y="2148289"/>
-            <a:ext cx="3745596" cy="3745596"/>
-          </a:xfrm>
-          <a:prstGeom prst="rect">
-            <a:avLst/>
-          </a:prstGeom>
-        </p:spPr>
-      </p:pic>
-    </p:spTree>
-    <p:extLst>
-      <p:ext uri="{BB962C8B-B14F-4D97-AF65-F5344CB8AC3E}">
-        <p14:creationId xmlns:p14="http://schemas.microsoft.com/office/powerpoint/2010/main" val="87508725"/>
-      </p:ext>
-    </p:extLst>
-  </p:cSld>
-  <p:clrMapOvr>
-    <a:masterClrMapping/>
-  </p:clrMapOvr>
-</p:sld>
-</file>
-
-<file path=ppt/slides/slide40.xml><?xml version="1.0" encoding="utf-8"?>
+<file path=ppt/slides/slide42.xml><?xml version="1.0" encoding="utf-8"?>
 <p:sld xmlns:a="http://schemas.openxmlformats.org/drawingml/2006/main" xmlns:r="http://schemas.openxmlformats.org/officeDocument/2006/relationships" xmlns:p="http://schemas.openxmlformats.org/presentationml/2006/main">
   <p:cSld>
     <p:spTree>
@@ -28858,7 +32103,7 @@
               <a:pPr defTabSz="1219170">
                 <a:defRPr/>
               </a:pPr>
-              <a:t>40</a:t>
+              <a:t>42</a:t>
             </a:fld>
             <a:endParaRPr lang="en-US" sz="1600" dirty="0">
               <a:solidFill>
@@ -29075,7 +32320,7 @@
 </p:sld>
 </file>
 
-<file path=ppt/slides/slide41.xml><?xml version="1.0" encoding="utf-8"?>
+<file path=ppt/slides/slide43.xml><?xml version="1.0" encoding="utf-8"?>
 <p:sld xmlns:a="http://schemas.openxmlformats.org/drawingml/2006/main" xmlns:r="http://schemas.openxmlformats.org/officeDocument/2006/relationships" xmlns:p="http://schemas.openxmlformats.org/presentationml/2006/main">
   <p:cSld>
     <p:spTree>
@@ -30381,7 +33626,7 @@
 </p:sld>
 </file>
 
-<file path=ppt/slides/slide42.xml><?xml version="1.0" encoding="utf-8"?>
+<file path=ppt/slides/slide44.xml><?xml version="1.0" encoding="utf-8"?>
 <p:sld xmlns:a="http://schemas.openxmlformats.org/drawingml/2006/main" xmlns:r="http://schemas.openxmlformats.org/officeDocument/2006/relationships" xmlns:p="http://schemas.openxmlformats.org/presentationml/2006/main">
   <p:cSld>
     <p:spTree>
@@ -31055,7 +34300,7 @@
 </p:sld>
 </file>
 
-<file path=ppt/slides/slide43.xml><?xml version="1.0" encoding="utf-8"?>
+<file path=ppt/slides/slide45.xml><?xml version="1.0" encoding="utf-8"?>
 <p:sld xmlns:a="http://schemas.openxmlformats.org/drawingml/2006/main" xmlns:r="http://schemas.openxmlformats.org/officeDocument/2006/relationships" xmlns:p="http://schemas.openxmlformats.org/presentationml/2006/main">
   <p:cSld>
     <p:spTree>
@@ -31729,7 +34974,7 @@
 </p:sld>
 </file>
 
-<file path=ppt/slides/slide44.xml><?xml version="1.0" encoding="utf-8"?>
+<file path=ppt/slides/slide46.xml><?xml version="1.0" encoding="utf-8"?>
 <p:sld xmlns:a="http://schemas.openxmlformats.org/drawingml/2006/main" xmlns:r="http://schemas.openxmlformats.org/officeDocument/2006/relationships" xmlns:p="http://schemas.openxmlformats.org/presentationml/2006/main">
   <p:cSld>
     <p:spTree>
@@ -32495,7 +35740,7 @@
 </p:sld>
 </file>
 
-<file path=ppt/slides/slide45.xml><?xml version="1.0" encoding="utf-8"?>
+<file path=ppt/slides/slide47.xml><?xml version="1.0" encoding="utf-8"?>
 <p:sld xmlns:a="http://schemas.openxmlformats.org/drawingml/2006/main" xmlns:r="http://schemas.openxmlformats.org/officeDocument/2006/relationships" xmlns:p="http://schemas.openxmlformats.org/presentationml/2006/main">
   <p:cSld>
     <p:spTree>
@@ -33182,7 +36427,7 @@
 </p:sld>
 </file>
 
-<file path=ppt/slides/slide46.xml><?xml version="1.0" encoding="utf-8"?>
+<file path=ppt/slides/slide48.xml><?xml version="1.0" encoding="utf-8"?>
 <p:sld xmlns:a="http://schemas.openxmlformats.org/drawingml/2006/main" xmlns:r="http://schemas.openxmlformats.org/officeDocument/2006/relationships" xmlns:p="http://schemas.openxmlformats.org/presentationml/2006/main">
   <p:cSld>
     <p:spTree>
@@ -33869,7 +37114,7 @@
 </p:sld>
 </file>
 
-<file path=ppt/slides/slide47.xml><?xml version="1.0" encoding="utf-8"?>
+<file path=ppt/slides/slide49.xml><?xml version="1.0" encoding="utf-8"?>
 <p:sld xmlns:a="http://schemas.openxmlformats.org/drawingml/2006/main" xmlns:r="http://schemas.openxmlformats.org/officeDocument/2006/relationships" xmlns:p="http://schemas.openxmlformats.org/presentationml/2006/main">
   <p:cSld>
     <p:spTree>
@@ -34556,7 +37801,277 @@
 </p:sld>
 </file>
 
-<file path=ppt/slides/slide48.xml><?xml version="1.0" encoding="utf-8"?>
+<file path=ppt/slides/slide5.xml><?xml version="1.0" encoding="utf-8"?>
+<p:sld xmlns:a="http://schemas.openxmlformats.org/drawingml/2006/main" xmlns:r="http://schemas.openxmlformats.org/officeDocument/2006/relationships" xmlns:p="http://schemas.openxmlformats.org/presentationml/2006/main">
+  <p:cSld>
+    <p:spTree>
+      <p:nvGrpSpPr>
+        <p:cNvPr id="1" name=""/>
+        <p:cNvGrpSpPr/>
+        <p:nvPr/>
+      </p:nvGrpSpPr>
+      <p:grpSpPr>
+        <a:xfrm>
+          <a:off x="0" y="0"/>
+          <a:ext cx="0" cy="0"/>
+          <a:chOff x="0" y="0"/>
+          <a:chExt cx="0" cy="0"/>
+        </a:xfrm>
+      </p:grpSpPr>
+      <p:sp>
+        <p:nvSpPr>
+          <p:cNvPr id="3" name="Title 2">
+            <a:extLst>
+              <a:ext uri="{FF2B5EF4-FFF2-40B4-BE49-F238E27FC236}">
+                <a16:creationId xmlns:a16="http://schemas.microsoft.com/office/drawing/2014/main" id="{97833A1C-127C-474F-BA57-5C49700D9788}"/>
+              </a:ext>
+            </a:extLst>
+          </p:cNvPr>
+          <p:cNvSpPr>
+            <a:spLocks noGrp="1"/>
+          </p:cNvSpPr>
+          <p:nvPr>
+            <p:ph type="title"/>
+          </p:nvPr>
+        </p:nvSpPr>
+        <p:spPr/>
+        <p:txBody>
+          <a:bodyPr/>
+          <a:lstStyle/>
+          <a:p>
+            <a:r>
+              <a:rPr lang="en-US" dirty="0"/>
+              <a:t>Course Pages</a:t>
+            </a:r>
+          </a:p>
+        </p:txBody>
+      </p:sp>
+      <p:sp>
+        <p:nvSpPr>
+          <p:cNvPr id="4" name="Content Placeholder 3">
+            <a:extLst>
+              <a:ext uri="{FF2B5EF4-FFF2-40B4-BE49-F238E27FC236}">
+                <a16:creationId xmlns:a16="http://schemas.microsoft.com/office/drawing/2014/main" id="{D584EB81-8C1E-41E9-9452-3C8471C013CF}"/>
+              </a:ext>
+            </a:extLst>
+          </p:cNvPr>
+          <p:cNvSpPr>
+            <a:spLocks noGrp="1"/>
+          </p:cNvSpPr>
+          <p:nvPr>
+            <p:ph idx="1"/>
+          </p:nvPr>
+        </p:nvSpPr>
+        <p:spPr/>
+        <p:txBody>
+          <a:bodyPr>
+            <a:normAutofit/>
+          </a:bodyPr>
+          <a:lstStyle/>
+          <a:p>
+            <a:r>
+              <a:rPr lang="en-US" dirty="0"/>
+              <a:t>Project submission and </a:t>
+            </a:r>
+            <a:r>
+              <a:rPr lang="en-US" dirty="0" err="1"/>
+              <a:t>autograding</a:t>
+            </a:r>
+            <a:r>
+              <a:rPr lang="en-US" dirty="0"/>
+              <a:t>: </a:t>
+            </a:r>
+            <a:r>
+              <a:rPr lang="en-US" dirty="0">
+                <a:hlinkClick r:id="rId3"/>
+              </a:rPr>
+              <a:t>Gradescope</a:t>
+            </a:r>
+            <a:endParaRPr lang="en-US" dirty="0"/>
+          </a:p>
+        </p:txBody>
+      </p:sp>
+      <p:sp>
+        <p:nvSpPr>
+          <p:cNvPr id="5" name="Slide Number Placeholder 3">
+            <a:extLst>
+              <a:ext uri="{FF2B5EF4-FFF2-40B4-BE49-F238E27FC236}">
+                <a16:creationId xmlns:a16="http://schemas.microsoft.com/office/drawing/2014/main" id="{75C15DC4-A771-6939-068A-4C3D2F6E2469}"/>
+              </a:ext>
+            </a:extLst>
+          </p:cNvPr>
+          <p:cNvSpPr txBox="1">
+            <a:spLocks/>
+          </p:cNvSpPr>
+          <p:nvPr/>
+        </p:nvSpPr>
+        <p:spPr>
+          <a:xfrm>
+            <a:off x="11705168" y="0"/>
+            <a:ext cx="486833" cy="366184"/>
+          </a:xfrm>
+          <a:prstGeom prst="rect">
+            <a:avLst/>
+          </a:prstGeom>
+          <a:solidFill>
+            <a:schemeClr val="bg1">
+              <a:lumMod val="50000"/>
+            </a:schemeClr>
+          </a:solidFill>
+        </p:spPr>
+        <p:txBody>
+          <a:bodyPr vert="horz" lIns="0" tIns="60960" rIns="60960" bIns="60960" rtlCol="0" anchor="ctr"/>
+          <a:lstStyle>
+            <a:defPPr>
+              <a:defRPr lang="en-US"/>
+            </a:defPPr>
+            <a:lvl1pPr marL="0" algn="r" defTabSz="914400" rtl="0" eaLnBrk="1" latinLnBrk="0" hangingPunct="1">
+              <a:defRPr sz="1200" kern="1200">
+                <a:solidFill>
+                  <a:schemeClr val="bg1">
+                    <a:lumMod val="95000"/>
+                  </a:schemeClr>
+                </a:solidFill>
+                <a:latin typeface="Consolas" panose="020B0609020204030204" pitchFamily="49" charset="0"/>
+                <a:ea typeface="+mn-ea"/>
+                <a:cs typeface="+mn-cs"/>
+              </a:defRPr>
+            </a:lvl1pPr>
+            <a:lvl2pPr marL="457200" algn="l" defTabSz="914400" rtl="0" eaLnBrk="1" latinLnBrk="0" hangingPunct="1">
+              <a:defRPr sz="1800" kern="1200">
+                <a:solidFill>
+                  <a:schemeClr val="tx1"/>
+                </a:solidFill>
+                <a:latin typeface="+mn-lt"/>
+                <a:ea typeface="+mn-ea"/>
+                <a:cs typeface="+mn-cs"/>
+              </a:defRPr>
+            </a:lvl2pPr>
+            <a:lvl3pPr marL="914400" algn="l" defTabSz="914400" rtl="0" eaLnBrk="1" latinLnBrk="0" hangingPunct="1">
+              <a:defRPr sz="1800" kern="1200">
+                <a:solidFill>
+                  <a:schemeClr val="tx1"/>
+                </a:solidFill>
+                <a:latin typeface="+mn-lt"/>
+                <a:ea typeface="+mn-ea"/>
+                <a:cs typeface="+mn-cs"/>
+              </a:defRPr>
+            </a:lvl3pPr>
+            <a:lvl4pPr marL="1371600" algn="l" defTabSz="914400" rtl="0" eaLnBrk="1" latinLnBrk="0" hangingPunct="1">
+              <a:defRPr sz="1800" kern="1200">
+                <a:solidFill>
+                  <a:schemeClr val="tx1"/>
+                </a:solidFill>
+                <a:latin typeface="+mn-lt"/>
+                <a:ea typeface="+mn-ea"/>
+                <a:cs typeface="+mn-cs"/>
+              </a:defRPr>
+            </a:lvl4pPr>
+            <a:lvl5pPr marL="1828800" algn="l" defTabSz="914400" rtl="0" eaLnBrk="1" latinLnBrk="0" hangingPunct="1">
+              <a:defRPr sz="1800" kern="1200">
+                <a:solidFill>
+                  <a:schemeClr val="tx1"/>
+                </a:solidFill>
+                <a:latin typeface="+mn-lt"/>
+                <a:ea typeface="+mn-ea"/>
+                <a:cs typeface="+mn-cs"/>
+              </a:defRPr>
+            </a:lvl5pPr>
+            <a:lvl6pPr marL="2286000" algn="l" defTabSz="914400" rtl="0" eaLnBrk="1" latinLnBrk="0" hangingPunct="1">
+              <a:defRPr sz="1800" kern="1200">
+                <a:solidFill>
+                  <a:schemeClr val="tx1"/>
+                </a:solidFill>
+                <a:latin typeface="+mn-lt"/>
+                <a:ea typeface="+mn-ea"/>
+                <a:cs typeface="+mn-cs"/>
+              </a:defRPr>
+            </a:lvl6pPr>
+            <a:lvl7pPr marL="2743200" algn="l" defTabSz="914400" rtl="0" eaLnBrk="1" latinLnBrk="0" hangingPunct="1">
+              <a:defRPr sz="1800" kern="1200">
+                <a:solidFill>
+                  <a:schemeClr val="tx1"/>
+                </a:solidFill>
+                <a:latin typeface="+mn-lt"/>
+                <a:ea typeface="+mn-ea"/>
+                <a:cs typeface="+mn-cs"/>
+              </a:defRPr>
+            </a:lvl7pPr>
+            <a:lvl8pPr marL="3200400" algn="l" defTabSz="914400" rtl="0" eaLnBrk="1" latinLnBrk="0" hangingPunct="1">
+              <a:defRPr sz="1800" kern="1200">
+                <a:solidFill>
+                  <a:schemeClr val="tx1"/>
+                </a:solidFill>
+                <a:latin typeface="+mn-lt"/>
+                <a:ea typeface="+mn-ea"/>
+                <a:cs typeface="+mn-cs"/>
+              </a:defRPr>
+            </a:lvl8pPr>
+            <a:lvl9pPr marL="3657600" algn="l" defTabSz="914400" rtl="0" eaLnBrk="1" latinLnBrk="0" hangingPunct="1">
+              <a:defRPr sz="1800" kern="1200">
+                <a:solidFill>
+                  <a:schemeClr val="tx1"/>
+                </a:solidFill>
+                <a:latin typeface="+mn-lt"/>
+                <a:ea typeface="+mn-ea"/>
+                <a:cs typeface="+mn-cs"/>
+              </a:defRPr>
+            </a:lvl9pPr>
+          </a:lstStyle>
+          <a:p>
+            <a:fld id="{97DD1AB5-42BA-4E8A-BFEE-435884E16AAB}" type="slidenum">
+              <a:rPr lang="en-US" sz="1600"/>
+              <a:pPr/>
+              <a:t>5</a:t>
+            </a:fld>
+            <a:endParaRPr lang="en-US" sz="1600" dirty="0"/>
+          </a:p>
+        </p:txBody>
+      </p:sp>
+      <p:pic>
+        <p:nvPicPr>
+          <p:cNvPr id="6" name="Picture 5">
+            <a:extLst>
+              <a:ext uri="{FF2B5EF4-FFF2-40B4-BE49-F238E27FC236}">
+                <a16:creationId xmlns:a16="http://schemas.microsoft.com/office/drawing/2014/main" id="{289DB9D7-847C-CBA0-D0B2-F7980EA5EAE7}"/>
+              </a:ext>
+            </a:extLst>
+          </p:cNvPr>
+          <p:cNvPicPr>
+            <a:picLocks noChangeAspect="1"/>
+          </p:cNvPicPr>
+          <p:nvPr/>
+        </p:nvPicPr>
+        <p:blipFill>
+          <a:blip r:embed="rId4"/>
+          <a:stretch>
+            <a:fillRect/>
+          </a:stretch>
+        </p:blipFill>
+        <p:spPr>
+          <a:xfrm>
+            <a:off x="4187327" y="2076540"/>
+            <a:ext cx="3817345" cy="3817345"/>
+          </a:xfrm>
+          <a:prstGeom prst="rect">
+            <a:avLst/>
+          </a:prstGeom>
+        </p:spPr>
+      </p:pic>
+    </p:spTree>
+    <p:extLst>
+      <p:ext uri="{BB962C8B-B14F-4D97-AF65-F5344CB8AC3E}">
+        <p14:creationId xmlns:p14="http://schemas.microsoft.com/office/powerpoint/2010/main" val="2683024402"/>
+      </p:ext>
+    </p:extLst>
+  </p:cSld>
+  <p:clrMapOvr>
+    <a:masterClrMapping/>
+  </p:clrMapOvr>
+</p:sld>
+</file>
+
+<file path=ppt/slides/slide50.xml><?xml version="1.0" encoding="utf-8"?>
 <p:sld xmlns:a="http://schemas.openxmlformats.org/drawingml/2006/main" xmlns:r="http://schemas.openxmlformats.org/officeDocument/2006/relationships" xmlns:p="http://schemas.openxmlformats.org/presentationml/2006/main">
   <p:cSld>
     <p:spTree>
@@ -35692,7 +39207,7 @@
 </p:sld>
 </file>
 
-<file path=ppt/slides/slide49.xml><?xml version="1.0" encoding="utf-8"?>
+<file path=ppt/slides/slide51.xml><?xml version="1.0" encoding="utf-8"?>
 <p:sld xmlns:a="http://schemas.openxmlformats.org/drawingml/2006/main" xmlns:r="http://schemas.openxmlformats.org/officeDocument/2006/relationships" xmlns:p="http://schemas.openxmlformats.org/presentationml/2006/main">
   <p:cSld>
     <p:spTree>
@@ -37006,277 +40521,7 @@
 </p:sld>
 </file>
 
-<file path=ppt/slides/slide5.xml><?xml version="1.0" encoding="utf-8"?>
-<p:sld xmlns:a="http://schemas.openxmlformats.org/drawingml/2006/main" xmlns:r="http://schemas.openxmlformats.org/officeDocument/2006/relationships" xmlns:p="http://schemas.openxmlformats.org/presentationml/2006/main">
-  <p:cSld>
-    <p:spTree>
-      <p:nvGrpSpPr>
-        <p:cNvPr id="1" name=""/>
-        <p:cNvGrpSpPr/>
-        <p:nvPr/>
-      </p:nvGrpSpPr>
-      <p:grpSpPr>
-        <a:xfrm>
-          <a:off x="0" y="0"/>
-          <a:ext cx="0" cy="0"/>
-          <a:chOff x="0" y="0"/>
-          <a:chExt cx="0" cy="0"/>
-        </a:xfrm>
-      </p:grpSpPr>
-      <p:sp>
-        <p:nvSpPr>
-          <p:cNvPr id="3" name="Title 2">
-            <a:extLst>
-              <a:ext uri="{FF2B5EF4-FFF2-40B4-BE49-F238E27FC236}">
-                <a16:creationId xmlns:a16="http://schemas.microsoft.com/office/drawing/2014/main" id="{97833A1C-127C-474F-BA57-5C49700D9788}"/>
-              </a:ext>
-            </a:extLst>
-          </p:cNvPr>
-          <p:cNvSpPr>
-            <a:spLocks noGrp="1"/>
-          </p:cNvSpPr>
-          <p:nvPr>
-            <p:ph type="title"/>
-          </p:nvPr>
-        </p:nvSpPr>
-        <p:spPr/>
-        <p:txBody>
-          <a:bodyPr/>
-          <a:lstStyle/>
-          <a:p>
-            <a:r>
-              <a:rPr lang="en-US" dirty="0"/>
-              <a:t>Course Pages</a:t>
-            </a:r>
-          </a:p>
-        </p:txBody>
-      </p:sp>
-      <p:sp>
-        <p:nvSpPr>
-          <p:cNvPr id="4" name="Content Placeholder 3">
-            <a:extLst>
-              <a:ext uri="{FF2B5EF4-FFF2-40B4-BE49-F238E27FC236}">
-                <a16:creationId xmlns:a16="http://schemas.microsoft.com/office/drawing/2014/main" id="{D584EB81-8C1E-41E9-9452-3C8471C013CF}"/>
-              </a:ext>
-            </a:extLst>
-          </p:cNvPr>
-          <p:cNvSpPr>
-            <a:spLocks noGrp="1"/>
-          </p:cNvSpPr>
-          <p:nvPr>
-            <p:ph idx="1"/>
-          </p:nvPr>
-        </p:nvSpPr>
-        <p:spPr/>
-        <p:txBody>
-          <a:bodyPr>
-            <a:normAutofit/>
-          </a:bodyPr>
-          <a:lstStyle/>
-          <a:p>
-            <a:r>
-              <a:rPr lang="en-US" dirty="0"/>
-              <a:t>Project submission and </a:t>
-            </a:r>
-            <a:r>
-              <a:rPr lang="en-US" dirty="0" err="1"/>
-              <a:t>autograding</a:t>
-            </a:r>
-            <a:r>
-              <a:rPr lang="en-US" dirty="0"/>
-              <a:t>: </a:t>
-            </a:r>
-            <a:r>
-              <a:rPr lang="en-US" dirty="0">
-                <a:hlinkClick r:id="rId3"/>
-              </a:rPr>
-              <a:t>Gradescope</a:t>
-            </a:r>
-            <a:endParaRPr lang="en-US" dirty="0"/>
-          </a:p>
-        </p:txBody>
-      </p:sp>
-      <p:sp>
-        <p:nvSpPr>
-          <p:cNvPr id="5" name="Slide Number Placeholder 3">
-            <a:extLst>
-              <a:ext uri="{FF2B5EF4-FFF2-40B4-BE49-F238E27FC236}">
-                <a16:creationId xmlns:a16="http://schemas.microsoft.com/office/drawing/2014/main" id="{75C15DC4-A771-6939-068A-4C3D2F6E2469}"/>
-              </a:ext>
-            </a:extLst>
-          </p:cNvPr>
-          <p:cNvSpPr txBox="1">
-            <a:spLocks/>
-          </p:cNvSpPr>
-          <p:nvPr/>
-        </p:nvSpPr>
-        <p:spPr>
-          <a:xfrm>
-            <a:off x="11705168" y="0"/>
-            <a:ext cx="486833" cy="366184"/>
-          </a:xfrm>
-          <a:prstGeom prst="rect">
-            <a:avLst/>
-          </a:prstGeom>
-          <a:solidFill>
-            <a:schemeClr val="bg1">
-              <a:lumMod val="50000"/>
-            </a:schemeClr>
-          </a:solidFill>
-        </p:spPr>
-        <p:txBody>
-          <a:bodyPr vert="horz" lIns="0" tIns="60960" rIns="60960" bIns="60960" rtlCol="0" anchor="ctr"/>
-          <a:lstStyle>
-            <a:defPPr>
-              <a:defRPr lang="en-US"/>
-            </a:defPPr>
-            <a:lvl1pPr marL="0" algn="r" defTabSz="914400" rtl="0" eaLnBrk="1" latinLnBrk="0" hangingPunct="1">
-              <a:defRPr sz="1200" kern="1200">
-                <a:solidFill>
-                  <a:schemeClr val="bg1">
-                    <a:lumMod val="95000"/>
-                  </a:schemeClr>
-                </a:solidFill>
-                <a:latin typeface="Consolas" panose="020B0609020204030204" pitchFamily="49" charset="0"/>
-                <a:ea typeface="+mn-ea"/>
-                <a:cs typeface="+mn-cs"/>
-              </a:defRPr>
-            </a:lvl1pPr>
-            <a:lvl2pPr marL="457200" algn="l" defTabSz="914400" rtl="0" eaLnBrk="1" latinLnBrk="0" hangingPunct="1">
-              <a:defRPr sz="1800" kern="1200">
-                <a:solidFill>
-                  <a:schemeClr val="tx1"/>
-                </a:solidFill>
-                <a:latin typeface="+mn-lt"/>
-                <a:ea typeface="+mn-ea"/>
-                <a:cs typeface="+mn-cs"/>
-              </a:defRPr>
-            </a:lvl2pPr>
-            <a:lvl3pPr marL="914400" algn="l" defTabSz="914400" rtl="0" eaLnBrk="1" latinLnBrk="0" hangingPunct="1">
-              <a:defRPr sz="1800" kern="1200">
-                <a:solidFill>
-                  <a:schemeClr val="tx1"/>
-                </a:solidFill>
-                <a:latin typeface="+mn-lt"/>
-                <a:ea typeface="+mn-ea"/>
-                <a:cs typeface="+mn-cs"/>
-              </a:defRPr>
-            </a:lvl3pPr>
-            <a:lvl4pPr marL="1371600" algn="l" defTabSz="914400" rtl="0" eaLnBrk="1" latinLnBrk="0" hangingPunct="1">
-              <a:defRPr sz="1800" kern="1200">
-                <a:solidFill>
-                  <a:schemeClr val="tx1"/>
-                </a:solidFill>
-                <a:latin typeface="+mn-lt"/>
-                <a:ea typeface="+mn-ea"/>
-                <a:cs typeface="+mn-cs"/>
-              </a:defRPr>
-            </a:lvl4pPr>
-            <a:lvl5pPr marL="1828800" algn="l" defTabSz="914400" rtl="0" eaLnBrk="1" latinLnBrk="0" hangingPunct="1">
-              <a:defRPr sz="1800" kern="1200">
-                <a:solidFill>
-                  <a:schemeClr val="tx1"/>
-                </a:solidFill>
-                <a:latin typeface="+mn-lt"/>
-                <a:ea typeface="+mn-ea"/>
-                <a:cs typeface="+mn-cs"/>
-              </a:defRPr>
-            </a:lvl5pPr>
-            <a:lvl6pPr marL="2286000" algn="l" defTabSz="914400" rtl="0" eaLnBrk="1" latinLnBrk="0" hangingPunct="1">
-              <a:defRPr sz="1800" kern="1200">
-                <a:solidFill>
-                  <a:schemeClr val="tx1"/>
-                </a:solidFill>
-                <a:latin typeface="+mn-lt"/>
-                <a:ea typeface="+mn-ea"/>
-                <a:cs typeface="+mn-cs"/>
-              </a:defRPr>
-            </a:lvl6pPr>
-            <a:lvl7pPr marL="2743200" algn="l" defTabSz="914400" rtl="0" eaLnBrk="1" latinLnBrk="0" hangingPunct="1">
-              <a:defRPr sz="1800" kern="1200">
-                <a:solidFill>
-                  <a:schemeClr val="tx1"/>
-                </a:solidFill>
-                <a:latin typeface="+mn-lt"/>
-                <a:ea typeface="+mn-ea"/>
-                <a:cs typeface="+mn-cs"/>
-              </a:defRPr>
-            </a:lvl7pPr>
-            <a:lvl8pPr marL="3200400" algn="l" defTabSz="914400" rtl="0" eaLnBrk="1" latinLnBrk="0" hangingPunct="1">
-              <a:defRPr sz="1800" kern="1200">
-                <a:solidFill>
-                  <a:schemeClr val="tx1"/>
-                </a:solidFill>
-                <a:latin typeface="+mn-lt"/>
-                <a:ea typeface="+mn-ea"/>
-                <a:cs typeface="+mn-cs"/>
-              </a:defRPr>
-            </a:lvl8pPr>
-            <a:lvl9pPr marL="3657600" algn="l" defTabSz="914400" rtl="0" eaLnBrk="1" latinLnBrk="0" hangingPunct="1">
-              <a:defRPr sz="1800" kern="1200">
-                <a:solidFill>
-                  <a:schemeClr val="tx1"/>
-                </a:solidFill>
-                <a:latin typeface="+mn-lt"/>
-                <a:ea typeface="+mn-ea"/>
-                <a:cs typeface="+mn-cs"/>
-              </a:defRPr>
-            </a:lvl9pPr>
-          </a:lstStyle>
-          <a:p>
-            <a:fld id="{97DD1AB5-42BA-4E8A-BFEE-435884E16AAB}" type="slidenum">
-              <a:rPr lang="en-US" sz="1600"/>
-              <a:pPr/>
-              <a:t>5</a:t>
-            </a:fld>
-            <a:endParaRPr lang="en-US" sz="1600" dirty="0"/>
-          </a:p>
-        </p:txBody>
-      </p:sp>
-      <p:pic>
-        <p:nvPicPr>
-          <p:cNvPr id="6" name="Picture 5">
-            <a:extLst>
-              <a:ext uri="{FF2B5EF4-FFF2-40B4-BE49-F238E27FC236}">
-                <a16:creationId xmlns:a16="http://schemas.microsoft.com/office/drawing/2014/main" id="{289DB9D7-847C-CBA0-D0B2-F7980EA5EAE7}"/>
-              </a:ext>
-            </a:extLst>
-          </p:cNvPr>
-          <p:cNvPicPr>
-            <a:picLocks noChangeAspect="1"/>
-          </p:cNvPicPr>
-          <p:nvPr/>
-        </p:nvPicPr>
-        <p:blipFill>
-          <a:blip r:embed="rId4"/>
-          <a:stretch>
-            <a:fillRect/>
-          </a:stretch>
-        </p:blipFill>
-        <p:spPr>
-          <a:xfrm>
-            <a:off x="4187327" y="2076540"/>
-            <a:ext cx="3817345" cy="3817345"/>
-          </a:xfrm>
-          <a:prstGeom prst="rect">
-            <a:avLst/>
-          </a:prstGeom>
-        </p:spPr>
-      </p:pic>
-    </p:spTree>
-    <p:extLst>
-      <p:ext uri="{BB962C8B-B14F-4D97-AF65-F5344CB8AC3E}">
-        <p14:creationId xmlns:p14="http://schemas.microsoft.com/office/powerpoint/2010/main" val="2683024402"/>
-      </p:ext>
-    </p:extLst>
-  </p:cSld>
-  <p:clrMapOvr>
-    <a:masterClrMapping/>
-  </p:clrMapOvr>
-</p:sld>
-</file>
-
-<file path=ppt/slides/slide50.xml><?xml version="1.0" encoding="utf-8"?>
+<file path=ppt/slides/slide52.xml><?xml version="1.0" encoding="utf-8"?>
 <p:sld xmlns:a="http://schemas.openxmlformats.org/drawingml/2006/main" xmlns:r="http://schemas.openxmlformats.org/officeDocument/2006/relationships" xmlns:p="http://schemas.openxmlformats.org/presentationml/2006/main">
   <p:cSld>
     <p:spTree>
@@ -38182,7 +41427,7 @@
 </p:sld>
 </file>
 
-<file path=ppt/slides/slide51.xml><?xml version="1.0" encoding="utf-8"?>
+<file path=ppt/slides/slide53.xml><?xml version="1.0" encoding="utf-8"?>
 <p:sld xmlns:a="http://schemas.openxmlformats.org/drawingml/2006/main" xmlns:r="http://schemas.openxmlformats.org/officeDocument/2006/relationships" xmlns:p="http://schemas.openxmlformats.org/presentationml/2006/main">
   <p:cSld>
     <p:spTree>
@@ -39363,7 +42608,7 @@
 </p:sld>
 </file>
 
-<file path=ppt/slides/slide52.xml><?xml version="1.0" encoding="utf-8"?>
+<file path=ppt/slides/slide54.xml><?xml version="1.0" encoding="utf-8"?>
 <p:sld xmlns:a="http://schemas.openxmlformats.org/drawingml/2006/main" xmlns:r="http://schemas.openxmlformats.org/officeDocument/2006/relationships" xmlns:p="http://schemas.openxmlformats.org/presentationml/2006/main">
   <p:cSld>
     <p:spTree>
@@ -40101,10 +43346,10 @@
       </p:sp>
       <p:pic>
         <p:nvPicPr>
-          <p:cNvPr id="8" name="Picture 7">
+          <p:cNvPr id="9" name="Picture 8">
             <a:extLst>
               <a:ext uri="{FF2B5EF4-FFF2-40B4-BE49-F238E27FC236}">
-                <a16:creationId xmlns:a16="http://schemas.microsoft.com/office/drawing/2014/main" id="{128EA473-F82F-DFBD-11F5-1D862659EAC0}"/>
+                <a16:creationId xmlns:a16="http://schemas.microsoft.com/office/drawing/2014/main" id="{E00D9ED6-F93D-81FB-62D5-AF97DAD1E59E}"/>
               </a:ext>
             </a:extLst>
           </p:cNvPr>
@@ -40121,8 +43366,8 @@
         </p:blipFill>
         <p:spPr>
           <a:xfrm>
-            <a:off x="4093685" y="1880344"/>
-            <a:ext cx="4004630" cy="4004630"/>
+            <a:off x="4223202" y="2148289"/>
+            <a:ext cx="3745596" cy="3745596"/>
           </a:xfrm>
           <a:prstGeom prst="rect">
             <a:avLst/>
@@ -40496,8 +43741,8 @@
         </p:nvSpPr>
         <p:spPr>
           <a:xfrm>
-            <a:off x="7077543" y="964115"/>
-            <a:ext cx="4214423" cy="2062103"/>
+            <a:off x="7188379" y="964115"/>
+            <a:ext cx="4214423" cy="1569660"/>
           </a:xfrm>
           <a:prstGeom prst="rect">
             <a:avLst/>
@@ -40550,13 +43795,6 @@
               <a:rPr lang="en-US" sz="3200" dirty="0"/>
               <a:t> (5%)</a:t>
             </a:r>
-          </a:p>
-          <a:p>
-            <a:pPr marL="457200" indent="-457200">
-              <a:buFont typeface="Arial" panose="020B0604020202020204" pitchFamily="34" charset="0"/>
-              <a:buChar char="•"/>
-            </a:pPr>
-            <a:endParaRPr lang="en-US" sz="3200" dirty="0"/>
           </a:p>
         </p:txBody>
       </p:sp>
